--- a/TFG_Chollos/Presentacion_Defensa_TFG.pptx
+++ b/TFG_Chollos/Presentacion_Defensa_TFG.pptx
@@ -13584,7 +13584,7 @@
           <p:nvPr>
             <p:extLst>
               <p:ext uri="{D42A27DB-BD31-4B8C-83A1-F6EECF244321}">
-                <p14:modId xmlns:p14="http://schemas.microsoft.com/office/powerpoint/2010/main" val="1340273364"/>
+                <p14:modId xmlns:p14="http://schemas.microsoft.com/office/powerpoint/2010/main" val="830664776"/>
               </p:ext>
             </p:extLst>
           </p:nvPr>
@@ -13971,7 +13971,9 @@
                       <a:tailEnd type="none" w="med" len="med"/>
                     </a:lnB>
                     <a:solidFill>
-                      <a:srgbClr val="D99A3D"/>
+                      <a:schemeClr val="accent6">
+                        <a:lumMod val="50000"/>
+                      </a:schemeClr>
                     </a:solidFill>
                   </a:tcPr>
                 </a:tc>
@@ -13986,7 +13988,7 @@
                       <a:r>
                         <a:rPr lang="en-US" sz="1250" b="1" dirty="0">
                           <a:solidFill>
-                            <a:srgbClr val="2B2320"/>
+                            <a:schemeClr val="bg1"/>
                           </a:solidFill>
                           <a:latin typeface="Calibri" pitchFamily="34" charset="0"/>
                           <a:ea typeface="Calibri" pitchFamily="34" charset="-122"/>
@@ -13995,6 +13997,9 @@
                         <a:t>Hiper-chollo</a:t>
                       </a:r>
                       <a:endParaRPr lang="en-US" sz="1250" dirty="0">
+                        <a:solidFill>
+                          <a:schemeClr val="bg1"/>
+                        </a:solidFill>
                         <a:latin typeface="Calibri" charset="0"/>
                         <a:ea typeface="Calibri" charset="0"/>
                         <a:cs typeface="Calibri" charset="0"/>
@@ -14039,7 +14044,9 @@
                       <a:tailEnd type="none" w="med" len="med"/>
                     </a:lnB>
                     <a:solidFill>
-                      <a:srgbClr val="D99A3D"/>
+                      <a:schemeClr val="accent6">
+                        <a:lumMod val="50000"/>
+                      </a:schemeClr>
                     </a:solidFill>
                   </a:tcPr>
                 </a:tc>
@@ -14054,7 +14061,7 @@
                       <a:r>
                         <a:rPr lang="en-US" sz="1250" dirty="0">
                           <a:solidFill>
-                            <a:srgbClr val="2B2320"/>
+                            <a:schemeClr val="bg1"/>
                           </a:solidFill>
                           <a:latin typeface="Calibri" pitchFamily="34" charset="0"/>
                           <a:ea typeface="Calibri" pitchFamily="34" charset="-122"/>
@@ -14063,6 +14070,9 @@
                         <a:t>r ≤ 0,75</a:t>
                       </a:r>
                       <a:endParaRPr lang="en-US" sz="1250" dirty="0">
+                        <a:solidFill>
+                          <a:schemeClr val="bg1"/>
+                        </a:solidFill>
                         <a:latin typeface="Calibri" charset="0"/>
                         <a:ea typeface="Calibri" charset="0"/>
                         <a:cs typeface="Calibri" charset="0"/>
@@ -14107,7 +14117,9 @@
                       <a:tailEnd type="none" w="med" len="med"/>
                     </a:lnB>
                     <a:solidFill>
-                      <a:srgbClr val="D99A3D"/>
+                      <a:schemeClr val="accent6">
+                        <a:lumMod val="50000"/>
+                      </a:schemeClr>
                     </a:solidFill>
                   </a:tcPr>
                 </a:tc>
@@ -14122,7 +14134,7 @@
                       <a:r>
                         <a:rPr lang="en-US" sz="1100" dirty="0">
                           <a:solidFill>
-                            <a:srgbClr val="2B2320"/>
+                            <a:schemeClr val="bg1"/>
                           </a:solidFill>
                           <a:latin typeface="Calibri" pitchFamily="34" charset="0"/>
                           <a:ea typeface="Calibri" pitchFamily="34" charset="-122"/>
@@ -14131,6 +14143,9 @@
                         <a:t>≥25% por debajo del precio justo</a:t>
                       </a:r>
                       <a:endParaRPr lang="en-US" sz="1100" dirty="0">
+                        <a:solidFill>
+                          <a:schemeClr val="bg1"/>
+                        </a:solidFill>
                         <a:latin typeface="Calibri" charset="0"/>
                         <a:ea typeface="Calibri" charset="0"/>
                         <a:cs typeface="Calibri" charset="0"/>
@@ -14175,7 +14190,9 @@
                       <a:tailEnd type="none" w="med" len="med"/>
                     </a:lnB>
                     <a:solidFill>
-                      <a:srgbClr val="D99A3D"/>
+                      <a:schemeClr val="accent6">
+                        <a:lumMod val="50000"/>
+                      </a:schemeClr>
                     </a:solidFill>
                   </a:tcPr>
                 </a:tc>
@@ -14250,7 +14267,9 @@
                       <a:tailEnd type="none" w="med" len="med"/>
                     </a:lnB>
                     <a:solidFill>
-                      <a:srgbClr val="FFFFFF"/>
+                      <a:schemeClr val="accent6">
+                        <a:lumMod val="75000"/>
+                      </a:schemeClr>
                     </a:solidFill>
                   </a:tcPr>
                 </a:tc>
@@ -14318,7 +14337,9 @@
                       <a:tailEnd type="none" w="med" len="med"/>
                     </a:lnB>
                     <a:solidFill>
-                      <a:srgbClr val="3B6E77"/>
+                      <a:schemeClr val="accent6">
+                        <a:lumMod val="75000"/>
+                      </a:schemeClr>
                     </a:solidFill>
                   </a:tcPr>
                 </a:tc>
@@ -14386,7 +14407,9 @@
                       <a:tailEnd type="none" w="med" len="med"/>
                     </a:lnB>
                     <a:solidFill>
-                      <a:srgbClr val="3B6E77"/>
+                      <a:schemeClr val="accent6">
+                        <a:lumMod val="75000"/>
+                      </a:schemeClr>
                     </a:solidFill>
                   </a:tcPr>
                 </a:tc>
@@ -14454,7 +14477,9 @@
                       <a:tailEnd type="none" w="med" len="med"/>
                     </a:lnB>
                     <a:solidFill>
-                      <a:srgbClr val="3B6E77"/>
+                      <a:schemeClr val="accent6">
+                        <a:lumMod val="75000"/>
+                      </a:schemeClr>
                     </a:solidFill>
                   </a:tcPr>
                 </a:tc>
@@ -14529,7 +14554,10 @@
                       <a:tailEnd type="none" w="med" len="med"/>
                     </a:lnB>
                     <a:solidFill>
-                      <a:srgbClr val="8FB7AE"/>
+                      <a:schemeClr val="accent6">
+                        <a:lumMod val="60000"/>
+                        <a:lumOff val="40000"/>
+                      </a:schemeClr>
                     </a:solidFill>
                   </a:tcPr>
                 </a:tc>
@@ -14544,7 +14572,7 @@
                       <a:r>
                         <a:rPr lang="en-US" sz="1250" b="1" dirty="0">
                           <a:solidFill>
-                            <a:srgbClr val="2B2320"/>
+                            <a:schemeClr val="bg1"/>
                           </a:solidFill>
                           <a:latin typeface="Calibri" pitchFamily="34" charset="0"/>
                           <a:ea typeface="Calibri" pitchFamily="34" charset="-122"/>
@@ -14553,6 +14581,9 @@
                         <a:t>Chollo</a:t>
                       </a:r>
                       <a:endParaRPr lang="en-US" sz="1250" dirty="0">
+                        <a:solidFill>
+                          <a:schemeClr val="bg1"/>
+                        </a:solidFill>
                         <a:latin typeface="Calibri" charset="0"/>
                         <a:ea typeface="Calibri" charset="0"/>
                         <a:cs typeface="Calibri" charset="0"/>
@@ -14597,7 +14628,10 @@
                       <a:tailEnd type="none" w="med" len="med"/>
                     </a:lnB>
                     <a:solidFill>
-                      <a:srgbClr val="8FB7AE"/>
+                      <a:schemeClr val="accent6">
+                        <a:lumMod val="60000"/>
+                        <a:lumOff val="40000"/>
+                      </a:schemeClr>
                     </a:solidFill>
                   </a:tcPr>
                 </a:tc>
@@ -14612,7 +14646,7 @@
                       <a:r>
                         <a:rPr lang="en-US" sz="1250" dirty="0">
                           <a:solidFill>
-                            <a:srgbClr val="2B2320"/>
+                            <a:schemeClr val="bg1"/>
                           </a:solidFill>
                           <a:latin typeface="Calibri" pitchFamily="34" charset="0"/>
                           <a:ea typeface="Calibri" pitchFamily="34" charset="-122"/>
@@ -14621,6 +14655,9 @@
                         <a:t>0,85 ≤ r &lt; 0,97</a:t>
                       </a:r>
                       <a:endParaRPr lang="en-US" sz="1250" dirty="0">
+                        <a:solidFill>
+                          <a:schemeClr val="bg1"/>
+                        </a:solidFill>
                         <a:latin typeface="Calibri" charset="0"/>
                         <a:ea typeface="Calibri" charset="0"/>
                         <a:cs typeface="Calibri" charset="0"/>
@@ -14665,7 +14702,10 @@
                       <a:tailEnd type="none" w="med" len="med"/>
                     </a:lnB>
                     <a:solidFill>
-                      <a:srgbClr val="8FB7AE"/>
+                      <a:schemeClr val="accent6">
+                        <a:lumMod val="60000"/>
+                        <a:lumOff val="40000"/>
+                      </a:schemeClr>
                     </a:solidFill>
                   </a:tcPr>
                 </a:tc>
@@ -14680,7 +14720,7 @@
                       <a:r>
                         <a:rPr lang="en-US" sz="1100" dirty="0">
                           <a:solidFill>
-                            <a:srgbClr val="2B2320"/>
+                            <a:schemeClr val="bg1"/>
                           </a:solidFill>
                           <a:latin typeface="Calibri" pitchFamily="34" charset="0"/>
                           <a:ea typeface="Calibri" pitchFamily="34" charset="-122"/>
@@ -14689,6 +14729,9 @@
                         <a:t>Entre 3% y 15% por debajo</a:t>
                       </a:r>
                       <a:endParaRPr lang="en-US" sz="1100" dirty="0">
+                        <a:solidFill>
+                          <a:schemeClr val="bg1"/>
+                        </a:solidFill>
                         <a:latin typeface="Calibri" charset="0"/>
                         <a:ea typeface="Calibri" charset="0"/>
                         <a:cs typeface="Calibri" charset="0"/>
@@ -14733,7 +14776,10 @@
                       <a:tailEnd type="none" w="med" len="med"/>
                     </a:lnB>
                     <a:solidFill>
-                      <a:srgbClr val="8FB7AE"/>
+                      <a:schemeClr val="accent6">
+                        <a:lumMod val="60000"/>
+                        <a:lumOff val="40000"/>
+                      </a:schemeClr>
                     </a:solidFill>
                   </a:tcPr>
                 </a:tc>
@@ -14808,7 +14854,7 @@
                       <a:tailEnd type="none" w="med" len="med"/>
                     </a:lnB>
                     <a:solidFill>
-                      <a:srgbClr val="D8CFC5"/>
+                      <a:schemeClr val="accent4"/>
                     </a:solidFill>
                   </a:tcPr>
                 </a:tc>
@@ -14876,7 +14922,7 @@
                       <a:tailEnd type="none" w="med" len="med"/>
                     </a:lnB>
                     <a:solidFill>
-                      <a:srgbClr val="D8CFC5"/>
+                      <a:schemeClr val="accent4"/>
                     </a:solidFill>
                   </a:tcPr>
                 </a:tc>
@@ -14944,7 +14990,7 @@
                       <a:tailEnd type="none" w="med" len="med"/>
                     </a:lnB>
                     <a:solidFill>
-                      <a:srgbClr val="D8CFC5"/>
+                      <a:schemeClr val="accent4"/>
                     </a:solidFill>
                   </a:tcPr>
                 </a:tc>
@@ -15012,7 +15058,7 @@
                       <a:tailEnd type="none" w="med" len="med"/>
                     </a:lnB>
                     <a:solidFill>
-                      <a:srgbClr val="D8CFC5"/>
+                      <a:schemeClr val="accent4"/>
                     </a:solidFill>
                   </a:tcPr>
                 </a:tc>
@@ -15102,7 +15148,7 @@
                       <a:r>
                         <a:rPr lang="en-US" sz="1250" b="1" dirty="0">
                           <a:solidFill>
-                            <a:srgbClr val="FFFFFF"/>
+                            <a:schemeClr val="tx1"/>
                           </a:solidFill>
                           <a:latin typeface="Calibri" pitchFamily="34" charset="0"/>
                           <a:ea typeface="Calibri" pitchFamily="34" charset="-122"/>
@@ -15111,6 +15157,9 @@
                         <a:t>Inflado</a:t>
                       </a:r>
                       <a:endParaRPr lang="en-US" sz="1250" dirty="0">
+                        <a:solidFill>
+                          <a:schemeClr val="tx1"/>
+                        </a:solidFill>
                         <a:latin typeface="Calibri" charset="0"/>
                         <a:ea typeface="Calibri" charset="0"/>
                         <a:cs typeface="Calibri" charset="0"/>
@@ -15170,7 +15219,7 @@
                       <a:r>
                         <a:rPr lang="en-US" sz="1250" dirty="0">
                           <a:solidFill>
-                            <a:srgbClr val="FFFFFF"/>
+                            <a:schemeClr val="tx1"/>
                           </a:solidFill>
                           <a:latin typeface="Calibri" pitchFamily="34" charset="0"/>
                           <a:ea typeface="Calibri" pitchFamily="34" charset="-122"/>
@@ -15179,6 +15228,9 @@
                         <a:t>r &gt; 1,03</a:t>
                       </a:r>
                       <a:endParaRPr lang="en-US" sz="1250" dirty="0">
+                        <a:solidFill>
+                          <a:schemeClr val="tx1"/>
+                        </a:solidFill>
                         <a:latin typeface="Calibri" charset="0"/>
                         <a:ea typeface="Calibri" charset="0"/>
                         <a:cs typeface="Calibri" charset="0"/>
@@ -15238,7 +15290,7 @@
                       <a:r>
                         <a:rPr lang="en-US" sz="1100" dirty="0">
                           <a:solidFill>
-                            <a:srgbClr val="FFFFFF"/>
+                            <a:schemeClr val="tx1"/>
                           </a:solidFill>
                           <a:latin typeface="Calibri" pitchFamily="34" charset="0"/>
                           <a:ea typeface="Calibri" pitchFamily="34" charset="-122"/>
@@ -15247,6 +15299,9 @@
                         <a:t>Precio &gt; 3% por encima del justo</a:t>
                       </a:r>
                       <a:endParaRPr lang="en-US" sz="1100" dirty="0">
+                        <a:solidFill>
+                          <a:schemeClr val="tx1"/>
+                        </a:solidFill>
                         <a:latin typeface="Calibri" charset="0"/>
                         <a:ea typeface="Calibri" charset="0"/>
                         <a:cs typeface="Calibri" charset="0"/>
@@ -20572,7 +20627,7 @@
             <a:r>
               <a:rPr lang="en-US" sz="1550" b="1" dirty="0" err="1">
                 <a:solidFill>
-                  <a:srgbClr val="D99A3D"/>
+                  <a:srgbClr val="C00000"/>
                 </a:solidFill>
                 <a:latin typeface="Cambria" pitchFamily="34" charset="0"/>
                 <a:ea typeface="Cambria" pitchFamily="34" charset="-122"/>
@@ -20580,7 +20635,11 @@
               </a:rPr>
               <a:t>Problema</a:t>
             </a:r>
-            <a:endParaRPr lang="en-US" sz="1550" dirty="0"/>
+            <a:endParaRPr lang="en-US" sz="1550" dirty="0">
+              <a:solidFill>
+                <a:srgbClr val="C00000"/>
+              </a:solidFill>
+            </a:endParaRPr>
           </a:p>
         </p:txBody>
       </p:sp>
@@ -20605,11 +20664,12 @@
           <a:bodyPr wrap="square" lIns="0" tIns="0" rIns="0" bIns="0" rtlCol="0" anchor="t"/>
           <a:lstStyle/>
           <a:p>
-            <a:pPr marL="0" indent="0">
+            <a:pPr marL="285750" indent="-285750">
               <a:lnSpc>
                 <a:spcPct val="120000"/>
               </a:lnSpc>
-              <a:buNone/>
+              <a:buFont typeface="Arial" panose="020B0604020202020204" pitchFamily="34" charset="0"/>
+              <a:buChar char="•"/>
             </a:pPr>
             <a:r>
               <a:rPr lang="en-US" sz="1250" dirty="0">
@@ -20717,11 +20777,12 @@
             </a:r>
           </a:p>
           <a:p>
-            <a:pPr marL="0" indent="0">
+            <a:pPr marL="285750" indent="-285750">
               <a:lnSpc>
                 <a:spcPct val="120000"/>
               </a:lnSpc>
-              <a:buNone/>
+              <a:buFont typeface="Arial" panose="020B0604020202020204" pitchFamily="34" charset="0"/>
+              <a:buChar char="•"/>
             </a:pPr>
             <a:r>
               <a:rPr lang="en-US" sz="1250" dirty="0" err="1">
@@ -21071,7 +21132,9 @@
             <a:r>
               <a:rPr lang="en-US" sz="1550" b="1" dirty="0" err="1">
                 <a:solidFill>
-                  <a:srgbClr val="8C4029"/>
+                  <a:schemeClr val="accent6">
+                    <a:lumMod val="75000"/>
+                  </a:schemeClr>
                 </a:solidFill>
                 <a:latin typeface="Cambria" pitchFamily="34" charset="0"/>
                 <a:ea typeface="Cambria" pitchFamily="34" charset="-122"/>
@@ -21079,7 +21142,13 @@
               </a:rPr>
               <a:t>Solución</a:t>
             </a:r>
-            <a:endParaRPr lang="en-US" sz="1550" dirty="0"/>
+            <a:endParaRPr lang="en-US" sz="1550" dirty="0">
+              <a:solidFill>
+                <a:schemeClr val="accent6">
+                  <a:lumMod val="75000"/>
+                </a:schemeClr>
+              </a:solidFill>
+            </a:endParaRPr>
           </a:p>
         </p:txBody>
       </p:sp>
@@ -21123,9 +21192,6 @@
             </a:r>
             <a:r>
               <a:rPr lang="en-US" sz="1250" b="1" dirty="0">
-                <a:solidFill>
-                  <a:srgbClr val="8C4029"/>
-                </a:solidFill>
                 <a:latin typeface="Calibri" pitchFamily="34" charset="0"/>
                 <a:ea typeface="Calibri" pitchFamily="34" charset="-122"/>
                 <a:cs typeface="Calibri" pitchFamily="34" charset="-120"/>
@@ -21143,32 +21209,148 @@
               </a:rPr>
               <a:t>. Se conservan 20 de los 100 árboles: </a:t>
             </a:r>
+          </a:p>
+          <a:p>
+            <a:pPr marL="285750" indent="-285750">
+              <a:lnSpc>
+                <a:spcPct val="120000"/>
+              </a:lnSpc>
+              <a:buFont typeface="Arial" panose="020B0604020202020204" pitchFamily="34" charset="0"/>
+              <a:buChar char="•"/>
+            </a:pPr>
             <a:r>
               <a:rPr lang="en-US" sz="1250" b="1" dirty="0">
                 <a:solidFill>
-                  <a:srgbClr val="8C4029"/>
-                </a:solidFill>
-                <a:latin typeface="Calibri" pitchFamily="34" charset="0"/>
-                <a:ea typeface="Calibri" pitchFamily="34" charset="-122"/>
-                <a:cs typeface="Calibri" pitchFamily="34" charset="-120"/>
-              </a:rPr>
-              <a:t>~373MB en RAM</a:t>
+                  <a:schemeClr val="accent6">
+                    <a:lumMod val="75000"/>
+                  </a:schemeClr>
+                </a:solidFill>
+                <a:latin typeface="Calibri" pitchFamily="34" charset="0"/>
+                <a:ea typeface="Calibri" pitchFamily="34" charset="-122"/>
+                <a:cs typeface="Calibri" pitchFamily="34" charset="-120"/>
+              </a:rPr>
+              <a:t>~373MB </a:t>
+            </a:r>
+            <a:r>
+              <a:rPr lang="en-US" sz="1250" b="1" dirty="0" err="1">
+                <a:solidFill>
+                  <a:schemeClr val="accent6">
+                    <a:lumMod val="75000"/>
+                  </a:schemeClr>
+                </a:solidFill>
+                <a:latin typeface="Calibri" pitchFamily="34" charset="0"/>
+                <a:ea typeface="Calibri" pitchFamily="34" charset="-122"/>
+                <a:cs typeface="Calibri" pitchFamily="34" charset="-120"/>
+              </a:rPr>
+              <a:t>en</a:t>
+            </a:r>
+            <a:r>
+              <a:rPr lang="en-US" sz="1250" b="1" dirty="0">
+                <a:solidFill>
+                  <a:schemeClr val="accent6">
+                    <a:lumMod val="75000"/>
+                  </a:schemeClr>
+                </a:solidFill>
+                <a:latin typeface="Calibri" pitchFamily="34" charset="0"/>
+                <a:ea typeface="Calibri" pitchFamily="34" charset="-122"/>
+                <a:cs typeface="Calibri" pitchFamily="34" charset="-120"/>
+              </a:rPr>
+              <a:t> RAM</a:t>
             </a:r>
             <a:r>
               <a:rPr lang="en-US" sz="1250" dirty="0">
                 <a:solidFill>
+                  <a:schemeClr val="accent6">
+                    <a:lumMod val="75000"/>
+                  </a:schemeClr>
+                </a:solidFill>
+                <a:latin typeface="Calibri" pitchFamily="34" charset="0"/>
+                <a:ea typeface="Calibri" pitchFamily="34" charset="-122"/>
+                <a:cs typeface="Calibri" pitchFamily="34" charset="-120"/>
+              </a:rPr>
+              <a:t> </a:t>
+            </a:r>
+            <a:r>
+              <a:rPr lang="en-US" sz="1250" dirty="0">
+                <a:solidFill>
                   <a:srgbClr val="2B2320"/>
                 </a:solidFill>
                 <a:latin typeface="Calibri" pitchFamily="34" charset="0"/>
                 <a:ea typeface="Calibri" pitchFamily="34" charset="-122"/>
                 <a:cs typeface="Calibri" pitchFamily="34" charset="-120"/>
               </a:rPr>
-              <a:t> y </a:t>
+              <a:t>(&lt;1GB del </a:t>
+            </a:r>
+            <a:r>
+              <a:rPr lang="en-US" sz="1250" dirty="0" err="1">
+                <a:solidFill>
+                  <a:srgbClr val="2B2320"/>
+                </a:solidFill>
+                <a:latin typeface="Calibri" pitchFamily="34" charset="0"/>
+                <a:ea typeface="Calibri" pitchFamily="34" charset="-122"/>
+                <a:cs typeface="Calibri" pitchFamily="34" charset="-120"/>
+              </a:rPr>
+              <a:t>límite</a:t>
+            </a:r>
+            <a:r>
+              <a:rPr lang="en-US" sz="1250" dirty="0">
+                <a:solidFill>
+                  <a:srgbClr val="2B2320"/>
+                </a:solidFill>
+                <a:latin typeface="Calibri" pitchFamily="34" charset="0"/>
+                <a:ea typeface="Calibri" pitchFamily="34" charset="-122"/>
+                <a:cs typeface="Calibri" pitchFamily="34" charset="-120"/>
+              </a:rPr>
+              <a:t> de </a:t>
+            </a:r>
+            <a:r>
+              <a:rPr lang="en-US" sz="1250" dirty="0" err="1">
+                <a:solidFill>
+                  <a:srgbClr val="2B2320"/>
+                </a:solidFill>
+                <a:latin typeface="Calibri" pitchFamily="34" charset="0"/>
+                <a:ea typeface="Calibri" pitchFamily="34" charset="-122"/>
+                <a:cs typeface="Calibri" pitchFamily="34" charset="-120"/>
+              </a:rPr>
+              <a:t>Streamlit</a:t>
+            </a:r>
+            <a:r>
+              <a:rPr lang="en-US" sz="1250" dirty="0">
+                <a:solidFill>
+                  <a:srgbClr val="2B2320"/>
+                </a:solidFill>
+                <a:latin typeface="Calibri" pitchFamily="34" charset="0"/>
+                <a:ea typeface="Calibri" pitchFamily="34" charset="-122"/>
+                <a:cs typeface="Calibri" pitchFamily="34" charset="-120"/>
+              </a:rPr>
+              <a:t> Cloud)</a:t>
+            </a:r>
+          </a:p>
+          <a:p>
+            <a:pPr marL="285750" indent="-285750">
+              <a:lnSpc>
+                <a:spcPct val="120000"/>
+              </a:lnSpc>
+              <a:buFont typeface="Arial" panose="020B0604020202020204" pitchFamily="34" charset="0"/>
+              <a:buChar char="•"/>
+            </a:pPr>
+            <a:r>
+              <a:rPr lang="en-US" sz="1250" dirty="0">
+                <a:solidFill>
+                  <a:srgbClr val="2B2320"/>
+                </a:solidFill>
+                <a:latin typeface="Calibri" pitchFamily="34" charset="0"/>
+                <a:ea typeface="Calibri" pitchFamily="34" charset="-122"/>
+                <a:cs typeface="Calibri" pitchFamily="34" charset="-120"/>
+              </a:rPr>
+              <a:t> </a:t>
             </a:r>
             <a:r>
               <a:rPr lang="en-US" sz="1250" b="1" dirty="0">
                 <a:solidFill>
-                  <a:srgbClr val="8C4029"/>
+                  <a:schemeClr val="accent6">
+                    <a:lumMod val="75000"/>
+                  </a:schemeClr>
                 </a:solidFill>
                 <a:latin typeface="Calibri" pitchFamily="34" charset="0"/>
                 <a:ea typeface="Calibri" pitchFamily="34" charset="-122"/>
@@ -21179,13 +21361,26 @@
             <a:r>
               <a:rPr lang="en-US" sz="1250" dirty="0">
                 <a:solidFill>
+                  <a:schemeClr val="accent6">
+                    <a:lumMod val="75000"/>
+                  </a:schemeClr>
+                </a:solidFill>
+                <a:latin typeface="Calibri" pitchFamily="34" charset="0"/>
+                <a:ea typeface="Calibri" pitchFamily="34" charset="-122"/>
+                <a:cs typeface="Calibri" pitchFamily="34" charset="-120"/>
+              </a:rPr>
+              <a:t> </a:t>
+            </a:r>
+            <a:r>
+              <a:rPr lang="en-US" sz="1250" dirty="0">
+                <a:solidFill>
                   <a:srgbClr val="2B2320"/>
                 </a:solidFill>
                 <a:latin typeface="Calibri" pitchFamily="34" charset="0"/>
                 <a:ea typeface="Calibri" pitchFamily="34" charset="-122"/>
                 <a:cs typeface="Calibri" pitchFamily="34" charset="-120"/>
               </a:rPr>
-              <a:t> en disco (&lt; 100MB del </a:t>
+              <a:t>en disco (&lt; 100MB del </a:t>
             </a:r>
             <a:r>
               <a:rPr lang="en-US" sz="1250" dirty="0" err="1">
@@ -21222,7 +21417,7 @@
           <p:nvPr>
             <p:extLst>
               <p:ext uri="{D42A27DB-BD31-4B8C-83A1-F6EECF244321}">
-                <p14:modId xmlns:p14="http://schemas.microsoft.com/office/powerpoint/2010/main" val="1579011935"/>
+                <p14:modId xmlns:p14="http://schemas.microsoft.com/office/powerpoint/2010/main" val="103355414"/>
               </p:ext>
             </p:extLst>
           </p:nvPr>
@@ -21963,7 +22158,9 @@
                       <a:r>
                         <a:rPr lang="en-US" sz="1250" b="1" dirty="0">
                           <a:solidFill>
-                            <a:srgbClr val="8C4029"/>
+                            <a:schemeClr val="accent6">
+                              <a:lumMod val="75000"/>
+                            </a:schemeClr>
                           </a:solidFill>
                           <a:latin typeface="Calibri" pitchFamily="34" charset="0"/>
                           <a:ea typeface="Calibri" pitchFamily="34" charset="-122"/>
@@ -21972,6 +22169,11 @@
                         <a:t>Podado (producción)</a:t>
                       </a:r>
                       <a:endParaRPr lang="en-US" sz="1250" dirty="0">
+                        <a:solidFill>
+                          <a:schemeClr val="accent6">
+                            <a:lumMod val="75000"/>
+                          </a:schemeClr>
+                        </a:solidFill>
                         <a:latin typeface="Calibri" charset="0"/>
                         <a:ea typeface="Calibri" charset="0"/>
                         <a:cs typeface="Calibri" charset="0"/>
@@ -22028,7 +22230,9 @@
                       <a:r>
                         <a:rPr lang="en-US" sz="1250" b="1" dirty="0">
                           <a:solidFill>
-                            <a:srgbClr val="8C4029"/>
+                            <a:schemeClr val="accent6">
+                              <a:lumMod val="75000"/>
+                            </a:schemeClr>
                           </a:solidFill>
                           <a:latin typeface="Calibri" pitchFamily="34" charset="0"/>
                           <a:ea typeface="Calibri" pitchFamily="34" charset="-122"/>
@@ -22037,6 +22241,11 @@
                         <a:t>20</a:t>
                       </a:r>
                       <a:endParaRPr lang="en-US" sz="1250" dirty="0">
+                        <a:solidFill>
+                          <a:schemeClr val="accent6">
+                            <a:lumMod val="75000"/>
+                          </a:schemeClr>
+                        </a:solidFill>
                         <a:latin typeface="Calibri" charset="0"/>
                         <a:ea typeface="Calibri" charset="0"/>
                         <a:cs typeface="Calibri" charset="0"/>
@@ -22093,7 +22302,9 @@
                       <a:r>
                         <a:rPr lang="en-US" sz="1250" b="1" dirty="0">
                           <a:solidFill>
-                            <a:srgbClr val="8C4029"/>
+                            <a:schemeClr val="accent6">
+                              <a:lumMod val="75000"/>
+                            </a:schemeClr>
                           </a:solidFill>
                           <a:latin typeface="Calibri" pitchFamily="34" charset="0"/>
                           <a:ea typeface="Calibri" pitchFamily="34" charset="-122"/>
@@ -22102,6 +22313,11 @@
                         <a:t>0,8634</a:t>
                       </a:r>
                       <a:endParaRPr lang="en-US" sz="1250" dirty="0">
+                        <a:solidFill>
+                          <a:schemeClr val="accent6">
+                            <a:lumMod val="75000"/>
+                          </a:schemeClr>
+                        </a:solidFill>
                         <a:latin typeface="Calibri" charset="0"/>
                         <a:ea typeface="Calibri" charset="0"/>
                         <a:cs typeface="Calibri" charset="0"/>
@@ -22158,7 +22374,9 @@
                       <a:r>
                         <a:rPr lang="en-US" sz="1250" b="1" dirty="0">
                           <a:solidFill>
-                            <a:srgbClr val="8C4029"/>
+                            <a:schemeClr val="accent6">
+                              <a:lumMod val="75000"/>
+                            </a:schemeClr>
                           </a:solidFill>
                           <a:latin typeface="Calibri" pitchFamily="34" charset="0"/>
                           <a:ea typeface="Calibri" pitchFamily="34" charset="-122"/>
@@ -22167,6 +22385,11 @@
                         <a:t>19,79</a:t>
                       </a:r>
                       <a:endParaRPr lang="en-US" sz="1250" dirty="0">
+                        <a:solidFill>
+                          <a:schemeClr val="accent6">
+                            <a:lumMod val="75000"/>
+                          </a:schemeClr>
+                        </a:solidFill>
                         <a:latin typeface="Calibri" charset="0"/>
                         <a:ea typeface="Calibri" charset="0"/>
                         <a:cs typeface="Calibri" charset="0"/>
@@ -22223,7 +22446,9 @@
                       <a:r>
                         <a:rPr lang="en-US" sz="1250" b="1" dirty="0">
                           <a:solidFill>
-                            <a:srgbClr val="8C4029"/>
+                            <a:schemeClr val="accent6">
+                              <a:lumMod val="75000"/>
+                            </a:schemeClr>
                           </a:solidFill>
                           <a:latin typeface="Calibri" pitchFamily="34" charset="0"/>
                           <a:ea typeface="Calibri" pitchFamily="34" charset="-122"/>
@@ -22232,6 +22457,11 @@
                         <a:t>33,57</a:t>
                       </a:r>
                       <a:endParaRPr lang="en-US" sz="1250" dirty="0">
+                        <a:solidFill>
+                          <a:schemeClr val="accent6">
+                            <a:lumMod val="75000"/>
+                          </a:schemeClr>
+                        </a:solidFill>
                         <a:latin typeface="Calibri" charset="0"/>
                         <a:ea typeface="Calibri" charset="0"/>
                         <a:cs typeface="Calibri" charset="0"/>
@@ -22373,14 +22603,47 @@
           <a:p>
             <a:pPr algn="ctr"/>
             <a:r>
-              <a:rPr sz="1250" b="1">
+              <a:rPr sz="1250" b="1" dirty="0">
                 <a:solidFill>
                   <a:srgbClr val="241A16"/>
                 </a:solidFill>
                 <a:latin typeface="Calibri"/>
               </a:rPr>
-              <a:t>373MB en RAM (1/4 del original) → ya cabe en el límite gratuito de Streamlit Cloud (~1GB)</a:t>
-            </a:r>
+              <a:t>373MB </a:t>
+            </a:r>
+            <a:r>
+              <a:rPr sz="1250" b="1" dirty="0" err="1">
+                <a:solidFill>
+                  <a:srgbClr val="241A16"/>
+                </a:solidFill>
+                <a:latin typeface="Calibri"/>
+              </a:rPr>
+              <a:t>en</a:t>
+            </a:r>
+            <a:r>
+              <a:rPr sz="1250" b="1" dirty="0">
+                <a:solidFill>
+                  <a:srgbClr val="241A16"/>
+                </a:solidFill>
+                <a:latin typeface="Calibri"/>
+              </a:rPr>
+              <a:t> RAM (1/4 del original)</a:t>
+            </a:r>
+            <a:r>
+              <a:rPr lang="es-ES" sz="1250" b="1" dirty="0">
+                <a:solidFill>
+                  <a:srgbClr val="241A16"/>
+                </a:solidFill>
+                <a:latin typeface="Calibri"/>
+              </a:rPr>
+              <a:t> y 59MB en disco</a:t>
+            </a:r>
+            <a:endParaRPr sz="1250" b="1" dirty="0">
+              <a:solidFill>
+                <a:srgbClr val="241A16"/>
+              </a:solidFill>
+              <a:latin typeface="Calibri"/>
+            </a:endParaRPr>
           </a:p>
         </p:txBody>
       </p:sp>

--- a/TFG_Chollos/Presentacion_Defensa_TFG.pptx
+++ b/TFG_Chollos/Presentacion_Defensa_TFG.pptx
@@ -5,7 +5,7 @@
     <p:sldMasterId id="2147483648" r:id="rId1"/>
   </p:sldMasterIdLst>
   <p:notesMasterIdLst>
-    <p:notesMasterId r:id="rId25"/>
+    <p:notesMasterId r:id="rId26"/>
   </p:notesMasterIdLst>
   <p:sldIdLst>
     <p:sldId id="256" r:id="rId2"/>
@@ -21,16 +21,17 @@
     <p:sldId id="266" r:id="rId12"/>
     <p:sldId id="267" r:id="rId13"/>
     <p:sldId id="268" r:id="rId14"/>
-    <p:sldId id="269" r:id="rId15"/>
-    <p:sldId id="270" r:id="rId16"/>
-    <p:sldId id="271" r:id="rId17"/>
-    <p:sldId id="272" r:id="rId18"/>
-    <p:sldId id="273" r:id="rId19"/>
-    <p:sldId id="274" r:id="rId20"/>
-    <p:sldId id="275" r:id="rId21"/>
-    <p:sldId id="276" r:id="rId22"/>
-    <p:sldId id="277" r:id="rId23"/>
-    <p:sldId id="278" r:id="rId24"/>
+    <p:sldId id="279" r:id="rId15"/>
+    <p:sldId id="269" r:id="rId16"/>
+    <p:sldId id="270" r:id="rId17"/>
+    <p:sldId id="271" r:id="rId18"/>
+    <p:sldId id="272" r:id="rId19"/>
+    <p:sldId id="273" r:id="rId20"/>
+    <p:sldId id="274" r:id="rId21"/>
+    <p:sldId id="275" r:id="rId22"/>
+    <p:sldId id="276" r:id="rId23"/>
+    <p:sldId id="277" r:id="rId24"/>
+    <p:sldId id="278" r:id="rId25"/>
   </p:sldIdLst>
   <p:sldSz cx="12192000" cy="6858000"/>
   <p:notesSz cx="6858000" cy="12192000"/>
@@ -2068,7 +2069,7 @@
           <a:p>
             <a:fld id="{F7021451-1387-4CA6-816F-3879F97B5CBC}" type="slidenum">
               <a:rPr lang="en-US"/>
-              <a:t>14</a:t>
+              <a:t>15</a:t>
             </a:fld>
             <a:endParaRPr lang="en-US"/>
           </a:p>
@@ -2152,7 +2153,7 @@
           <a:p>
             <a:fld id="{F7021451-1387-4CA6-816F-3879F97B5CBC}" type="slidenum">
               <a:rPr lang="en-US"/>
-              <a:t>15</a:t>
+              <a:t>16</a:t>
             </a:fld>
             <a:endParaRPr lang="en-US"/>
           </a:p>
@@ -2236,7 +2237,7 @@
           <a:p>
             <a:fld id="{F7021451-1387-4CA6-816F-3879F97B5CBC}" type="slidenum">
               <a:rPr lang="en-US"/>
-              <a:t>16</a:t>
+              <a:t>17</a:t>
             </a:fld>
             <a:endParaRPr lang="en-US"/>
           </a:p>
@@ -2320,7 +2321,7 @@
           <a:p>
             <a:fld id="{F7021451-1387-4CA6-816F-3879F97B5CBC}" type="slidenum">
               <a:rPr lang="en-US"/>
-              <a:t>17</a:t>
+              <a:t>18</a:t>
             </a:fld>
             <a:endParaRPr lang="en-US"/>
           </a:p>
@@ -2404,7 +2405,7 @@
           <a:p>
             <a:fld id="{F7021451-1387-4CA6-816F-3879F97B5CBC}" type="slidenum">
               <a:rPr lang="en-US"/>
-              <a:t>18</a:t>
+              <a:t>19</a:t>
             </a:fld>
             <a:endParaRPr lang="en-US"/>
           </a:p>
@@ -2488,7 +2489,7 @@
           <a:p>
             <a:fld id="{F7021451-1387-4CA6-816F-3879F97B5CBC}" type="slidenum">
               <a:rPr lang="en-US"/>
-              <a:t>19</a:t>
+              <a:t>20</a:t>
             </a:fld>
             <a:endParaRPr lang="en-US"/>
           </a:p>
@@ -2656,7 +2657,7 @@
           <a:p>
             <a:fld id="{F7021451-1387-4CA6-816F-3879F97B5CBC}" type="slidenum">
               <a:rPr lang="en-US"/>
-              <a:t>20</a:t>
+              <a:t>21</a:t>
             </a:fld>
             <a:endParaRPr lang="en-US"/>
           </a:p>
@@ -2740,7 +2741,7 @@
           <a:p>
             <a:fld id="{F7021451-1387-4CA6-816F-3879F97B5CBC}" type="slidenum">
               <a:rPr lang="en-US"/>
-              <a:t>21</a:t>
+              <a:t>22</a:t>
             </a:fld>
             <a:endParaRPr lang="en-US"/>
           </a:p>
@@ -2824,7 +2825,7 @@
           <a:p>
             <a:fld id="{F7021451-1387-4CA6-816F-3879F97B5CBC}" type="slidenum">
               <a:rPr lang="en-US"/>
-              <a:t>22</a:t>
+              <a:t>23</a:t>
             </a:fld>
             <a:endParaRPr lang="en-US"/>
           </a:p>
@@ -2908,7 +2909,7 @@
           <a:p>
             <a:fld id="{F7021451-1387-4CA6-816F-3879F97B5CBC}" type="slidenum">
               <a:rPr lang="en-US"/>
-              <a:t>23</a:t>
+              <a:t>24</a:t>
             </a:fld>
             <a:endParaRPr lang="en-US"/>
           </a:p>
@@ -4073,6 +4074,13 @@
           </a:solidFill>
           <a:ln/>
         </p:spPr>
+        <p:txBody>
+          <a:bodyPr/>
+          <a:lstStyle/>
+          <a:p>
+            <a:endParaRPr/>
+          </a:p>
+        </p:txBody>
       </p:sp>
       <p:pic>
         <p:nvPicPr>
@@ -4156,6 +4164,13 @@
           </a:solidFill>
           <a:ln/>
         </p:spPr>
+        <p:txBody>
+          <a:bodyPr/>
+          <a:lstStyle/>
+          <a:p>
+            <a:endParaRPr/>
+          </a:p>
+        </p:txBody>
       </p:sp>
       <p:pic>
         <p:nvPicPr>
@@ -4239,6 +4254,13 @@
           </a:solidFill>
           <a:ln/>
         </p:spPr>
+        <p:txBody>
+          <a:bodyPr/>
+          <a:lstStyle/>
+          <a:p>
+            <a:endParaRPr/>
+          </a:p>
+        </p:txBody>
       </p:sp>
       <p:pic>
         <p:nvPicPr>
@@ -4322,6 +4344,13 @@
           </a:solidFill>
           <a:ln/>
         </p:spPr>
+        <p:txBody>
+          <a:bodyPr/>
+          <a:lstStyle/>
+          <a:p>
+            <a:endParaRPr/>
+          </a:p>
+        </p:txBody>
       </p:sp>
       <p:pic>
         <p:nvPicPr>
@@ -4405,6 +4434,13 @@
           </a:solidFill>
           <a:ln/>
         </p:spPr>
+        <p:txBody>
+          <a:bodyPr/>
+          <a:lstStyle/>
+          <a:p>
+            <a:endParaRPr/>
+          </a:p>
+        </p:txBody>
       </p:sp>
       <p:pic>
         <p:nvPicPr>
@@ -4658,7 +4694,7 @@
                 <a:ea typeface="Calibri" pitchFamily="34" charset="-122"/>
                 <a:cs typeface="Calibri" pitchFamily="34" charset="-120"/>
               </a:rPr>
-              <a:t>10 / 23</a:t>
+              <a:t>10 / 24</a:t>
             </a:r>
             <a:endParaRPr lang="en-US" sz="900" dirty="0"/>
           </a:p>
@@ -4683,6 +4719,13 @@
           </a:solidFill>
           <a:ln/>
         </p:spPr>
+        <p:txBody>
+          <a:bodyPr/>
+          <a:lstStyle/>
+          <a:p>
+            <a:endParaRPr/>
+          </a:p>
+        </p:txBody>
       </p:sp>
       <p:sp>
         <p:nvSpPr>
@@ -4851,6 +4894,13 @@
             <a:prstDash val="solid"/>
           </a:ln>
         </p:spPr>
+        <p:txBody>
+          <a:bodyPr/>
+          <a:lstStyle/>
+          <a:p>
+            <a:endParaRPr/>
+          </a:p>
+        </p:txBody>
       </p:sp>
       <p:sp>
         <p:nvSpPr>
@@ -4917,6 +4967,13 @@
             <a:prstDash val="solid"/>
           </a:ln>
         </p:spPr>
+        <p:txBody>
+          <a:bodyPr/>
+          <a:lstStyle/>
+          <a:p>
+            <a:endParaRPr/>
+          </a:p>
+        </p:txBody>
       </p:sp>
       <p:sp>
         <p:nvSpPr>
@@ -4983,6 +5040,13 @@
             <a:prstDash val="solid"/>
           </a:ln>
         </p:spPr>
+        <p:txBody>
+          <a:bodyPr/>
+          <a:lstStyle/>
+          <a:p>
+            <a:endParaRPr/>
+          </a:p>
+        </p:txBody>
       </p:sp>
       <p:sp>
         <p:nvSpPr>
@@ -5049,6 +5113,13 @@
             <a:prstDash val="solid"/>
           </a:ln>
         </p:spPr>
+        <p:txBody>
+          <a:bodyPr/>
+          <a:lstStyle/>
+          <a:p>
+            <a:endParaRPr/>
+          </a:p>
+        </p:txBody>
       </p:sp>
       <p:sp>
         <p:nvSpPr>
@@ -5115,6 +5186,13 @@
             <a:prstDash val="solid"/>
           </a:ln>
         </p:spPr>
+        <p:txBody>
+          <a:bodyPr/>
+          <a:lstStyle/>
+          <a:p>
+            <a:endParaRPr/>
+          </a:p>
+        </p:txBody>
       </p:sp>
       <p:sp>
         <p:nvSpPr>
@@ -5181,6 +5259,13 @@
             <a:prstDash val="solid"/>
           </a:ln>
         </p:spPr>
+        <p:txBody>
+          <a:bodyPr/>
+          <a:lstStyle/>
+          <a:p>
+            <a:endParaRPr/>
+          </a:p>
+        </p:txBody>
       </p:sp>
       <p:sp>
         <p:nvSpPr>
@@ -5247,6 +5332,13 @@
             <a:prstDash val="solid"/>
           </a:ln>
         </p:spPr>
+        <p:txBody>
+          <a:bodyPr/>
+          <a:lstStyle/>
+          <a:p>
+            <a:endParaRPr/>
+          </a:p>
+        </p:txBody>
       </p:sp>
       <p:sp>
         <p:nvSpPr>
@@ -5313,6 +5405,13 @@
             <a:prstDash val="solid"/>
           </a:ln>
         </p:spPr>
+        <p:txBody>
+          <a:bodyPr/>
+          <a:lstStyle/>
+          <a:p>
+            <a:endParaRPr/>
+          </a:p>
+        </p:txBody>
       </p:sp>
       <p:sp>
         <p:nvSpPr>
@@ -5379,6 +5478,13 @@
             <a:prstDash val="solid"/>
           </a:ln>
         </p:spPr>
+        <p:txBody>
+          <a:bodyPr/>
+          <a:lstStyle/>
+          <a:p>
+            <a:endParaRPr/>
+          </a:p>
+        </p:txBody>
       </p:sp>
       <p:sp>
         <p:nvSpPr>
@@ -5445,6 +5551,13 @@
             <a:prstDash val="solid"/>
           </a:ln>
         </p:spPr>
+        <p:txBody>
+          <a:bodyPr/>
+          <a:lstStyle/>
+          <a:p>
+            <a:endParaRPr/>
+          </a:p>
+        </p:txBody>
       </p:sp>
       <p:sp>
         <p:nvSpPr>
@@ -5511,6 +5624,13 @@
             <a:prstDash val="solid"/>
           </a:ln>
         </p:spPr>
+        <p:txBody>
+          <a:bodyPr/>
+          <a:lstStyle/>
+          <a:p>
+            <a:endParaRPr/>
+          </a:p>
+        </p:txBody>
       </p:sp>
       <p:sp>
         <p:nvSpPr>
@@ -5577,6 +5697,13 @@
             <a:prstDash val="solid"/>
           </a:ln>
         </p:spPr>
+        <p:txBody>
+          <a:bodyPr/>
+          <a:lstStyle/>
+          <a:p>
+            <a:endParaRPr/>
+          </a:p>
+        </p:txBody>
       </p:sp>
       <p:sp>
         <p:nvSpPr>
@@ -5982,6 +6109,13 @@
             </a:outerShdw>
           </a:effectLst>
         </p:spPr>
+        <p:txBody>
+          <a:bodyPr/>
+          <a:lstStyle/>
+          <a:p>
+            <a:endParaRPr/>
+          </a:p>
+        </p:txBody>
       </p:sp>
       <p:sp>
         <p:nvSpPr>
@@ -6256,7 +6390,7 @@
                 <a:ea typeface="Calibri" pitchFamily="34" charset="-122"/>
                 <a:cs typeface="Calibri" pitchFamily="34" charset="-120"/>
               </a:rPr>
-              <a:t>11 / 23</a:t>
+              <a:t>11 / 24</a:t>
             </a:r>
             <a:endParaRPr lang="en-US" sz="900" dirty="0"/>
           </a:p>
@@ -6281,6 +6415,13 @@
           </a:solidFill>
           <a:ln/>
         </p:spPr>
+        <p:txBody>
+          <a:bodyPr/>
+          <a:lstStyle/>
+          <a:p>
+            <a:endParaRPr/>
+          </a:p>
+        </p:txBody>
       </p:sp>
       <p:sp>
         <p:nvSpPr>
@@ -6763,6 +6904,13 @@
             </a:outerShdw>
           </a:effectLst>
         </p:spPr>
+        <p:txBody>
+          <a:bodyPr/>
+          <a:lstStyle/>
+          <a:p>
+            <a:endParaRPr/>
+          </a:p>
+        </p:txBody>
       </p:sp>
       <p:sp>
         <p:nvSpPr>
@@ -7057,6 +7205,13 @@
           </a:solidFill>
           <a:ln/>
         </p:spPr>
+        <p:txBody>
+          <a:bodyPr/>
+          <a:lstStyle/>
+          <a:p>
+            <a:endParaRPr/>
+          </a:p>
+        </p:txBody>
       </p:sp>
       <p:sp>
         <p:nvSpPr>
@@ -9466,7 +9621,7 @@
                 <a:ea typeface="Calibri" pitchFamily="34" charset="-122"/>
                 <a:cs typeface="Calibri" pitchFamily="34" charset="-120"/>
               </a:rPr>
-              <a:t>12 / 23</a:t>
+              <a:t>12 / 24</a:t>
             </a:r>
             <a:endParaRPr lang="en-US" sz="900" dirty="0"/>
           </a:p>
@@ -9491,6 +9646,13 @@
           </a:solidFill>
           <a:ln/>
         </p:spPr>
+        <p:txBody>
+          <a:bodyPr/>
+          <a:lstStyle/>
+          <a:p>
+            <a:endParaRPr/>
+          </a:p>
+        </p:txBody>
       </p:sp>
       <p:sp>
         <p:nvSpPr>
@@ -9646,6 +9808,13 @@
             </a:outerShdw>
           </a:effectLst>
         </p:spPr>
+        <p:txBody>
+          <a:bodyPr/>
+          <a:lstStyle/>
+          <a:p>
+            <a:endParaRPr/>
+          </a:p>
+        </p:txBody>
       </p:sp>
       <p:sp>
         <p:nvSpPr>
@@ -10104,7 +10273,7 @@
                 <a:ea typeface="Calibri" pitchFamily="34" charset="-122"/>
                 <a:cs typeface="Calibri" pitchFamily="34" charset="-120"/>
               </a:rPr>
-              <a:t>13 / 23</a:t>
+              <a:t>13 / 24</a:t>
             </a:r>
             <a:endParaRPr lang="en-US" sz="900" dirty="0"/>
           </a:p>
@@ -10129,6 +10298,13 @@
           </a:solidFill>
           <a:ln/>
         </p:spPr>
+        <p:txBody>
+          <a:bodyPr/>
+          <a:lstStyle/>
+          <a:p>
+            <a:endParaRPr/>
+          </a:p>
+        </p:txBody>
       </p:sp>
       <p:sp>
         <p:nvSpPr>
@@ -10260,6 +10436,13 @@
             </a:outerShdw>
           </a:effectLst>
         </p:spPr>
+        <p:txBody>
+          <a:bodyPr/>
+          <a:lstStyle/>
+          <a:p>
+            <a:endParaRPr/>
+          </a:p>
+        </p:txBody>
       </p:sp>
       <p:sp>
         <p:nvSpPr>
@@ -10280,6 +10463,13 @@
           </a:solidFill>
           <a:ln/>
         </p:spPr>
+        <p:txBody>
+          <a:bodyPr/>
+          <a:lstStyle/>
+          <a:p>
+            <a:endParaRPr/>
+          </a:p>
+        </p:txBody>
       </p:sp>
       <p:pic>
         <p:nvPicPr>
@@ -10414,6 +10604,13 @@
             </a:outerShdw>
           </a:effectLst>
         </p:spPr>
+        <p:txBody>
+          <a:bodyPr/>
+          <a:lstStyle/>
+          <a:p>
+            <a:endParaRPr/>
+          </a:p>
+        </p:txBody>
       </p:sp>
       <p:sp>
         <p:nvSpPr>
@@ -10434,6 +10631,13 @@
           </a:solidFill>
           <a:ln/>
         </p:spPr>
+        <p:txBody>
+          <a:bodyPr/>
+          <a:lstStyle/>
+          <a:p>
+            <a:endParaRPr/>
+          </a:p>
+        </p:txBody>
       </p:sp>
       <p:pic>
         <p:nvPicPr>
@@ -10568,6 +10772,13 @@
             </a:outerShdw>
           </a:effectLst>
         </p:spPr>
+        <p:txBody>
+          <a:bodyPr/>
+          <a:lstStyle/>
+          <a:p>
+            <a:endParaRPr/>
+          </a:p>
+        </p:txBody>
       </p:sp>
       <p:sp>
         <p:nvSpPr>
@@ -10588,6 +10799,13 @@
           </a:solidFill>
           <a:ln/>
         </p:spPr>
+        <p:txBody>
+          <a:bodyPr/>
+          <a:lstStyle/>
+          <a:p>
+            <a:endParaRPr/>
+          </a:p>
+        </p:txBody>
       </p:sp>
       <p:pic>
         <p:nvPicPr>
@@ -10722,6 +10940,13 @@
             </a:outerShdw>
           </a:effectLst>
         </p:spPr>
+        <p:txBody>
+          <a:bodyPr/>
+          <a:lstStyle/>
+          <a:p>
+            <a:endParaRPr/>
+          </a:p>
+        </p:txBody>
       </p:sp>
       <p:sp>
         <p:nvSpPr>
@@ -10742,6 +10967,13 @@
           </a:solidFill>
           <a:ln/>
         </p:spPr>
+        <p:txBody>
+          <a:bodyPr/>
+          <a:lstStyle/>
+          <a:p>
+            <a:endParaRPr/>
+          </a:p>
+        </p:txBody>
       </p:sp>
       <p:pic>
         <p:nvPicPr>
@@ -10896,6 +11128,307 @@
 </file>
 
 <file path=ppt/slides/slide14.xml><?xml version="1.0" encoding="utf-8"?>
+<p:sld xmlns:a="http://schemas.openxmlformats.org/drawingml/2006/main" xmlns:r="http://schemas.openxmlformats.org/officeDocument/2006/relationships" xmlns:p="http://schemas.openxmlformats.org/presentationml/2006/main">
+  <p:cSld>
+    <p:bg>
+      <p:bgPr>
+        <a:solidFill>
+          <a:srgbClr val="FFFFFF"/>
+        </a:solidFill>
+        <a:effectLst/>
+      </p:bgPr>
+    </p:bg>
+    <p:spTree>
+      <p:nvGrpSpPr>
+        <p:cNvPr id="1" name=""/>
+        <p:cNvGrpSpPr/>
+        <p:nvPr/>
+      </p:nvGrpSpPr>
+      <p:grpSpPr>
+        <a:xfrm>
+          <a:off x="0" y="0"/>
+          <a:ext cx="0" cy="0"/>
+          <a:chOff x="0" y="0"/>
+          <a:chExt cx="0" cy="0"/>
+        </a:xfrm>
+      </p:grpSpPr>
+      <p:sp>
+        <p:nvSpPr>
+          <p:cNvPr id="2" name="TextBox 1"/>
+          <p:cNvSpPr txBox="1"/>
+          <p:nvPr/>
+        </p:nvSpPr>
+        <p:spPr>
+          <a:xfrm>
+            <a:off x="548640" y="6473952"/>
+            <a:ext cx="7315200" cy="274320"/>
+          </a:xfrm>
+          <a:prstGeom prst="rect">
+            <a:avLst/>
+          </a:prstGeom>
+          <a:noFill/>
+        </p:spPr>
+        <p:txBody>
+          <a:bodyPr wrap="square" lIns="0" tIns="0" rIns="0" bIns="0">
+            <a:spAutoFit/>
+          </a:bodyPr>
+          <a:lstStyle/>
+          <a:p>
+            <a:pPr algn="l"/>
+            <a:r>
+              <a:rPr sz="900" b="0" i="0">
+                <a:solidFill>
+                  <a:srgbClr val="7A6F68"/>
+                </a:solidFill>
+                <a:latin typeface="Calibri"/>
+              </a:rPr>
+              <a:t>Detección de Alojamientos Turísticos con Precio Real Inferior — TFG</a:t>
+            </a:r>
+          </a:p>
+        </p:txBody>
+      </p:sp>
+      <p:sp>
+        <p:nvSpPr>
+          <p:cNvPr id="3" name="TextBox 2"/>
+          <p:cNvSpPr txBox="1"/>
+          <p:nvPr/>
+        </p:nvSpPr>
+        <p:spPr>
+          <a:xfrm>
+            <a:off x="10545775" y="6473952"/>
+            <a:ext cx="1097280" cy="274320"/>
+          </a:xfrm>
+          <a:prstGeom prst="rect">
+            <a:avLst/>
+          </a:prstGeom>
+          <a:noFill/>
+        </p:spPr>
+        <p:txBody>
+          <a:bodyPr wrap="square" lIns="0" tIns="0" rIns="0" bIns="0">
+            <a:spAutoFit/>
+          </a:bodyPr>
+          <a:lstStyle/>
+          <a:p>
+            <a:pPr algn="r"/>
+            <a:r>
+              <a:rPr sz="900" b="0" i="0">
+                <a:solidFill>
+                  <a:srgbClr val="7A6F68"/>
+                </a:solidFill>
+                <a:latin typeface="Calibri"/>
+              </a:rPr>
+              <a:t>14 / 24</a:t>
+            </a:r>
+          </a:p>
+        </p:txBody>
+      </p:sp>
+      <p:sp>
+        <p:nvSpPr>
+          <p:cNvPr id="4" name="Oval 3"/>
+          <p:cNvSpPr/>
+          <p:nvPr/>
+        </p:nvSpPr>
+        <p:spPr>
+          <a:xfrm>
+            <a:off x="548640" y="457200"/>
+            <a:ext cx="566928" cy="566928"/>
+          </a:xfrm>
+          <a:prstGeom prst="ellipse">
+            <a:avLst/>
+          </a:prstGeom>
+          <a:solidFill>
+            <a:srgbClr val="B8563A"/>
+          </a:solidFill>
+          <a:ln>
+            <a:noFill/>
+          </a:ln>
+          <a:effectLst/>
+        </p:spPr>
+        <p:style>
+          <a:lnRef idx="1">
+            <a:schemeClr val="accent1"/>
+          </a:lnRef>
+          <a:fillRef idx="3">
+            <a:schemeClr val="accent1"/>
+          </a:fillRef>
+          <a:effectRef idx="2">
+            <a:schemeClr val="accent1"/>
+          </a:effectRef>
+          <a:fontRef idx="minor">
+            <a:schemeClr val="lt1"/>
+          </a:fontRef>
+        </p:style>
+        <p:txBody>
+          <a:bodyPr rtlCol="0" anchor="ctr"/>
+          <a:lstStyle/>
+          <a:p>
+            <a:pPr algn="ctr"/>
+            <a:endParaRPr/>
+          </a:p>
+        </p:txBody>
+      </p:sp>
+      <p:pic>
+        <p:nvPicPr>
+          <p:cNvPr id="5" name="Picture 4" descr="image.png"/>
+          <p:cNvPicPr>
+            <a:picLocks noChangeAspect="1"/>
+          </p:cNvPicPr>
+          <p:nvPr/>
+        </p:nvPicPr>
+        <p:blipFill>
+          <a:blip r:embed="rId2"/>
+          <a:stretch>
+            <a:fillRect/>
+          </a:stretch>
+        </p:blipFill>
+        <p:spPr>
+          <a:xfrm>
+            <a:off x="656356" y="564916"/>
+            <a:ext cx="351495" cy="351495"/>
+          </a:xfrm>
+          <a:prstGeom prst="rect">
+            <a:avLst/>
+          </a:prstGeom>
+        </p:spPr>
+      </p:pic>
+      <p:sp>
+        <p:nvSpPr>
+          <p:cNvPr id="6" name="TextBox 5"/>
+          <p:cNvSpPr txBox="1"/>
+          <p:nvPr/>
+        </p:nvSpPr>
+        <p:spPr>
+          <a:xfrm>
+            <a:off x="1316736" y="420624"/>
+            <a:ext cx="9601200" cy="256032"/>
+          </a:xfrm>
+          <a:prstGeom prst="rect">
+            <a:avLst/>
+          </a:prstGeom>
+          <a:noFill/>
+        </p:spPr>
+        <p:txBody>
+          <a:bodyPr wrap="square" lIns="0" tIns="0" rIns="0" bIns="0">
+            <a:spAutoFit/>
+          </a:bodyPr>
+          <a:lstStyle/>
+          <a:p>
+            <a:pPr algn="l"/>
+            <a:r>
+              <a:rPr sz="1100" b="1" i="0" spc="200">
+                <a:solidFill>
+                  <a:srgbClr val="7A6F68"/>
+                </a:solidFill>
+                <a:latin typeface="Calibri"/>
+              </a:rPr>
+              <a:t>MODELIZACIÓN Y RESULTADOS</a:t>
+            </a:r>
+          </a:p>
+        </p:txBody>
+      </p:sp>
+      <p:sp>
+        <p:nvSpPr>
+          <p:cNvPr id="7" name="TextBox 6"/>
+          <p:cNvSpPr txBox="1"/>
+          <p:nvPr/>
+        </p:nvSpPr>
+        <p:spPr>
+          <a:xfrm>
+            <a:off x="1316736" y="640080"/>
+            <a:ext cx="9966960" cy="640080"/>
+          </a:xfrm>
+          <a:prstGeom prst="rect">
+            <a:avLst/>
+          </a:prstGeom>
+          <a:noFill/>
+        </p:spPr>
+        <p:txBody>
+          <a:bodyPr wrap="square" lIns="0" tIns="0" rIns="0" bIns="0">
+            <a:spAutoFit/>
+          </a:bodyPr>
+          <a:lstStyle/>
+          <a:p>
+            <a:pPr algn="l"/>
+            <a:r>
+              <a:rPr sz="2800" b="1" i="0">
+                <a:solidFill>
+                  <a:srgbClr val="2B2320"/>
+                </a:solidFill>
+                <a:latin typeface="Cambria"/>
+              </a:rPr>
+              <a:t>Árbol de decisión</a:t>
+            </a:r>
+          </a:p>
+        </p:txBody>
+      </p:sp>
+      <p:pic>
+        <p:nvPicPr>
+          <p:cNvPr id="8" name="Picture 7" descr="image.png"/>
+          <p:cNvPicPr>
+            <a:picLocks noChangeAspect="1"/>
+          </p:cNvPicPr>
+          <p:nvPr/>
+        </p:nvPicPr>
+        <p:blipFill>
+          <a:blip r:embed="rId3"/>
+          <a:stretch>
+            <a:fillRect/>
+          </a:stretch>
+        </p:blipFill>
+        <p:spPr>
+          <a:xfrm>
+            <a:off x="1115568" y="1019072"/>
+            <a:ext cx="9815886" cy="4925052"/>
+          </a:xfrm>
+          <a:prstGeom prst="rect">
+            <a:avLst/>
+          </a:prstGeom>
+        </p:spPr>
+      </p:pic>
+      <p:sp>
+        <p:nvSpPr>
+          <p:cNvPr id="9" name="TextBox 8"/>
+          <p:cNvSpPr txBox="1"/>
+          <p:nvPr/>
+        </p:nvSpPr>
+        <p:spPr>
+          <a:xfrm>
+            <a:off x="1280160" y="5944124"/>
+            <a:ext cx="9601200" cy="548640"/>
+          </a:xfrm>
+          <a:prstGeom prst="rect">
+            <a:avLst/>
+          </a:prstGeom>
+          <a:noFill/>
+        </p:spPr>
+        <p:txBody>
+          <a:bodyPr wrap="square" lIns="0" tIns="0" rIns="0" bIns="0">
+            <a:spAutoFit/>
+          </a:bodyPr>
+          <a:lstStyle/>
+          <a:p>
+            <a:pPr algn="ctr"/>
+            <a:r>
+              <a:rPr sz="1150" b="0" i="1">
+                <a:solidFill>
+                  <a:srgbClr val="7A6F68"/>
+                </a:solidFill>
+                <a:latin typeface="Calibri"/>
+              </a:rPr>
+              <a:t>Uno de los cuatro modelos candidatos (Sección 4.3): el árbol de decisión particiona el espacio de características de forma recursiva. La raíz es tamaño_habitacion (≤ 75,5m²); el segundo nivel es provincia.</a:t>
+            </a:r>
+          </a:p>
+        </p:txBody>
+      </p:sp>
+    </p:spTree>
+  </p:cSld>
+  <p:clrMapOvr>
+    <a:masterClrMapping/>
+  </p:clrMapOvr>
+</p:sld>
+</file>
+
+<file path=ppt/slides/slide15.xml><?xml version="1.0" encoding="utf-8"?>
 <p:sld xmlns:a="http://schemas.openxmlformats.org/drawingml/2006/main" xmlns:r="http://schemas.openxmlformats.org/officeDocument/2006/relationships" xmlns:p="http://schemas.openxmlformats.org/presentationml/2006/main">
   <p:cSld name="Slide 14">
     <p:bg>
@@ -10992,7 +11525,7 @@
                 <a:ea typeface="Calibri" pitchFamily="34" charset="-122"/>
                 <a:cs typeface="Calibri" pitchFamily="34" charset="-120"/>
               </a:rPr>
-              <a:t>14 / 23</a:t>
+              <a:t>15 / 24</a:t>
             </a:r>
             <a:endParaRPr lang="en-US" sz="900" dirty="0"/>
           </a:p>
@@ -11017,6 +11550,13 @@
           </a:solidFill>
           <a:ln/>
         </p:spPr>
+        <p:txBody>
+          <a:bodyPr/>
+          <a:lstStyle/>
+          <a:p>
+            <a:endParaRPr/>
+          </a:p>
+        </p:txBody>
       </p:sp>
       <p:sp>
         <p:nvSpPr>
@@ -12590,6 +13130,13 @@
             </a:outerShdw>
           </a:effectLst>
         </p:spPr>
+        <p:txBody>
+          <a:bodyPr/>
+          <a:lstStyle/>
+          <a:p>
+            <a:endParaRPr/>
+          </a:p>
+        </p:txBody>
       </p:sp>
       <p:sp>
         <p:nvSpPr>
@@ -12681,6 +13228,13 @@
             </a:outerShdw>
           </a:effectLst>
         </p:spPr>
+        <p:txBody>
+          <a:bodyPr/>
+          <a:lstStyle/>
+          <a:p>
+            <a:endParaRPr/>
+          </a:p>
+        </p:txBody>
       </p:sp>
       <p:sp>
         <p:nvSpPr>
@@ -12788,6 +13342,13 @@
             </a:outerShdw>
           </a:effectLst>
         </p:spPr>
+        <p:txBody>
+          <a:bodyPr/>
+          <a:lstStyle/>
+          <a:p>
+            <a:endParaRPr/>
+          </a:p>
+        </p:txBody>
       </p:sp>
       <p:sp>
         <p:nvSpPr>
@@ -12917,7 +13478,7 @@
 </p:sld>
 </file>
 
-<file path=ppt/slides/slide15.xml><?xml version="1.0" encoding="utf-8"?>
+<file path=ppt/slides/slide16.xml><?xml version="1.0" encoding="utf-8"?>
 <p:sld xmlns:a="http://schemas.openxmlformats.org/drawingml/2006/main" xmlns:r="http://schemas.openxmlformats.org/officeDocument/2006/relationships" xmlns:p="http://schemas.openxmlformats.org/presentationml/2006/main">
   <p:cSld name="Slide 15">
     <p:bg>
@@ -13014,7 +13575,7 @@
                 <a:ea typeface="Calibri" pitchFamily="34" charset="-122"/>
                 <a:cs typeface="Calibri" pitchFamily="34" charset="-120"/>
               </a:rPr>
-              <a:t>15 / 23</a:t>
+              <a:t>16 / 24</a:t>
             </a:r>
             <a:endParaRPr lang="en-US" sz="900" dirty="0"/>
           </a:p>
@@ -13039,6 +13600,13 @@
           </a:solidFill>
           <a:ln/>
         </p:spPr>
+        <p:txBody>
+          <a:bodyPr/>
+          <a:lstStyle/>
+          <a:p>
+            <a:endParaRPr/>
+          </a:p>
+        </p:txBody>
       </p:sp>
       <p:sp>
         <p:nvSpPr>
@@ -13112,39 +13680,70 @@
                 <a:ea typeface="Cambria" pitchFamily="34" charset="-122"/>
                 <a:cs typeface="Cambria" pitchFamily="34" charset="-120"/>
               </a:rPr>
-              <a:t>Interpretabilidad del modelo</a:t>
+              <a:t>Interpretabilidad del bosque aleatorio</a:t>
             </a:r>
             <a:endParaRPr lang="en-US" sz="2800" dirty="0"/>
           </a:p>
         </p:txBody>
       </p:sp>
+      <p:sp>
+        <p:nvSpPr>
+          <p:cNvPr id="10" name="Text 6"/>
+          <p:cNvSpPr/>
+          <p:nvPr/>
+        </p:nvSpPr>
+        <p:spPr>
+          <a:xfrm>
+            <a:off x="548640" y="1508760"/>
+            <a:ext cx="11094720" cy="320040"/>
+          </a:xfrm>
+          <a:prstGeom prst="rect">
+            <a:avLst/>
+          </a:prstGeom>
+          <a:noFill/>
+          <a:ln/>
+        </p:spPr>
+        <p:txBody>
+          <a:bodyPr wrap="square" lIns="0" tIns="0" rIns="0" bIns="0" rtlCol="0" anchor="ctr"/>
+          <a:lstStyle/>
+          <a:p>
+            <a:pPr marL="0" indent="0">
+              <a:buNone/>
+            </a:pPr>
+            <a:r>
+              <a:rPr lang="en-US" sz="1300" b="1" dirty="0">
+                <a:solidFill>
+                  <a:srgbClr val="8C4029"/>
+                </a:solidFill>
+                <a:latin typeface="Calibri" pitchFamily="34" charset="0"/>
+                <a:ea typeface="Calibri" pitchFamily="34" charset="-122"/>
+                <a:cs typeface="Calibri" pitchFamily="34" charset="-120"/>
+              </a:rPr>
+              <a:t>Importancia de variables (bosque aleatorio)</a:t>
+            </a:r>
+            <a:endParaRPr lang="en-US" sz="1300" dirty="0"/>
+          </a:p>
+        </p:txBody>
+      </p:sp>
+      <p:graphicFrame>
+        <p:nvGraphicFramePr>
+          <p:cNvPr id="11" name="Chart 0"/>
+          <p:cNvGraphicFramePr/>
+          <p:nvPr/>
+        </p:nvGraphicFramePr>
+        <p:xfrm>
+          <a:off x="548640" y="1874519"/>
+          <a:ext cx="11094720" cy="4160520"/>
+        </p:xfrm>
+        <a:graphic>
+          <a:graphicData uri="http://schemas.openxmlformats.org/drawingml/2006/chart">
+            <c:chart xmlns:c="http://schemas.openxmlformats.org/drawingml/2006/chart" xmlns:r="http://schemas.openxmlformats.org/officeDocument/2006/relationships" r:id="rId3"/>
+          </a:graphicData>
+        </a:graphic>
+      </p:graphicFrame>
       <p:pic>
         <p:nvPicPr>
-          <p:cNvPr id="7" name="Image 0" descr="preencoded.png"/>
-          <p:cNvPicPr>
-            <a:picLocks noChangeAspect="1"/>
-          </p:cNvPicPr>
-          <p:nvPr/>
-        </p:nvPicPr>
-        <p:blipFill>
-          <a:blip r:embed="rId3"/>
-          <a:stretch>
-            <a:fillRect/>
-          </a:stretch>
-        </p:blipFill>
-        <p:spPr>
-          <a:xfrm>
-            <a:off x="656356" y="564916"/>
-            <a:ext cx="351495" cy="351495"/>
-          </a:xfrm>
-          <a:prstGeom prst="rect">
-            <a:avLst/>
-          </a:prstGeom>
-        </p:spPr>
-      </p:pic>
-      <p:pic>
-        <p:nvPicPr>
-          <p:cNvPr id="8" name="Image 1" descr="C:/Users/usuario/OneDrive/UNI_Mario5/TFG/TFG_Chollos/images/arbol_decision.png"/>
+          <p:cNvPr id="12" name="Picture 11" descr="image.png"/>
           <p:cNvPicPr>
             <a:picLocks noChangeAspect="1"/>
           </p:cNvPicPr>
@@ -13158,111 +13757,14 @@
         </p:blipFill>
         <p:spPr>
           <a:xfrm>
-            <a:off x="548640" y="1508760"/>
-            <a:ext cx="6172200" cy="3105757"/>
+            <a:off x="656356" y="564916"/>
+            <a:ext cx="351495" cy="351495"/>
           </a:xfrm>
           <a:prstGeom prst="rect">
             <a:avLst/>
           </a:prstGeom>
         </p:spPr>
       </p:pic>
-      <p:sp>
-        <p:nvSpPr>
-          <p:cNvPr id="9" name="Text 5"/>
-          <p:cNvSpPr/>
-          <p:nvPr/>
-        </p:nvSpPr>
-        <p:spPr>
-          <a:xfrm>
-            <a:off x="548640" y="4687669"/>
-            <a:ext cx="6172200" cy="640080"/>
-          </a:xfrm>
-          <a:prstGeom prst="rect">
-            <a:avLst/>
-          </a:prstGeom>
-          <a:noFill/>
-          <a:ln/>
-        </p:spPr>
-        <p:txBody>
-          <a:bodyPr wrap="square" lIns="0" tIns="0" rIns="0" bIns="0" rtlCol="0" anchor="t"/>
-          <a:lstStyle/>
-          <a:p>
-            <a:pPr marL="0" indent="0">
-              <a:lnSpc>
-                <a:spcPct val="115000"/>
-              </a:lnSpc>
-              <a:buNone/>
-            </a:pPr>
-            <a:r>
-              <a:rPr lang="en-US" sz="1100" i="1" dirty="0">
-                <a:solidFill>
-                  <a:srgbClr val="7A6F68"/>
-                </a:solidFill>
-                <a:latin typeface="Calibri" pitchFamily="34" charset="0"/>
-                <a:ea typeface="Calibri" pitchFamily="34" charset="-122"/>
-                <a:cs typeface="Calibri" pitchFamily="34" charset="-120"/>
-              </a:rPr>
-              <a:t>Árbol de decisión — primeros 4 niveles. La raíz es tamaño_habitacion (≤ 75,5m²); el segundo nivel, provincia.</a:t>
-            </a:r>
-            <a:endParaRPr lang="en-US" sz="1100" dirty="0"/>
-          </a:p>
-        </p:txBody>
-      </p:sp>
-      <p:sp>
-        <p:nvSpPr>
-          <p:cNvPr id="10" name="Text 6"/>
-          <p:cNvSpPr/>
-          <p:nvPr/>
-        </p:nvSpPr>
-        <p:spPr>
-          <a:xfrm>
-            <a:off x="7086600" y="1508760"/>
-            <a:ext cx="4556455" cy="320040"/>
-          </a:xfrm>
-          <a:prstGeom prst="rect">
-            <a:avLst/>
-          </a:prstGeom>
-          <a:noFill/>
-          <a:ln/>
-        </p:spPr>
-        <p:txBody>
-          <a:bodyPr wrap="square" lIns="0" tIns="0" rIns="0" bIns="0" rtlCol="0" anchor="ctr"/>
-          <a:lstStyle/>
-          <a:p>
-            <a:pPr marL="0" indent="0">
-              <a:buNone/>
-            </a:pPr>
-            <a:r>
-              <a:rPr lang="en-US" sz="1300" b="1" dirty="0">
-                <a:solidFill>
-                  <a:srgbClr val="8C4029"/>
-                </a:solidFill>
-                <a:latin typeface="Calibri" pitchFamily="34" charset="0"/>
-                <a:ea typeface="Calibri" pitchFamily="34" charset="-122"/>
-                <a:cs typeface="Calibri" pitchFamily="34" charset="-120"/>
-              </a:rPr>
-              <a:t>Importancia de variables (bosque aleatorio)</a:t>
-            </a:r>
-            <a:endParaRPr lang="en-US" sz="1300" dirty="0"/>
-          </a:p>
-        </p:txBody>
-      </p:sp>
-      <p:graphicFrame>
-        <p:nvGraphicFramePr>
-          <p:cNvPr id="11" name="Chart 0"/>
-          <p:cNvGraphicFramePr/>
-          <p:nvPr/>
-        </p:nvGraphicFramePr>
-        <p:xfrm>
-          <a:off x="7086600" y="1874520"/>
-          <a:ext cx="4556455" cy="4160520"/>
-        </p:xfrm>
-        <a:graphic>
-          <a:graphicData uri="http://schemas.openxmlformats.org/drawingml/2006/chart">
-            <c:chart xmlns:c="http://schemas.openxmlformats.org/drawingml/2006/chart" xmlns:r="http://schemas.openxmlformats.org/officeDocument/2006/relationships" r:id="rId5"/>
-          </a:graphicData>
-        </a:graphic>
-      </p:graphicFrame>
     </p:spTree>
   </p:cSld>
   <p:clrMapOvr>
@@ -13271,7 +13773,7 @@
 </p:sld>
 </file>
 
-<file path=ppt/slides/slide16.xml><?xml version="1.0" encoding="utf-8"?>
+<file path=ppt/slides/slide17.xml><?xml version="1.0" encoding="utf-8"?>
 <p:sld xmlns:a="http://schemas.openxmlformats.org/drawingml/2006/main" xmlns:r="http://schemas.openxmlformats.org/officeDocument/2006/relationships" xmlns:p="http://schemas.openxmlformats.org/presentationml/2006/main">
   <p:cSld name="Slide 16">
     <p:bg>
@@ -13368,7 +13870,7 @@
                 <a:ea typeface="Calibri" pitchFamily="34" charset="-122"/>
                 <a:cs typeface="Calibri" pitchFamily="34" charset="-120"/>
               </a:rPr>
-              <a:t>16 / 23</a:t>
+              <a:t>17 / 24</a:t>
             </a:r>
             <a:endParaRPr lang="en-US" sz="900" dirty="0"/>
           </a:p>
@@ -13393,6 +13895,13 @@
           </a:solidFill>
           <a:ln/>
         </p:spPr>
+        <p:txBody>
+          <a:bodyPr/>
+          <a:lstStyle/>
+          <a:p>
+            <a:endParaRPr/>
+          </a:p>
+        </p:txBody>
       </p:sp>
       <p:sp>
         <p:nvSpPr>
@@ -13524,6 +14033,13 @@
             </a:outerShdw>
           </a:effectLst>
         </p:spPr>
+        <p:txBody>
+          <a:bodyPr/>
+          <a:lstStyle/>
+          <a:p>
+            <a:endParaRPr/>
+          </a:p>
+        </p:txBody>
       </p:sp>
       <p:sp>
         <p:nvSpPr>
@@ -13584,14 +14100,14 @@
           <p:nvPr>
             <p:extLst>
               <p:ext uri="{D42A27DB-BD31-4B8C-83A1-F6EECF244321}">
-                <p14:modId xmlns:p14="http://schemas.microsoft.com/office/powerpoint/2010/main" val="830664776"/>
+                <p14:modId xmlns:p14="http://schemas.microsoft.com/office/powerpoint/2010/main" val="338123150"/>
               </p:ext>
             </p:extLst>
           </p:nvPr>
         </p:nvGraphicFramePr>
         <p:xfrm>
-          <a:off x="548640" y="2423160"/>
-          <a:ext cx="11091672" cy="1676400"/>
+          <a:off x="548640" y="2423159"/>
+          <a:ext cx="11091672" cy="2240283"/>
         </p:xfrm>
         <a:graphic>
           <a:graphicData uri="http://schemas.openxmlformats.org/drawingml/2006/table">
@@ -13627,7 +14143,7 @@
                   </a:extLst>
                 </a:gridCol>
               </a:tblGrid>
-              <a:tr h="0">
+              <a:tr h="356408">
                 <a:tc>
                   <a:txBody>
                     <a:bodyPr/>
@@ -13906,7 +14422,7 @@
                   </a:ext>
                 </a:extLst>
               </a:tr>
-              <a:tr h="0">
+              <a:tr h="376775">
                 <a:tc>
                   <a:txBody>
                     <a:bodyPr/>
@@ -14202,7 +14718,7 @@
                   </a:ext>
                 </a:extLst>
               </a:tr>
-              <a:tr h="0">
+              <a:tr h="376775">
                 <a:tc>
                   <a:txBody>
                     <a:bodyPr/>
@@ -14489,7 +15005,7 @@
                   </a:ext>
                 </a:extLst>
               </a:tr>
-              <a:tr h="0">
+              <a:tr h="376775">
                 <a:tc>
                   <a:txBody>
                     <a:bodyPr/>
@@ -14789,7 +15305,7 @@
                   </a:ext>
                 </a:extLst>
               </a:tr>
-              <a:tr h="0">
+              <a:tr h="376775">
                 <a:tc>
                   <a:txBody>
                     <a:bodyPr/>
@@ -15068,7 +15584,7 @@
                   </a:ext>
                 </a:extLst>
               </a:tr>
-              <a:tr h="0">
+              <a:tr h="376775">
                 <a:tc>
                   <a:txBody>
                     <a:bodyPr/>
@@ -15368,7 +15884,7 @@
         </p:nvSpPr>
         <p:spPr>
           <a:xfrm>
-            <a:off x="548640" y="5532120"/>
+            <a:off x="548640" y="5068365"/>
             <a:ext cx="11091672" cy="1005840"/>
           </a:xfrm>
           <a:prstGeom prst="rect">
@@ -15421,7 +15937,7 @@
 </p:sld>
 </file>
 
-<file path=ppt/slides/slide17.xml><?xml version="1.0" encoding="utf-8"?>
+<file path=ppt/slides/slide18.xml><?xml version="1.0" encoding="utf-8"?>
 <p:sld xmlns:a="http://schemas.openxmlformats.org/drawingml/2006/main" xmlns:r="http://schemas.openxmlformats.org/officeDocument/2006/relationships" xmlns:p="http://schemas.openxmlformats.org/presentationml/2006/main">
   <p:cSld name="Slide 17">
     <p:bg>
@@ -15518,7 +16034,7 @@
                 <a:ea typeface="Calibri" pitchFamily="34" charset="-122"/>
                 <a:cs typeface="Calibri" pitchFamily="34" charset="-120"/>
               </a:rPr>
-              <a:t>17 / 23</a:t>
+              <a:t>18 / 24</a:t>
             </a:r>
             <a:endParaRPr lang="en-US" sz="900" dirty="0"/>
           </a:p>
@@ -15543,6 +16059,13 @@
           </a:solidFill>
           <a:ln/>
         </p:spPr>
+        <p:txBody>
+          <a:bodyPr/>
+          <a:lstStyle/>
+          <a:p>
+            <a:endParaRPr/>
+          </a:p>
+        </p:txBody>
       </p:sp>
       <p:sp>
         <p:nvSpPr>
@@ -15696,6 +16219,13 @@
             </a:outerShdw>
           </a:effectLst>
         </p:spPr>
+        <p:txBody>
+          <a:bodyPr/>
+          <a:lstStyle/>
+          <a:p>
+            <a:endParaRPr/>
+          </a:p>
+        </p:txBody>
       </p:sp>
       <p:sp>
         <p:nvSpPr>
@@ -17169,7 +17699,7 @@
 </p:sld>
 </file>
 
-<file path=ppt/slides/slide18.xml><?xml version="1.0" encoding="utf-8"?>
+<file path=ppt/slides/slide19.xml><?xml version="1.0" encoding="utf-8"?>
 <p:sld xmlns:a="http://schemas.openxmlformats.org/drawingml/2006/main" xmlns:r="http://schemas.openxmlformats.org/officeDocument/2006/relationships" xmlns:p="http://schemas.openxmlformats.org/presentationml/2006/main">
   <p:cSld name="Slide 18">
     <p:bg>
@@ -17266,7 +17796,7 @@
                 <a:ea typeface="Calibri" pitchFamily="34" charset="-122"/>
                 <a:cs typeface="Calibri" pitchFamily="34" charset="-120"/>
               </a:rPr>
-              <a:t>18 / 23</a:t>
+              <a:t>19 / 24</a:t>
             </a:r>
             <a:endParaRPr lang="en-US" sz="900" dirty="0"/>
           </a:p>
@@ -17291,6 +17821,13 @@
           </a:solidFill>
           <a:ln/>
         </p:spPr>
+        <p:txBody>
+          <a:bodyPr/>
+          <a:lstStyle/>
+          <a:p>
+            <a:endParaRPr/>
+          </a:p>
+        </p:txBody>
       </p:sp>
       <p:sp>
         <p:nvSpPr>
@@ -17422,6 +17959,13 @@
             </a:outerShdw>
           </a:effectLst>
         </p:spPr>
+        <p:txBody>
+          <a:bodyPr/>
+          <a:lstStyle/>
+          <a:p>
+            <a:endParaRPr/>
+          </a:p>
+        </p:txBody>
       </p:sp>
       <p:sp>
         <p:nvSpPr>
@@ -17442,6 +17986,13 @@
           </a:solidFill>
           <a:ln/>
         </p:spPr>
+        <p:txBody>
+          <a:bodyPr/>
+          <a:lstStyle/>
+          <a:p>
+            <a:endParaRPr/>
+          </a:p>
+        </p:txBody>
       </p:sp>
       <p:pic>
         <p:nvPicPr>
@@ -17931,6 +18482,13 @@
             </a:outerShdw>
           </a:effectLst>
         </p:spPr>
+        <p:txBody>
+          <a:bodyPr/>
+          <a:lstStyle/>
+          <a:p>
+            <a:endParaRPr/>
+          </a:p>
+        </p:txBody>
       </p:sp>
       <p:sp>
         <p:nvSpPr>
@@ -17951,6 +18509,13 @@
           </a:solidFill>
           <a:ln/>
         </p:spPr>
+        <p:txBody>
+          <a:bodyPr/>
+          <a:lstStyle/>
+          <a:p>
+            <a:endParaRPr/>
+          </a:p>
+        </p:txBody>
       </p:sp>
       <p:pic>
         <p:nvPicPr>
@@ -18103,1205 +18668,6 @@
               <a:t>Resultados en tabla interactiva, ordenados por grado de ahorro, con gráfico de tarta.</a:t>
             </a:r>
             <a:endParaRPr lang="en-US" sz="1250" dirty="0"/>
-          </a:p>
-        </p:txBody>
-      </p:sp>
-    </p:spTree>
-  </p:cSld>
-  <p:clrMapOvr>
-    <a:masterClrMapping/>
-  </p:clrMapOvr>
-</p:sld>
-</file>
-
-<file path=ppt/slides/slide19.xml><?xml version="1.0" encoding="utf-8"?>
-<p:sld xmlns:a="http://schemas.openxmlformats.org/drawingml/2006/main" xmlns:r="http://schemas.openxmlformats.org/officeDocument/2006/relationships" xmlns:p="http://schemas.openxmlformats.org/presentationml/2006/main">
-  <p:cSld name="Slide 19">
-    <p:bg>
-      <p:bgPr>
-        <a:solidFill>
-          <a:srgbClr val="FFFFFF"/>
-        </a:solidFill>
-        <a:effectLst/>
-      </p:bgPr>
-    </p:bg>
-    <p:spTree>
-      <p:nvGrpSpPr>
-        <p:cNvPr id="1" name=""/>
-        <p:cNvGrpSpPr/>
-        <p:nvPr/>
-      </p:nvGrpSpPr>
-      <p:grpSpPr>
-        <a:xfrm>
-          <a:off x="0" y="0"/>
-          <a:ext cx="0" cy="0"/>
-          <a:chOff x="0" y="0"/>
-          <a:chExt cx="0" cy="0"/>
-        </a:xfrm>
-      </p:grpSpPr>
-      <p:sp>
-        <p:nvSpPr>
-          <p:cNvPr id="2" name="Text 0"/>
-          <p:cNvSpPr/>
-          <p:nvPr/>
-        </p:nvSpPr>
-        <p:spPr>
-          <a:xfrm>
-            <a:off x="548640" y="6473952"/>
-            <a:ext cx="7315200" cy="274320"/>
-          </a:xfrm>
-          <a:prstGeom prst="rect">
-            <a:avLst/>
-          </a:prstGeom>
-          <a:noFill/>
-          <a:ln/>
-        </p:spPr>
-        <p:txBody>
-          <a:bodyPr wrap="square" lIns="0" tIns="0" rIns="0" bIns="0" rtlCol="0" anchor="ctr"/>
-          <a:lstStyle/>
-          <a:p>
-            <a:pPr marL="0" indent="0" algn="l">
-              <a:buNone/>
-            </a:pPr>
-            <a:r>
-              <a:rPr lang="en-US" sz="900" dirty="0">
-                <a:solidFill>
-                  <a:srgbClr val="7A6F68"/>
-                </a:solidFill>
-                <a:latin typeface="Calibri" pitchFamily="34" charset="0"/>
-                <a:ea typeface="Calibri" pitchFamily="34" charset="-122"/>
-                <a:cs typeface="Calibri" pitchFamily="34" charset="-120"/>
-              </a:rPr>
-              <a:t>Detección de Alojamientos Turísticos con Precio Real Inferior — TFG</a:t>
-            </a:r>
-            <a:endParaRPr lang="en-US" sz="900" dirty="0"/>
-          </a:p>
-        </p:txBody>
-      </p:sp>
-      <p:sp>
-        <p:nvSpPr>
-          <p:cNvPr id="3" name="Text 1"/>
-          <p:cNvSpPr/>
-          <p:nvPr/>
-        </p:nvSpPr>
-        <p:spPr>
-          <a:xfrm>
-            <a:off x="10545775" y="6473952"/>
-            <a:ext cx="1097280" cy="274320"/>
-          </a:xfrm>
-          <a:prstGeom prst="rect">
-            <a:avLst/>
-          </a:prstGeom>
-          <a:noFill/>
-          <a:ln/>
-        </p:spPr>
-        <p:txBody>
-          <a:bodyPr wrap="square" lIns="0" tIns="0" rIns="0" bIns="0" rtlCol="0" anchor="ctr"/>
-          <a:lstStyle/>
-          <a:p>
-            <a:pPr marL="0" indent="0" algn="r">
-              <a:buNone/>
-            </a:pPr>
-            <a:r>
-              <a:rPr lang="en-US" sz="900" dirty="0">
-                <a:solidFill>
-                  <a:srgbClr val="7A6F68"/>
-                </a:solidFill>
-                <a:latin typeface="Calibri" pitchFamily="34" charset="0"/>
-                <a:ea typeface="Calibri" pitchFamily="34" charset="-122"/>
-                <a:cs typeface="Calibri" pitchFamily="34" charset="-120"/>
-              </a:rPr>
-              <a:t>19 / 23</a:t>
-            </a:r>
-            <a:endParaRPr lang="en-US" sz="900" dirty="0"/>
-          </a:p>
-        </p:txBody>
-      </p:sp>
-      <p:sp>
-        <p:nvSpPr>
-          <p:cNvPr id="4" name="Shape 2"/>
-          <p:cNvSpPr/>
-          <p:nvPr/>
-        </p:nvSpPr>
-        <p:spPr>
-          <a:xfrm>
-            <a:off x="548640" y="457200"/>
-            <a:ext cx="566928" cy="566928"/>
-          </a:xfrm>
-          <a:prstGeom prst="ellipse">
-            <a:avLst/>
-          </a:prstGeom>
-          <a:solidFill>
-            <a:srgbClr val="B8563A"/>
-          </a:solidFill>
-          <a:ln/>
-        </p:spPr>
-      </p:sp>
-      <p:sp>
-        <p:nvSpPr>
-          <p:cNvPr id="5" name="Text 3"/>
-          <p:cNvSpPr/>
-          <p:nvPr/>
-        </p:nvSpPr>
-        <p:spPr>
-          <a:xfrm>
-            <a:off x="1316736" y="420624"/>
-            <a:ext cx="9601200" cy="256032"/>
-          </a:xfrm>
-          <a:prstGeom prst="rect">
-            <a:avLst/>
-          </a:prstGeom>
-          <a:noFill/>
-          <a:ln/>
-        </p:spPr>
-        <p:txBody>
-          <a:bodyPr wrap="square" lIns="0" tIns="0" rIns="0" bIns="0" rtlCol="0" anchor="ctr"/>
-          <a:lstStyle/>
-          <a:p>
-            <a:pPr marL="0" indent="0">
-              <a:buNone/>
-            </a:pPr>
-            <a:r>
-              <a:rPr lang="en-US" sz="1100" b="1" kern="0" spc="200" dirty="0">
-                <a:solidFill>
-                  <a:srgbClr val="7A6F68"/>
-                </a:solidFill>
-                <a:latin typeface="Calibri" pitchFamily="34" charset="0"/>
-                <a:ea typeface="Calibri" pitchFamily="34" charset="-122"/>
-                <a:cs typeface="Calibri" pitchFamily="34" charset="-120"/>
-              </a:rPr>
-              <a:t>APLICACIÓN WEB</a:t>
-            </a:r>
-            <a:endParaRPr lang="en-US" sz="1100" dirty="0"/>
-          </a:p>
-        </p:txBody>
-      </p:sp>
-      <p:sp>
-        <p:nvSpPr>
-          <p:cNvPr id="6" name="Text 4"/>
-          <p:cNvSpPr/>
-          <p:nvPr/>
-        </p:nvSpPr>
-        <p:spPr>
-          <a:xfrm>
-            <a:off x="1316736" y="640080"/>
-            <a:ext cx="9966960" cy="640080"/>
-          </a:xfrm>
-          <a:prstGeom prst="rect">
-            <a:avLst/>
-          </a:prstGeom>
-          <a:noFill/>
-          <a:ln/>
-        </p:spPr>
-        <p:txBody>
-          <a:bodyPr wrap="square" lIns="0" tIns="0" rIns="0" bIns="0" rtlCol="0" anchor="t"/>
-          <a:lstStyle/>
-          <a:p>
-            <a:pPr marL="0" indent="0">
-              <a:buNone/>
-            </a:pPr>
-            <a:r>
-              <a:rPr lang="en-US" sz="2800" b="1" dirty="0">
-                <a:solidFill>
-                  <a:srgbClr val="2B2320"/>
-                </a:solidFill>
-                <a:latin typeface="Cambria" pitchFamily="34" charset="0"/>
-                <a:ea typeface="Cambria" pitchFamily="34" charset="-122"/>
-                <a:cs typeface="Cambria" pitchFamily="34" charset="-120"/>
-              </a:rPr>
-              <a:t>Flujo de trabajo de la búsqueda</a:t>
-            </a:r>
-            <a:endParaRPr lang="en-US" sz="2800" dirty="0"/>
-          </a:p>
-        </p:txBody>
-      </p:sp>
-      <p:pic>
-        <p:nvPicPr>
-          <p:cNvPr id="7" name="Image 0" descr="preencoded.png"/>
-          <p:cNvPicPr>
-            <a:picLocks noChangeAspect="1"/>
-          </p:cNvPicPr>
-          <p:nvPr/>
-        </p:nvPicPr>
-        <p:blipFill>
-          <a:blip r:embed="rId3"/>
-          <a:stretch>
-            <a:fillRect/>
-          </a:stretch>
-        </p:blipFill>
-        <p:spPr>
-          <a:xfrm>
-            <a:off x="656356" y="564916"/>
-            <a:ext cx="351495" cy="351495"/>
-          </a:xfrm>
-          <a:prstGeom prst="rect">
-            <a:avLst/>
-          </a:prstGeom>
-        </p:spPr>
-      </p:pic>
-      <p:sp>
-        <p:nvSpPr>
-          <p:cNvPr id="8" name="Shape 5"/>
-          <p:cNvSpPr/>
-          <p:nvPr/>
-        </p:nvSpPr>
-        <p:spPr>
-          <a:xfrm>
-            <a:off x="548640" y="1481328"/>
-            <a:ext cx="457200" cy="457200"/>
-          </a:xfrm>
-          <a:prstGeom prst="ellipse">
-            <a:avLst/>
-          </a:prstGeom>
-          <a:solidFill>
-            <a:srgbClr val="3B6E77"/>
-          </a:solidFill>
-          <a:ln/>
-        </p:spPr>
-      </p:sp>
-      <p:sp>
-        <p:nvSpPr>
-          <p:cNvPr id="9" name="Text 6"/>
-          <p:cNvSpPr/>
-          <p:nvPr/>
-        </p:nvSpPr>
-        <p:spPr>
-          <a:xfrm>
-            <a:off x="548640" y="1481328"/>
-            <a:ext cx="457200" cy="457200"/>
-          </a:xfrm>
-          <a:prstGeom prst="rect">
-            <a:avLst/>
-          </a:prstGeom>
-          <a:noFill/>
-          <a:ln/>
-        </p:spPr>
-        <p:txBody>
-          <a:bodyPr wrap="square" lIns="0" tIns="0" rIns="0" bIns="0" rtlCol="0" anchor="ctr"/>
-          <a:lstStyle/>
-          <a:p>
-            <a:pPr marL="0" indent="0" algn="ctr">
-              <a:buNone/>
-            </a:pPr>
-            <a:r>
-              <a:rPr lang="en-US" sz="1400" b="1" dirty="0">
-                <a:solidFill>
-                  <a:srgbClr val="FFFFFF"/>
-                </a:solidFill>
-                <a:latin typeface="Cambria" pitchFamily="34" charset="0"/>
-                <a:ea typeface="Cambria" pitchFamily="34" charset="-122"/>
-                <a:cs typeface="Cambria" pitchFamily="34" charset="-120"/>
-              </a:rPr>
-              <a:t>1</a:t>
-            </a:r>
-            <a:endParaRPr lang="en-US" sz="1400" dirty="0"/>
-          </a:p>
-        </p:txBody>
-      </p:sp>
-      <p:pic>
-        <p:nvPicPr>
-          <p:cNvPr id="10" name="Image 1" descr="preencoded.png"/>
-          <p:cNvPicPr>
-            <a:picLocks noChangeAspect="1"/>
-          </p:cNvPicPr>
-          <p:nvPr/>
-        </p:nvPicPr>
-        <p:blipFill>
-          <a:blip r:embed="rId4"/>
-          <a:stretch>
-            <a:fillRect/>
-          </a:stretch>
-        </p:blipFill>
-        <p:spPr>
-          <a:xfrm>
-            <a:off x="1143000" y="1554480"/>
-            <a:ext cx="310896" cy="310896"/>
-          </a:xfrm>
-          <a:prstGeom prst="rect">
-            <a:avLst/>
-          </a:prstGeom>
-        </p:spPr>
-      </p:pic>
-      <p:sp>
-        <p:nvSpPr>
-          <p:cNvPr id="11" name="Text 7"/>
-          <p:cNvSpPr/>
-          <p:nvPr/>
-        </p:nvSpPr>
-        <p:spPr>
-          <a:xfrm>
-            <a:off x="1600200" y="1444752"/>
-            <a:ext cx="4206240" cy="320040"/>
-          </a:xfrm>
-          <a:prstGeom prst="rect">
-            <a:avLst/>
-          </a:prstGeom>
-          <a:noFill/>
-          <a:ln/>
-        </p:spPr>
-        <p:txBody>
-          <a:bodyPr wrap="square" lIns="0" tIns="0" rIns="0" bIns="0" rtlCol="0" anchor="ctr"/>
-          <a:lstStyle/>
-          <a:p>
-            <a:pPr marL="0" indent="0">
-              <a:buNone/>
-            </a:pPr>
-            <a:r>
-              <a:rPr lang="en-US" sz="1350" b="1" dirty="0">
-                <a:solidFill>
-                  <a:srgbClr val="2B2320"/>
-                </a:solidFill>
-                <a:latin typeface="Calibri" pitchFamily="34" charset="0"/>
-                <a:ea typeface="Calibri" pitchFamily="34" charset="-122"/>
-                <a:cs typeface="Calibri" pitchFamily="34" charset="-120"/>
-              </a:rPr>
-              <a:t>Formulario de preferencias</a:t>
-            </a:r>
-            <a:endParaRPr lang="en-US" sz="1350" dirty="0"/>
-          </a:p>
-        </p:txBody>
-      </p:sp>
-      <p:sp>
-        <p:nvSpPr>
-          <p:cNvPr id="12" name="Text 8"/>
-          <p:cNvSpPr/>
-          <p:nvPr/>
-        </p:nvSpPr>
-        <p:spPr>
-          <a:xfrm>
-            <a:off x="6035040" y="1463040"/>
-            <a:ext cx="5669280" cy="502920"/>
-          </a:xfrm>
-          <a:prstGeom prst="rect">
-            <a:avLst/>
-          </a:prstGeom>
-          <a:noFill/>
-          <a:ln/>
-        </p:spPr>
-        <p:txBody>
-          <a:bodyPr wrap="square" lIns="0" tIns="0" rIns="0" bIns="0" rtlCol="0" anchor="ctr"/>
-          <a:lstStyle/>
-          <a:p>
-            <a:pPr marL="0" indent="0">
-              <a:buNone/>
-            </a:pPr>
-            <a:r>
-              <a:rPr lang="en-US" sz="1200" dirty="0">
-                <a:solidFill>
-                  <a:srgbClr val="7A6F68"/>
-                </a:solidFill>
-                <a:latin typeface="Calibri" pitchFamily="34" charset="0"/>
-                <a:ea typeface="Calibri" pitchFamily="34" charset="-122"/>
-                <a:cs typeface="Calibri" pitchFamily="34" charset="-120"/>
-              </a:rPr>
-              <a:t>Destino, fechas, tipo, servicios y nivel de exigencia</a:t>
-            </a:r>
-            <a:endParaRPr lang="en-US" sz="1200" dirty="0"/>
-          </a:p>
-        </p:txBody>
-      </p:sp>
-      <p:sp>
-        <p:nvSpPr>
-          <p:cNvPr id="13" name="Shape 9"/>
-          <p:cNvSpPr/>
-          <p:nvPr/>
-        </p:nvSpPr>
-        <p:spPr>
-          <a:xfrm>
-            <a:off x="548640" y="2258568"/>
-            <a:ext cx="457200" cy="457200"/>
-          </a:xfrm>
-          <a:prstGeom prst="ellipse">
-            <a:avLst/>
-          </a:prstGeom>
-          <a:solidFill>
-            <a:srgbClr val="3B6E77"/>
-          </a:solidFill>
-          <a:ln/>
-        </p:spPr>
-      </p:sp>
-      <p:sp>
-        <p:nvSpPr>
-          <p:cNvPr id="14" name="Text 10"/>
-          <p:cNvSpPr/>
-          <p:nvPr/>
-        </p:nvSpPr>
-        <p:spPr>
-          <a:xfrm>
-            <a:off x="548640" y="2258568"/>
-            <a:ext cx="457200" cy="457200"/>
-          </a:xfrm>
-          <a:prstGeom prst="rect">
-            <a:avLst/>
-          </a:prstGeom>
-          <a:noFill/>
-          <a:ln/>
-        </p:spPr>
-        <p:txBody>
-          <a:bodyPr wrap="square" lIns="0" tIns="0" rIns="0" bIns="0" rtlCol="0" anchor="ctr"/>
-          <a:lstStyle/>
-          <a:p>
-            <a:pPr marL="0" indent="0" algn="ctr">
-              <a:buNone/>
-            </a:pPr>
-            <a:r>
-              <a:rPr lang="en-US" sz="1400" b="1" dirty="0">
-                <a:solidFill>
-                  <a:srgbClr val="FFFFFF"/>
-                </a:solidFill>
-                <a:latin typeface="Cambria" pitchFamily="34" charset="0"/>
-                <a:ea typeface="Cambria" pitchFamily="34" charset="-122"/>
-                <a:cs typeface="Cambria" pitchFamily="34" charset="-120"/>
-              </a:rPr>
-              <a:t>2</a:t>
-            </a:r>
-            <a:endParaRPr lang="en-US" sz="1400" dirty="0"/>
-          </a:p>
-        </p:txBody>
-      </p:sp>
-      <p:pic>
-        <p:nvPicPr>
-          <p:cNvPr id="15" name="Image 2" descr="preencoded.png"/>
-          <p:cNvPicPr>
-            <a:picLocks noChangeAspect="1"/>
-          </p:cNvPicPr>
-          <p:nvPr/>
-        </p:nvPicPr>
-        <p:blipFill>
-          <a:blip r:embed="rId5"/>
-          <a:stretch>
-            <a:fillRect/>
-          </a:stretch>
-        </p:blipFill>
-        <p:spPr>
-          <a:xfrm>
-            <a:off x="1143000" y="2331720"/>
-            <a:ext cx="310896" cy="310896"/>
-          </a:xfrm>
-          <a:prstGeom prst="rect">
-            <a:avLst/>
-          </a:prstGeom>
-        </p:spPr>
-      </p:pic>
-      <p:sp>
-        <p:nvSpPr>
-          <p:cNvPr id="16" name="Text 11"/>
-          <p:cNvSpPr/>
-          <p:nvPr/>
-        </p:nvSpPr>
-        <p:spPr>
-          <a:xfrm>
-            <a:off x="1600200" y="2221992"/>
-            <a:ext cx="4206240" cy="320040"/>
-          </a:xfrm>
-          <a:prstGeom prst="rect">
-            <a:avLst/>
-          </a:prstGeom>
-          <a:noFill/>
-          <a:ln/>
-        </p:spPr>
-        <p:txBody>
-          <a:bodyPr wrap="square" lIns="0" tIns="0" rIns="0" bIns="0" rtlCol="0" anchor="ctr"/>
-          <a:lstStyle/>
-          <a:p>
-            <a:pPr marL="0" indent="0">
-              <a:buNone/>
-            </a:pPr>
-            <a:r>
-              <a:rPr lang="en-US" sz="1350" b="1" dirty="0">
-                <a:solidFill>
-                  <a:srgbClr val="2B2320"/>
-                </a:solidFill>
-                <a:latin typeface="Calibri" pitchFamily="34" charset="0"/>
-                <a:ea typeface="Calibri" pitchFamily="34" charset="-122"/>
-                <a:cs typeface="Calibri" pitchFamily="34" charset="-120"/>
-              </a:rPr>
-              <a:t>Extracción en tiempo real</a:t>
-            </a:r>
-            <a:endParaRPr lang="en-US" sz="1350" dirty="0"/>
-          </a:p>
-        </p:txBody>
-      </p:sp>
-      <p:sp>
-        <p:nvSpPr>
-          <p:cNvPr id="17" name="Text 12"/>
-          <p:cNvSpPr/>
-          <p:nvPr/>
-        </p:nvSpPr>
-        <p:spPr>
-          <a:xfrm>
-            <a:off x="6035040" y="2240280"/>
-            <a:ext cx="5669280" cy="502920"/>
-          </a:xfrm>
-          <a:prstGeom prst="rect">
-            <a:avLst/>
-          </a:prstGeom>
-          <a:noFill/>
-          <a:ln/>
-        </p:spPr>
-        <p:txBody>
-          <a:bodyPr wrap="square" lIns="0" tIns="0" rIns="0" bIns="0" rtlCol="0" anchor="ctr"/>
-          <a:lstStyle/>
-          <a:p>
-            <a:pPr marL="0" indent="0">
-              <a:buNone/>
-            </a:pPr>
-            <a:r>
-              <a:rPr lang="en-US" sz="1200" dirty="0">
-                <a:solidFill>
-                  <a:srgbClr val="7A6F68"/>
-                </a:solidFill>
-                <a:latin typeface="Calibri" pitchFamily="34" charset="0"/>
-                <a:ea typeface="Calibri" pitchFamily="34" charset="-122"/>
-                <a:cs typeface="Calibri" pitchFamily="34" charset="-120"/>
-              </a:rPr>
-              <a:t>Hasta 25 alojamientos por localidad seleccionada</a:t>
-            </a:r>
-            <a:endParaRPr lang="en-US" sz="1200" dirty="0"/>
-          </a:p>
-        </p:txBody>
-      </p:sp>
-      <p:sp>
-        <p:nvSpPr>
-          <p:cNvPr id="18" name="Shape 13"/>
-          <p:cNvSpPr/>
-          <p:nvPr/>
-        </p:nvSpPr>
-        <p:spPr>
-          <a:xfrm>
-            <a:off x="548640" y="3035808"/>
-            <a:ext cx="457200" cy="457200"/>
-          </a:xfrm>
-          <a:prstGeom prst="ellipse">
-            <a:avLst/>
-          </a:prstGeom>
-          <a:solidFill>
-            <a:srgbClr val="3B6E77"/>
-          </a:solidFill>
-          <a:ln/>
-        </p:spPr>
-      </p:sp>
-      <p:sp>
-        <p:nvSpPr>
-          <p:cNvPr id="19" name="Text 14"/>
-          <p:cNvSpPr/>
-          <p:nvPr/>
-        </p:nvSpPr>
-        <p:spPr>
-          <a:xfrm>
-            <a:off x="548640" y="3035808"/>
-            <a:ext cx="457200" cy="457200"/>
-          </a:xfrm>
-          <a:prstGeom prst="rect">
-            <a:avLst/>
-          </a:prstGeom>
-          <a:noFill/>
-          <a:ln/>
-        </p:spPr>
-        <p:txBody>
-          <a:bodyPr wrap="square" lIns="0" tIns="0" rIns="0" bIns="0" rtlCol="0" anchor="ctr"/>
-          <a:lstStyle/>
-          <a:p>
-            <a:pPr marL="0" indent="0" algn="ctr">
-              <a:buNone/>
-            </a:pPr>
-            <a:r>
-              <a:rPr lang="en-US" sz="1400" b="1" dirty="0">
-                <a:solidFill>
-                  <a:srgbClr val="FFFFFF"/>
-                </a:solidFill>
-                <a:latin typeface="Cambria" pitchFamily="34" charset="0"/>
-                <a:ea typeface="Cambria" pitchFamily="34" charset="-122"/>
-                <a:cs typeface="Cambria" pitchFamily="34" charset="-120"/>
-              </a:rPr>
-              <a:t>3</a:t>
-            </a:r>
-            <a:endParaRPr lang="en-US" sz="1400" dirty="0"/>
-          </a:p>
-        </p:txBody>
-      </p:sp>
-      <p:pic>
-        <p:nvPicPr>
-          <p:cNvPr id="20" name="Image 3" descr="preencoded.png"/>
-          <p:cNvPicPr>
-            <a:picLocks noChangeAspect="1"/>
-          </p:cNvPicPr>
-          <p:nvPr/>
-        </p:nvPicPr>
-        <p:blipFill>
-          <a:blip r:embed="rId6"/>
-          <a:stretch>
-            <a:fillRect/>
-          </a:stretch>
-        </p:blipFill>
-        <p:spPr>
-          <a:xfrm>
-            <a:off x="1143000" y="3108960"/>
-            <a:ext cx="310896" cy="310896"/>
-          </a:xfrm>
-          <a:prstGeom prst="rect">
-            <a:avLst/>
-          </a:prstGeom>
-        </p:spPr>
-      </p:pic>
-      <p:sp>
-        <p:nvSpPr>
-          <p:cNvPr id="21" name="Text 15"/>
-          <p:cNvSpPr/>
-          <p:nvPr/>
-        </p:nvSpPr>
-        <p:spPr>
-          <a:xfrm>
-            <a:off x="1600200" y="2999232"/>
-            <a:ext cx="4206240" cy="320040"/>
-          </a:xfrm>
-          <a:prstGeom prst="rect">
-            <a:avLst/>
-          </a:prstGeom>
-          <a:noFill/>
-          <a:ln/>
-        </p:spPr>
-        <p:txBody>
-          <a:bodyPr wrap="square" lIns="0" tIns="0" rIns="0" bIns="0" rtlCol="0" anchor="ctr"/>
-          <a:lstStyle/>
-          <a:p>
-            <a:pPr marL="0" indent="0">
-              <a:buNone/>
-            </a:pPr>
-            <a:r>
-              <a:rPr lang="en-US" sz="1350" b="1" dirty="0">
-                <a:solidFill>
-                  <a:srgbClr val="2B2320"/>
-                </a:solidFill>
-                <a:latin typeface="Calibri" pitchFamily="34" charset="0"/>
-                <a:ea typeface="Calibri" pitchFamily="34" charset="-122"/>
-                <a:cs typeface="Calibri" pitchFamily="34" charset="-120"/>
-              </a:rPr>
-              <a:t>Preprocesamiento</a:t>
-            </a:r>
-            <a:endParaRPr lang="en-US" sz="1350" dirty="0"/>
-          </a:p>
-        </p:txBody>
-      </p:sp>
-      <p:sp>
-        <p:nvSpPr>
-          <p:cNvPr id="22" name="Text 16"/>
-          <p:cNvSpPr/>
-          <p:nvPr/>
-        </p:nvSpPr>
-        <p:spPr>
-          <a:xfrm>
-            <a:off x="6035040" y="3017520"/>
-            <a:ext cx="5669280" cy="502920"/>
-          </a:xfrm>
-          <a:prstGeom prst="rect">
-            <a:avLst/>
-          </a:prstGeom>
-          <a:noFill/>
-          <a:ln/>
-        </p:spPr>
-        <p:txBody>
-          <a:bodyPr wrap="square" lIns="0" tIns="0" rIns="0" bIns="0" rtlCol="0" anchor="ctr"/>
-          <a:lstStyle/>
-          <a:p>
-            <a:pPr marL="0" indent="0">
-              <a:buNone/>
-            </a:pPr>
-            <a:r>
-              <a:rPr lang="en-US" sz="1200" dirty="0">
-                <a:solidFill>
-                  <a:srgbClr val="7A6F68"/>
-                </a:solidFill>
-                <a:latin typeface="Calibri" pitchFamily="34" charset="0"/>
-                <a:ea typeface="Calibri" pitchFamily="34" charset="-122"/>
-                <a:cs typeface="Calibri" pitchFamily="34" charset="-120"/>
-              </a:rPr>
-              <a:t>Misma secuencia de transformaciones que en el entrenamiento</a:t>
-            </a:r>
-            <a:endParaRPr lang="en-US" sz="1200" dirty="0"/>
-          </a:p>
-        </p:txBody>
-      </p:sp>
-      <p:sp>
-        <p:nvSpPr>
-          <p:cNvPr id="23" name="Shape 17"/>
-          <p:cNvSpPr/>
-          <p:nvPr/>
-        </p:nvSpPr>
-        <p:spPr>
-          <a:xfrm>
-            <a:off x="548640" y="3813048"/>
-            <a:ext cx="457200" cy="457200"/>
-          </a:xfrm>
-          <a:prstGeom prst="ellipse">
-            <a:avLst/>
-          </a:prstGeom>
-          <a:solidFill>
-            <a:srgbClr val="3B6E77"/>
-          </a:solidFill>
-          <a:ln/>
-        </p:spPr>
-      </p:sp>
-      <p:sp>
-        <p:nvSpPr>
-          <p:cNvPr id="24" name="Text 18"/>
-          <p:cNvSpPr/>
-          <p:nvPr/>
-        </p:nvSpPr>
-        <p:spPr>
-          <a:xfrm>
-            <a:off x="548640" y="3813048"/>
-            <a:ext cx="457200" cy="457200"/>
-          </a:xfrm>
-          <a:prstGeom prst="rect">
-            <a:avLst/>
-          </a:prstGeom>
-          <a:noFill/>
-          <a:ln/>
-        </p:spPr>
-        <p:txBody>
-          <a:bodyPr wrap="square" lIns="0" tIns="0" rIns="0" bIns="0" rtlCol="0" anchor="ctr"/>
-          <a:lstStyle/>
-          <a:p>
-            <a:pPr marL="0" indent="0" algn="ctr">
-              <a:buNone/>
-            </a:pPr>
-            <a:r>
-              <a:rPr lang="en-US" sz="1400" b="1" dirty="0">
-                <a:solidFill>
-                  <a:srgbClr val="FFFFFF"/>
-                </a:solidFill>
-                <a:latin typeface="Cambria" pitchFamily="34" charset="0"/>
-                <a:ea typeface="Cambria" pitchFamily="34" charset="-122"/>
-                <a:cs typeface="Cambria" pitchFamily="34" charset="-120"/>
-              </a:rPr>
-              <a:t>4</a:t>
-            </a:r>
-            <a:endParaRPr lang="en-US" sz="1400" dirty="0"/>
-          </a:p>
-        </p:txBody>
-      </p:sp>
-      <p:pic>
-        <p:nvPicPr>
-          <p:cNvPr id="25" name="Image 4" descr="preencoded.png"/>
-          <p:cNvPicPr>
-            <a:picLocks noChangeAspect="1"/>
-          </p:cNvPicPr>
-          <p:nvPr/>
-        </p:nvPicPr>
-        <p:blipFill>
-          <a:blip r:embed="rId7"/>
-          <a:stretch>
-            <a:fillRect/>
-          </a:stretch>
-        </p:blipFill>
-        <p:spPr>
-          <a:xfrm>
-            <a:off x="1143000" y="3886200"/>
-            <a:ext cx="310896" cy="310896"/>
-          </a:xfrm>
-          <a:prstGeom prst="rect">
-            <a:avLst/>
-          </a:prstGeom>
-        </p:spPr>
-      </p:pic>
-      <p:sp>
-        <p:nvSpPr>
-          <p:cNvPr id="26" name="Text 19"/>
-          <p:cNvSpPr/>
-          <p:nvPr/>
-        </p:nvSpPr>
-        <p:spPr>
-          <a:xfrm>
-            <a:off x="1600200" y="3776472"/>
-            <a:ext cx="4206240" cy="320040"/>
-          </a:xfrm>
-          <a:prstGeom prst="rect">
-            <a:avLst/>
-          </a:prstGeom>
-          <a:noFill/>
-          <a:ln/>
-        </p:spPr>
-        <p:txBody>
-          <a:bodyPr wrap="square" lIns="0" tIns="0" rIns="0" bIns="0" rtlCol="0" anchor="ctr"/>
-          <a:lstStyle/>
-          <a:p>
-            <a:pPr marL="0" indent="0">
-              <a:buNone/>
-            </a:pPr>
-            <a:r>
-              <a:rPr lang="en-US" sz="1350" b="1" dirty="0">
-                <a:solidFill>
-                  <a:srgbClr val="2B2320"/>
-                </a:solidFill>
-                <a:latin typeface="Calibri" pitchFamily="34" charset="0"/>
-                <a:ea typeface="Calibri" pitchFamily="34" charset="-122"/>
-                <a:cs typeface="Calibri" pitchFamily="34" charset="-120"/>
-              </a:rPr>
-              <a:t>Codificación</a:t>
-            </a:r>
-            <a:endParaRPr lang="en-US" sz="1350" dirty="0"/>
-          </a:p>
-        </p:txBody>
-      </p:sp>
-      <p:sp>
-        <p:nvSpPr>
-          <p:cNvPr id="27" name="Text 20"/>
-          <p:cNvSpPr/>
-          <p:nvPr/>
-        </p:nvSpPr>
-        <p:spPr>
-          <a:xfrm>
-            <a:off x="6035040" y="3794760"/>
-            <a:ext cx="5669280" cy="502920"/>
-          </a:xfrm>
-          <a:prstGeom prst="rect">
-            <a:avLst/>
-          </a:prstGeom>
-          <a:noFill/>
-          <a:ln/>
-        </p:spPr>
-        <p:txBody>
-          <a:bodyPr wrap="square" lIns="0" tIns="0" rIns="0" bIns="0" rtlCol="0" anchor="ctr"/>
-          <a:lstStyle/>
-          <a:p>
-            <a:pPr marL="0" indent="0">
-              <a:buNone/>
-            </a:pPr>
-            <a:r>
-              <a:rPr lang="en-US" sz="1200" dirty="0">
-                <a:solidFill>
-                  <a:srgbClr val="7A6F68"/>
-                </a:solidFill>
-                <a:latin typeface="Calibri" pitchFamily="34" charset="0"/>
-                <a:ea typeface="Calibri" pitchFamily="34" charset="-122"/>
-                <a:cs typeface="Calibri" pitchFamily="34" charset="-120"/>
-              </a:rPr>
-              <a:t>Encoders serializados con joblib (mismo espacio de características)</a:t>
-            </a:r>
-            <a:endParaRPr lang="en-US" sz="1200" dirty="0"/>
-          </a:p>
-        </p:txBody>
-      </p:sp>
-      <p:sp>
-        <p:nvSpPr>
-          <p:cNvPr id="28" name="Shape 21"/>
-          <p:cNvSpPr/>
-          <p:nvPr/>
-        </p:nvSpPr>
-        <p:spPr>
-          <a:xfrm>
-            <a:off x="548640" y="4590288"/>
-            <a:ext cx="457200" cy="457200"/>
-          </a:xfrm>
-          <a:prstGeom prst="ellipse">
-            <a:avLst/>
-          </a:prstGeom>
-          <a:solidFill>
-            <a:srgbClr val="B8563A"/>
-          </a:solidFill>
-          <a:ln/>
-        </p:spPr>
-      </p:sp>
-      <p:sp>
-        <p:nvSpPr>
-          <p:cNvPr id="29" name="Text 22"/>
-          <p:cNvSpPr/>
-          <p:nvPr/>
-        </p:nvSpPr>
-        <p:spPr>
-          <a:xfrm>
-            <a:off x="548640" y="4590288"/>
-            <a:ext cx="457200" cy="457200"/>
-          </a:xfrm>
-          <a:prstGeom prst="rect">
-            <a:avLst/>
-          </a:prstGeom>
-          <a:noFill/>
-          <a:ln/>
-        </p:spPr>
-        <p:txBody>
-          <a:bodyPr wrap="square" lIns="0" tIns="0" rIns="0" bIns="0" rtlCol="0" anchor="ctr"/>
-          <a:lstStyle/>
-          <a:p>
-            <a:pPr marL="0" indent="0" algn="ctr">
-              <a:buNone/>
-            </a:pPr>
-            <a:r>
-              <a:rPr lang="en-US" sz="1400" b="1" dirty="0">
-                <a:solidFill>
-                  <a:srgbClr val="FFFFFF"/>
-                </a:solidFill>
-                <a:latin typeface="Cambria" pitchFamily="34" charset="0"/>
-                <a:ea typeface="Cambria" pitchFamily="34" charset="-122"/>
-                <a:cs typeface="Cambria" pitchFamily="34" charset="-120"/>
-              </a:rPr>
-              <a:t>5</a:t>
-            </a:r>
-            <a:endParaRPr lang="en-US" sz="1400" dirty="0"/>
-          </a:p>
-        </p:txBody>
-      </p:sp>
-      <p:pic>
-        <p:nvPicPr>
-          <p:cNvPr id="30" name="Image 5" descr="preencoded.png"/>
-          <p:cNvPicPr>
-            <a:picLocks noChangeAspect="1"/>
-          </p:cNvPicPr>
-          <p:nvPr/>
-        </p:nvPicPr>
-        <p:blipFill>
-          <a:blip r:embed="rId8"/>
-          <a:stretch>
-            <a:fillRect/>
-          </a:stretch>
-        </p:blipFill>
-        <p:spPr>
-          <a:xfrm>
-            <a:off x="1143000" y="4663440"/>
-            <a:ext cx="310896" cy="310896"/>
-          </a:xfrm>
-          <a:prstGeom prst="rect">
-            <a:avLst/>
-          </a:prstGeom>
-        </p:spPr>
-      </p:pic>
-      <p:sp>
-        <p:nvSpPr>
-          <p:cNvPr id="31" name="Text 23"/>
-          <p:cNvSpPr/>
-          <p:nvPr/>
-        </p:nvSpPr>
-        <p:spPr>
-          <a:xfrm>
-            <a:off x="1600200" y="4553712"/>
-            <a:ext cx="4206240" cy="320040"/>
-          </a:xfrm>
-          <a:prstGeom prst="rect">
-            <a:avLst/>
-          </a:prstGeom>
-          <a:noFill/>
-          <a:ln/>
-        </p:spPr>
-        <p:txBody>
-          <a:bodyPr wrap="square" lIns="0" tIns="0" rIns="0" bIns="0" rtlCol="0" anchor="ctr"/>
-          <a:lstStyle/>
-          <a:p>
-            <a:pPr marL="0" indent="0">
-              <a:buNone/>
-            </a:pPr>
-            <a:r>
-              <a:rPr lang="en-US" sz="1350" b="1" dirty="0">
-                <a:solidFill>
-                  <a:srgbClr val="2B2320"/>
-                </a:solidFill>
-                <a:latin typeface="Calibri" pitchFamily="34" charset="0"/>
-                <a:ea typeface="Calibri" pitchFamily="34" charset="-122"/>
-                <a:cs typeface="Calibri" pitchFamily="34" charset="-120"/>
-              </a:rPr>
-              <a:t>Predicción y categorización</a:t>
-            </a:r>
-            <a:endParaRPr lang="en-US" sz="1350" dirty="0"/>
-          </a:p>
-        </p:txBody>
-      </p:sp>
-      <p:sp>
-        <p:nvSpPr>
-          <p:cNvPr id="32" name="Text 24"/>
-          <p:cNvSpPr/>
-          <p:nvPr/>
-        </p:nvSpPr>
-        <p:spPr>
-          <a:xfrm>
-            <a:off x="6035040" y="4572000"/>
-            <a:ext cx="5669280" cy="502920"/>
-          </a:xfrm>
-          <a:prstGeom prst="rect">
-            <a:avLst/>
-          </a:prstGeom>
-          <a:noFill/>
-          <a:ln/>
-        </p:spPr>
-        <p:txBody>
-          <a:bodyPr wrap="square" lIns="0" tIns="0" rIns="0" bIns="0" rtlCol="0" anchor="ctr"/>
-          <a:lstStyle/>
-          <a:p>
-            <a:pPr marL="0" indent="0">
-              <a:buNone/>
-            </a:pPr>
-            <a:r>
-              <a:rPr lang="en-US" sz="1200" dirty="0">
-                <a:solidFill>
-                  <a:srgbClr val="7A6F68"/>
-                </a:solidFill>
-                <a:latin typeface="Calibri" pitchFamily="34" charset="0"/>
-                <a:ea typeface="Calibri" pitchFamily="34" charset="-122"/>
-                <a:cs typeface="Calibri" pitchFamily="34" charset="-120"/>
-              </a:rPr>
-              <a:t>Modelo podado + ratio r + umbrales del nivel elegido</a:t>
-            </a:r>
-            <a:endParaRPr lang="en-US" sz="1200" dirty="0"/>
-          </a:p>
-        </p:txBody>
-      </p:sp>
-      <p:sp>
-        <p:nvSpPr>
-          <p:cNvPr id="33" name="Shape 25"/>
-          <p:cNvSpPr/>
-          <p:nvPr/>
-        </p:nvSpPr>
-        <p:spPr>
-          <a:xfrm>
-            <a:off x="548640" y="5367528"/>
-            <a:ext cx="457200" cy="457200"/>
-          </a:xfrm>
-          <a:prstGeom prst="ellipse">
-            <a:avLst/>
-          </a:prstGeom>
-          <a:solidFill>
-            <a:srgbClr val="3B6E77"/>
-          </a:solidFill>
-          <a:ln/>
-        </p:spPr>
-      </p:sp>
-      <p:sp>
-        <p:nvSpPr>
-          <p:cNvPr id="34" name="Text 26"/>
-          <p:cNvSpPr/>
-          <p:nvPr/>
-        </p:nvSpPr>
-        <p:spPr>
-          <a:xfrm>
-            <a:off x="548640" y="5367528"/>
-            <a:ext cx="457200" cy="457200"/>
-          </a:xfrm>
-          <a:prstGeom prst="rect">
-            <a:avLst/>
-          </a:prstGeom>
-          <a:noFill/>
-          <a:ln/>
-        </p:spPr>
-        <p:txBody>
-          <a:bodyPr wrap="square" lIns="0" tIns="0" rIns="0" bIns="0" rtlCol="0" anchor="ctr"/>
-          <a:lstStyle/>
-          <a:p>
-            <a:pPr marL="0" indent="0" algn="ctr">
-              <a:buNone/>
-            </a:pPr>
-            <a:r>
-              <a:rPr lang="en-US" sz="1400" b="1" dirty="0">
-                <a:solidFill>
-                  <a:srgbClr val="FFFFFF"/>
-                </a:solidFill>
-                <a:latin typeface="Cambria" pitchFamily="34" charset="0"/>
-                <a:ea typeface="Cambria" pitchFamily="34" charset="-122"/>
-                <a:cs typeface="Cambria" pitchFamily="34" charset="-120"/>
-              </a:rPr>
-              <a:t>6</a:t>
-            </a:r>
-            <a:endParaRPr lang="en-US" sz="1400" dirty="0"/>
-          </a:p>
-        </p:txBody>
-      </p:sp>
-      <p:pic>
-        <p:nvPicPr>
-          <p:cNvPr id="35" name="Image 6" descr="preencoded.png"/>
-          <p:cNvPicPr>
-            <a:picLocks noChangeAspect="1"/>
-          </p:cNvPicPr>
-          <p:nvPr/>
-        </p:nvPicPr>
-        <p:blipFill>
-          <a:blip r:embed="rId9"/>
-          <a:stretch>
-            <a:fillRect/>
-          </a:stretch>
-        </p:blipFill>
-        <p:spPr>
-          <a:xfrm>
-            <a:off x="1143000" y="5440680"/>
-            <a:ext cx="310896" cy="310896"/>
-          </a:xfrm>
-          <a:prstGeom prst="rect">
-            <a:avLst/>
-          </a:prstGeom>
-        </p:spPr>
-      </p:pic>
-      <p:sp>
-        <p:nvSpPr>
-          <p:cNvPr id="36" name="Text 27"/>
-          <p:cNvSpPr/>
-          <p:nvPr/>
-        </p:nvSpPr>
-        <p:spPr>
-          <a:xfrm>
-            <a:off x="1600200" y="5330952"/>
-            <a:ext cx="4206240" cy="320040"/>
-          </a:xfrm>
-          <a:prstGeom prst="rect">
-            <a:avLst/>
-          </a:prstGeom>
-          <a:noFill/>
-          <a:ln/>
-        </p:spPr>
-        <p:txBody>
-          <a:bodyPr wrap="square" lIns="0" tIns="0" rIns="0" bIns="0" rtlCol="0" anchor="ctr"/>
-          <a:lstStyle/>
-          <a:p>
-            <a:pPr marL="0" indent="0">
-              <a:buNone/>
-            </a:pPr>
-            <a:r>
-              <a:rPr lang="en-US" sz="1350" b="1" dirty="0">
-                <a:solidFill>
-                  <a:srgbClr val="2B2320"/>
-                </a:solidFill>
-                <a:latin typeface="Calibri" pitchFamily="34" charset="0"/>
-                <a:ea typeface="Calibri" pitchFamily="34" charset="-122"/>
-                <a:cs typeface="Calibri" pitchFamily="34" charset="-120"/>
-              </a:rPr>
-              <a:t>Presentación de resultados</a:t>
-            </a:r>
-            <a:endParaRPr lang="en-US" sz="1350" dirty="0"/>
-          </a:p>
-        </p:txBody>
-      </p:sp>
-      <p:sp>
-        <p:nvSpPr>
-          <p:cNvPr id="37" name="Text 28"/>
-          <p:cNvSpPr/>
-          <p:nvPr/>
-        </p:nvSpPr>
-        <p:spPr>
-          <a:xfrm>
-            <a:off x="6035040" y="5349240"/>
-            <a:ext cx="5669280" cy="502920"/>
-          </a:xfrm>
-          <a:prstGeom prst="rect">
-            <a:avLst/>
-          </a:prstGeom>
-          <a:noFill/>
-          <a:ln/>
-        </p:spPr>
-        <p:txBody>
-          <a:bodyPr wrap="square" lIns="0" tIns="0" rIns="0" bIns="0" rtlCol="0" anchor="ctr"/>
-          <a:lstStyle/>
-          <a:p>
-            <a:pPr marL="0" indent="0">
-              <a:buNone/>
-            </a:pPr>
-            <a:r>
-              <a:rPr lang="en-US" sz="1200" dirty="0">
-                <a:solidFill>
-                  <a:srgbClr val="7A6F68"/>
-                </a:solidFill>
-                <a:latin typeface="Calibri" pitchFamily="34" charset="0"/>
-                <a:ea typeface="Calibri" pitchFamily="34" charset="-122"/>
-                <a:cs typeface="Calibri" pitchFamily="34" charset="-120"/>
-              </a:rPr>
-              <a:t>Tabla ordenada por ahorro y gráfico de categorías</a:t>
-            </a:r>
-            <a:endParaRPr lang="en-US" sz="1200" dirty="0"/>
           </a:p>
         </p:txBody>
       </p:sp>
@@ -19410,7 +18776,7 @@
                 <a:ea typeface="Calibri" pitchFamily="34" charset="-122"/>
                 <a:cs typeface="Calibri" pitchFamily="34" charset="-120"/>
               </a:rPr>
-              <a:t>2 / 23</a:t>
+              <a:t>2 / 24</a:t>
             </a:r>
             <a:endParaRPr lang="en-US" sz="900" dirty="0"/>
           </a:p>
@@ -19435,6 +18801,13 @@
           </a:solidFill>
           <a:ln/>
         </p:spPr>
+        <p:txBody>
+          <a:bodyPr/>
+          <a:lstStyle/>
+          <a:p>
+            <a:endParaRPr/>
+          </a:p>
+        </p:txBody>
       </p:sp>
       <p:sp>
         <p:nvSpPr>
@@ -19533,6 +18906,13 @@
           </a:solidFill>
           <a:ln/>
         </p:spPr>
+        <p:txBody>
+          <a:bodyPr/>
+          <a:lstStyle/>
+          <a:p>
+            <a:endParaRPr/>
+          </a:p>
+        </p:txBody>
       </p:sp>
       <p:sp>
         <p:nvSpPr>
@@ -19670,6 +19050,13 @@
           </a:solidFill>
           <a:ln/>
         </p:spPr>
+        <p:txBody>
+          <a:bodyPr/>
+          <a:lstStyle/>
+          <a:p>
+            <a:endParaRPr/>
+          </a:p>
+        </p:txBody>
       </p:sp>
       <p:sp>
         <p:nvSpPr>
@@ -19807,6 +19194,13 @@
           </a:solidFill>
           <a:ln/>
         </p:spPr>
+        <p:txBody>
+          <a:bodyPr/>
+          <a:lstStyle/>
+          <a:p>
+            <a:endParaRPr/>
+          </a:p>
+        </p:txBody>
       </p:sp>
       <p:sp>
         <p:nvSpPr>
@@ -19944,6 +19338,13 @@
           </a:solidFill>
           <a:ln/>
         </p:spPr>
+        <p:txBody>
+          <a:bodyPr/>
+          <a:lstStyle/>
+          <a:p>
+            <a:endParaRPr/>
+          </a:p>
+        </p:txBody>
       </p:sp>
       <p:sp>
         <p:nvSpPr>
@@ -20081,6 +19482,13 @@
           </a:solidFill>
           <a:ln/>
         </p:spPr>
+        <p:txBody>
+          <a:bodyPr/>
+          <a:lstStyle/>
+          <a:p>
+            <a:endParaRPr/>
+          </a:p>
+        </p:txBody>
       </p:sp>
       <p:sp>
         <p:nvSpPr>
@@ -20218,6 +19626,13 @@
           </a:solidFill>
           <a:ln/>
         </p:spPr>
+        <p:txBody>
+          <a:bodyPr/>
+          <a:lstStyle/>
+          <a:p>
+            <a:endParaRPr/>
+          </a:p>
+        </p:txBody>
       </p:sp>
       <p:sp>
         <p:nvSpPr>
@@ -20345,6 +19760,1254 @@
 </file>
 
 <file path=ppt/slides/slide20.xml><?xml version="1.0" encoding="utf-8"?>
+<p:sld xmlns:a="http://schemas.openxmlformats.org/drawingml/2006/main" xmlns:r="http://schemas.openxmlformats.org/officeDocument/2006/relationships" xmlns:p="http://schemas.openxmlformats.org/presentationml/2006/main">
+  <p:cSld name="Slide 19">
+    <p:bg>
+      <p:bgPr>
+        <a:solidFill>
+          <a:srgbClr val="FFFFFF"/>
+        </a:solidFill>
+        <a:effectLst/>
+      </p:bgPr>
+    </p:bg>
+    <p:spTree>
+      <p:nvGrpSpPr>
+        <p:cNvPr id="1" name=""/>
+        <p:cNvGrpSpPr/>
+        <p:nvPr/>
+      </p:nvGrpSpPr>
+      <p:grpSpPr>
+        <a:xfrm>
+          <a:off x="0" y="0"/>
+          <a:ext cx="0" cy="0"/>
+          <a:chOff x="0" y="0"/>
+          <a:chExt cx="0" cy="0"/>
+        </a:xfrm>
+      </p:grpSpPr>
+      <p:sp>
+        <p:nvSpPr>
+          <p:cNvPr id="2" name="Text 0"/>
+          <p:cNvSpPr/>
+          <p:nvPr/>
+        </p:nvSpPr>
+        <p:spPr>
+          <a:xfrm>
+            <a:off x="548640" y="6473952"/>
+            <a:ext cx="7315200" cy="274320"/>
+          </a:xfrm>
+          <a:prstGeom prst="rect">
+            <a:avLst/>
+          </a:prstGeom>
+          <a:noFill/>
+          <a:ln/>
+        </p:spPr>
+        <p:txBody>
+          <a:bodyPr wrap="square" lIns="0" tIns="0" rIns="0" bIns="0" rtlCol="0" anchor="ctr"/>
+          <a:lstStyle/>
+          <a:p>
+            <a:pPr marL="0" indent="0" algn="l">
+              <a:buNone/>
+            </a:pPr>
+            <a:r>
+              <a:rPr lang="en-US" sz="900" dirty="0">
+                <a:solidFill>
+                  <a:srgbClr val="7A6F68"/>
+                </a:solidFill>
+                <a:latin typeface="Calibri" pitchFamily="34" charset="0"/>
+                <a:ea typeface="Calibri" pitchFamily="34" charset="-122"/>
+                <a:cs typeface="Calibri" pitchFamily="34" charset="-120"/>
+              </a:rPr>
+              <a:t>Detección de Alojamientos Turísticos con Precio Real Inferior — TFG</a:t>
+            </a:r>
+            <a:endParaRPr lang="en-US" sz="900" dirty="0"/>
+          </a:p>
+        </p:txBody>
+      </p:sp>
+      <p:sp>
+        <p:nvSpPr>
+          <p:cNvPr id="3" name="Text 1"/>
+          <p:cNvSpPr/>
+          <p:nvPr/>
+        </p:nvSpPr>
+        <p:spPr>
+          <a:xfrm>
+            <a:off x="10545775" y="6473952"/>
+            <a:ext cx="1097280" cy="274320"/>
+          </a:xfrm>
+          <a:prstGeom prst="rect">
+            <a:avLst/>
+          </a:prstGeom>
+          <a:noFill/>
+          <a:ln/>
+        </p:spPr>
+        <p:txBody>
+          <a:bodyPr wrap="square" lIns="0" tIns="0" rIns="0" bIns="0" rtlCol="0" anchor="ctr"/>
+          <a:lstStyle/>
+          <a:p>
+            <a:pPr marL="0" indent="0" algn="r">
+              <a:buNone/>
+            </a:pPr>
+            <a:r>
+              <a:rPr lang="en-US" sz="900" dirty="0">
+                <a:solidFill>
+                  <a:srgbClr val="7A6F68"/>
+                </a:solidFill>
+                <a:latin typeface="Calibri" pitchFamily="34" charset="0"/>
+                <a:ea typeface="Calibri" pitchFamily="34" charset="-122"/>
+                <a:cs typeface="Calibri" pitchFamily="34" charset="-120"/>
+              </a:rPr>
+              <a:t>20 / 24</a:t>
+            </a:r>
+            <a:endParaRPr lang="en-US" sz="900" dirty="0"/>
+          </a:p>
+        </p:txBody>
+      </p:sp>
+      <p:sp>
+        <p:nvSpPr>
+          <p:cNvPr id="4" name="Shape 2"/>
+          <p:cNvSpPr/>
+          <p:nvPr/>
+        </p:nvSpPr>
+        <p:spPr>
+          <a:xfrm>
+            <a:off x="548640" y="457200"/>
+            <a:ext cx="566928" cy="566928"/>
+          </a:xfrm>
+          <a:prstGeom prst="ellipse">
+            <a:avLst/>
+          </a:prstGeom>
+          <a:solidFill>
+            <a:srgbClr val="B8563A"/>
+          </a:solidFill>
+          <a:ln/>
+        </p:spPr>
+        <p:txBody>
+          <a:bodyPr/>
+          <a:lstStyle/>
+          <a:p>
+            <a:endParaRPr/>
+          </a:p>
+        </p:txBody>
+      </p:sp>
+      <p:sp>
+        <p:nvSpPr>
+          <p:cNvPr id="5" name="Text 3"/>
+          <p:cNvSpPr/>
+          <p:nvPr/>
+        </p:nvSpPr>
+        <p:spPr>
+          <a:xfrm>
+            <a:off x="1316736" y="420624"/>
+            <a:ext cx="9601200" cy="256032"/>
+          </a:xfrm>
+          <a:prstGeom prst="rect">
+            <a:avLst/>
+          </a:prstGeom>
+          <a:noFill/>
+          <a:ln/>
+        </p:spPr>
+        <p:txBody>
+          <a:bodyPr wrap="square" lIns="0" tIns="0" rIns="0" bIns="0" rtlCol="0" anchor="ctr"/>
+          <a:lstStyle/>
+          <a:p>
+            <a:pPr marL="0" indent="0">
+              <a:buNone/>
+            </a:pPr>
+            <a:r>
+              <a:rPr lang="en-US" sz="1100" b="1" kern="0" spc="200" dirty="0">
+                <a:solidFill>
+                  <a:srgbClr val="7A6F68"/>
+                </a:solidFill>
+                <a:latin typeface="Calibri" pitchFamily="34" charset="0"/>
+                <a:ea typeface="Calibri" pitchFamily="34" charset="-122"/>
+                <a:cs typeface="Calibri" pitchFamily="34" charset="-120"/>
+              </a:rPr>
+              <a:t>APLICACIÓN WEB</a:t>
+            </a:r>
+            <a:endParaRPr lang="en-US" sz="1100" dirty="0"/>
+          </a:p>
+        </p:txBody>
+      </p:sp>
+      <p:sp>
+        <p:nvSpPr>
+          <p:cNvPr id="6" name="Text 4"/>
+          <p:cNvSpPr/>
+          <p:nvPr/>
+        </p:nvSpPr>
+        <p:spPr>
+          <a:xfrm>
+            <a:off x="1316736" y="640080"/>
+            <a:ext cx="9966960" cy="640080"/>
+          </a:xfrm>
+          <a:prstGeom prst="rect">
+            <a:avLst/>
+          </a:prstGeom>
+          <a:noFill/>
+          <a:ln/>
+        </p:spPr>
+        <p:txBody>
+          <a:bodyPr wrap="square" lIns="0" tIns="0" rIns="0" bIns="0" rtlCol="0" anchor="t"/>
+          <a:lstStyle/>
+          <a:p>
+            <a:pPr marL="0" indent="0">
+              <a:buNone/>
+            </a:pPr>
+            <a:r>
+              <a:rPr lang="en-US" sz="2800" b="1" dirty="0">
+                <a:solidFill>
+                  <a:srgbClr val="2B2320"/>
+                </a:solidFill>
+                <a:latin typeface="Cambria" pitchFamily="34" charset="0"/>
+                <a:ea typeface="Cambria" pitchFamily="34" charset="-122"/>
+                <a:cs typeface="Cambria" pitchFamily="34" charset="-120"/>
+              </a:rPr>
+              <a:t>Flujo de trabajo de la búsqueda</a:t>
+            </a:r>
+            <a:endParaRPr lang="en-US" sz="2800" dirty="0"/>
+          </a:p>
+        </p:txBody>
+      </p:sp>
+      <p:pic>
+        <p:nvPicPr>
+          <p:cNvPr id="7" name="Image 0" descr="preencoded.png"/>
+          <p:cNvPicPr>
+            <a:picLocks noChangeAspect="1"/>
+          </p:cNvPicPr>
+          <p:nvPr/>
+        </p:nvPicPr>
+        <p:blipFill>
+          <a:blip r:embed="rId3"/>
+          <a:stretch>
+            <a:fillRect/>
+          </a:stretch>
+        </p:blipFill>
+        <p:spPr>
+          <a:xfrm>
+            <a:off x="656356" y="564916"/>
+            <a:ext cx="351495" cy="351495"/>
+          </a:xfrm>
+          <a:prstGeom prst="rect">
+            <a:avLst/>
+          </a:prstGeom>
+        </p:spPr>
+      </p:pic>
+      <p:sp>
+        <p:nvSpPr>
+          <p:cNvPr id="8" name="Shape 5"/>
+          <p:cNvSpPr/>
+          <p:nvPr/>
+        </p:nvSpPr>
+        <p:spPr>
+          <a:xfrm>
+            <a:off x="548640" y="1481328"/>
+            <a:ext cx="457200" cy="457200"/>
+          </a:xfrm>
+          <a:prstGeom prst="ellipse">
+            <a:avLst/>
+          </a:prstGeom>
+          <a:solidFill>
+            <a:srgbClr val="3B6E77"/>
+          </a:solidFill>
+          <a:ln/>
+        </p:spPr>
+        <p:txBody>
+          <a:bodyPr/>
+          <a:lstStyle/>
+          <a:p>
+            <a:endParaRPr/>
+          </a:p>
+        </p:txBody>
+      </p:sp>
+      <p:sp>
+        <p:nvSpPr>
+          <p:cNvPr id="9" name="Text 6"/>
+          <p:cNvSpPr/>
+          <p:nvPr/>
+        </p:nvSpPr>
+        <p:spPr>
+          <a:xfrm>
+            <a:off x="548640" y="1481328"/>
+            <a:ext cx="457200" cy="457200"/>
+          </a:xfrm>
+          <a:prstGeom prst="rect">
+            <a:avLst/>
+          </a:prstGeom>
+          <a:noFill/>
+          <a:ln/>
+        </p:spPr>
+        <p:txBody>
+          <a:bodyPr wrap="square" lIns="0" tIns="0" rIns="0" bIns="0" rtlCol="0" anchor="ctr"/>
+          <a:lstStyle/>
+          <a:p>
+            <a:pPr marL="0" indent="0" algn="ctr">
+              <a:buNone/>
+            </a:pPr>
+            <a:r>
+              <a:rPr lang="en-US" sz="1400" b="1" dirty="0">
+                <a:solidFill>
+                  <a:srgbClr val="FFFFFF"/>
+                </a:solidFill>
+                <a:latin typeface="Cambria" pitchFamily="34" charset="0"/>
+                <a:ea typeface="Cambria" pitchFamily="34" charset="-122"/>
+                <a:cs typeface="Cambria" pitchFamily="34" charset="-120"/>
+              </a:rPr>
+              <a:t>1</a:t>
+            </a:r>
+            <a:endParaRPr lang="en-US" sz="1400" dirty="0"/>
+          </a:p>
+        </p:txBody>
+      </p:sp>
+      <p:pic>
+        <p:nvPicPr>
+          <p:cNvPr id="10" name="Image 1" descr="preencoded.png"/>
+          <p:cNvPicPr>
+            <a:picLocks noChangeAspect="1"/>
+          </p:cNvPicPr>
+          <p:nvPr/>
+        </p:nvPicPr>
+        <p:blipFill>
+          <a:blip r:embed="rId4"/>
+          <a:stretch>
+            <a:fillRect/>
+          </a:stretch>
+        </p:blipFill>
+        <p:spPr>
+          <a:xfrm>
+            <a:off x="1143000" y="1554480"/>
+            <a:ext cx="310896" cy="310896"/>
+          </a:xfrm>
+          <a:prstGeom prst="rect">
+            <a:avLst/>
+          </a:prstGeom>
+        </p:spPr>
+      </p:pic>
+      <p:sp>
+        <p:nvSpPr>
+          <p:cNvPr id="11" name="Text 7"/>
+          <p:cNvSpPr/>
+          <p:nvPr/>
+        </p:nvSpPr>
+        <p:spPr>
+          <a:xfrm>
+            <a:off x="1600200" y="1444752"/>
+            <a:ext cx="4206240" cy="320040"/>
+          </a:xfrm>
+          <a:prstGeom prst="rect">
+            <a:avLst/>
+          </a:prstGeom>
+          <a:noFill/>
+          <a:ln/>
+        </p:spPr>
+        <p:txBody>
+          <a:bodyPr wrap="square" lIns="0" tIns="0" rIns="0" bIns="0" rtlCol="0" anchor="ctr"/>
+          <a:lstStyle/>
+          <a:p>
+            <a:pPr marL="0" indent="0">
+              <a:buNone/>
+            </a:pPr>
+            <a:r>
+              <a:rPr lang="en-US" sz="1350" b="1" dirty="0">
+                <a:solidFill>
+                  <a:srgbClr val="2B2320"/>
+                </a:solidFill>
+                <a:latin typeface="Calibri" pitchFamily="34" charset="0"/>
+                <a:ea typeface="Calibri" pitchFamily="34" charset="-122"/>
+                <a:cs typeface="Calibri" pitchFamily="34" charset="-120"/>
+              </a:rPr>
+              <a:t>Formulario de preferencias</a:t>
+            </a:r>
+            <a:endParaRPr lang="en-US" sz="1350" dirty="0"/>
+          </a:p>
+        </p:txBody>
+      </p:sp>
+      <p:sp>
+        <p:nvSpPr>
+          <p:cNvPr id="12" name="Text 8"/>
+          <p:cNvSpPr/>
+          <p:nvPr/>
+        </p:nvSpPr>
+        <p:spPr>
+          <a:xfrm>
+            <a:off x="6035040" y="1463040"/>
+            <a:ext cx="5669280" cy="502920"/>
+          </a:xfrm>
+          <a:prstGeom prst="rect">
+            <a:avLst/>
+          </a:prstGeom>
+          <a:noFill/>
+          <a:ln/>
+        </p:spPr>
+        <p:txBody>
+          <a:bodyPr wrap="square" lIns="0" tIns="0" rIns="0" bIns="0" rtlCol="0" anchor="ctr"/>
+          <a:lstStyle/>
+          <a:p>
+            <a:pPr marL="0" indent="0">
+              <a:buNone/>
+            </a:pPr>
+            <a:r>
+              <a:rPr lang="en-US" sz="1200" dirty="0">
+                <a:solidFill>
+                  <a:srgbClr val="7A6F68"/>
+                </a:solidFill>
+                <a:latin typeface="Calibri" pitchFamily="34" charset="0"/>
+                <a:ea typeface="Calibri" pitchFamily="34" charset="-122"/>
+                <a:cs typeface="Calibri" pitchFamily="34" charset="-120"/>
+              </a:rPr>
+              <a:t>Destino, fechas, tipo, servicios y nivel de exigencia</a:t>
+            </a:r>
+            <a:endParaRPr lang="en-US" sz="1200" dirty="0"/>
+          </a:p>
+        </p:txBody>
+      </p:sp>
+      <p:sp>
+        <p:nvSpPr>
+          <p:cNvPr id="13" name="Shape 9"/>
+          <p:cNvSpPr/>
+          <p:nvPr/>
+        </p:nvSpPr>
+        <p:spPr>
+          <a:xfrm>
+            <a:off x="548640" y="2258568"/>
+            <a:ext cx="457200" cy="457200"/>
+          </a:xfrm>
+          <a:prstGeom prst="ellipse">
+            <a:avLst/>
+          </a:prstGeom>
+          <a:solidFill>
+            <a:srgbClr val="3B6E77"/>
+          </a:solidFill>
+          <a:ln/>
+        </p:spPr>
+        <p:txBody>
+          <a:bodyPr/>
+          <a:lstStyle/>
+          <a:p>
+            <a:endParaRPr/>
+          </a:p>
+        </p:txBody>
+      </p:sp>
+      <p:sp>
+        <p:nvSpPr>
+          <p:cNvPr id="14" name="Text 10"/>
+          <p:cNvSpPr/>
+          <p:nvPr/>
+        </p:nvSpPr>
+        <p:spPr>
+          <a:xfrm>
+            <a:off x="548640" y="2258568"/>
+            <a:ext cx="457200" cy="457200"/>
+          </a:xfrm>
+          <a:prstGeom prst="rect">
+            <a:avLst/>
+          </a:prstGeom>
+          <a:noFill/>
+          <a:ln/>
+        </p:spPr>
+        <p:txBody>
+          <a:bodyPr wrap="square" lIns="0" tIns="0" rIns="0" bIns="0" rtlCol="0" anchor="ctr"/>
+          <a:lstStyle/>
+          <a:p>
+            <a:pPr marL="0" indent="0" algn="ctr">
+              <a:buNone/>
+            </a:pPr>
+            <a:r>
+              <a:rPr lang="en-US" sz="1400" b="1" dirty="0">
+                <a:solidFill>
+                  <a:srgbClr val="FFFFFF"/>
+                </a:solidFill>
+                <a:latin typeface="Cambria" pitchFamily="34" charset="0"/>
+                <a:ea typeface="Cambria" pitchFamily="34" charset="-122"/>
+                <a:cs typeface="Cambria" pitchFamily="34" charset="-120"/>
+              </a:rPr>
+              <a:t>2</a:t>
+            </a:r>
+            <a:endParaRPr lang="en-US" sz="1400" dirty="0"/>
+          </a:p>
+        </p:txBody>
+      </p:sp>
+      <p:pic>
+        <p:nvPicPr>
+          <p:cNvPr id="15" name="Image 2" descr="preencoded.png"/>
+          <p:cNvPicPr>
+            <a:picLocks noChangeAspect="1"/>
+          </p:cNvPicPr>
+          <p:nvPr/>
+        </p:nvPicPr>
+        <p:blipFill>
+          <a:blip r:embed="rId5"/>
+          <a:stretch>
+            <a:fillRect/>
+          </a:stretch>
+        </p:blipFill>
+        <p:spPr>
+          <a:xfrm>
+            <a:off x="1143000" y="2331720"/>
+            <a:ext cx="310896" cy="310896"/>
+          </a:xfrm>
+          <a:prstGeom prst="rect">
+            <a:avLst/>
+          </a:prstGeom>
+        </p:spPr>
+      </p:pic>
+      <p:sp>
+        <p:nvSpPr>
+          <p:cNvPr id="16" name="Text 11"/>
+          <p:cNvSpPr/>
+          <p:nvPr/>
+        </p:nvSpPr>
+        <p:spPr>
+          <a:xfrm>
+            <a:off x="1600200" y="2221992"/>
+            <a:ext cx="4206240" cy="320040"/>
+          </a:xfrm>
+          <a:prstGeom prst="rect">
+            <a:avLst/>
+          </a:prstGeom>
+          <a:noFill/>
+          <a:ln/>
+        </p:spPr>
+        <p:txBody>
+          <a:bodyPr wrap="square" lIns="0" tIns="0" rIns="0" bIns="0" rtlCol="0" anchor="ctr"/>
+          <a:lstStyle/>
+          <a:p>
+            <a:pPr marL="0" indent="0">
+              <a:buNone/>
+            </a:pPr>
+            <a:r>
+              <a:rPr lang="en-US" sz="1350" b="1" dirty="0">
+                <a:solidFill>
+                  <a:srgbClr val="2B2320"/>
+                </a:solidFill>
+                <a:latin typeface="Calibri" pitchFamily="34" charset="0"/>
+                <a:ea typeface="Calibri" pitchFamily="34" charset="-122"/>
+                <a:cs typeface="Calibri" pitchFamily="34" charset="-120"/>
+              </a:rPr>
+              <a:t>Extracción en tiempo real</a:t>
+            </a:r>
+            <a:endParaRPr lang="en-US" sz="1350" dirty="0"/>
+          </a:p>
+        </p:txBody>
+      </p:sp>
+      <p:sp>
+        <p:nvSpPr>
+          <p:cNvPr id="17" name="Text 12"/>
+          <p:cNvSpPr/>
+          <p:nvPr/>
+        </p:nvSpPr>
+        <p:spPr>
+          <a:xfrm>
+            <a:off x="6035040" y="2240280"/>
+            <a:ext cx="5669280" cy="502920"/>
+          </a:xfrm>
+          <a:prstGeom prst="rect">
+            <a:avLst/>
+          </a:prstGeom>
+          <a:noFill/>
+          <a:ln/>
+        </p:spPr>
+        <p:txBody>
+          <a:bodyPr wrap="square" lIns="0" tIns="0" rIns="0" bIns="0" rtlCol="0" anchor="ctr"/>
+          <a:lstStyle/>
+          <a:p>
+            <a:pPr marL="0" indent="0">
+              <a:buNone/>
+            </a:pPr>
+            <a:r>
+              <a:rPr lang="en-US" sz="1200" dirty="0">
+                <a:solidFill>
+                  <a:srgbClr val="7A6F68"/>
+                </a:solidFill>
+                <a:latin typeface="Calibri" pitchFamily="34" charset="0"/>
+                <a:ea typeface="Calibri" pitchFamily="34" charset="-122"/>
+                <a:cs typeface="Calibri" pitchFamily="34" charset="-120"/>
+              </a:rPr>
+              <a:t>Hasta 25 alojamientos por localidad seleccionada</a:t>
+            </a:r>
+            <a:endParaRPr lang="en-US" sz="1200" dirty="0"/>
+          </a:p>
+        </p:txBody>
+      </p:sp>
+      <p:sp>
+        <p:nvSpPr>
+          <p:cNvPr id="18" name="Shape 13"/>
+          <p:cNvSpPr/>
+          <p:nvPr/>
+        </p:nvSpPr>
+        <p:spPr>
+          <a:xfrm>
+            <a:off x="548640" y="3035808"/>
+            <a:ext cx="457200" cy="457200"/>
+          </a:xfrm>
+          <a:prstGeom prst="ellipse">
+            <a:avLst/>
+          </a:prstGeom>
+          <a:solidFill>
+            <a:srgbClr val="3B6E77"/>
+          </a:solidFill>
+          <a:ln/>
+        </p:spPr>
+        <p:txBody>
+          <a:bodyPr/>
+          <a:lstStyle/>
+          <a:p>
+            <a:endParaRPr/>
+          </a:p>
+        </p:txBody>
+      </p:sp>
+      <p:sp>
+        <p:nvSpPr>
+          <p:cNvPr id="19" name="Text 14"/>
+          <p:cNvSpPr/>
+          <p:nvPr/>
+        </p:nvSpPr>
+        <p:spPr>
+          <a:xfrm>
+            <a:off x="548640" y="3035808"/>
+            <a:ext cx="457200" cy="457200"/>
+          </a:xfrm>
+          <a:prstGeom prst="rect">
+            <a:avLst/>
+          </a:prstGeom>
+          <a:noFill/>
+          <a:ln/>
+        </p:spPr>
+        <p:txBody>
+          <a:bodyPr wrap="square" lIns="0" tIns="0" rIns="0" bIns="0" rtlCol="0" anchor="ctr"/>
+          <a:lstStyle/>
+          <a:p>
+            <a:pPr marL="0" indent="0" algn="ctr">
+              <a:buNone/>
+            </a:pPr>
+            <a:r>
+              <a:rPr lang="en-US" sz="1400" b="1" dirty="0">
+                <a:solidFill>
+                  <a:srgbClr val="FFFFFF"/>
+                </a:solidFill>
+                <a:latin typeface="Cambria" pitchFamily="34" charset="0"/>
+                <a:ea typeface="Cambria" pitchFamily="34" charset="-122"/>
+                <a:cs typeface="Cambria" pitchFamily="34" charset="-120"/>
+              </a:rPr>
+              <a:t>3</a:t>
+            </a:r>
+            <a:endParaRPr lang="en-US" sz="1400" dirty="0"/>
+          </a:p>
+        </p:txBody>
+      </p:sp>
+      <p:pic>
+        <p:nvPicPr>
+          <p:cNvPr id="20" name="Image 3" descr="preencoded.png"/>
+          <p:cNvPicPr>
+            <a:picLocks noChangeAspect="1"/>
+          </p:cNvPicPr>
+          <p:nvPr/>
+        </p:nvPicPr>
+        <p:blipFill>
+          <a:blip r:embed="rId6"/>
+          <a:stretch>
+            <a:fillRect/>
+          </a:stretch>
+        </p:blipFill>
+        <p:spPr>
+          <a:xfrm>
+            <a:off x="1143000" y="3108960"/>
+            <a:ext cx="310896" cy="310896"/>
+          </a:xfrm>
+          <a:prstGeom prst="rect">
+            <a:avLst/>
+          </a:prstGeom>
+        </p:spPr>
+      </p:pic>
+      <p:sp>
+        <p:nvSpPr>
+          <p:cNvPr id="21" name="Text 15"/>
+          <p:cNvSpPr/>
+          <p:nvPr/>
+        </p:nvSpPr>
+        <p:spPr>
+          <a:xfrm>
+            <a:off x="1600200" y="2999232"/>
+            <a:ext cx="4206240" cy="320040"/>
+          </a:xfrm>
+          <a:prstGeom prst="rect">
+            <a:avLst/>
+          </a:prstGeom>
+          <a:noFill/>
+          <a:ln/>
+        </p:spPr>
+        <p:txBody>
+          <a:bodyPr wrap="square" lIns="0" tIns="0" rIns="0" bIns="0" rtlCol="0" anchor="ctr"/>
+          <a:lstStyle/>
+          <a:p>
+            <a:pPr marL="0" indent="0">
+              <a:buNone/>
+            </a:pPr>
+            <a:r>
+              <a:rPr lang="en-US" sz="1350" b="1" dirty="0">
+                <a:solidFill>
+                  <a:srgbClr val="2B2320"/>
+                </a:solidFill>
+                <a:latin typeface="Calibri" pitchFamily="34" charset="0"/>
+                <a:ea typeface="Calibri" pitchFamily="34" charset="-122"/>
+                <a:cs typeface="Calibri" pitchFamily="34" charset="-120"/>
+              </a:rPr>
+              <a:t>Preprocesamiento</a:t>
+            </a:r>
+            <a:endParaRPr lang="en-US" sz="1350" dirty="0"/>
+          </a:p>
+        </p:txBody>
+      </p:sp>
+      <p:sp>
+        <p:nvSpPr>
+          <p:cNvPr id="22" name="Text 16"/>
+          <p:cNvSpPr/>
+          <p:nvPr/>
+        </p:nvSpPr>
+        <p:spPr>
+          <a:xfrm>
+            <a:off x="6035040" y="3017520"/>
+            <a:ext cx="5669280" cy="502920"/>
+          </a:xfrm>
+          <a:prstGeom prst="rect">
+            <a:avLst/>
+          </a:prstGeom>
+          <a:noFill/>
+          <a:ln/>
+        </p:spPr>
+        <p:txBody>
+          <a:bodyPr wrap="square" lIns="0" tIns="0" rIns="0" bIns="0" rtlCol="0" anchor="ctr"/>
+          <a:lstStyle/>
+          <a:p>
+            <a:pPr marL="0" indent="0">
+              <a:buNone/>
+            </a:pPr>
+            <a:r>
+              <a:rPr lang="en-US" sz="1200" dirty="0">
+                <a:solidFill>
+                  <a:srgbClr val="7A6F68"/>
+                </a:solidFill>
+                <a:latin typeface="Calibri" pitchFamily="34" charset="0"/>
+                <a:ea typeface="Calibri" pitchFamily="34" charset="-122"/>
+                <a:cs typeface="Calibri" pitchFamily="34" charset="-120"/>
+              </a:rPr>
+              <a:t>Misma secuencia de transformaciones que en el entrenamiento</a:t>
+            </a:r>
+            <a:endParaRPr lang="en-US" sz="1200" dirty="0"/>
+          </a:p>
+        </p:txBody>
+      </p:sp>
+      <p:sp>
+        <p:nvSpPr>
+          <p:cNvPr id="23" name="Shape 17"/>
+          <p:cNvSpPr/>
+          <p:nvPr/>
+        </p:nvSpPr>
+        <p:spPr>
+          <a:xfrm>
+            <a:off x="548640" y="3813048"/>
+            <a:ext cx="457200" cy="457200"/>
+          </a:xfrm>
+          <a:prstGeom prst="ellipse">
+            <a:avLst/>
+          </a:prstGeom>
+          <a:solidFill>
+            <a:srgbClr val="3B6E77"/>
+          </a:solidFill>
+          <a:ln/>
+        </p:spPr>
+        <p:txBody>
+          <a:bodyPr/>
+          <a:lstStyle/>
+          <a:p>
+            <a:endParaRPr/>
+          </a:p>
+        </p:txBody>
+      </p:sp>
+      <p:sp>
+        <p:nvSpPr>
+          <p:cNvPr id="24" name="Text 18"/>
+          <p:cNvSpPr/>
+          <p:nvPr/>
+        </p:nvSpPr>
+        <p:spPr>
+          <a:xfrm>
+            <a:off x="548640" y="3813048"/>
+            <a:ext cx="457200" cy="457200"/>
+          </a:xfrm>
+          <a:prstGeom prst="rect">
+            <a:avLst/>
+          </a:prstGeom>
+          <a:noFill/>
+          <a:ln/>
+        </p:spPr>
+        <p:txBody>
+          <a:bodyPr wrap="square" lIns="0" tIns="0" rIns="0" bIns="0" rtlCol="0" anchor="ctr"/>
+          <a:lstStyle/>
+          <a:p>
+            <a:pPr marL="0" indent="0" algn="ctr">
+              <a:buNone/>
+            </a:pPr>
+            <a:r>
+              <a:rPr lang="en-US" sz="1400" b="1" dirty="0">
+                <a:solidFill>
+                  <a:srgbClr val="FFFFFF"/>
+                </a:solidFill>
+                <a:latin typeface="Cambria" pitchFamily="34" charset="0"/>
+                <a:ea typeface="Cambria" pitchFamily="34" charset="-122"/>
+                <a:cs typeface="Cambria" pitchFamily="34" charset="-120"/>
+              </a:rPr>
+              <a:t>4</a:t>
+            </a:r>
+            <a:endParaRPr lang="en-US" sz="1400" dirty="0"/>
+          </a:p>
+        </p:txBody>
+      </p:sp>
+      <p:pic>
+        <p:nvPicPr>
+          <p:cNvPr id="25" name="Image 4" descr="preencoded.png"/>
+          <p:cNvPicPr>
+            <a:picLocks noChangeAspect="1"/>
+          </p:cNvPicPr>
+          <p:nvPr/>
+        </p:nvPicPr>
+        <p:blipFill>
+          <a:blip r:embed="rId7"/>
+          <a:stretch>
+            <a:fillRect/>
+          </a:stretch>
+        </p:blipFill>
+        <p:spPr>
+          <a:xfrm>
+            <a:off x="1143000" y="3886200"/>
+            <a:ext cx="310896" cy="310896"/>
+          </a:xfrm>
+          <a:prstGeom prst="rect">
+            <a:avLst/>
+          </a:prstGeom>
+        </p:spPr>
+      </p:pic>
+      <p:sp>
+        <p:nvSpPr>
+          <p:cNvPr id="26" name="Text 19"/>
+          <p:cNvSpPr/>
+          <p:nvPr/>
+        </p:nvSpPr>
+        <p:spPr>
+          <a:xfrm>
+            <a:off x="1600200" y="3776472"/>
+            <a:ext cx="4206240" cy="320040"/>
+          </a:xfrm>
+          <a:prstGeom prst="rect">
+            <a:avLst/>
+          </a:prstGeom>
+          <a:noFill/>
+          <a:ln/>
+        </p:spPr>
+        <p:txBody>
+          <a:bodyPr wrap="square" lIns="0" tIns="0" rIns="0" bIns="0" rtlCol="0" anchor="ctr"/>
+          <a:lstStyle/>
+          <a:p>
+            <a:pPr marL="0" indent="0">
+              <a:buNone/>
+            </a:pPr>
+            <a:r>
+              <a:rPr lang="en-US" sz="1350" b="1" dirty="0">
+                <a:solidFill>
+                  <a:srgbClr val="2B2320"/>
+                </a:solidFill>
+                <a:latin typeface="Calibri" pitchFamily="34" charset="0"/>
+                <a:ea typeface="Calibri" pitchFamily="34" charset="-122"/>
+                <a:cs typeface="Calibri" pitchFamily="34" charset="-120"/>
+              </a:rPr>
+              <a:t>Codificación</a:t>
+            </a:r>
+            <a:endParaRPr lang="en-US" sz="1350" dirty="0"/>
+          </a:p>
+        </p:txBody>
+      </p:sp>
+      <p:sp>
+        <p:nvSpPr>
+          <p:cNvPr id="27" name="Text 20"/>
+          <p:cNvSpPr/>
+          <p:nvPr/>
+        </p:nvSpPr>
+        <p:spPr>
+          <a:xfrm>
+            <a:off x="6035040" y="3794760"/>
+            <a:ext cx="5669280" cy="502920"/>
+          </a:xfrm>
+          <a:prstGeom prst="rect">
+            <a:avLst/>
+          </a:prstGeom>
+          <a:noFill/>
+          <a:ln/>
+        </p:spPr>
+        <p:txBody>
+          <a:bodyPr wrap="square" lIns="0" tIns="0" rIns="0" bIns="0" rtlCol="0" anchor="ctr"/>
+          <a:lstStyle/>
+          <a:p>
+            <a:pPr marL="0" indent="0">
+              <a:buNone/>
+            </a:pPr>
+            <a:r>
+              <a:rPr lang="en-US" sz="1200" dirty="0">
+                <a:solidFill>
+                  <a:srgbClr val="7A6F68"/>
+                </a:solidFill>
+                <a:latin typeface="Calibri" pitchFamily="34" charset="0"/>
+                <a:ea typeface="Calibri" pitchFamily="34" charset="-122"/>
+                <a:cs typeface="Calibri" pitchFamily="34" charset="-120"/>
+              </a:rPr>
+              <a:t>Encoders serializados con joblib (mismo espacio de características)</a:t>
+            </a:r>
+            <a:endParaRPr lang="en-US" sz="1200" dirty="0"/>
+          </a:p>
+        </p:txBody>
+      </p:sp>
+      <p:sp>
+        <p:nvSpPr>
+          <p:cNvPr id="28" name="Shape 21"/>
+          <p:cNvSpPr/>
+          <p:nvPr/>
+        </p:nvSpPr>
+        <p:spPr>
+          <a:xfrm>
+            <a:off x="548640" y="4590288"/>
+            <a:ext cx="457200" cy="457200"/>
+          </a:xfrm>
+          <a:prstGeom prst="ellipse">
+            <a:avLst/>
+          </a:prstGeom>
+          <a:solidFill>
+            <a:srgbClr val="B8563A"/>
+          </a:solidFill>
+          <a:ln/>
+        </p:spPr>
+        <p:txBody>
+          <a:bodyPr/>
+          <a:lstStyle/>
+          <a:p>
+            <a:endParaRPr/>
+          </a:p>
+        </p:txBody>
+      </p:sp>
+      <p:sp>
+        <p:nvSpPr>
+          <p:cNvPr id="29" name="Text 22"/>
+          <p:cNvSpPr/>
+          <p:nvPr/>
+        </p:nvSpPr>
+        <p:spPr>
+          <a:xfrm>
+            <a:off x="548640" y="4590288"/>
+            <a:ext cx="457200" cy="457200"/>
+          </a:xfrm>
+          <a:prstGeom prst="rect">
+            <a:avLst/>
+          </a:prstGeom>
+          <a:noFill/>
+          <a:ln/>
+        </p:spPr>
+        <p:txBody>
+          <a:bodyPr wrap="square" lIns="0" tIns="0" rIns="0" bIns="0" rtlCol="0" anchor="ctr"/>
+          <a:lstStyle/>
+          <a:p>
+            <a:pPr marL="0" indent="0" algn="ctr">
+              <a:buNone/>
+            </a:pPr>
+            <a:r>
+              <a:rPr lang="en-US" sz="1400" b="1" dirty="0">
+                <a:solidFill>
+                  <a:srgbClr val="FFFFFF"/>
+                </a:solidFill>
+                <a:latin typeface="Cambria" pitchFamily="34" charset="0"/>
+                <a:ea typeface="Cambria" pitchFamily="34" charset="-122"/>
+                <a:cs typeface="Cambria" pitchFamily="34" charset="-120"/>
+              </a:rPr>
+              <a:t>5</a:t>
+            </a:r>
+            <a:endParaRPr lang="en-US" sz="1400" dirty="0"/>
+          </a:p>
+        </p:txBody>
+      </p:sp>
+      <p:pic>
+        <p:nvPicPr>
+          <p:cNvPr id="30" name="Image 5" descr="preencoded.png"/>
+          <p:cNvPicPr>
+            <a:picLocks noChangeAspect="1"/>
+          </p:cNvPicPr>
+          <p:nvPr/>
+        </p:nvPicPr>
+        <p:blipFill>
+          <a:blip r:embed="rId8"/>
+          <a:stretch>
+            <a:fillRect/>
+          </a:stretch>
+        </p:blipFill>
+        <p:spPr>
+          <a:xfrm>
+            <a:off x="1143000" y="4663440"/>
+            <a:ext cx="310896" cy="310896"/>
+          </a:xfrm>
+          <a:prstGeom prst="rect">
+            <a:avLst/>
+          </a:prstGeom>
+        </p:spPr>
+      </p:pic>
+      <p:sp>
+        <p:nvSpPr>
+          <p:cNvPr id="31" name="Text 23"/>
+          <p:cNvSpPr/>
+          <p:nvPr/>
+        </p:nvSpPr>
+        <p:spPr>
+          <a:xfrm>
+            <a:off x="1600200" y="4553712"/>
+            <a:ext cx="4206240" cy="320040"/>
+          </a:xfrm>
+          <a:prstGeom prst="rect">
+            <a:avLst/>
+          </a:prstGeom>
+          <a:noFill/>
+          <a:ln/>
+        </p:spPr>
+        <p:txBody>
+          <a:bodyPr wrap="square" lIns="0" tIns="0" rIns="0" bIns="0" rtlCol="0" anchor="ctr"/>
+          <a:lstStyle/>
+          <a:p>
+            <a:pPr marL="0" indent="0">
+              <a:buNone/>
+            </a:pPr>
+            <a:r>
+              <a:rPr lang="en-US" sz="1350" b="1" dirty="0">
+                <a:solidFill>
+                  <a:srgbClr val="2B2320"/>
+                </a:solidFill>
+                <a:latin typeface="Calibri" pitchFamily="34" charset="0"/>
+                <a:ea typeface="Calibri" pitchFamily="34" charset="-122"/>
+                <a:cs typeface="Calibri" pitchFamily="34" charset="-120"/>
+              </a:rPr>
+              <a:t>Predicción y categorización</a:t>
+            </a:r>
+            <a:endParaRPr lang="en-US" sz="1350" dirty="0"/>
+          </a:p>
+        </p:txBody>
+      </p:sp>
+      <p:sp>
+        <p:nvSpPr>
+          <p:cNvPr id="32" name="Text 24"/>
+          <p:cNvSpPr/>
+          <p:nvPr/>
+        </p:nvSpPr>
+        <p:spPr>
+          <a:xfrm>
+            <a:off x="6035040" y="4572000"/>
+            <a:ext cx="5669280" cy="502920"/>
+          </a:xfrm>
+          <a:prstGeom prst="rect">
+            <a:avLst/>
+          </a:prstGeom>
+          <a:noFill/>
+          <a:ln/>
+        </p:spPr>
+        <p:txBody>
+          <a:bodyPr wrap="square" lIns="0" tIns="0" rIns="0" bIns="0" rtlCol="0" anchor="ctr"/>
+          <a:lstStyle/>
+          <a:p>
+            <a:pPr marL="0" indent="0">
+              <a:buNone/>
+            </a:pPr>
+            <a:r>
+              <a:rPr lang="en-US" sz="1200" dirty="0">
+                <a:solidFill>
+                  <a:srgbClr val="7A6F68"/>
+                </a:solidFill>
+                <a:latin typeface="Calibri" pitchFamily="34" charset="0"/>
+                <a:ea typeface="Calibri" pitchFamily="34" charset="-122"/>
+                <a:cs typeface="Calibri" pitchFamily="34" charset="-120"/>
+              </a:rPr>
+              <a:t>Modelo podado + ratio r + umbrales del nivel elegido</a:t>
+            </a:r>
+            <a:endParaRPr lang="en-US" sz="1200" dirty="0"/>
+          </a:p>
+        </p:txBody>
+      </p:sp>
+      <p:sp>
+        <p:nvSpPr>
+          <p:cNvPr id="33" name="Shape 25"/>
+          <p:cNvSpPr/>
+          <p:nvPr/>
+        </p:nvSpPr>
+        <p:spPr>
+          <a:xfrm>
+            <a:off x="548640" y="5367528"/>
+            <a:ext cx="457200" cy="457200"/>
+          </a:xfrm>
+          <a:prstGeom prst="ellipse">
+            <a:avLst/>
+          </a:prstGeom>
+          <a:solidFill>
+            <a:srgbClr val="3B6E77"/>
+          </a:solidFill>
+          <a:ln/>
+        </p:spPr>
+        <p:txBody>
+          <a:bodyPr/>
+          <a:lstStyle/>
+          <a:p>
+            <a:endParaRPr/>
+          </a:p>
+        </p:txBody>
+      </p:sp>
+      <p:sp>
+        <p:nvSpPr>
+          <p:cNvPr id="34" name="Text 26"/>
+          <p:cNvSpPr/>
+          <p:nvPr/>
+        </p:nvSpPr>
+        <p:spPr>
+          <a:xfrm>
+            <a:off x="548640" y="5367528"/>
+            <a:ext cx="457200" cy="457200"/>
+          </a:xfrm>
+          <a:prstGeom prst="rect">
+            <a:avLst/>
+          </a:prstGeom>
+          <a:noFill/>
+          <a:ln/>
+        </p:spPr>
+        <p:txBody>
+          <a:bodyPr wrap="square" lIns="0" tIns="0" rIns="0" bIns="0" rtlCol="0" anchor="ctr"/>
+          <a:lstStyle/>
+          <a:p>
+            <a:pPr marL="0" indent="0" algn="ctr">
+              <a:buNone/>
+            </a:pPr>
+            <a:r>
+              <a:rPr lang="en-US" sz="1400" b="1" dirty="0">
+                <a:solidFill>
+                  <a:srgbClr val="FFFFFF"/>
+                </a:solidFill>
+                <a:latin typeface="Cambria" pitchFamily="34" charset="0"/>
+                <a:ea typeface="Cambria" pitchFamily="34" charset="-122"/>
+                <a:cs typeface="Cambria" pitchFamily="34" charset="-120"/>
+              </a:rPr>
+              <a:t>6</a:t>
+            </a:r>
+            <a:endParaRPr lang="en-US" sz="1400" dirty="0"/>
+          </a:p>
+        </p:txBody>
+      </p:sp>
+      <p:pic>
+        <p:nvPicPr>
+          <p:cNvPr id="35" name="Image 6" descr="preencoded.png"/>
+          <p:cNvPicPr>
+            <a:picLocks noChangeAspect="1"/>
+          </p:cNvPicPr>
+          <p:nvPr/>
+        </p:nvPicPr>
+        <p:blipFill>
+          <a:blip r:embed="rId9"/>
+          <a:stretch>
+            <a:fillRect/>
+          </a:stretch>
+        </p:blipFill>
+        <p:spPr>
+          <a:xfrm>
+            <a:off x="1143000" y="5440680"/>
+            <a:ext cx="310896" cy="310896"/>
+          </a:xfrm>
+          <a:prstGeom prst="rect">
+            <a:avLst/>
+          </a:prstGeom>
+        </p:spPr>
+      </p:pic>
+      <p:sp>
+        <p:nvSpPr>
+          <p:cNvPr id="36" name="Text 27"/>
+          <p:cNvSpPr/>
+          <p:nvPr/>
+        </p:nvSpPr>
+        <p:spPr>
+          <a:xfrm>
+            <a:off x="1600200" y="5330952"/>
+            <a:ext cx="4206240" cy="320040"/>
+          </a:xfrm>
+          <a:prstGeom prst="rect">
+            <a:avLst/>
+          </a:prstGeom>
+          <a:noFill/>
+          <a:ln/>
+        </p:spPr>
+        <p:txBody>
+          <a:bodyPr wrap="square" lIns="0" tIns="0" rIns="0" bIns="0" rtlCol="0" anchor="ctr"/>
+          <a:lstStyle/>
+          <a:p>
+            <a:pPr marL="0" indent="0">
+              <a:buNone/>
+            </a:pPr>
+            <a:r>
+              <a:rPr lang="en-US" sz="1350" b="1" dirty="0">
+                <a:solidFill>
+                  <a:srgbClr val="2B2320"/>
+                </a:solidFill>
+                <a:latin typeface="Calibri" pitchFamily="34" charset="0"/>
+                <a:ea typeface="Calibri" pitchFamily="34" charset="-122"/>
+                <a:cs typeface="Calibri" pitchFamily="34" charset="-120"/>
+              </a:rPr>
+              <a:t>Presentación de resultados</a:t>
+            </a:r>
+            <a:endParaRPr lang="en-US" sz="1350" dirty="0"/>
+          </a:p>
+        </p:txBody>
+      </p:sp>
+      <p:sp>
+        <p:nvSpPr>
+          <p:cNvPr id="37" name="Text 28"/>
+          <p:cNvSpPr/>
+          <p:nvPr/>
+        </p:nvSpPr>
+        <p:spPr>
+          <a:xfrm>
+            <a:off x="6035040" y="5349240"/>
+            <a:ext cx="5669280" cy="502920"/>
+          </a:xfrm>
+          <a:prstGeom prst="rect">
+            <a:avLst/>
+          </a:prstGeom>
+          <a:noFill/>
+          <a:ln/>
+        </p:spPr>
+        <p:txBody>
+          <a:bodyPr wrap="square" lIns="0" tIns="0" rIns="0" bIns="0" rtlCol="0" anchor="ctr"/>
+          <a:lstStyle/>
+          <a:p>
+            <a:pPr marL="0" indent="0">
+              <a:buNone/>
+            </a:pPr>
+            <a:r>
+              <a:rPr lang="en-US" sz="1200" dirty="0">
+                <a:solidFill>
+                  <a:srgbClr val="7A6F68"/>
+                </a:solidFill>
+                <a:latin typeface="Calibri" pitchFamily="34" charset="0"/>
+                <a:ea typeface="Calibri" pitchFamily="34" charset="-122"/>
+                <a:cs typeface="Calibri" pitchFamily="34" charset="-120"/>
+              </a:rPr>
+              <a:t>Tabla ordenada por ahorro y gráfico de categorías</a:t>
+            </a:r>
+            <a:endParaRPr lang="en-US" sz="1200" dirty="0"/>
+          </a:p>
+        </p:txBody>
+      </p:sp>
+    </p:spTree>
+  </p:cSld>
+  <p:clrMapOvr>
+    <a:masterClrMapping/>
+  </p:clrMapOvr>
+</p:sld>
+</file>
+
+<file path=ppt/slides/slide21.xml><?xml version="1.0" encoding="utf-8"?>
 <p:sld xmlns:a="http://schemas.openxmlformats.org/drawingml/2006/main" xmlns:r="http://schemas.openxmlformats.org/officeDocument/2006/relationships" xmlns:p="http://schemas.openxmlformats.org/presentationml/2006/main">
   <p:cSld name="Slide 20">
     <p:bg>
@@ -20441,7 +21104,7 @@
                 <a:ea typeface="Calibri" pitchFamily="34" charset="-122"/>
                 <a:cs typeface="Calibri" pitchFamily="34" charset="-120"/>
               </a:rPr>
-              <a:t>20 / 23</a:t>
+              <a:t>21 / 24</a:t>
             </a:r>
             <a:endParaRPr lang="en-US" sz="900" dirty="0"/>
           </a:p>
@@ -20466,6 +21129,13 @@
           </a:solidFill>
           <a:ln/>
         </p:spPr>
+        <p:txBody>
+          <a:bodyPr/>
+          <a:lstStyle/>
+          <a:p>
+            <a:endParaRPr/>
+          </a:p>
+        </p:txBody>
       </p:sp>
       <p:sp>
         <p:nvSpPr>
@@ -20599,6 +21269,13 @@
             </a:outerShdw>
           </a:effectLst>
         </p:spPr>
+        <p:txBody>
+          <a:bodyPr/>
+          <a:lstStyle/>
+          <a:p>
+            <a:endParaRPr/>
+          </a:p>
+        </p:txBody>
       </p:sp>
       <p:sp>
         <p:nvSpPr>
@@ -21104,6 +21781,13 @@
             </a:outerShdw>
           </a:effectLst>
         </p:spPr>
+        <p:txBody>
+          <a:bodyPr/>
+          <a:lstStyle/>
+          <a:p>
+            <a:endParaRPr/>
+          </a:p>
+        </p:txBody>
       </p:sp>
       <p:sp>
         <p:nvSpPr>
@@ -21417,49 +22101,49 @@
           <p:nvPr>
             <p:extLst>
               <p:ext uri="{D42A27DB-BD31-4B8C-83A1-F6EECF244321}">
-                <p14:modId xmlns:p14="http://schemas.microsoft.com/office/powerpoint/2010/main" val="103355414"/>
+                <p14:modId xmlns:p14="http://schemas.microsoft.com/office/powerpoint/2010/main" val="1625249065"/>
               </p:ext>
             </p:extLst>
           </p:nvPr>
         </p:nvGraphicFramePr>
         <p:xfrm>
-          <a:off x="548640" y="4526280"/>
-          <a:ext cx="8138160" cy="830580"/>
+          <a:off x="1705011" y="4535424"/>
+          <a:ext cx="8477178" cy="977229"/>
         </p:xfrm>
         <a:graphic>
           <a:graphicData uri="http://schemas.openxmlformats.org/drawingml/2006/table">
             <a:tbl>
               <a:tblPr/>
               <a:tblGrid>
-                <a:gridCol w="2468880">
+                <a:gridCol w="2571728">
                   <a:extLst>
                     <a:ext uri="{9D8B030D-6E8A-4147-A177-3AD203B41FA5}">
                       <a16:colId xmlns:a16="http://schemas.microsoft.com/office/drawing/2014/main" val="20000"/>
                     </a:ext>
                   </a:extLst>
                 </a:gridCol>
-                <a:gridCol w="1280160">
+                <a:gridCol w="1333489">
                   <a:extLst>
                     <a:ext uri="{9D8B030D-6E8A-4147-A177-3AD203B41FA5}">
                       <a16:colId xmlns:a16="http://schemas.microsoft.com/office/drawing/2014/main" val="20001"/>
                     </a:ext>
                   </a:extLst>
                 </a:gridCol>
-                <a:gridCol w="1280160">
+                <a:gridCol w="1333489">
                   <a:extLst>
                     <a:ext uri="{9D8B030D-6E8A-4147-A177-3AD203B41FA5}">
                       <a16:colId xmlns:a16="http://schemas.microsoft.com/office/drawing/2014/main" val="20002"/>
                     </a:ext>
                   </a:extLst>
                 </a:gridCol>
-                <a:gridCol w="1463040">
+                <a:gridCol w="1523987">
                   <a:extLst>
                     <a:ext uri="{9D8B030D-6E8A-4147-A177-3AD203B41FA5}">
                       <a16:colId xmlns:a16="http://schemas.microsoft.com/office/drawing/2014/main" val="20003"/>
                     </a:ext>
                   </a:extLst>
                 </a:gridCol>
-                <a:gridCol w="1645920">
+                <a:gridCol w="1714485">
                   <a:extLst>
                     <a:ext uri="{9D8B030D-6E8A-4147-A177-3AD203B41FA5}">
                       <a16:colId xmlns:a16="http://schemas.microsoft.com/office/drawing/2014/main" val="20004"/>
@@ -21467,7 +22151,7 @@
                   </a:extLst>
                 </a:gridCol>
               </a:tblGrid>
-              <a:tr h="0">
+              <a:tr h="313789">
                 <a:tc>
                   <a:txBody>
                     <a:bodyPr/>
@@ -21814,7 +22498,7 @@
                   </a:ext>
                 </a:extLst>
               </a:tr>
-              <a:tr h="0">
+              <a:tr h="331720">
                 <a:tc>
                   <a:txBody>
                     <a:bodyPr/>
@@ -22146,7 +22830,7 @@
                   </a:ext>
                 </a:extLst>
               </a:tr>
-              <a:tr h="0">
+              <a:tr h="331720">
                 <a:tc>
                   <a:txBody>
                     <a:bodyPr/>
@@ -22525,8 +23209,8 @@
         </p:nvSpPr>
         <p:spPr>
           <a:xfrm>
-            <a:off x="548640" y="5532120"/>
-            <a:ext cx="8138160" cy="731520"/>
+            <a:off x="1705011" y="5631406"/>
+            <a:ext cx="8477178" cy="376547"/>
           </a:xfrm>
           <a:prstGeom prst="rect">
             <a:avLst/>
@@ -22567,8 +23251,8 @@
         </p:nvSpPr>
         <p:spPr>
           <a:xfrm>
-            <a:off x="6245352" y="3840480"/>
-            <a:ext cx="5394960" cy="566928"/>
+            <a:off x="6245352" y="3734946"/>
+            <a:ext cx="5394960" cy="437359"/>
           </a:xfrm>
           <a:prstGeom prst="roundRect">
             <a:avLst>
@@ -22576,7 +23260,10 @@
             </a:avLst>
           </a:prstGeom>
           <a:solidFill>
-            <a:srgbClr val="D99A3D"/>
+            <a:schemeClr val="accent1">
+              <a:lumMod val="20000"/>
+              <a:lumOff val="80000"/>
+            </a:schemeClr>
           </a:solidFill>
           <a:ln>
             <a:noFill/>
@@ -22627,7 +23314,7 @@
                 </a:solidFill>
                 <a:latin typeface="Calibri"/>
               </a:rPr>
-              <a:t> RAM (1/4 del original)</a:t>
+              <a:t> RAM </a:t>
             </a:r>
             <a:r>
               <a:rPr lang="es-ES" sz="1250" b="1" dirty="0">
@@ -22636,14 +23323,71 @@
                 </a:solidFill>
                 <a:latin typeface="Calibri"/>
               </a:rPr>
-              <a:t> y 59MB en disco</a:t>
-            </a:r>
-            <a:endParaRPr sz="1250" b="1" dirty="0">
-              <a:solidFill>
-                <a:srgbClr val="241A16"/>
-              </a:solidFill>
-              <a:latin typeface="Calibri"/>
-            </a:endParaRPr>
+              <a:t>es </a:t>
+            </a:r>
+            <a:r>
+              <a:rPr sz="1250" b="1" dirty="0">
+                <a:solidFill>
+                  <a:srgbClr val="241A16"/>
+                </a:solidFill>
+                <a:latin typeface="Calibri"/>
+              </a:rPr>
+              <a:t>1/4 del original</a:t>
+            </a:r>
+            <a:r>
+              <a:rPr lang="es-ES" sz="1250" b="1" dirty="0">
+                <a:solidFill>
+                  <a:srgbClr val="241A16"/>
+                </a:solidFill>
+                <a:latin typeface="Calibri"/>
+              </a:rPr>
+              <a:t> y</a:t>
+            </a:r>
+            <a:r>
+              <a:rPr sz="1250" b="1" dirty="0">
+                <a:solidFill>
+                  <a:srgbClr val="241A16"/>
+                </a:solidFill>
+                <a:latin typeface="Calibri"/>
+              </a:rPr>
+              <a:t> 59MB </a:t>
+            </a:r>
+            <a:r>
+              <a:rPr sz="1250" b="1" dirty="0" err="1">
+                <a:solidFill>
+                  <a:srgbClr val="241A16"/>
+                </a:solidFill>
+                <a:latin typeface="Calibri"/>
+              </a:rPr>
+              <a:t>en</a:t>
+            </a:r>
+            <a:r>
+              <a:rPr sz="1250" b="1" dirty="0">
+                <a:solidFill>
+                  <a:srgbClr val="241A16"/>
+                </a:solidFill>
+                <a:latin typeface="Calibri"/>
+              </a:rPr>
+              <a:t> disco </a:t>
+            </a:r>
+            <a:r>
+              <a:rPr lang="es-ES" sz="1250" b="1" dirty="0">
+                <a:solidFill>
+                  <a:srgbClr val="241A16"/>
+                </a:solidFill>
+                <a:latin typeface="Calibri"/>
+              </a:rPr>
+              <a:t>es </a:t>
+            </a:r>
+            <a:r>
+              <a:rPr sz="1250" b="1" dirty="0">
+                <a:solidFill>
+                  <a:srgbClr val="241A16"/>
+                </a:solidFill>
+                <a:latin typeface="Calibri"/>
+              </a:rPr>
+              <a:t>~1/22 del original</a:t>
+            </a:r>
           </a:p>
         </p:txBody>
       </p:sp>
@@ -22655,7 +23399,7 @@
 </p:sld>
 </file>
 
-<file path=ppt/slides/slide21.xml><?xml version="1.0" encoding="utf-8"?>
+<file path=ppt/slides/slide22.xml><?xml version="1.0" encoding="utf-8"?>
 <p:sld xmlns:a="http://schemas.openxmlformats.org/drawingml/2006/main" xmlns:r="http://schemas.openxmlformats.org/officeDocument/2006/relationships" xmlns:p="http://schemas.openxmlformats.org/presentationml/2006/main">
   <p:cSld name="Slide 21">
     <p:bg>
@@ -22752,7 +23496,7 @@
                 <a:ea typeface="Calibri" pitchFamily="34" charset="-122"/>
                 <a:cs typeface="Calibri" pitchFamily="34" charset="-120"/>
               </a:rPr>
-              <a:t>21 / 23</a:t>
+              <a:t>22 / 24</a:t>
             </a:r>
             <a:endParaRPr lang="en-US" sz="900" dirty="0"/>
           </a:p>
@@ -22777,6 +23521,13 @@
           </a:solidFill>
           <a:ln/>
         </p:spPr>
+        <p:txBody>
+          <a:bodyPr/>
+          <a:lstStyle/>
+          <a:p>
+            <a:endParaRPr/>
+          </a:p>
+        </p:txBody>
       </p:sp>
       <p:sp>
         <p:nvSpPr>
@@ -22908,6 +23659,13 @@
             </a:outerShdw>
           </a:effectLst>
         </p:spPr>
+        <p:txBody>
+          <a:bodyPr/>
+          <a:lstStyle/>
+          <a:p>
+            <a:endParaRPr/>
+          </a:p>
+        </p:txBody>
       </p:sp>
       <p:sp>
         <p:nvSpPr>
@@ -22928,6 +23686,13 @@
           </a:solidFill>
           <a:ln/>
         </p:spPr>
+        <p:txBody>
+          <a:bodyPr/>
+          <a:lstStyle/>
+          <a:p>
+            <a:endParaRPr/>
+          </a:p>
+        </p:txBody>
       </p:sp>
       <p:pic>
         <p:nvPicPr>
@@ -23059,6 +23824,13 @@
             </a:outerShdw>
           </a:effectLst>
         </p:spPr>
+        <p:txBody>
+          <a:bodyPr/>
+          <a:lstStyle/>
+          <a:p>
+            <a:endParaRPr/>
+          </a:p>
+        </p:txBody>
       </p:sp>
       <p:sp>
         <p:nvSpPr>
@@ -23079,6 +23851,13 @@
           </a:solidFill>
           <a:ln/>
         </p:spPr>
+        <p:txBody>
+          <a:bodyPr/>
+          <a:lstStyle/>
+          <a:p>
+            <a:endParaRPr/>
+          </a:p>
+        </p:txBody>
       </p:sp>
       <p:pic>
         <p:nvPicPr>
@@ -23210,6 +23989,13 @@
             </a:outerShdw>
           </a:effectLst>
         </p:spPr>
+        <p:txBody>
+          <a:bodyPr/>
+          <a:lstStyle/>
+          <a:p>
+            <a:endParaRPr/>
+          </a:p>
+        </p:txBody>
       </p:sp>
       <p:sp>
         <p:nvSpPr>
@@ -23230,6 +24016,13 @@
           </a:solidFill>
           <a:ln/>
         </p:spPr>
+        <p:txBody>
+          <a:bodyPr/>
+          <a:lstStyle/>
+          <a:p>
+            <a:endParaRPr/>
+          </a:p>
+        </p:txBody>
       </p:sp>
       <p:pic>
         <p:nvPicPr>
@@ -23361,6 +24154,13 @@
             </a:outerShdw>
           </a:effectLst>
         </p:spPr>
+        <p:txBody>
+          <a:bodyPr/>
+          <a:lstStyle/>
+          <a:p>
+            <a:endParaRPr/>
+          </a:p>
+        </p:txBody>
       </p:sp>
       <p:sp>
         <p:nvSpPr>
@@ -23381,6 +24181,13 @@
           </a:solidFill>
           <a:ln/>
         </p:spPr>
+        <p:txBody>
+          <a:bodyPr/>
+          <a:lstStyle/>
+          <a:p>
+            <a:endParaRPr/>
+          </a:p>
+        </p:txBody>
       </p:sp>
       <p:pic>
         <p:nvPicPr>
@@ -23492,7 +24299,7 @@
 </p:sld>
 </file>
 
-<file path=ppt/slides/slide22.xml><?xml version="1.0" encoding="utf-8"?>
+<file path=ppt/slides/slide23.xml><?xml version="1.0" encoding="utf-8"?>
 <p:sld xmlns:a="http://schemas.openxmlformats.org/drawingml/2006/main" xmlns:r="http://schemas.openxmlformats.org/officeDocument/2006/relationships" xmlns:p="http://schemas.openxmlformats.org/presentationml/2006/main">
   <p:cSld name="Slide 22">
     <p:bg>
@@ -23589,7 +24396,7 @@
                 <a:ea typeface="Calibri" pitchFamily="34" charset="-122"/>
                 <a:cs typeface="Calibri" pitchFamily="34" charset="-120"/>
               </a:rPr>
-              <a:t>22 / 23</a:t>
+              <a:t>23 / 24</a:t>
             </a:r>
             <a:endParaRPr lang="en-US" sz="900" dirty="0"/>
           </a:p>
@@ -23614,6 +24421,13 @@
           </a:solidFill>
           <a:ln/>
         </p:spPr>
+        <p:txBody>
+          <a:bodyPr/>
+          <a:lstStyle/>
+          <a:p>
+            <a:endParaRPr/>
+          </a:p>
+        </p:txBody>
       </p:sp>
       <p:sp>
         <p:nvSpPr>
@@ -23736,6 +24550,13 @@
           </a:solidFill>
           <a:ln/>
         </p:spPr>
+        <p:txBody>
+          <a:bodyPr/>
+          <a:lstStyle/>
+          <a:p>
+            <a:endParaRPr/>
+          </a:p>
+        </p:txBody>
       </p:sp>
       <p:pic>
         <p:nvPicPr>
@@ -23858,6 +24679,13 @@
           </a:solidFill>
           <a:ln/>
         </p:spPr>
+        <p:txBody>
+          <a:bodyPr/>
+          <a:lstStyle/>
+          <a:p>
+            <a:endParaRPr/>
+          </a:p>
+        </p:txBody>
       </p:sp>
       <p:pic>
         <p:nvPicPr>
@@ -23980,6 +24808,13 @@
           </a:solidFill>
           <a:ln/>
         </p:spPr>
+        <p:txBody>
+          <a:bodyPr/>
+          <a:lstStyle/>
+          <a:p>
+            <a:endParaRPr/>
+          </a:p>
+        </p:txBody>
       </p:sp>
       <p:pic>
         <p:nvPicPr>
@@ -24102,6 +24937,13 @@
           </a:solidFill>
           <a:ln/>
         </p:spPr>
+        <p:txBody>
+          <a:bodyPr/>
+          <a:lstStyle/>
+          <a:p>
+            <a:endParaRPr/>
+          </a:p>
+        </p:txBody>
       </p:sp>
       <p:pic>
         <p:nvPicPr>
@@ -24224,6 +25066,13 @@
           </a:solidFill>
           <a:ln/>
         </p:spPr>
+        <p:txBody>
+          <a:bodyPr/>
+          <a:lstStyle/>
+          <a:p>
+            <a:endParaRPr/>
+          </a:p>
+        </p:txBody>
       </p:sp>
       <p:pic>
         <p:nvPicPr>
@@ -24335,7 +25184,7 @@
 </p:sld>
 </file>
 
-<file path=ppt/slides/slide23.xml><?xml version="1.0" encoding="utf-8"?>
+<file path=ppt/slides/slide24.xml><?xml version="1.0" encoding="utf-8"?>
 <p:sld xmlns:a="http://schemas.openxmlformats.org/drawingml/2006/main" xmlns:r="http://schemas.openxmlformats.org/officeDocument/2006/relationships" xmlns:p="http://schemas.openxmlformats.org/presentationml/2006/main">
   <p:cSld name="Slide 23">
     <p:bg>
@@ -24459,6 +25308,13 @@
           </a:solidFill>
           <a:ln/>
         </p:spPr>
+        <p:txBody>
+          <a:bodyPr/>
+          <a:lstStyle/>
+          <a:p>
+            <a:endParaRPr/>
+          </a:p>
+        </p:txBody>
       </p:sp>
       <p:sp>
         <p:nvSpPr>
@@ -24479,6 +25335,13 @@
           </a:solidFill>
           <a:ln/>
         </p:spPr>
+        <p:txBody>
+          <a:bodyPr/>
+          <a:lstStyle/>
+          <a:p>
+            <a:endParaRPr/>
+          </a:p>
+        </p:txBody>
       </p:sp>
       <p:pic>
         <p:nvPicPr>
@@ -24612,6 +25475,13 @@
           </a:solidFill>
           <a:ln/>
         </p:spPr>
+        <p:txBody>
+          <a:bodyPr/>
+          <a:lstStyle/>
+          <a:p>
+            <a:endParaRPr/>
+          </a:p>
+        </p:txBody>
       </p:sp>
       <p:sp>
         <p:nvSpPr>
@@ -24632,6 +25502,13 @@
           </a:solidFill>
           <a:ln/>
         </p:spPr>
+        <p:txBody>
+          <a:bodyPr/>
+          <a:lstStyle/>
+          <a:p>
+            <a:endParaRPr/>
+          </a:p>
+        </p:txBody>
       </p:sp>
       <p:pic>
         <p:nvPicPr>
@@ -24888,7 +25765,7 @@
                 <a:ea typeface="Calibri" pitchFamily="34" charset="-122"/>
                 <a:cs typeface="Calibri" pitchFamily="34" charset="-120"/>
               </a:rPr>
-              <a:t>3 / 23</a:t>
+              <a:t>3 / 24</a:t>
             </a:r>
             <a:endParaRPr lang="en-US" sz="900" dirty="0"/>
           </a:p>
@@ -24913,6 +25790,13 @@
           </a:solidFill>
           <a:ln/>
         </p:spPr>
+        <p:txBody>
+          <a:bodyPr/>
+          <a:lstStyle/>
+          <a:p>
+            <a:endParaRPr/>
+          </a:p>
+        </p:txBody>
       </p:sp>
       <p:sp>
         <p:nvSpPr>
@@ -25159,6 +26043,13 @@
             </a:outerShdw>
           </a:effectLst>
         </p:spPr>
+        <p:txBody>
+          <a:bodyPr/>
+          <a:lstStyle/>
+          <a:p>
+            <a:endParaRPr/>
+          </a:p>
+        </p:txBody>
       </p:sp>
       <p:sp>
         <p:nvSpPr>
@@ -25266,6 +26157,13 @@
             </a:outerShdw>
           </a:effectLst>
         </p:spPr>
+        <p:txBody>
+          <a:bodyPr/>
+          <a:lstStyle/>
+          <a:p>
+            <a:endParaRPr/>
+          </a:p>
+        </p:txBody>
       </p:sp>
       <p:pic>
         <p:nvPicPr>
@@ -25446,7 +26344,7 @@
                 <a:ea typeface="Calibri" pitchFamily="34" charset="-122"/>
                 <a:cs typeface="Calibri" pitchFamily="34" charset="-120"/>
               </a:rPr>
-              <a:t>4 / 23</a:t>
+              <a:t>4 / 24</a:t>
             </a:r>
             <a:endParaRPr lang="en-US" sz="900" dirty="0"/>
           </a:p>
@@ -25471,6 +26369,13 @@
           </a:solidFill>
           <a:ln/>
         </p:spPr>
+        <p:txBody>
+          <a:bodyPr/>
+          <a:lstStyle/>
+          <a:p>
+            <a:endParaRPr/>
+          </a:p>
+        </p:txBody>
       </p:sp>
       <p:sp>
         <p:nvSpPr>
@@ -25602,6 +26507,13 @@
             </a:outerShdw>
           </a:effectLst>
         </p:spPr>
+        <p:txBody>
+          <a:bodyPr/>
+          <a:lstStyle/>
+          <a:p>
+            <a:endParaRPr/>
+          </a:p>
+        </p:txBody>
       </p:sp>
       <p:sp>
         <p:nvSpPr>
@@ -25675,6 +26587,13 @@
           </a:solidFill>
           <a:ln/>
         </p:spPr>
+        <p:txBody>
+          <a:bodyPr/>
+          <a:lstStyle/>
+          <a:p>
+            <a:endParaRPr/>
+          </a:p>
+        </p:txBody>
       </p:sp>
       <p:pic>
         <p:nvPicPr>
@@ -25797,6 +26716,13 @@
           </a:solidFill>
           <a:ln/>
         </p:spPr>
+        <p:txBody>
+          <a:bodyPr/>
+          <a:lstStyle/>
+          <a:p>
+            <a:endParaRPr/>
+          </a:p>
+        </p:txBody>
       </p:sp>
       <p:pic>
         <p:nvPicPr>
@@ -25919,6 +26845,13 @@
           </a:solidFill>
           <a:ln/>
         </p:spPr>
+        <p:txBody>
+          <a:bodyPr/>
+          <a:lstStyle/>
+          <a:p>
+            <a:endParaRPr/>
+          </a:p>
+        </p:txBody>
       </p:sp>
       <p:pic>
         <p:nvPicPr>
@@ -26041,6 +26974,13 @@
           </a:solidFill>
           <a:ln/>
         </p:spPr>
+        <p:txBody>
+          <a:bodyPr/>
+          <a:lstStyle/>
+          <a:p>
+            <a:endParaRPr/>
+          </a:p>
+        </p:txBody>
       </p:sp>
       <p:pic>
         <p:nvPicPr>
@@ -26163,6 +27103,13 @@
           </a:solidFill>
           <a:ln/>
         </p:spPr>
+        <p:txBody>
+          <a:bodyPr/>
+          <a:lstStyle/>
+          <a:p>
+            <a:endParaRPr/>
+          </a:p>
+        </p:txBody>
       </p:sp>
       <p:pic>
         <p:nvPicPr>
@@ -26371,7 +27318,7 @@
                 <a:ea typeface="Calibri" pitchFamily="34" charset="-122"/>
                 <a:cs typeface="Calibri" pitchFamily="34" charset="-120"/>
               </a:rPr>
-              <a:t>5 / 23</a:t>
+              <a:t>5 / 24</a:t>
             </a:r>
             <a:endParaRPr lang="en-US" sz="900" dirty="0"/>
           </a:p>
@@ -26396,6 +27343,13 @@
           </a:solidFill>
           <a:ln/>
         </p:spPr>
+        <p:txBody>
+          <a:bodyPr/>
+          <a:lstStyle/>
+          <a:p>
+            <a:endParaRPr/>
+          </a:p>
+        </p:txBody>
       </p:sp>
       <p:sp>
         <p:nvSpPr>
@@ -26527,6 +27481,13 @@
             </a:outerShdw>
           </a:effectLst>
         </p:spPr>
+        <p:txBody>
+          <a:bodyPr/>
+          <a:lstStyle/>
+          <a:p>
+            <a:endParaRPr/>
+          </a:p>
+        </p:txBody>
       </p:sp>
       <p:sp>
         <p:nvSpPr>
@@ -26547,6 +27508,13 @@
           </a:solidFill>
           <a:ln/>
         </p:spPr>
+        <p:txBody>
+          <a:bodyPr/>
+          <a:lstStyle/>
+          <a:p>
+            <a:endParaRPr/>
+          </a:p>
+        </p:txBody>
       </p:sp>
       <p:pic>
         <p:nvPicPr>
@@ -26774,6 +27742,13 @@
             </a:outerShdw>
           </a:effectLst>
         </p:spPr>
+        <p:txBody>
+          <a:bodyPr/>
+          <a:lstStyle/>
+          <a:p>
+            <a:endParaRPr/>
+          </a:p>
+        </p:txBody>
       </p:sp>
       <p:sp>
         <p:nvSpPr>
@@ -26794,6 +27769,13 @@
           </a:solidFill>
           <a:ln/>
         </p:spPr>
+        <p:txBody>
+          <a:bodyPr/>
+          <a:lstStyle/>
+          <a:p>
+            <a:endParaRPr/>
+          </a:p>
+        </p:txBody>
       </p:sp>
       <p:pic>
         <p:nvPicPr>
@@ -27703,7 +28685,7 @@
                 <a:ea typeface="Calibri" pitchFamily="34" charset="-122"/>
                 <a:cs typeface="Calibri" pitchFamily="34" charset="-120"/>
               </a:rPr>
-              <a:t>6 / 23</a:t>
+              <a:t>6 / 24</a:t>
             </a:r>
             <a:endParaRPr lang="en-US" sz="900" dirty="0"/>
           </a:p>
@@ -27728,6 +28710,13 @@
           </a:solidFill>
           <a:ln/>
         </p:spPr>
+        <p:txBody>
+          <a:bodyPr/>
+          <a:lstStyle/>
+          <a:p>
+            <a:endParaRPr/>
+          </a:p>
+        </p:txBody>
       </p:sp>
       <p:sp>
         <p:nvSpPr>
@@ -27859,6 +28848,13 @@
             </a:outerShdw>
           </a:effectLst>
         </p:spPr>
+        <p:txBody>
+          <a:bodyPr/>
+          <a:lstStyle/>
+          <a:p>
+            <a:endParaRPr/>
+          </a:p>
+        </p:txBody>
       </p:sp>
       <p:sp>
         <p:nvSpPr>
@@ -27879,6 +28875,13 @@
           </a:solidFill>
           <a:ln/>
         </p:spPr>
+        <p:txBody>
+          <a:bodyPr/>
+          <a:lstStyle/>
+          <a:p>
+            <a:endParaRPr/>
+          </a:p>
+        </p:txBody>
       </p:sp>
       <p:pic>
         <p:nvPicPr>
@@ -28027,6 +29030,13 @@
             </a:outerShdw>
           </a:effectLst>
         </p:spPr>
+        <p:txBody>
+          <a:bodyPr/>
+          <a:lstStyle/>
+          <a:p>
+            <a:endParaRPr/>
+          </a:p>
+        </p:txBody>
       </p:sp>
       <p:sp>
         <p:nvSpPr>
@@ -28047,6 +29057,13 @@
           </a:solidFill>
           <a:ln/>
         </p:spPr>
+        <p:txBody>
+          <a:bodyPr/>
+          <a:lstStyle/>
+          <a:p>
+            <a:endParaRPr/>
+          </a:p>
+        </p:txBody>
       </p:sp>
       <p:pic>
         <p:nvPicPr>
@@ -28178,6 +29195,13 @@
             </a:outerShdw>
           </a:effectLst>
         </p:spPr>
+        <p:txBody>
+          <a:bodyPr/>
+          <a:lstStyle/>
+          <a:p>
+            <a:endParaRPr/>
+          </a:p>
+        </p:txBody>
       </p:sp>
       <p:sp>
         <p:nvSpPr>
@@ -28198,6 +29222,13 @@
           </a:solidFill>
           <a:ln/>
         </p:spPr>
+        <p:txBody>
+          <a:bodyPr/>
+          <a:lstStyle/>
+          <a:p>
+            <a:endParaRPr/>
+          </a:p>
+        </p:txBody>
       </p:sp>
       <p:pic>
         <p:nvPicPr>
@@ -28346,6 +29377,13 @@
             </a:outerShdw>
           </a:effectLst>
         </p:spPr>
+        <p:txBody>
+          <a:bodyPr/>
+          <a:lstStyle/>
+          <a:p>
+            <a:endParaRPr/>
+          </a:p>
+        </p:txBody>
       </p:sp>
       <p:sp>
         <p:nvSpPr>
@@ -28366,6 +29404,13 @@
           </a:solidFill>
           <a:ln/>
         </p:spPr>
+        <p:txBody>
+          <a:bodyPr/>
+          <a:lstStyle/>
+          <a:p>
+            <a:endParaRPr/>
+          </a:p>
+        </p:txBody>
       </p:sp>
       <p:pic>
         <p:nvPicPr>
@@ -28514,6 +29559,13 @@
             </a:outerShdw>
           </a:effectLst>
         </p:spPr>
+        <p:txBody>
+          <a:bodyPr/>
+          <a:lstStyle/>
+          <a:p>
+            <a:endParaRPr/>
+          </a:p>
+        </p:txBody>
       </p:sp>
       <p:sp>
         <p:nvSpPr>
@@ -28534,6 +29586,13 @@
           </a:solidFill>
           <a:ln/>
         </p:spPr>
+        <p:txBody>
+          <a:bodyPr/>
+          <a:lstStyle/>
+          <a:p>
+            <a:endParaRPr/>
+          </a:p>
+        </p:txBody>
       </p:sp>
       <p:pic>
         <p:nvPicPr>
@@ -28682,6 +29741,13 @@
             </a:outerShdw>
           </a:effectLst>
         </p:spPr>
+        <p:txBody>
+          <a:bodyPr/>
+          <a:lstStyle/>
+          <a:p>
+            <a:endParaRPr/>
+          </a:p>
+        </p:txBody>
       </p:sp>
       <p:sp>
         <p:nvSpPr>
@@ -28702,6 +29768,13 @@
           </a:solidFill>
           <a:ln/>
         </p:spPr>
+        <p:txBody>
+          <a:bodyPr/>
+          <a:lstStyle/>
+          <a:p>
+            <a:endParaRPr/>
+          </a:p>
+        </p:txBody>
       </p:sp>
       <p:pic>
         <p:nvPicPr>
@@ -28927,7 +30000,7 @@
                 <a:ea typeface="Calibri" pitchFamily="34" charset="-122"/>
                 <a:cs typeface="Calibri" pitchFamily="34" charset="-120"/>
               </a:rPr>
-              <a:t>7 / 23</a:t>
+              <a:t>7 / 24</a:t>
             </a:r>
             <a:endParaRPr lang="en-US" sz="900" dirty="0"/>
           </a:p>
@@ -28952,6 +30025,13 @@
           </a:solidFill>
           <a:ln/>
         </p:spPr>
+        <p:txBody>
+          <a:bodyPr/>
+          <a:lstStyle/>
+          <a:p>
+            <a:endParaRPr/>
+          </a:p>
+        </p:txBody>
       </p:sp>
       <p:sp>
         <p:nvSpPr>
@@ -29083,6 +30163,13 @@
             </a:outerShdw>
           </a:effectLst>
         </p:spPr>
+        <p:txBody>
+          <a:bodyPr/>
+          <a:lstStyle/>
+          <a:p>
+            <a:endParaRPr/>
+          </a:p>
+        </p:txBody>
       </p:sp>
       <p:sp>
         <p:nvSpPr>
@@ -29103,6 +30190,13 @@
           </a:solidFill>
           <a:ln/>
         </p:spPr>
+        <p:txBody>
+          <a:bodyPr/>
+          <a:lstStyle/>
+          <a:p>
+            <a:endParaRPr/>
+          </a:p>
+        </p:txBody>
       </p:sp>
       <p:pic>
         <p:nvPicPr>
@@ -29325,6 +30419,13 @@
             </a:outerShdw>
           </a:effectLst>
         </p:spPr>
+        <p:txBody>
+          <a:bodyPr/>
+          <a:lstStyle/>
+          <a:p>
+            <a:endParaRPr/>
+          </a:p>
+        </p:txBody>
       </p:sp>
       <p:sp>
         <p:nvSpPr>
@@ -29345,6 +30446,13 @@
           </a:solidFill>
           <a:ln/>
         </p:spPr>
+        <p:txBody>
+          <a:bodyPr/>
+          <a:lstStyle/>
+          <a:p>
+            <a:endParaRPr/>
+          </a:p>
+        </p:txBody>
       </p:sp>
       <p:pic>
         <p:nvPicPr>
@@ -29567,6 +30675,13 @@
             </a:outerShdw>
           </a:effectLst>
         </p:spPr>
+        <p:txBody>
+          <a:bodyPr/>
+          <a:lstStyle/>
+          <a:p>
+            <a:endParaRPr/>
+          </a:p>
+        </p:txBody>
       </p:sp>
       <p:sp>
         <p:nvSpPr>
@@ -29587,6 +30702,13 @@
           </a:solidFill>
           <a:ln/>
         </p:spPr>
+        <p:txBody>
+          <a:bodyPr/>
+          <a:lstStyle/>
+          <a:p>
+            <a:endParaRPr/>
+          </a:p>
+        </p:txBody>
       </p:sp>
       <p:pic>
         <p:nvPicPr>
@@ -29775,7 +30897,7 @@
                 <a:ea typeface="Calibri" pitchFamily="34" charset="-122"/>
                 <a:cs typeface="Calibri" pitchFamily="34" charset="-120"/>
               </a:rPr>
-              <a:t>8 / 23</a:t>
+              <a:t>8 / 24</a:t>
             </a:r>
             <a:endParaRPr lang="en-US" sz="900" dirty="0"/>
           </a:p>
@@ -29800,6 +30922,13 @@
           </a:solidFill>
           <a:ln/>
         </p:spPr>
+        <p:txBody>
+          <a:bodyPr/>
+          <a:lstStyle/>
+          <a:p>
+            <a:endParaRPr/>
+          </a:p>
+        </p:txBody>
       </p:sp>
       <p:sp>
         <p:nvSpPr>
@@ -29931,6 +31060,13 @@
             </a:outerShdw>
           </a:effectLst>
         </p:spPr>
+        <p:txBody>
+          <a:bodyPr/>
+          <a:lstStyle/>
+          <a:p>
+            <a:endParaRPr/>
+          </a:p>
+        </p:txBody>
       </p:sp>
       <p:sp>
         <p:nvSpPr>
@@ -31654,7 +32790,7 @@
                 <a:ea typeface="Calibri" pitchFamily="34" charset="-122"/>
                 <a:cs typeface="Calibri" pitchFamily="34" charset="-120"/>
               </a:rPr>
-              <a:t>9 / 23</a:t>
+              <a:t>9 / 24</a:t>
             </a:r>
             <a:endParaRPr lang="en-US" sz="900" dirty="0"/>
           </a:p>
@@ -31679,6 +32815,13 @@
           </a:solidFill>
           <a:ln/>
         </p:spPr>
+        <p:txBody>
+          <a:bodyPr/>
+          <a:lstStyle/>
+          <a:p>
+            <a:endParaRPr/>
+          </a:p>
+        </p:txBody>
       </p:sp>
       <p:sp>
         <p:nvSpPr>

--- a/TFG_Chollos/Presentacion_Defensa_TFG.pptx
+++ b/TFG_Chollos/Presentacion_Defensa_TFG.pptx
@@ -19751,6 +19751,30 @@
           </a:p>
         </p:txBody>
       </p:sp>
+      <p:pic>
+        <p:nvPicPr>
+          <p:cNvPr id="31" name="Picture 30" descr="info_icon.png"/>
+          <p:cNvPicPr>
+            <a:picLocks noChangeAspect="1"/>
+          </p:cNvPicPr>
+          <p:nvPr/>
+        </p:nvPicPr>
+        <p:blipFill>
+          <a:blip r:embed="rId3"/>
+          <a:stretch>
+            <a:fillRect/>
+          </a:stretch>
+        </p:blipFill>
+        <p:spPr>
+          <a:xfrm>
+            <a:off x="656356" y="564916"/>
+            <a:ext cx="351495" cy="351495"/>
+          </a:xfrm>
+          <a:prstGeom prst="rect">
+            <a:avLst/>
+          </a:prstGeom>
+        </p:spPr>
+      </p:pic>
     </p:spTree>
   </p:cSld>
   <p:clrMapOvr>

--- a/TFG_Chollos/Presentacion_Defensa_TFG.pptx
+++ b/TFG_Chollos/Presentacion_Defensa_TFG.pptx
@@ -9772,8 +9772,8 @@
         </p:blipFill>
         <p:spPr>
           <a:xfrm>
-            <a:off x="177265" y="1136719"/>
-            <a:ext cx="6654856" cy="5349655"/>
+            <a:off x="-1" y="1136719"/>
+            <a:ext cx="7496355" cy="5349655"/>
           </a:xfrm>
           <a:prstGeom prst="rect">
             <a:avLst/>
@@ -13174,7 +13174,23 @@
                 <a:ea typeface="Calibri" pitchFamily="34" charset="-122"/>
                 <a:cs typeface="Calibri" pitchFamily="34" charset="-120"/>
               </a:rPr>
-              <a:t>Sobre el conjunto de prueba (nunca usado en el entrenamiento): </a:t>
+              <a:t>Sobre el conjunto de </a:t>
+            </a:r>
+            <a:r>
+              <a:rPr lang="en-US" sz="1300" dirty="0" err="1">
+                <a:latin typeface="Calibri" pitchFamily="34" charset="0"/>
+                <a:ea typeface="Calibri" pitchFamily="34" charset="-122"/>
+                <a:cs typeface="Calibri" pitchFamily="34" charset="-120"/>
+              </a:rPr>
+              <a:t>prueba</a:t>
+            </a:r>
+            <a:r>
+              <a:rPr lang="en-US" sz="1300" dirty="0">
+                <a:latin typeface="Calibri" pitchFamily="34" charset="0"/>
+                <a:ea typeface="Calibri" pitchFamily="34" charset="-122"/>
+                <a:cs typeface="Calibri" pitchFamily="34" charset="-120"/>
+              </a:rPr>
+              <a:t>:</a:t>
             </a:r>
             <a:endParaRPr lang="en-US" sz="1300" dirty="0"/>
           </a:p>
@@ -14085,7 +14101,51 @@
                 <a:ea typeface="Calibri" pitchFamily="34" charset="-122"/>
                 <a:cs typeface="Calibri" pitchFamily="34" charset="-120"/>
               </a:rPr>
-              <a:t>     r &lt; 1 → potencial chollo          r &gt; 1 → alojamiento inflado</a:t>
+              <a:t>     r &lt; 1 → potencial chollo          r &gt; 1 → </a:t>
+            </a:r>
+            <a:r>
+              <a:rPr lang="en-US" sz="1300" dirty="0" err="1">
+                <a:solidFill>
+                  <a:srgbClr val="2B2320"/>
+                </a:solidFill>
+                <a:latin typeface="Calibri" pitchFamily="34" charset="0"/>
+                <a:ea typeface="Calibri" pitchFamily="34" charset="-122"/>
+                <a:cs typeface="Calibri" pitchFamily="34" charset="-120"/>
+              </a:rPr>
+              <a:t>alojamiento</a:t>
+            </a:r>
+            <a:r>
+              <a:rPr lang="en-US" sz="1300" dirty="0">
+                <a:solidFill>
+                  <a:srgbClr val="2B2320"/>
+                </a:solidFill>
+                <a:latin typeface="Calibri" pitchFamily="34" charset="0"/>
+                <a:ea typeface="Calibri" pitchFamily="34" charset="-122"/>
+                <a:cs typeface="Calibri" pitchFamily="34" charset="-120"/>
+              </a:rPr>
+              <a:t> con </a:t>
+            </a:r>
+            <a:r>
+              <a:rPr lang="en-US" sz="1300" dirty="0" err="1">
+                <a:solidFill>
+                  <a:srgbClr val="2B2320"/>
+                </a:solidFill>
+                <a:latin typeface="Calibri" pitchFamily="34" charset="0"/>
+                <a:ea typeface="Calibri" pitchFamily="34" charset="-122"/>
+                <a:cs typeface="Calibri" pitchFamily="34" charset="-120"/>
+              </a:rPr>
+              <a:t>precio</a:t>
+            </a:r>
+            <a:r>
+              <a:rPr lang="en-US" sz="1300" dirty="0">
+                <a:solidFill>
+                  <a:srgbClr val="2B2320"/>
+                </a:solidFill>
+                <a:latin typeface="Calibri" pitchFamily="34" charset="0"/>
+                <a:ea typeface="Calibri" pitchFamily="34" charset="-122"/>
+                <a:cs typeface="Calibri" pitchFamily="34" charset="-120"/>
+              </a:rPr>
+              <a:t> inflado</a:t>
             </a:r>
             <a:endParaRPr lang="en-US" sz="1600" dirty="0"/>
           </a:p>
@@ -21398,6 +21458,9 @@
             </a:r>
             <a:r>
               <a:rPr lang="en-US" sz="1250" b="1" dirty="0">
+                <a:solidFill>
+                  <a:srgbClr val="C00000"/>
+                </a:solidFill>
                 <a:latin typeface="Calibri" pitchFamily="34" charset="0"/>
                 <a:ea typeface="Calibri" pitchFamily="34" charset="-122"/>
                 <a:cs typeface="Calibri" pitchFamily="34" charset="-120"/>
@@ -21406,6 +21469,9 @@
             </a:r>
             <a:r>
               <a:rPr lang="en-US" sz="1250" b="1" dirty="0" err="1">
+                <a:solidFill>
+                  <a:srgbClr val="C00000"/>
+                </a:solidFill>
                 <a:latin typeface="Calibri" pitchFamily="34" charset="0"/>
                 <a:ea typeface="Calibri" pitchFamily="34" charset="-122"/>
                 <a:cs typeface="Calibri" pitchFamily="34" charset="-120"/>
@@ -21414,6 +21480,9 @@
             </a:r>
             <a:r>
               <a:rPr lang="en-US" sz="1250" b="1" dirty="0">
+                <a:solidFill>
+                  <a:srgbClr val="C00000"/>
+                </a:solidFill>
                 <a:latin typeface="Calibri" pitchFamily="34" charset="0"/>
                 <a:ea typeface="Calibri" pitchFamily="34" charset="-122"/>
                 <a:cs typeface="Calibri" pitchFamily="34" charset="-120"/>
@@ -21422,11 +21491,22 @@
             </a:r>
             <a:r>
               <a:rPr lang="en-US" sz="1250" dirty="0">
-                <a:latin typeface="Calibri" pitchFamily="34" charset="0"/>
-                <a:ea typeface="Calibri" pitchFamily="34" charset="-122"/>
-                <a:cs typeface="Calibri" pitchFamily="34" charset="-120"/>
-              </a:rPr>
-              <a:t> al </a:t>
+                <a:solidFill>
+                  <a:srgbClr val="C00000"/>
+                </a:solidFill>
+                <a:latin typeface="Calibri" pitchFamily="34" charset="0"/>
+                <a:ea typeface="Calibri" pitchFamily="34" charset="-122"/>
+                <a:cs typeface="Calibri" pitchFamily="34" charset="-120"/>
+              </a:rPr>
+              <a:t> </a:t>
+            </a:r>
+            <a:r>
+              <a:rPr lang="en-US" sz="1250" dirty="0">
+                <a:latin typeface="Calibri" pitchFamily="34" charset="0"/>
+                <a:ea typeface="Calibri" pitchFamily="34" charset="-122"/>
+                <a:cs typeface="Calibri" pitchFamily="34" charset="-120"/>
+              </a:rPr>
+              <a:t>al </a:t>
             </a:r>
             <a:r>
               <a:rPr lang="en-US" sz="1250" dirty="0" err="1">
@@ -21519,6 +21599,9 @@
             </a:r>
             <a:r>
               <a:rPr lang="en-US" sz="1250" b="1" dirty="0">
+                <a:solidFill>
+                  <a:srgbClr val="C00000"/>
+                </a:solidFill>
                 <a:latin typeface="Calibri" pitchFamily="34" charset="0"/>
                 <a:ea typeface="Calibri" pitchFamily="34" charset="-122"/>
                 <a:cs typeface="Calibri" pitchFamily="34" charset="-120"/>
@@ -21527,6 +21610,9 @@
             </a:r>
             <a:r>
               <a:rPr lang="en-US" sz="1250" b="1" dirty="0" err="1">
+                <a:solidFill>
+                  <a:srgbClr val="C00000"/>
+                </a:solidFill>
                 <a:latin typeface="Calibri" pitchFamily="34" charset="0"/>
                 <a:ea typeface="Calibri" pitchFamily="34" charset="-122"/>
                 <a:cs typeface="Calibri" pitchFamily="34" charset="-120"/>
@@ -21535,6 +21621,9 @@
             </a:r>
             <a:r>
               <a:rPr lang="en-US" sz="1250" b="1" dirty="0">
+                <a:solidFill>
+                  <a:srgbClr val="C00000"/>
+                </a:solidFill>
                 <a:latin typeface="Calibri" pitchFamily="34" charset="0"/>
                 <a:ea typeface="Calibri" pitchFamily="34" charset="-122"/>
                 <a:cs typeface="Calibri" pitchFamily="34" charset="-120"/>
@@ -22043,17 +22132,6 @@
               <a:buChar char="•"/>
             </a:pPr>
             <a:r>
-              <a:rPr lang="en-US" sz="1250" dirty="0">
-                <a:solidFill>
-                  <a:srgbClr val="2B2320"/>
-                </a:solidFill>
-                <a:latin typeface="Calibri" pitchFamily="34" charset="0"/>
-                <a:ea typeface="Calibri" pitchFamily="34" charset="-122"/>
-                <a:cs typeface="Calibri" pitchFamily="34" charset="-120"/>
-              </a:rPr>
-              <a:t> </a:t>
-            </a:r>
-            <a:r>
               <a:rPr lang="en-US" sz="1250" b="1" dirty="0">
                 <a:solidFill>
                   <a:schemeClr val="accent6">
@@ -22064,10 +22142,10 @@
                 <a:ea typeface="Calibri" pitchFamily="34" charset="-122"/>
                 <a:cs typeface="Calibri" pitchFamily="34" charset="-120"/>
               </a:rPr>
-              <a:t>~59MB comprimido</a:t>
-            </a:r>
-            <a:r>
-              <a:rPr lang="en-US" sz="1250" dirty="0">
+              <a:t>~59MB </a:t>
+            </a:r>
+            <a:r>
+              <a:rPr lang="en-US" sz="1250" b="1" dirty="0" err="1">
                 <a:solidFill>
                   <a:schemeClr val="accent6">
                     <a:lumMod val="75000"/>
@@ -22077,9 +22155,33 @@
                 <a:ea typeface="Calibri" pitchFamily="34" charset="-122"/>
                 <a:cs typeface="Calibri" pitchFamily="34" charset="-120"/>
               </a:rPr>
+              <a:t>comprimido</a:t>
+            </a:r>
+            <a:r>
+              <a:rPr lang="en-US" sz="1250" dirty="0">
+                <a:solidFill>
+                  <a:schemeClr val="accent6">
+                    <a:lumMod val="75000"/>
+                  </a:schemeClr>
+                </a:solidFill>
+                <a:latin typeface="Calibri" pitchFamily="34" charset="0"/>
+                <a:ea typeface="Calibri" pitchFamily="34" charset="-122"/>
+                <a:cs typeface="Calibri" pitchFamily="34" charset="-120"/>
+              </a:rPr>
               <a:t> </a:t>
             </a:r>
             <a:r>
+              <a:rPr lang="en-US" sz="1250" dirty="0" err="1">
+                <a:solidFill>
+                  <a:srgbClr val="2B2320"/>
+                </a:solidFill>
+                <a:latin typeface="Calibri" pitchFamily="34" charset="0"/>
+                <a:ea typeface="Calibri" pitchFamily="34" charset="-122"/>
+                <a:cs typeface="Calibri" pitchFamily="34" charset="-120"/>
+              </a:rPr>
+              <a:t>en</a:t>
+            </a:r>
+            <a:r>
               <a:rPr lang="en-US" sz="1250" dirty="0">
                 <a:solidFill>
                   <a:srgbClr val="2B2320"/>
@@ -22088,7 +22190,7 @@
                 <a:ea typeface="Calibri" pitchFamily="34" charset="-122"/>
                 <a:cs typeface="Calibri" pitchFamily="34" charset="-120"/>
               </a:rPr>
-              <a:t>en disco (&lt; 100MB del </a:t>
+              <a:t> disco (&lt; 100MB del </a:t>
             </a:r>
             <a:r>
               <a:rPr lang="en-US" sz="1250" dirty="0" err="1">
@@ -22112,7 +22214,6 @@
               </a:rPr>
               <a:t> de GitHub).</a:t>
             </a:r>
-            <a:endParaRPr lang="en-US" sz="1250" dirty="0"/>
           </a:p>
         </p:txBody>
       </p:sp>
@@ -22125,7 +22226,7 @@
           <p:nvPr>
             <p:extLst>
               <p:ext uri="{D42A27DB-BD31-4B8C-83A1-F6EECF244321}">
-                <p14:modId xmlns:p14="http://schemas.microsoft.com/office/powerpoint/2010/main" val="1625249065"/>
+                <p14:modId xmlns:p14="http://schemas.microsoft.com/office/powerpoint/2010/main" val="1315385388"/>
               </p:ext>
             </p:extLst>
           </p:nvPr>
@@ -22864,7 +22965,7 @@
                         <a:buNone/>
                       </a:pPr>
                       <a:r>
-                        <a:rPr lang="en-US" sz="1250" b="1" dirty="0">
+                        <a:rPr lang="en-US" sz="1250" b="1" dirty="0" err="1">
                           <a:solidFill>
                             <a:schemeClr val="accent6">
                               <a:lumMod val="75000"/>
@@ -22874,7 +22975,7 @@
                           <a:ea typeface="Calibri" pitchFamily="34" charset="-122"/>
                           <a:cs typeface="Calibri" pitchFamily="34" charset="-120"/>
                         </a:rPr>
-                        <a:t>Podado (producción)</a:t>
+                        <a:t>Podado</a:t>
                       </a:r>
                       <a:endParaRPr lang="en-US" sz="1250" dirty="0">
                         <a:solidFill>
@@ -25214,7 +25315,7 @@
     <p:bg>
       <p:bgPr>
         <a:solidFill>
-          <a:srgbClr val="241A16"/>
+          <a:schemeClr val="bg1"/>
         </a:solidFill>
         <a:effectLst/>
       </p:bgPr>
@@ -25259,9 +25360,6 @@
             </a:pPr>
             <a:r>
               <a:rPr lang="en-US" sz="4600" b="1" dirty="0">
-                <a:solidFill>
-                  <a:srgbClr val="FFFFFF"/>
-                </a:solidFill>
                 <a:latin typeface="Cambria" pitchFamily="34" charset="0"/>
                 <a:ea typeface="Cambria" pitchFamily="34" charset="-122"/>
                 <a:cs typeface="Cambria" pitchFamily="34" charset="-120"/>
@@ -25298,9 +25396,6 @@
             </a:pPr>
             <a:r>
               <a:rPr lang="en-US" sz="1500" i="1" dirty="0">
-                <a:solidFill>
-                  <a:srgbClr val="D8CCC3"/>
-                </a:solidFill>
                 <a:latin typeface="Calibri" pitchFamily="34" charset="0"/>
                 <a:ea typeface="Calibri" pitchFamily="34" charset="-122"/>
                 <a:cs typeface="Calibri" pitchFamily="34" charset="-120"/>
@@ -25328,7 +25423,7 @@
             </a:avLst>
           </a:prstGeom>
           <a:solidFill>
-            <a:srgbClr val="342722"/>
+            <a:schemeClr val="bg2"/>
           </a:solidFill>
           <a:ln/>
         </p:spPr>
@@ -25417,9 +25512,6 @@
             </a:pPr>
             <a:r>
               <a:rPr lang="en-US" sz="1300" b="1" dirty="0">
-                <a:solidFill>
-                  <a:srgbClr val="C7B9AF"/>
-                </a:solidFill>
                 <a:latin typeface="Calibri" pitchFamily="34" charset="0"/>
                 <a:ea typeface="Calibri" pitchFamily="34" charset="-122"/>
                 <a:cs typeface="Calibri" pitchFamily="34" charset="-120"/>
@@ -25458,9 +25550,6 @@
             </a:pPr>
             <a:r>
               <a:rPr lang="en-US" sz="1300" u="sng" dirty="0">
-                <a:solidFill>
-                  <a:srgbClr val="FFFFFF"/>
-                </a:solidFill>
                 <a:latin typeface="Calibri" pitchFamily="34" charset="0"/>
                 <a:ea typeface="Calibri" pitchFamily="34" charset="-122"/>
                 <a:cs typeface="Calibri" pitchFamily="34" charset="-120"/>
@@ -25495,7 +25584,7 @@
             </a:avLst>
           </a:prstGeom>
           <a:solidFill>
-            <a:srgbClr val="342722"/>
+            <a:schemeClr val="bg2"/>
           </a:solidFill>
           <a:ln/>
         </p:spPr>
@@ -25584,9 +25673,6 @@
             </a:pPr>
             <a:r>
               <a:rPr lang="en-US" sz="1300" b="1" dirty="0">
-                <a:solidFill>
-                  <a:srgbClr val="C7B9AF"/>
-                </a:solidFill>
                 <a:latin typeface="Calibri" pitchFamily="34" charset="0"/>
                 <a:ea typeface="Calibri" pitchFamily="34" charset="-122"/>
                 <a:cs typeface="Calibri" pitchFamily="34" charset="-120"/>
@@ -25625,9 +25711,6 @@
             </a:pPr>
             <a:r>
               <a:rPr lang="en-US" sz="1300" u="sng" dirty="0">
-                <a:solidFill>
-                  <a:srgbClr val="FFFFFF"/>
-                </a:solidFill>
                 <a:latin typeface="Calibri" pitchFamily="34" charset="0"/>
                 <a:ea typeface="Calibri" pitchFamily="34" charset="-122"/>
                 <a:cs typeface="Calibri" pitchFamily="34" charset="-120"/>
@@ -34383,42 +34466,49 @@
           </a:p>
         </p:txBody>
       </p:sp>
-      <p:pic>
-        <p:nvPicPr>
-          <p:cNvPr id="20" name="Gráfico 19" descr="Flechas de cheurón con relleno sólido">
+      <p:sp>
+        <p:nvSpPr>
+          <p:cNvPr id="21" name="CuadroTexto 20">
             <a:extLst>
               <a:ext uri="{FF2B5EF4-FFF2-40B4-BE49-F238E27FC236}">
-                <a16:creationId xmlns:a16="http://schemas.microsoft.com/office/drawing/2014/main" id="{67C9516D-B195-8BDC-2581-2DC136E05BBB}"/>
+                <a16:creationId xmlns:a16="http://schemas.microsoft.com/office/drawing/2014/main" id="{C256E2FD-D61C-572F-AA4B-BA8AE6304A10}"/>
               </a:ext>
             </a:extLst>
           </p:cNvPr>
-          <p:cNvPicPr>
-            <a:picLocks noChangeAspect="1"/>
-          </p:cNvPicPr>
-          <p:nvPr/>
-        </p:nvPicPr>
-        <p:blipFill>
-          <a:blip r:embed="rId8">
-            <a:extLst>
-              <a:ext uri="{96DAC541-7B7A-43D3-8B79-37D633B846F1}">
-                <asvg:svgBlip xmlns:asvg="http://schemas.microsoft.com/office/drawing/2016/SVG/main" r:embed="rId9"/>
-              </a:ext>
-            </a:extLst>
-          </a:blip>
-          <a:stretch>
-            <a:fillRect/>
-          </a:stretch>
-        </p:blipFill>
-        <p:spPr>
-          <a:xfrm>
-            <a:off x="8278697" y="4919513"/>
-            <a:ext cx="335280" cy="335280"/>
+          <p:cNvSpPr txBox="1"/>
+          <p:nvPr/>
+        </p:nvSpPr>
+        <p:spPr>
+          <a:xfrm>
+            <a:off x="8227466" y="4856320"/>
+            <a:ext cx="437741" cy="461665"/>
           </a:xfrm>
           <a:prstGeom prst="rect">
             <a:avLst/>
           </a:prstGeom>
-        </p:spPr>
-      </p:pic>
+          <a:noFill/>
+        </p:spPr>
+        <p:txBody>
+          <a:bodyPr wrap="square">
+            <a:spAutoFit/>
+          </a:bodyPr>
+          <a:lstStyle/>
+          <a:p>
+            <a:pPr marL="0" indent="0" algn="ctr">
+              <a:buNone/>
+            </a:pPr>
+            <a:r>
+              <a:rPr lang="en-US" sz="2400" dirty="0">
+                <a:latin typeface="Calibri" pitchFamily="34" charset="0"/>
+                <a:ea typeface="Calibri" pitchFamily="34" charset="-122"/>
+                <a:cs typeface="Calibri" pitchFamily="34" charset="-120"/>
+              </a:rPr>
+              <a:t>→</a:t>
+            </a:r>
+            <a:endParaRPr lang="en-US" sz="2400" dirty="0"/>
+          </a:p>
+        </p:txBody>
+      </p:sp>
     </p:spTree>
   </p:cSld>
   <p:clrMapOvr>

--- a/TFG_Chollos/Presentacion_Defensa_TFG.pptx
+++ b/TFG_Chollos/Presentacion_Defensa_TFG.pptx
@@ -5,7 +5,7 @@
     <p:sldMasterId id="2147483648" r:id="rId1"/>
   </p:sldMasterIdLst>
   <p:notesMasterIdLst>
-    <p:notesMasterId r:id="rId26"/>
+    <p:notesMasterId r:id="rId25"/>
   </p:notesMasterIdLst>
   <p:sldIdLst>
     <p:sldId id="256" r:id="rId2"/>
@@ -13,25 +13,24 @@
     <p:sldId id="258" r:id="rId4"/>
     <p:sldId id="259" r:id="rId5"/>
     <p:sldId id="260" r:id="rId6"/>
-    <p:sldId id="261" r:id="rId7"/>
-    <p:sldId id="262" r:id="rId8"/>
-    <p:sldId id="263" r:id="rId9"/>
-    <p:sldId id="264" r:id="rId10"/>
-    <p:sldId id="265" r:id="rId11"/>
-    <p:sldId id="266" r:id="rId12"/>
-    <p:sldId id="267" r:id="rId13"/>
-    <p:sldId id="268" r:id="rId14"/>
-    <p:sldId id="279" r:id="rId15"/>
-    <p:sldId id="269" r:id="rId16"/>
-    <p:sldId id="270" r:id="rId17"/>
-    <p:sldId id="271" r:id="rId18"/>
-    <p:sldId id="272" r:id="rId19"/>
-    <p:sldId id="273" r:id="rId20"/>
-    <p:sldId id="274" r:id="rId21"/>
-    <p:sldId id="275" r:id="rId22"/>
-    <p:sldId id="276" r:id="rId23"/>
-    <p:sldId id="277" r:id="rId24"/>
-    <p:sldId id="278" r:id="rId25"/>
+    <p:sldId id="262" r:id="rId7"/>
+    <p:sldId id="263" r:id="rId8"/>
+    <p:sldId id="264" r:id="rId9"/>
+    <p:sldId id="265" r:id="rId10"/>
+    <p:sldId id="266" r:id="rId11"/>
+    <p:sldId id="267" r:id="rId12"/>
+    <p:sldId id="268" r:id="rId13"/>
+    <p:sldId id="279" r:id="rId14"/>
+    <p:sldId id="269" r:id="rId15"/>
+    <p:sldId id="270" r:id="rId16"/>
+    <p:sldId id="271" r:id="rId17"/>
+    <p:sldId id="272" r:id="rId18"/>
+    <p:sldId id="273" r:id="rId19"/>
+    <p:sldId id="274" r:id="rId20"/>
+    <p:sldId id="275" r:id="rId21"/>
+    <p:sldId id="276" r:id="rId22"/>
+    <p:sldId id="277" r:id="rId23"/>
+    <p:sldId id="278" r:id="rId24"/>
   </p:sldIdLst>
   <p:sldSz cx="12192000" cy="6858000"/>
   <p:notesSz cx="6858000" cy="12192000"/>
@@ -1985,7 +1984,7 @@
           <a:p>
             <a:fld id="{F7021451-1387-4CA6-816F-3879F97B5CBC}" type="slidenum">
               <a:rPr lang="en-US"/>
-              <a:t>13</a:t>
+              <a:t>14</a:t>
             </a:fld>
             <a:endParaRPr lang="en-US"/>
           </a:p>
@@ -2826,90 +2825,6 @@
             <a:fld id="{F7021451-1387-4CA6-816F-3879F97B5CBC}" type="slidenum">
               <a:rPr lang="en-US"/>
               <a:t>23</a:t>
-            </a:fld>
-            <a:endParaRPr lang="en-US"/>
-          </a:p>
-        </p:txBody>
-      </p:sp>
-    </p:spTree>
-    <p:extLst>
-      <p:ext uri="{BB962C8B-B14F-4D97-AF65-F5344CB8AC3E}">
-        <p14:creationId xmlns:p14="http://schemas.microsoft.com/office/powerpoint/2010/main" val="1024086991"/>
-      </p:ext>
-    </p:extLst>
-  </p:cSld>
-  <p:clrMapOvr>
-    <a:masterClrMapping/>
-  </p:clrMapOvr>
-</p:notes>
-</file>
-
-<file path=ppt/notesSlides/notesSlide23.xml><?xml version="1.0" encoding="utf-8"?>
-<p:notes xmlns:a="http://schemas.openxmlformats.org/drawingml/2006/main" xmlns:r="http://schemas.openxmlformats.org/officeDocument/2006/relationships" xmlns:p="http://schemas.openxmlformats.org/presentationml/2006/main">
-  <p:cSld>
-    <p:spTree>
-      <p:nvGrpSpPr>
-        <p:cNvPr id="1" name=""/>
-        <p:cNvGrpSpPr/>
-        <p:nvPr/>
-      </p:nvGrpSpPr>
-      <p:grpSpPr>
-        <a:xfrm>
-          <a:off x="0" y="0"/>
-          <a:ext cx="0" cy="0"/>
-          <a:chOff x="0" y="0"/>
-          <a:chExt cx="0" cy="0"/>
-        </a:xfrm>
-      </p:grpSpPr>
-      <p:sp>
-        <p:nvSpPr>
-          <p:cNvPr id="2" name="Slide Image Placeholder 1"/>
-          <p:cNvSpPr>
-            <a:spLocks noGrp="1" noRot="1" noChangeAspect="1"/>
-          </p:cNvSpPr>
-          <p:nvPr>
-            <p:ph type="sldImg"/>
-          </p:nvPr>
-        </p:nvSpPr>
-        <p:spPr/>
-      </p:sp>
-      <p:sp>
-        <p:nvSpPr>
-          <p:cNvPr id="3" name="Notes Placeholder 2"/>
-          <p:cNvSpPr>
-            <a:spLocks noGrp="1"/>
-          </p:cNvSpPr>
-          <p:nvPr>
-            <p:ph type="body" idx="1"/>
-          </p:nvPr>
-        </p:nvSpPr>
-        <p:spPr/>
-        <p:txBody>
-          <a:bodyPr/>
-          <a:lstStyle/>
-          <a:p>
-            <a:endParaRPr lang="en-US" dirty="0"/>
-          </a:p>
-        </p:txBody>
-      </p:sp>
-      <p:sp>
-        <p:nvSpPr>
-          <p:cNvPr id="4" name="Slide Number Placeholder 3"/>
-          <p:cNvSpPr>
-            <a:spLocks noGrp="1"/>
-          </p:cNvSpPr>
-          <p:nvPr>
-            <p:ph type="sldNum" sz="quarter" idx="10"/>
-          </p:nvPr>
-        </p:nvSpPr>
-        <p:spPr/>
-        <p:txBody>
-          <a:bodyPr/>
-          <a:lstStyle/>
-          <a:p>
-            <a:fld id="{F7021451-1387-4CA6-816F-3879F97B5CBC}" type="slidenum">
-              <a:rPr lang="en-US"/>
-              <a:t>24</a:t>
             </a:fld>
             <a:endParaRPr lang="en-US"/>
           </a:p>
@@ -4599,1702 +4514,6 @@
 
 <file path=ppt/slides/slide10.xml><?xml version="1.0" encoding="utf-8"?>
 <p:sld xmlns:a="http://schemas.openxmlformats.org/drawingml/2006/main" xmlns:r="http://schemas.openxmlformats.org/officeDocument/2006/relationships" xmlns:p="http://schemas.openxmlformats.org/presentationml/2006/main">
-  <p:cSld name="Slide 10">
-    <p:bg>
-      <p:bgPr>
-        <a:solidFill>
-          <a:srgbClr val="FFFFFF"/>
-        </a:solidFill>
-        <a:effectLst/>
-      </p:bgPr>
-    </p:bg>
-    <p:spTree>
-      <p:nvGrpSpPr>
-        <p:cNvPr id="1" name=""/>
-        <p:cNvGrpSpPr/>
-        <p:nvPr/>
-      </p:nvGrpSpPr>
-      <p:grpSpPr>
-        <a:xfrm>
-          <a:off x="0" y="0"/>
-          <a:ext cx="0" cy="0"/>
-          <a:chOff x="0" y="0"/>
-          <a:chExt cx="0" cy="0"/>
-        </a:xfrm>
-      </p:grpSpPr>
-      <p:sp>
-        <p:nvSpPr>
-          <p:cNvPr id="2" name="Text 0"/>
-          <p:cNvSpPr/>
-          <p:nvPr/>
-        </p:nvSpPr>
-        <p:spPr>
-          <a:xfrm>
-            <a:off x="548640" y="6473952"/>
-            <a:ext cx="7315200" cy="274320"/>
-          </a:xfrm>
-          <a:prstGeom prst="rect">
-            <a:avLst/>
-          </a:prstGeom>
-          <a:noFill/>
-          <a:ln/>
-        </p:spPr>
-        <p:txBody>
-          <a:bodyPr wrap="square" lIns="0" tIns="0" rIns="0" bIns="0" rtlCol="0" anchor="ctr"/>
-          <a:lstStyle/>
-          <a:p>
-            <a:pPr marL="0" indent="0" algn="l">
-              <a:buNone/>
-            </a:pPr>
-            <a:r>
-              <a:rPr lang="en-US" sz="900" dirty="0">
-                <a:solidFill>
-                  <a:srgbClr val="7A6F68"/>
-                </a:solidFill>
-                <a:latin typeface="Calibri" pitchFamily="34" charset="0"/>
-                <a:ea typeface="Calibri" pitchFamily="34" charset="-122"/>
-                <a:cs typeface="Calibri" pitchFamily="34" charset="-120"/>
-              </a:rPr>
-              <a:t>Detección de Alojamientos Turísticos con Precio Real Inferior — TFG</a:t>
-            </a:r>
-            <a:endParaRPr lang="en-US" sz="900" dirty="0"/>
-          </a:p>
-        </p:txBody>
-      </p:sp>
-      <p:sp>
-        <p:nvSpPr>
-          <p:cNvPr id="3" name="Text 1"/>
-          <p:cNvSpPr/>
-          <p:nvPr/>
-        </p:nvSpPr>
-        <p:spPr>
-          <a:xfrm>
-            <a:off x="10545775" y="6473952"/>
-            <a:ext cx="1097280" cy="274320"/>
-          </a:xfrm>
-          <a:prstGeom prst="rect">
-            <a:avLst/>
-          </a:prstGeom>
-          <a:noFill/>
-          <a:ln/>
-        </p:spPr>
-        <p:txBody>
-          <a:bodyPr wrap="square" lIns="0" tIns="0" rIns="0" bIns="0" rtlCol="0" anchor="ctr"/>
-          <a:lstStyle/>
-          <a:p>
-            <a:pPr marL="0" indent="0" algn="r">
-              <a:buNone/>
-            </a:pPr>
-            <a:r>
-              <a:rPr lang="en-US" sz="900" dirty="0">
-                <a:solidFill>
-                  <a:srgbClr val="7A6F68"/>
-                </a:solidFill>
-                <a:latin typeface="Calibri" pitchFamily="34" charset="0"/>
-                <a:ea typeface="Calibri" pitchFamily="34" charset="-122"/>
-                <a:cs typeface="Calibri" pitchFamily="34" charset="-120"/>
-              </a:rPr>
-              <a:t>10 / 24</a:t>
-            </a:r>
-            <a:endParaRPr lang="en-US" sz="900" dirty="0"/>
-          </a:p>
-        </p:txBody>
-      </p:sp>
-      <p:sp>
-        <p:nvSpPr>
-          <p:cNvPr id="4" name="Shape 2"/>
-          <p:cNvSpPr/>
-          <p:nvPr/>
-        </p:nvSpPr>
-        <p:spPr>
-          <a:xfrm>
-            <a:off x="548640" y="457200"/>
-            <a:ext cx="566928" cy="566928"/>
-          </a:xfrm>
-          <a:prstGeom prst="ellipse">
-            <a:avLst/>
-          </a:prstGeom>
-          <a:solidFill>
-            <a:srgbClr val="B8563A"/>
-          </a:solidFill>
-          <a:ln/>
-        </p:spPr>
-        <p:txBody>
-          <a:bodyPr/>
-          <a:lstStyle/>
-          <a:p>
-            <a:endParaRPr/>
-          </a:p>
-        </p:txBody>
-      </p:sp>
-      <p:sp>
-        <p:nvSpPr>
-          <p:cNvPr id="5" name="Text 3"/>
-          <p:cNvSpPr/>
-          <p:nvPr/>
-        </p:nvSpPr>
-        <p:spPr>
-          <a:xfrm>
-            <a:off x="1316736" y="420624"/>
-            <a:ext cx="9601200" cy="256032"/>
-          </a:xfrm>
-          <a:prstGeom prst="rect">
-            <a:avLst/>
-          </a:prstGeom>
-          <a:noFill/>
-          <a:ln/>
-        </p:spPr>
-        <p:txBody>
-          <a:bodyPr wrap="square" lIns="0" tIns="0" rIns="0" bIns="0" rtlCol="0" anchor="ctr"/>
-          <a:lstStyle/>
-          <a:p>
-            <a:pPr marL="0" indent="0">
-              <a:buNone/>
-            </a:pPr>
-            <a:r>
-              <a:rPr lang="en-US" sz="1100" b="1" kern="0" spc="200" dirty="0">
-                <a:solidFill>
-                  <a:srgbClr val="7A6F68"/>
-                </a:solidFill>
-                <a:latin typeface="Calibri" pitchFamily="34" charset="0"/>
-                <a:ea typeface="Calibri" pitchFamily="34" charset="-122"/>
-                <a:cs typeface="Calibri" pitchFamily="34" charset="-120"/>
-              </a:rPr>
-              <a:t>DATOS Y METODOLOGÍA</a:t>
-            </a:r>
-            <a:endParaRPr lang="en-US" sz="1100" dirty="0"/>
-          </a:p>
-        </p:txBody>
-      </p:sp>
-      <p:sp>
-        <p:nvSpPr>
-          <p:cNvPr id="6" name="Text 4"/>
-          <p:cNvSpPr/>
-          <p:nvPr/>
-        </p:nvSpPr>
-        <p:spPr>
-          <a:xfrm>
-            <a:off x="1316736" y="640080"/>
-            <a:ext cx="9966960" cy="640080"/>
-          </a:xfrm>
-          <a:prstGeom prst="rect">
-            <a:avLst/>
-          </a:prstGeom>
-          <a:noFill/>
-          <a:ln/>
-        </p:spPr>
-        <p:txBody>
-          <a:bodyPr wrap="square" lIns="0" tIns="0" rIns="0" bIns="0" rtlCol="0" anchor="t"/>
-          <a:lstStyle/>
-          <a:p>
-            <a:pPr marL="0" indent="0">
-              <a:buNone/>
-            </a:pPr>
-            <a:r>
-              <a:rPr lang="en-US" sz="2800" b="1" dirty="0">
-                <a:solidFill>
-                  <a:srgbClr val="2B2320"/>
-                </a:solidFill>
-                <a:latin typeface="Cambria" pitchFamily="34" charset="0"/>
-                <a:ea typeface="Cambria" pitchFamily="34" charset="-122"/>
-                <a:cs typeface="Cambria" pitchFamily="34" charset="-120"/>
-              </a:rPr>
-              <a:t>Ingeniería de características</a:t>
-            </a:r>
-            <a:endParaRPr lang="en-US" sz="2800" dirty="0"/>
-          </a:p>
-        </p:txBody>
-      </p:sp>
-      <p:pic>
-        <p:nvPicPr>
-          <p:cNvPr id="7" name="Image 0" descr="preencoded.png"/>
-          <p:cNvPicPr>
-            <a:picLocks noChangeAspect="1"/>
-          </p:cNvPicPr>
-          <p:nvPr/>
-        </p:nvPicPr>
-        <p:blipFill>
-          <a:blip r:embed="rId3"/>
-          <a:stretch>
-            <a:fillRect/>
-          </a:stretch>
-        </p:blipFill>
-        <p:spPr>
-          <a:xfrm>
-            <a:off x="656356" y="564916"/>
-            <a:ext cx="351495" cy="351495"/>
-          </a:xfrm>
-          <a:prstGeom prst="rect">
-            <a:avLst/>
-          </a:prstGeom>
-        </p:spPr>
-      </p:pic>
-      <p:sp>
-        <p:nvSpPr>
-          <p:cNvPr id="8" name="Text 5"/>
-          <p:cNvSpPr/>
-          <p:nvPr/>
-        </p:nvSpPr>
-        <p:spPr>
-          <a:xfrm>
-            <a:off x="548640" y="1417320"/>
-            <a:ext cx="5486400" cy="365760"/>
-          </a:xfrm>
-          <a:prstGeom prst="rect">
-            <a:avLst/>
-          </a:prstGeom>
-          <a:noFill/>
-          <a:ln/>
-        </p:spPr>
-        <p:txBody>
-          <a:bodyPr wrap="square" lIns="0" tIns="0" rIns="0" bIns="0" rtlCol="0" anchor="ctr"/>
-          <a:lstStyle/>
-          <a:p>
-            <a:pPr marL="0" indent="0">
-              <a:buNone/>
-            </a:pPr>
-            <a:r>
-              <a:rPr lang="en-US" sz="1300" b="1" dirty="0">
-                <a:solidFill>
-                  <a:srgbClr val="8C4029"/>
-                </a:solidFill>
-                <a:latin typeface="Calibri" pitchFamily="34" charset="0"/>
-                <a:ea typeface="Calibri" pitchFamily="34" charset="-122"/>
-                <a:cs typeface="Calibri" pitchFamily="34" charset="-120"/>
-              </a:rPr>
-              <a:t>12 servicios binarios extraídos por búsqueda de subcadenas en los campos de texto (API)</a:t>
-            </a:r>
-            <a:endParaRPr lang="en-US" sz="1300" dirty="0"/>
-          </a:p>
-        </p:txBody>
-      </p:sp>
-      <p:sp>
-        <p:nvSpPr>
-          <p:cNvPr id="9" name="Shape 6"/>
-          <p:cNvSpPr/>
-          <p:nvPr/>
-        </p:nvSpPr>
-        <p:spPr>
-          <a:xfrm>
-            <a:off x="548640" y="1874520"/>
-            <a:ext cx="1691640" cy="457200"/>
-          </a:xfrm>
-          <a:prstGeom prst="roundRect">
-            <a:avLst>
-              <a:gd name="adj" fmla="val 50000"/>
-            </a:avLst>
-          </a:prstGeom>
-          <a:solidFill>
-            <a:srgbClr val="F6EEE8"/>
-          </a:solidFill>
-          <a:ln w="12700">
-            <a:solidFill>
-              <a:srgbClr val="E7DDD3"/>
-            </a:solidFill>
-            <a:prstDash val="solid"/>
-          </a:ln>
-        </p:spPr>
-        <p:txBody>
-          <a:bodyPr/>
-          <a:lstStyle/>
-          <a:p>
-            <a:endParaRPr/>
-          </a:p>
-        </p:txBody>
-      </p:sp>
-      <p:sp>
-        <p:nvSpPr>
-          <p:cNvPr id="10" name="Text 7"/>
-          <p:cNvSpPr/>
-          <p:nvPr/>
-        </p:nvSpPr>
-        <p:spPr>
-          <a:xfrm>
-            <a:off x="548640" y="1874520"/>
-            <a:ext cx="1691640" cy="457200"/>
-          </a:xfrm>
-          <a:prstGeom prst="rect">
-            <a:avLst/>
-          </a:prstGeom>
-          <a:noFill/>
-          <a:ln/>
-        </p:spPr>
-        <p:txBody>
-          <a:bodyPr wrap="square" lIns="0" tIns="0" rIns="0" bIns="0" rtlCol="0" anchor="ctr"/>
-          <a:lstStyle/>
-          <a:p>
-            <a:pPr marL="0" indent="0" algn="ctr">
-              <a:buNone/>
-            </a:pPr>
-            <a:r>
-              <a:rPr lang="en-US" sz="1050" dirty="0">
-                <a:solidFill>
-                  <a:srgbClr val="2B2320"/>
-                </a:solidFill>
-                <a:latin typeface="Calibri" pitchFamily="34" charset="0"/>
-                <a:ea typeface="Calibri" pitchFamily="34" charset="-122"/>
-                <a:cs typeface="Calibri" pitchFamily="34" charset="-120"/>
-              </a:rPr>
-              <a:t>Parking</a:t>
-            </a:r>
-            <a:endParaRPr lang="en-US" sz="1050" dirty="0"/>
-          </a:p>
-        </p:txBody>
-      </p:sp>
-      <p:sp>
-        <p:nvSpPr>
-          <p:cNvPr id="11" name="Shape 8"/>
-          <p:cNvSpPr/>
-          <p:nvPr/>
-        </p:nvSpPr>
-        <p:spPr>
-          <a:xfrm>
-            <a:off x="2368296" y="1874520"/>
-            <a:ext cx="1691640" cy="457200"/>
-          </a:xfrm>
-          <a:prstGeom prst="roundRect">
-            <a:avLst>
-              <a:gd name="adj" fmla="val 50000"/>
-            </a:avLst>
-          </a:prstGeom>
-          <a:solidFill>
-            <a:srgbClr val="F6EEE8"/>
-          </a:solidFill>
-          <a:ln w="12700">
-            <a:solidFill>
-              <a:srgbClr val="E7DDD3"/>
-            </a:solidFill>
-            <a:prstDash val="solid"/>
-          </a:ln>
-        </p:spPr>
-        <p:txBody>
-          <a:bodyPr/>
-          <a:lstStyle/>
-          <a:p>
-            <a:endParaRPr/>
-          </a:p>
-        </p:txBody>
-      </p:sp>
-      <p:sp>
-        <p:nvSpPr>
-          <p:cNvPr id="12" name="Text 9"/>
-          <p:cNvSpPr/>
-          <p:nvPr/>
-        </p:nvSpPr>
-        <p:spPr>
-          <a:xfrm>
-            <a:off x="2368296" y="1874520"/>
-            <a:ext cx="1691640" cy="457200"/>
-          </a:xfrm>
-          <a:prstGeom prst="rect">
-            <a:avLst/>
-          </a:prstGeom>
-          <a:noFill/>
-          <a:ln/>
-        </p:spPr>
-        <p:txBody>
-          <a:bodyPr wrap="square" lIns="0" tIns="0" rIns="0" bIns="0" rtlCol="0" anchor="ctr"/>
-          <a:lstStyle/>
-          <a:p>
-            <a:pPr marL="0" indent="0" algn="ctr">
-              <a:buNone/>
-            </a:pPr>
-            <a:r>
-              <a:rPr lang="en-US" sz="1050" dirty="0">
-                <a:solidFill>
-                  <a:srgbClr val="2B2320"/>
-                </a:solidFill>
-                <a:latin typeface="Calibri" pitchFamily="34" charset="0"/>
-                <a:ea typeface="Calibri" pitchFamily="34" charset="-122"/>
-                <a:cs typeface="Calibri" pitchFamily="34" charset="-120"/>
-              </a:rPr>
-              <a:t>Parking gratis</a:t>
-            </a:r>
-            <a:endParaRPr lang="en-US" sz="1050" dirty="0"/>
-          </a:p>
-        </p:txBody>
-      </p:sp>
-      <p:sp>
-        <p:nvSpPr>
-          <p:cNvPr id="13" name="Shape 10"/>
-          <p:cNvSpPr/>
-          <p:nvPr/>
-        </p:nvSpPr>
-        <p:spPr>
-          <a:xfrm>
-            <a:off x="4187952" y="1874520"/>
-            <a:ext cx="1691640" cy="457200"/>
-          </a:xfrm>
-          <a:prstGeom prst="roundRect">
-            <a:avLst>
-              <a:gd name="adj" fmla="val 50000"/>
-            </a:avLst>
-          </a:prstGeom>
-          <a:solidFill>
-            <a:srgbClr val="F6EEE8"/>
-          </a:solidFill>
-          <a:ln w="12700">
-            <a:solidFill>
-              <a:srgbClr val="E7DDD3"/>
-            </a:solidFill>
-            <a:prstDash val="solid"/>
-          </a:ln>
-        </p:spPr>
-        <p:txBody>
-          <a:bodyPr/>
-          <a:lstStyle/>
-          <a:p>
-            <a:endParaRPr/>
-          </a:p>
-        </p:txBody>
-      </p:sp>
-      <p:sp>
-        <p:nvSpPr>
-          <p:cNvPr id="14" name="Text 11"/>
-          <p:cNvSpPr/>
-          <p:nvPr/>
-        </p:nvSpPr>
-        <p:spPr>
-          <a:xfrm>
-            <a:off x="4187952" y="1874520"/>
-            <a:ext cx="1691640" cy="457200"/>
-          </a:xfrm>
-          <a:prstGeom prst="rect">
-            <a:avLst/>
-          </a:prstGeom>
-          <a:noFill/>
-          <a:ln/>
-        </p:spPr>
-        <p:txBody>
-          <a:bodyPr wrap="square" lIns="0" tIns="0" rIns="0" bIns="0" rtlCol="0" anchor="ctr"/>
-          <a:lstStyle/>
-          <a:p>
-            <a:pPr marL="0" indent="0" algn="ctr">
-              <a:buNone/>
-            </a:pPr>
-            <a:r>
-              <a:rPr lang="en-US" sz="1050" dirty="0">
-                <a:solidFill>
-                  <a:srgbClr val="2B2320"/>
-                </a:solidFill>
-                <a:latin typeface="Calibri" pitchFamily="34" charset="0"/>
-                <a:ea typeface="Calibri" pitchFamily="34" charset="-122"/>
-                <a:cs typeface="Calibri" pitchFamily="34" charset="-120"/>
-              </a:rPr>
-              <a:t>Gimnasio</a:t>
-            </a:r>
-            <a:endParaRPr lang="en-US" sz="1050" dirty="0"/>
-          </a:p>
-        </p:txBody>
-      </p:sp>
-      <p:sp>
-        <p:nvSpPr>
-          <p:cNvPr id="15" name="Shape 12"/>
-          <p:cNvSpPr/>
-          <p:nvPr/>
-        </p:nvSpPr>
-        <p:spPr>
-          <a:xfrm>
-            <a:off x="548640" y="2441448"/>
-            <a:ext cx="1691640" cy="457200"/>
-          </a:xfrm>
-          <a:prstGeom prst="roundRect">
-            <a:avLst>
-              <a:gd name="adj" fmla="val 50000"/>
-            </a:avLst>
-          </a:prstGeom>
-          <a:solidFill>
-            <a:srgbClr val="F6EEE8"/>
-          </a:solidFill>
-          <a:ln w="12700">
-            <a:solidFill>
-              <a:srgbClr val="E7DDD3"/>
-            </a:solidFill>
-            <a:prstDash val="solid"/>
-          </a:ln>
-        </p:spPr>
-        <p:txBody>
-          <a:bodyPr/>
-          <a:lstStyle/>
-          <a:p>
-            <a:endParaRPr/>
-          </a:p>
-        </p:txBody>
-      </p:sp>
-      <p:sp>
-        <p:nvSpPr>
-          <p:cNvPr id="16" name="Text 13"/>
-          <p:cNvSpPr/>
-          <p:nvPr/>
-        </p:nvSpPr>
-        <p:spPr>
-          <a:xfrm>
-            <a:off x="548640" y="2441448"/>
-            <a:ext cx="1691640" cy="457200"/>
-          </a:xfrm>
-          <a:prstGeom prst="rect">
-            <a:avLst/>
-          </a:prstGeom>
-          <a:noFill/>
-          <a:ln/>
-        </p:spPr>
-        <p:txBody>
-          <a:bodyPr wrap="square" lIns="0" tIns="0" rIns="0" bIns="0" rtlCol="0" anchor="ctr"/>
-          <a:lstStyle/>
-          <a:p>
-            <a:pPr marL="0" indent="0" algn="ctr">
-              <a:buNone/>
-            </a:pPr>
-            <a:r>
-              <a:rPr lang="en-US" sz="1050" dirty="0">
-                <a:solidFill>
-                  <a:srgbClr val="2B2320"/>
-                </a:solidFill>
-                <a:latin typeface="Calibri" pitchFamily="34" charset="0"/>
-                <a:ea typeface="Calibri" pitchFamily="34" charset="-122"/>
-                <a:cs typeface="Calibri" pitchFamily="34" charset="-120"/>
-              </a:rPr>
-              <a:t>Restaurante</a:t>
-            </a:r>
-            <a:endParaRPr lang="en-US" sz="1050" dirty="0"/>
-          </a:p>
-        </p:txBody>
-      </p:sp>
-      <p:sp>
-        <p:nvSpPr>
-          <p:cNvPr id="17" name="Shape 14"/>
-          <p:cNvSpPr/>
-          <p:nvPr/>
-        </p:nvSpPr>
-        <p:spPr>
-          <a:xfrm>
-            <a:off x="2368296" y="2441448"/>
-            <a:ext cx="1691640" cy="457200"/>
-          </a:xfrm>
-          <a:prstGeom prst="roundRect">
-            <a:avLst>
-              <a:gd name="adj" fmla="val 50000"/>
-            </a:avLst>
-          </a:prstGeom>
-          <a:solidFill>
-            <a:srgbClr val="F6EEE8"/>
-          </a:solidFill>
-          <a:ln w="12700">
-            <a:solidFill>
-              <a:srgbClr val="E7DDD3"/>
-            </a:solidFill>
-            <a:prstDash val="solid"/>
-          </a:ln>
-        </p:spPr>
-        <p:txBody>
-          <a:bodyPr/>
-          <a:lstStyle/>
-          <a:p>
-            <a:endParaRPr/>
-          </a:p>
-        </p:txBody>
-      </p:sp>
-      <p:sp>
-        <p:nvSpPr>
-          <p:cNvPr id="18" name="Text 15"/>
-          <p:cNvSpPr/>
-          <p:nvPr/>
-        </p:nvSpPr>
-        <p:spPr>
-          <a:xfrm>
-            <a:off x="2368296" y="2441448"/>
-            <a:ext cx="1691640" cy="457200"/>
-          </a:xfrm>
-          <a:prstGeom prst="rect">
-            <a:avLst/>
-          </a:prstGeom>
-          <a:noFill/>
-          <a:ln/>
-        </p:spPr>
-        <p:txBody>
-          <a:bodyPr wrap="square" lIns="0" tIns="0" rIns="0" bIns="0" rtlCol="0" anchor="ctr"/>
-          <a:lstStyle/>
-          <a:p>
-            <a:pPr marL="0" indent="0" algn="ctr">
-              <a:buNone/>
-            </a:pPr>
-            <a:r>
-              <a:rPr lang="en-US" sz="1050" dirty="0">
-                <a:solidFill>
-                  <a:srgbClr val="2B2320"/>
-                </a:solidFill>
-                <a:latin typeface="Calibri" pitchFamily="34" charset="0"/>
-                <a:ea typeface="Calibri" pitchFamily="34" charset="-122"/>
-                <a:cs typeface="Calibri" pitchFamily="34" charset="-120"/>
-              </a:rPr>
-              <a:t>Piscina</a:t>
-            </a:r>
-            <a:endParaRPr lang="en-US" sz="1050" dirty="0"/>
-          </a:p>
-        </p:txBody>
-      </p:sp>
-      <p:sp>
-        <p:nvSpPr>
-          <p:cNvPr id="19" name="Shape 16"/>
-          <p:cNvSpPr/>
-          <p:nvPr/>
-        </p:nvSpPr>
-        <p:spPr>
-          <a:xfrm>
-            <a:off x="4187952" y="2441448"/>
-            <a:ext cx="1691640" cy="457200"/>
-          </a:xfrm>
-          <a:prstGeom prst="roundRect">
-            <a:avLst>
-              <a:gd name="adj" fmla="val 50000"/>
-            </a:avLst>
-          </a:prstGeom>
-          <a:solidFill>
-            <a:srgbClr val="F6EEE8"/>
-          </a:solidFill>
-          <a:ln w="12700">
-            <a:solidFill>
-              <a:srgbClr val="E7DDD3"/>
-            </a:solidFill>
-            <a:prstDash val="solid"/>
-          </a:ln>
-        </p:spPr>
-        <p:txBody>
-          <a:bodyPr/>
-          <a:lstStyle/>
-          <a:p>
-            <a:endParaRPr/>
-          </a:p>
-        </p:txBody>
-      </p:sp>
-      <p:sp>
-        <p:nvSpPr>
-          <p:cNvPr id="20" name="Text 17"/>
-          <p:cNvSpPr/>
-          <p:nvPr/>
-        </p:nvSpPr>
-        <p:spPr>
-          <a:xfrm>
-            <a:off x="4187952" y="2441448"/>
-            <a:ext cx="1691640" cy="457200"/>
-          </a:xfrm>
-          <a:prstGeom prst="rect">
-            <a:avLst/>
-          </a:prstGeom>
-          <a:noFill/>
-          <a:ln/>
-        </p:spPr>
-        <p:txBody>
-          <a:bodyPr wrap="square" lIns="0" tIns="0" rIns="0" bIns="0" rtlCol="0" anchor="ctr"/>
-          <a:lstStyle/>
-          <a:p>
-            <a:pPr marL="0" indent="0" algn="ctr">
-              <a:buNone/>
-            </a:pPr>
-            <a:r>
-              <a:rPr lang="en-US" sz="1050" dirty="0">
-                <a:solidFill>
-                  <a:srgbClr val="2B2320"/>
-                </a:solidFill>
-                <a:latin typeface="Calibri" pitchFamily="34" charset="0"/>
-                <a:ea typeface="Calibri" pitchFamily="34" charset="-122"/>
-                <a:cs typeface="Calibri" pitchFamily="34" charset="-120"/>
-              </a:rPr>
-              <a:t>Piscina interior</a:t>
-            </a:r>
-            <a:endParaRPr lang="en-US" sz="1050" dirty="0"/>
-          </a:p>
-        </p:txBody>
-      </p:sp>
-      <p:sp>
-        <p:nvSpPr>
-          <p:cNvPr id="21" name="Shape 18"/>
-          <p:cNvSpPr/>
-          <p:nvPr/>
-        </p:nvSpPr>
-        <p:spPr>
-          <a:xfrm>
-            <a:off x="548640" y="3008376"/>
-            <a:ext cx="1691640" cy="457200"/>
-          </a:xfrm>
-          <a:prstGeom prst="roundRect">
-            <a:avLst>
-              <a:gd name="adj" fmla="val 50000"/>
-            </a:avLst>
-          </a:prstGeom>
-          <a:solidFill>
-            <a:srgbClr val="F6EEE8"/>
-          </a:solidFill>
-          <a:ln w="12700">
-            <a:solidFill>
-              <a:srgbClr val="E7DDD3"/>
-            </a:solidFill>
-            <a:prstDash val="solid"/>
-          </a:ln>
-        </p:spPr>
-        <p:txBody>
-          <a:bodyPr/>
-          <a:lstStyle/>
-          <a:p>
-            <a:endParaRPr/>
-          </a:p>
-        </p:txBody>
-      </p:sp>
-      <p:sp>
-        <p:nvSpPr>
-          <p:cNvPr id="22" name="Text 19"/>
-          <p:cNvSpPr/>
-          <p:nvPr/>
-        </p:nvSpPr>
-        <p:spPr>
-          <a:xfrm>
-            <a:off x="548640" y="3008376"/>
-            <a:ext cx="1691640" cy="457200"/>
-          </a:xfrm>
-          <a:prstGeom prst="rect">
-            <a:avLst/>
-          </a:prstGeom>
-          <a:noFill/>
-          <a:ln/>
-        </p:spPr>
-        <p:txBody>
-          <a:bodyPr wrap="square" lIns="0" tIns="0" rIns="0" bIns="0" rtlCol="0" anchor="ctr"/>
-          <a:lstStyle/>
-          <a:p>
-            <a:pPr marL="0" indent="0" algn="ctr">
-              <a:buNone/>
-            </a:pPr>
-            <a:r>
-              <a:rPr lang="en-US" sz="1050" dirty="0">
-                <a:solidFill>
-                  <a:srgbClr val="2B2320"/>
-                </a:solidFill>
-                <a:latin typeface="Calibri" pitchFamily="34" charset="0"/>
-                <a:ea typeface="Calibri" pitchFamily="34" charset="-122"/>
-                <a:cs typeface="Calibri" pitchFamily="34" charset="-120"/>
-              </a:rPr>
-              <a:t>Piscina infinita</a:t>
-            </a:r>
-            <a:endParaRPr lang="en-US" sz="1050" dirty="0"/>
-          </a:p>
-        </p:txBody>
-      </p:sp>
-      <p:sp>
-        <p:nvSpPr>
-          <p:cNvPr id="23" name="Shape 20"/>
-          <p:cNvSpPr/>
-          <p:nvPr/>
-        </p:nvSpPr>
-        <p:spPr>
-          <a:xfrm>
-            <a:off x="2368296" y="3008376"/>
-            <a:ext cx="1691640" cy="457200"/>
-          </a:xfrm>
-          <a:prstGeom prst="roundRect">
-            <a:avLst>
-              <a:gd name="adj" fmla="val 50000"/>
-            </a:avLst>
-          </a:prstGeom>
-          <a:solidFill>
-            <a:srgbClr val="F6EEE8"/>
-          </a:solidFill>
-          <a:ln w="12700">
-            <a:solidFill>
-              <a:srgbClr val="E7DDD3"/>
-            </a:solidFill>
-            <a:prstDash val="solid"/>
-          </a:ln>
-        </p:spPr>
-        <p:txBody>
-          <a:bodyPr/>
-          <a:lstStyle/>
-          <a:p>
-            <a:endParaRPr/>
-          </a:p>
-        </p:txBody>
-      </p:sp>
-      <p:sp>
-        <p:nvSpPr>
-          <p:cNvPr id="24" name="Text 21"/>
-          <p:cNvSpPr/>
-          <p:nvPr/>
-        </p:nvSpPr>
-        <p:spPr>
-          <a:xfrm>
-            <a:off x="2368296" y="3008376"/>
-            <a:ext cx="1691640" cy="457200"/>
-          </a:xfrm>
-          <a:prstGeom prst="rect">
-            <a:avLst/>
-          </a:prstGeom>
-          <a:noFill/>
-          <a:ln/>
-        </p:spPr>
-        <p:txBody>
-          <a:bodyPr wrap="square" lIns="0" tIns="0" rIns="0" bIns="0" rtlCol="0" anchor="ctr"/>
-          <a:lstStyle/>
-          <a:p>
-            <a:pPr marL="0" indent="0" algn="ctr">
-              <a:buNone/>
-            </a:pPr>
-            <a:r>
-              <a:rPr lang="en-US" sz="1050" dirty="0">
-                <a:solidFill>
-                  <a:srgbClr val="2B2320"/>
-                </a:solidFill>
-                <a:latin typeface="Calibri" pitchFamily="34" charset="0"/>
-                <a:ea typeface="Calibri" pitchFamily="34" charset="-122"/>
-                <a:cs typeface="Calibri" pitchFamily="34" charset="-120"/>
-              </a:rPr>
-              <a:t>Aire acondic.</a:t>
-            </a:r>
-            <a:endParaRPr lang="en-US" sz="1050" dirty="0"/>
-          </a:p>
-        </p:txBody>
-      </p:sp>
-      <p:sp>
-        <p:nvSpPr>
-          <p:cNvPr id="25" name="Shape 22"/>
-          <p:cNvSpPr/>
-          <p:nvPr/>
-        </p:nvSpPr>
-        <p:spPr>
-          <a:xfrm>
-            <a:off x="4187952" y="3008376"/>
-            <a:ext cx="1691640" cy="457200"/>
-          </a:xfrm>
-          <a:prstGeom prst="roundRect">
-            <a:avLst>
-              <a:gd name="adj" fmla="val 50000"/>
-            </a:avLst>
-          </a:prstGeom>
-          <a:solidFill>
-            <a:srgbClr val="F6EEE8"/>
-          </a:solidFill>
-          <a:ln w="12700">
-            <a:solidFill>
-              <a:srgbClr val="E7DDD3"/>
-            </a:solidFill>
-            <a:prstDash val="solid"/>
-          </a:ln>
-        </p:spPr>
-        <p:txBody>
-          <a:bodyPr/>
-          <a:lstStyle/>
-          <a:p>
-            <a:endParaRPr/>
-          </a:p>
-        </p:txBody>
-      </p:sp>
-      <p:sp>
-        <p:nvSpPr>
-          <p:cNvPr id="26" name="Text 23"/>
-          <p:cNvSpPr/>
-          <p:nvPr/>
-        </p:nvSpPr>
-        <p:spPr>
-          <a:xfrm>
-            <a:off x="4187952" y="3008376"/>
-            <a:ext cx="1691640" cy="457200"/>
-          </a:xfrm>
-          <a:prstGeom prst="rect">
-            <a:avLst/>
-          </a:prstGeom>
-          <a:noFill/>
-          <a:ln/>
-        </p:spPr>
-        <p:txBody>
-          <a:bodyPr wrap="square" lIns="0" tIns="0" rIns="0" bIns="0" rtlCol="0" anchor="ctr"/>
-          <a:lstStyle/>
-          <a:p>
-            <a:pPr marL="0" indent="0" algn="ctr">
-              <a:buNone/>
-            </a:pPr>
-            <a:r>
-              <a:rPr lang="en-US" sz="1050" dirty="0">
-                <a:solidFill>
-                  <a:srgbClr val="2B2320"/>
-                </a:solidFill>
-                <a:latin typeface="Calibri" pitchFamily="34" charset="0"/>
-                <a:ea typeface="Calibri" pitchFamily="34" charset="-122"/>
-                <a:cs typeface="Calibri" pitchFamily="34" charset="-120"/>
-              </a:rPr>
-              <a:t>Calefacción</a:t>
-            </a:r>
-            <a:endParaRPr lang="en-US" sz="1050" dirty="0"/>
-          </a:p>
-        </p:txBody>
-      </p:sp>
-      <p:sp>
-        <p:nvSpPr>
-          <p:cNvPr id="27" name="Shape 24"/>
-          <p:cNvSpPr/>
-          <p:nvPr/>
-        </p:nvSpPr>
-        <p:spPr>
-          <a:xfrm>
-            <a:off x="548640" y="3575304"/>
-            <a:ext cx="1691640" cy="457200"/>
-          </a:xfrm>
-          <a:prstGeom prst="roundRect">
-            <a:avLst>
-              <a:gd name="adj" fmla="val 50000"/>
-            </a:avLst>
-          </a:prstGeom>
-          <a:solidFill>
-            <a:srgbClr val="F6EEE8"/>
-          </a:solidFill>
-          <a:ln w="12700">
-            <a:solidFill>
-              <a:srgbClr val="E7DDD3"/>
-            </a:solidFill>
-            <a:prstDash val="solid"/>
-          </a:ln>
-        </p:spPr>
-        <p:txBody>
-          <a:bodyPr/>
-          <a:lstStyle/>
-          <a:p>
-            <a:endParaRPr/>
-          </a:p>
-        </p:txBody>
-      </p:sp>
-      <p:sp>
-        <p:nvSpPr>
-          <p:cNvPr id="28" name="Text 25"/>
-          <p:cNvSpPr/>
-          <p:nvPr/>
-        </p:nvSpPr>
-        <p:spPr>
-          <a:xfrm>
-            <a:off x="548640" y="3575304"/>
-            <a:ext cx="1691640" cy="457200"/>
-          </a:xfrm>
-          <a:prstGeom prst="rect">
-            <a:avLst/>
-          </a:prstGeom>
-          <a:noFill/>
-          <a:ln/>
-        </p:spPr>
-        <p:txBody>
-          <a:bodyPr wrap="square" lIns="0" tIns="0" rIns="0" bIns="0" rtlCol="0" anchor="ctr"/>
-          <a:lstStyle/>
-          <a:p>
-            <a:pPr marL="0" indent="0" algn="ctr">
-              <a:buNone/>
-            </a:pPr>
-            <a:r>
-              <a:rPr lang="en-US" sz="1050" dirty="0">
-                <a:solidFill>
-                  <a:srgbClr val="2B2320"/>
-                </a:solidFill>
-                <a:latin typeface="Calibri" pitchFamily="34" charset="0"/>
-                <a:ea typeface="Calibri" pitchFamily="34" charset="-122"/>
-                <a:cs typeface="Calibri" pitchFamily="34" charset="-120"/>
-              </a:rPr>
-              <a:t>Vistas</a:t>
-            </a:r>
-            <a:endParaRPr lang="en-US" sz="1050" dirty="0"/>
-          </a:p>
-        </p:txBody>
-      </p:sp>
-      <p:sp>
-        <p:nvSpPr>
-          <p:cNvPr id="29" name="Shape 26"/>
-          <p:cNvSpPr/>
-          <p:nvPr/>
-        </p:nvSpPr>
-        <p:spPr>
-          <a:xfrm>
-            <a:off x="2368296" y="3575304"/>
-            <a:ext cx="1691640" cy="457200"/>
-          </a:xfrm>
-          <a:prstGeom prst="roundRect">
-            <a:avLst>
-              <a:gd name="adj" fmla="val 50000"/>
-            </a:avLst>
-          </a:prstGeom>
-          <a:solidFill>
-            <a:srgbClr val="F6EEE8"/>
-          </a:solidFill>
-          <a:ln w="12700">
-            <a:solidFill>
-              <a:srgbClr val="E7DDD3"/>
-            </a:solidFill>
-            <a:prstDash val="solid"/>
-          </a:ln>
-        </p:spPr>
-        <p:txBody>
-          <a:bodyPr/>
-          <a:lstStyle/>
-          <a:p>
-            <a:endParaRPr/>
-          </a:p>
-        </p:txBody>
-      </p:sp>
-      <p:sp>
-        <p:nvSpPr>
-          <p:cNvPr id="30" name="Text 27"/>
-          <p:cNvSpPr/>
-          <p:nvPr/>
-        </p:nvSpPr>
-        <p:spPr>
-          <a:xfrm>
-            <a:off x="2368296" y="3575304"/>
-            <a:ext cx="1691640" cy="457200"/>
-          </a:xfrm>
-          <a:prstGeom prst="rect">
-            <a:avLst/>
-          </a:prstGeom>
-          <a:noFill/>
-          <a:ln/>
-        </p:spPr>
-        <p:txBody>
-          <a:bodyPr wrap="square" lIns="0" tIns="0" rIns="0" bIns="0" rtlCol="0" anchor="ctr"/>
-          <a:lstStyle/>
-          <a:p>
-            <a:pPr marL="0" indent="0" algn="ctr">
-              <a:buNone/>
-            </a:pPr>
-            <a:r>
-              <a:rPr lang="en-US" sz="1050" dirty="0">
-                <a:solidFill>
-                  <a:srgbClr val="2B2320"/>
-                </a:solidFill>
-                <a:latin typeface="Calibri" pitchFamily="34" charset="0"/>
-                <a:ea typeface="Calibri" pitchFamily="34" charset="-122"/>
-                <a:cs typeface="Calibri" pitchFamily="34" charset="-120"/>
-              </a:rPr>
-              <a:t>Terraza</a:t>
-            </a:r>
-            <a:endParaRPr lang="en-US" sz="1050" dirty="0"/>
-          </a:p>
-        </p:txBody>
-      </p:sp>
-      <p:sp>
-        <p:nvSpPr>
-          <p:cNvPr id="31" name="Shape 28"/>
-          <p:cNvSpPr/>
-          <p:nvPr/>
-        </p:nvSpPr>
-        <p:spPr>
-          <a:xfrm>
-            <a:off x="4187952" y="3575304"/>
-            <a:ext cx="1691640" cy="457200"/>
-          </a:xfrm>
-          <a:prstGeom prst="roundRect">
-            <a:avLst>
-              <a:gd name="adj" fmla="val 50000"/>
-            </a:avLst>
-          </a:prstGeom>
-          <a:solidFill>
-            <a:srgbClr val="F6EEE8"/>
-          </a:solidFill>
-          <a:ln w="12700">
-            <a:solidFill>
-              <a:srgbClr val="E7DDD3"/>
-            </a:solidFill>
-            <a:prstDash val="solid"/>
-          </a:ln>
-        </p:spPr>
-        <p:txBody>
-          <a:bodyPr/>
-          <a:lstStyle/>
-          <a:p>
-            <a:endParaRPr/>
-          </a:p>
-        </p:txBody>
-      </p:sp>
-      <p:sp>
-        <p:nvSpPr>
-          <p:cNvPr id="32" name="Text 29"/>
-          <p:cNvSpPr/>
-          <p:nvPr/>
-        </p:nvSpPr>
-        <p:spPr>
-          <a:xfrm>
-            <a:off x="4187952" y="3575304"/>
-            <a:ext cx="1691640" cy="457200"/>
-          </a:xfrm>
-          <a:prstGeom prst="rect">
-            <a:avLst/>
-          </a:prstGeom>
-          <a:noFill/>
-          <a:ln/>
-        </p:spPr>
-        <p:txBody>
-          <a:bodyPr wrap="square" lIns="0" tIns="0" rIns="0" bIns="0" rtlCol="0" anchor="ctr"/>
-          <a:lstStyle/>
-          <a:p>
-            <a:pPr marL="0" indent="0" algn="ctr">
-              <a:buNone/>
-            </a:pPr>
-            <a:r>
-              <a:rPr lang="en-US" sz="1050" dirty="0">
-                <a:solidFill>
-                  <a:srgbClr val="2B2320"/>
-                </a:solidFill>
-                <a:latin typeface="Calibri" pitchFamily="34" charset="0"/>
-                <a:ea typeface="Calibri" pitchFamily="34" charset="-122"/>
-                <a:cs typeface="Calibri" pitchFamily="34" charset="-120"/>
-              </a:rPr>
-              <a:t>Baño privado</a:t>
-            </a:r>
-            <a:endParaRPr lang="en-US" sz="1050" dirty="0"/>
-          </a:p>
-        </p:txBody>
-      </p:sp>
-      <p:sp>
-        <p:nvSpPr>
-          <p:cNvPr id="33" name="Text 30"/>
-          <p:cNvSpPr/>
-          <p:nvPr/>
-        </p:nvSpPr>
-        <p:spPr>
-          <a:xfrm>
-            <a:off x="7086600" y="1417320"/>
-            <a:ext cx="4206240" cy="365760"/>
-          </a:xfrm>
-          <a:prstGeom prst="rect">
-            <a:avLst/>
-          </a:prstGeom>
-          <a:noFill/>
-          <a:ln/>
-        </p:spPr>
-        <p:txBody>
-          <a:bodyPr wrap="square" lIns="0" tIns="0" rIns="0" bIns="0" rtlCol="0" anchor="ctr"/>
-          <a:lstStyle/>
-          <a:p>
-            <a:pPr marL="0" indent="0">
-              <a:buNone/>
-            </a:pPr>
-            <a:r>
-              <a:rPr lang="en-US" sz="1300" b="1" dirty="0">
-                <a:solidFill>
-                  <a:srgbClr val="8C4029"/>
-                </a:solidFill>
-                <a:latin typeface="Calibri" pitchFamily="34" charset="0"/>
-                <a:ea typeface="Calibri" pitchFamily="34" charset="-122"/>
-                <a:cs typeface="Calibri" pitchFamily="34" charset="-120"/>
-              </a:rPr>
-              <a:t>Variables temporales</a:t>
-            </a:r>
-            <a:endParaRPr lang="en-US" sz="1300" dirty="0"/>
-          </a:p>
-        </p:txBody>
-      </p:sp>
-      <p:sp>
-        <p:nvSpPr>
-          <p:cNvPr id="34" name="Text 31"/>
-          <p:cNvSpPr/>
-          <p:nvPr/>
-        </p:nvSpPr>
-        <p:spPr>
-          <a:xfrm>
-            <a:off x="7086600" y="1828800"/>
-            <a:ext cx="4297680" cy="1828800"/>
-          </a:xfrm>
-          <a:prstGeom prst="rect">
-            <a:avLst/>
-          </a:prstGeom>
-          <a:noFill/>
-          <a:ln/>
-        </p:spPr>
-        <p:txBody>
-          <a:bodyPr wrap="square" lIns="0" tIns="0" rIns="0" bIns="0" rtlCol="0" anchor="t"/>
-          <a:lstStyle/>
-          <a:p>
-            <a:pPr marL="228600" indent="-228600">
-              <a:lnSpc>
-                <a:spcPct val="135000"/>
-              </a:lnSpc>
-              <a:buFont typeface="Arial" panose="020B0604020202020204" pitchFamily="34" charset="0"/>
-              <a:buChar char="•"/>
-            </a:pPr>
-            <a:r>
-              <a:rPr lang="en-US" sz="1200" b="1" dirty="0" err="1">
-                <a:solidFill>
-                  <a:srgbClr val="2B2320"/>
-                </a:solidFill>
-                <a:latin typeface="Calibri" pitchFamily="34" charset="0"/>
-                <a:ea typeface="Calibri" pitchFamily="34" charset="-122"/>
-                <a:cs typeface="Calibri" pitchFamily="34" charset="-120"/>
-              </a:rPr>
-              <a:t>es_finde</a:t>
-            </a:r>
-            <a:r>
-              <a:rPr lang="en-US" sz="1200" b="1" dirty="0">
-                <a:solidFill>
-                  <a:srgbClr val="7A6F68"/>
-                </a:solidFill>
-                <a:latin typeface="Calibri" pitchFamily="34" charset="0"/>
-                <a:ea typeface="Calibri" pitchFamily="34" charset="-122"/>
-                <a:cs typeface="Calibri" pitchFamily="34" charset="-120"/>
-              </a:rPr>
-              <a:t>:</a:t>
-            </a:r>
-            <a:r>
-              <a:rPr lang="en-US" sz="1200" dirty="0">
-                <a:solidFill>
-                  <a:srgbClr val="7A6F68"/>
-                </a:solidFill>
-                <a:latin typeface="Calibri" pitchFamily="34" charset="0"/>
-                <a:ea typeface="Calibri" pitchFamily="34" charset="-122"/>
-                <a:cs typeface="Calibri" pitchFamily="34" charset="-120"/>
-              </a:rPr>
-              <a:t> viernes o </a:t>
-            </a:r>
-            <a:r>
-              <a:rPr lang="en-US" sz="1200" dirty="0" err="1">
-                <a:solidFill>
-                  <a:srgbClr val="7A6F68"/>
-                </a:solidFill>
-                <a:latin typeface="Calibri" pitchFamily="34" charset="0"/>
-                <a:ea typeface="Calibri" pitchFamily="34" charset="-122"/>
-                <a:cs typeface="Calibri" pitchFamily="34" charset="-120"/>
-              </a:rPr>
-              <a:t>sábado</a:t>
-            </a:r>
-            <a:endParaRPr lang="en-US" sz="1200" dirty="0">
-              <a:solidFill>
-                <a:srgbClr val="7A6F68"/>
-              </a:solidFill>
-              <a:latin typeface="Calibri" pitchFamily="34" charset="0"/>
-              <a:ea typeface="Calibri" pitchFamily="34" charset="-122"/>
-              <a:cs typeface="Calibri" pitchFamily="34" charset="-120"/>
-            </a:endParaRPr>
-          </a:p>
-          <a:p>
-            <a:pPr marL="228600" indent="-228600">
-              <a:lnSpc>
-                <a:spcPct val="135000"/>
-              </a:lnSpc>
-              <a:buFont typeface="Arial" panose="020B0604020202020204" pitchFamily="34" charset="0"/>
-              <a:buChar char="•"/>
-            </a:pPr>
-            <a:r>
-              <a:rPr lang="en-US" sz="1200" b="1" dirty="0" err="1">
-                <a:solidFill>
-                  <a:srgbClr val="2B2320"/>
-                </a:solidFill>
-                <a:latin typeface="Calibri" pitchFamily="34" charset="0"/>
-                <a:ea typeface="Calibri" pitchFamily="34" charset="-122"/>
-                <a:cs typeface="Calibri" pitchFamily="34" charset="-120"/>
-              </a:rPr>
-              <a:t>es_domingo</a:t>
-            </a:r>
-            <a:r>
-              <a:rPr lang="en-US" sz="1200" b="1" dirty="0">
-                <a:solidFill>
-                  <a:srgbClr val="7A6F68"/>
-                </a:solidFill>
-                <a:latin typeface="Calibri" pitchFamily="34" charset="0"/>
-                <a:ea typeface="Calibri" pitchFamily="34" charset="-122"/>
-                <a:cs typeface="Calibri" pitchFamily="34" charset="-120"/>
-              </a:rPr>
-              <a:t>:</a:t>
-            </a:r>
-            <a:r>
-              <a:rPr lang="en-US" sz="1200" dirty="0">
-                <a:solidFill>
-                  <a:srgbClr val="7A6F68"/>
-                </a:solidFill>
-                <a:latin typeface="Calibri" pitchFamily="34" charset="0"/>
-                <a:ea typeface="Calibri" pitchFamily="34" charset="-122"/>
-                <a:cs typeface="Calibri" pitchFamily="34" charset="-120"/>
-              </a:rPr>
-              <a:t> </a:t>
-            </a:r>
-            <a:r>
-              <a:rPr lang="en-US" sz="1200" dirty="0" err="1">
-                <a:solidFill>
-                  <a:srgbClr val="7A6F68"/>
-                </a:solidFill>
-                <a:latin typeface="Calibri" pitchFamily="34" charset="0"/>
-                <a:ea typeface="Calibri" pitchFamily="34" charset="-122"/>
-                <a:cs typeface="Calibri" pitchFamily="34" charset="-120"/>
-              </a:rPr>
-              <a:t>comportamiento</a:t>
-            </a:r>
-            <a:r>
-              <a:rPr lang="en-US" sz="1200" dirty="0">
-                <a:solidFill>
-                  <a:srgbClr val="7A6F68"/>
-                </a:solidFill>
-                <a:latin typeface="Calibri" pitchFamily="34" charset="0"/>
-                <a:ea typeface="Calibri" pitchFamily="34" charset="-122"/>
-                <a:cs typeface="Calibri" pitchFamily="34" charset="-120"/>
-              </a:rPr>
-              <a:t> </a:t>
-            </a:r>
-            <a:r>
-              <a:rPr lang="en-US" sz="1200" dirty="0" err="1">
-                <a:solidFill>
-                  <a:srgbClr val="7A6F68"/>
-                </a:solidFill>
-                <a:latin typeface="Calibri" pitchFamily="34" charset="0"/>
-                <a:ea typeface="Calibri" pitchFamily="34" charset="-122"/>
-                <a:cs typeface="Calibri" pitchFamily="34" charset="-120"/>
-              </a:rPr>
-              <a:t>diferenciado</a:t>
-            </a:r>
-            <a:endParaRPr lang="en-US" sz="1200" dirty="0">
-              <a:solidFill>
-                <a:srgbClr val="7A6F68"/>
-              </a:solidFill>
-              <a:latin typeface="Calibri" pitchFamily="34" charset="0"/>
-              <a:ea typeface="Calibri" pitchFamily="34" charset="-122"/>
-              <a:cs typeface="Calibri" pitchFamily="34" charset="-120"/>
-            </a:endParaRPr>
-          </a:p>
-          <a:p>
-            <a:pPr marL="228600" indent="-228600">
-              <a:lnSpc>
-                <a:spcPct val="135000"/>
-              </a:lnSpc>
-              <a:buFont typeface="Arial" panose="020B0604020202020204" pitchFamily="34" charset="0"/>
-              <a:buChar char="•"/>
-            </a:pPr>
-            <a:r>
-              <a:rPr lang="en-US" sz="1200" b="1" dirty="0" err="1">
-                <a:solidFill>
-                  <a:srgbClr val="2B2320"/>
-                </a:solidFill>
-                <a:latin typeface="Calibri" pitchFamily="34" charset="0"/>
-                <a:ea typeface="Calibri" pitchFamily="34" charset="-122"/>
-                <a:cs typeface="Calibri" pitchFamily="34" charset="-120"/>
-              </a:rPr>
-              <a:t>dias_restantes</a:t>
-            </a:r>
-            <a:r>
-              <a:rPr lang="en-US" sz="1200" dirty="0">
-                <a:solidFill>
-                  <a:srgbClr val="7A6F68"/>
-                </a:solidFill>
-                <a:latin typeface="Calibri" pitchFamily="34" charset="0"/>
-                <a:ea typeface="Calibri" pitchFamily="34" charset="-122"/>
-                <a:cs typeface="Calibri" pitchFamily="34" charset="-120"/>
-              </a:rPr>
-              <a:t>: antelación de la </a:t>
-            </a:r>
-            <a:r>
-              <a:rPr lang="en-US" sz="1200" dirty="0" err="1">
-                <a:solidFill>
-                  <a:srgbClr val="7A6F68"/>
-                </a:solidFill>
-                <a:latin typeface="Calibri" pitchFamily="34" charset="0"/>
-                <a:ea typeface="Calibri" pitchFamily="34" charset="-122"/>
-                <a:cs typeface="Calibri" pitchFamily="34" charset="-120"/>
-              </a:rPr>
-              <a:t>reserva</a:t>
-            </a:r>
-            <a:endParaRPr lang="en-US" sz="1200" dirty="0">
-              <a:solidFill>
-                <a:srgbClr val="7A6F68"/>
-              </a:solidFill>
-              <a:latin typeface="Calibri" pitchFamily="34" charset="0"/>
-              <a:ea typeface="Calibri" pitchFamily="34" charset="-122"/>
-              <a:cs typeface="Calibri" pitchFamily="34" charset="-120"/>
-            </a:endParaRPr>
-          </a:p>
-          <a:p>
-            <a:pPr marL="228600" indent="-228600">
-              <a:lnSpc>
-                <a:spcPct val="135000"/>
-              </a:lnSpc>
-              <a:buFont typeface="Arial" panose="020B0604020202020204" pitchFamily="34" charset="0"/>
-              <a:buChar char="•"/>
-            </a:pPr>
-            <a:r>
-              <a:rPr lang="en-US" sz="1200" b="1" dirty="0" err="1">
-                <a:solidFill>
-                  <a:srgbClr val="2B2320"/>
-                </a:solidFill>
-                <a:latin typeface="Calibri" pitchFamily="34" charset="0"/>
-                <a:ea typeface="Calibri" pitchFamily="34" charset="-122"/>
-                <a:cs typeface="Calibri" pitchFamily="34" charset="-120"/>
-              </a:rPr>
-              <a:t>mes_disponible</a:t>
-            </a:r>
-            <a:r>
-              <a:rPr lang="en-US" sz="1200" dirty="0">
-                <a:solidFill>
-                  <a:srgbClr val="7A6F68"/>
-                </a:solidFill>
-                <a:latin typeface="Calibri" pitchFamily="34" charset="0"/>
-                <a:ea typeface="Calibri" pitchFamily="34" charset="-122"/>
-                <a:cs typeface="Calibri" pitchFamily="34" charset="-120"/>
-              </a:rPr>
-              <a:t>: </a:t>
-            </a:r>
-            <a:r>
-              <a:rPr lang="en-US" sz="1200" dirty="0" err="1">
-                <a:solidFill>
-                  <a:srgbClr val="7A6F68"/>
-                </a:solidFill>
-                <a:latin typeface="Calibri" pitchFamily="34" charset="0"/>
-                <a:ea typeface="Calibri" pitchFamily="34" charset="-122"/>
-                <a:cs typeface="Calibri" pitchFamily="34" charset="-120"/>
-              </a:rPr>
-              <a:t>mes</a:t>
-            </a:r>
-            <a:endParaRPr lang="en-US" sz="1200" dirty="0">
-              <a:solidFill>
-                <a:srgbClr val="7A6F68"/>
-              </a:solidFill>
-              <a:latin typeface="Calibri" pitchFamily="34" charset="0"/>
-              <a:ea typeface="Calibri" pitchFamily="34" charset="-122"/>
-              <a:cs typeface="Calibri" pitchFamily="34" charset="-120"/>
-            </a:endParaRPr>
-          </a:p>
-          <a:p>
-            <a:pPr marL="228600" indent="-228600">
-              <a:lnSpc>
-                <a:spcPct val="135000"/>
-              </a:lnSpc>
-              <a:buFont typeface="Arial" panose="020B0604020202020204" pitchFamily="34" charset="0"/>
-              <a:buChar char="•"/>
-            </a:pPr>
-            <a:r>
-              <a:rPr lang="en-US" sz="1200" b="1" dirty="0" err="1">
-                <a:solidFill>
-                  <a:srgbClr val="2B2320"/>
-                </a:solidFill>
-                <a:latin typeface="Calibri" pitchFamily="34" charset="0"/>
-                <a:ea typeface="Calibri" pitchFamily="34" charset="-122"/>
-                <a:cs typeface="Calibri" pitchFamily="34" charset="-120"/>
-              </a:rPr>
-              <a:t>dia_disponible</a:t>
-            </a:r>
-            <a:r>
-              <a:rPr lang="en-US" sz="1200" dirty="0">
-                <a:solidFill>
-                  <a:srgbClr val="7A6F68"/>
-                </a:solidFill>
-                <a:latin typeface="Calibri" pitchFamily="34" charset="0"/>
-                <a:ea typeface="Calibri" pitchFamily="34" charset="-122"/>
-                <a:cs typeface="Calibri" pitchFamily="34" charset="-120"/>
-              </a:rPr>
-              <a:t>: día del mes</a:t>
-            </a:r>
-            <a:endParaRPr lang="en-US" sz="1200" dirty="0"/>
-          </a:p>
-        </p:txBody>
-      </p:sp>
-      <p:sp>
-        <p:nvSpPr>
-          <p:cNvPr id="35" name="Shape 32"/>
-          <p:cNvSpPr/>
-          <p:nvPr/>
-        </p:nvSpPr>
-        <p:spPr>
-          <a:xfrm>
-            <a:off x="551383" y="4368849"/>
-            <a:ext cx="11091672" cy="1412144"/>
-          </a:xfrm>
-          <a:prstGeom prst="roundRect">
-            <a:avLst>
-              <a:gd name="adj" fmla="val 4103"/>
-            </a:avLst>
-          </a:prstGeom>
-          <a:solidFill>
-            <a:srgbClr val="F6EEE8"/>
-          </a:solidFill>
-          <a:ln/>
-          <a:effectLst>
-            <a:outerShdw blurRad="101600" dist="38100" dir="5400000" algn="bl" rotWithShape="0">
-              <a:srgbClr val="000000">
-                <a:alpha val="10000"/>
-              </a:srgbClr>
-            </a:outerShdw>
-          </a:effectLst>
-        </p:spPr>
-        <p:txBody>
-          <a:bodyPr/>
-          <a:lstStyle/>
-          <a:p>
-            <a:endParaRPr/>
-          </a:p>
-        </p:txBody>
-      </p:sp>
-      <p:sp>
-        <p:nvSpPr>
-          <p:cNvPr id="36" name="Text 33"/>
-          <p:cNvSpPr/>
-          <p:nvPr/>
-        </p:nvSpPr>
-        <p:spPr>
-          <a:xfrm>
-            <a:off x="807415" y="4551729"/>
-            <a:ext cx="7315200" cy="365760"/>
-          </a:xfrm>
-          <a:prstGeom prst="rect">
-            <a:avLst/>
-          </a:prstGeom>
-          <a:noFill/>
-          <a:ln/>
-        </p:spPr>
-        <p:txBody>
-          <a:bodyPr wrap="square" lIns="0" tIns="0" rIns="0" bIns="0" rtlCol="0" anchor="ctr"/>
-          <a:lstStyle/>
-          <a:p>
-            <a:pPr marL="0" indent="0">
-              <a:buNone/>
-            </a:pPr>
-            <a:r>
-              <a:rPr lang="en-US" sz="1350" b="1" dirty="0">
-                <a:solidFill>
-                  <a:srgbClr val="8C4029"/>
-                </a:solidFill>
-                <a:latin typeface="Calibri" pitchFamily="34" charset="0"/>
-                <a:ea typeface="Calibri" pitchFamily="34" charset="-122"/>
-                <a:cs typeface="Calibri" pitchFamily="34" charset="-120"/>
-              </a:rPr>
-              <a:t>Codificación de variables categóricas</a:t>
-            </a:r>
-            <a:endParaRPr lang="en-US" sz="1350" dirty="0"/>
-          </a:p>
-        </p:txBody>
-      </p:sp>
-      <p:sp>
-        <p:nvSpPr>
-          <p:cNvPr id="37" name="Text 34"/>
-          <p:cNvSpPr/>
-          <p:nvPr/>
-        </p:nvSpPr>
-        <p:spPr>
-          <a:xfrm>
-            <a:off x="807415" y="4963209"/>
-            <a:ext cx="10607040" cy="731520"/>
-          </a:xfrm>
-          <a:prstGeom prst="rect">
-            <a:avLst/>
-          </a:prstGeom>
-          <a:noFill/>
-          <a:ln/>
-        </p:spPr>
-        <p:txBody>
-          <a:bodyPr wrap="square" lIns="0" tIns="0" rIns="0" bIns="0" rtlCol="0" anchor="t"/>
-          <a:lstStyle/>
-          <a:p>
-            <a:pPr marL="285750" indent="-285750">
-              <a:lnSpc>
-                <a:spcPct val="120000"/>
-              </a:lnSpc>
-              <a:buFont typeface="Arial" panose="020B0604020202020204" pitchFamily="34" charset="0"/>
-              <a:buChar char="•"/>
-            </a:pPr>
-            <a:r>
-              <a:rPr lang="en-US" sz="1250" b="1" dirty="0">
-                <a:solidFill>
-                  <a:srgbClr val="000000"/>
-                </a:solidFill>
-                <a:latin typeface="Calibri" pitchFamily="34" charset="0"/>
-                <a:ea typeface="Calibri" pitchFamily="34" charset="-122"/>
-                <a:cs typeface="Calibri" pitchFamily="34" charset="-120"/>
-              </a:rPr>
-              <a:t>tipo_Hotel </a:t>
-            </a:r>
-            <a:r>
-              <a:rPr lang="en-US" sz="1250" dirty="0">
-                <a:solidFill>
-                  <a:srgbClr val="2B2320"/>
-                </a:solidFill>
-                <a:latin typeface="Calibri" pitchFamily="34" charset="0"/>
-                <a:ea typeface="Calibri" pitchFamily="34" charset="-122"/>
-                <a:cs typeface="Calibri" pitchFamily="34" charset="-120"/>
-              </a:rPr>
-              <a:t>(one-hot binario, 1 si es hotel) </a:t>
-            </a:r>
-          </a:p>
-          <a:p>
-            <a:pPr marL="285750" indent="-285750">
-              <a:lnSpc>
-                <a:spcPct val="120000"/>
-              </a:lnSpc>
-              <a:buFont typeface="Arial" panose="020B0604020202020204" pitchFamily="34" charset="0"/>
-              <a:buChar char="•"/>
-            </a:pPr>
-            <a:r>
-              <a:rPr lang="en-US" sz="1250" b="1" dirty="0" err="1">
-                <a:solidFill>
-                  <a:srgbClr val="000000"/>
-                </a:solidFill>
-                <a:latin typeface="Calibri" pitchFamily="34" charset="0"/>
-                <a:ea typeface="Calibri" pitchFamily="34" charset="-122"/>
-                <a:cs typeface="Calibri" pitchFamily="34" charset="-120"/>
-              </a:rPr>
-              <a:t>localidad</a:t>
-            </a:r>
-            <a:r>
-              <a:rPr lang="en-US" sz="1250" b="1" dirty="0">
-                <a:solidFill>
-                  <a:srgbClr val="000000"/>
-                </a:solidFill>
-                <a:latin typeface="Calibri" pitchFamily="34" charset="0"/>
-                <a:ea typeface="Calibri" pitchFamily="34" charset="-122"/>
-                <a:cs typeface="Calibri" pitchFamily="34" charset="-120"/>
-              </a:rPr>
-              <a:t> </a:t>
-            </a:r>
-            <a:r>
-              <a:rPr lang="en-US" sz="1250" dirty="0">
-                <a:solidFill>
-                  <a:srgbClr val="2B2320"/>
-                </a:solidFill>
-                <a:latin typeface="Calibri" pitchFamily="34" charset="0"/>
-                <a:ea typeface="Calibri" pitchFamily="34" charset="-122"/>
-                <a:cs typeface="Calibri" pitchFamily="34" charset="-120"/>
-              </a:rPr>
-              <a:t>y </a:t>
-            </a:r>
-            <a:r>
-              <a:rPr lang="en-US" sz="1250" b="1" dirty="0">
-                <a:solidFill>
-                  <a:srgbClr val="000000"/>
-                </a:solidFill>
-                <a:latin typeface="Calibri" pitchFamily="34" charset="0"/>
-                <a:ea typeface="Calibri" pitchFamily="34" charset="-122"/>
-                <a:cs typeface="Calibri" pitchFamily="34" charset="-120"/>
-              </a:rPr>
-              <a:t>provincia </a:t>
-            </a:r>
-            <a:r>
-              <a:rPr lang="en-US" sz="1250" dirty="0">
-                <a:solidFill>
-                  <a:srgbClr val="2B2320"/>
-                </a:solidFill>
-                <a:latin typeface="Calibri" pitchFamily="34" charset="0"/>
-                <a:ea typeface="Calibri" pitchFamily="34" charset="-122"/>
-                <a:cs typeface="Calibri" pitchFamily="34" charset="-120"/>
-              </a:rPr>
-              <a:t>(ordinal, para no disparar la dimensionalidad).</a:t>
-            </a:r>
-            <a:r>
-              <a:rPr lang="en-US" sz="1250" i="1" dirty="0">
-                <a:solidFill>
-                  <a:srgbClr val="7A6F68"/>
-                </a:solidFill>
-                <a:latin typeface="Calibri" pitchFamily="34" charset="0"/>
-                <a:ea typeface="Calibri" pitchFamily="34" charset="-122"/>
-                <a:cs typeface="Calibri" pitchFamily="34" charset="-120"/>
-              </a:rPr>
-              <a:t>Viable porque el modelo ganador es un ensemble de árboles: puede aislar cualquier localidad mediante particiones binarias sucesivas, sin depender de un orden real.</a:t>
-            </a:r>
-            <a:endParaRPr lang="en-US" sz="1250" dirty="0"/>
-          </a:p>
-        </p:txBody>
-      </p:sp>
-    </p:spTree>
-  </p:cSld>
-  <p:clrMapOvr>
-    <a:masterClrMapping/>
-  </p:clrMapOvr>
-</p:sld>
-</file>
-
-<file path=ppt/slides/slide11.xml><?xml version="1.0" encoding="utf-8"?>
-<p:sld xmlns:a="http://schemas.openxmlformats.org/drawingml/2006/main" xmlns:r="http://schemas.openxmlformats.org/officeDocument/2006/relationships" xmlns:p="http://schemas.openxmlformats.org/presentationml/2006/main">
   <p:cSld name="Slide 11">
     <p:bg>
       <p:bgPr>
@@ -6390,7 +4609,7 @@
                 <a:ea typeface="Calibri" pitchFamily="34" charset="-122"/>
                 <a:cs typeface="Calibri" pitchFamily="34" charset="-120"/>
               </a:rPr>
-              <a:t>11 / 24</a:t>
+              <a:t>10 / 23</a:t>
             </a:r>
             <a:endParaRPr lang="en-US" sz="900" dirty="0"/>
           </a:p>
@@ -9524,7 +7743,7 @@
 </p:sld>
 </file>
 
-<file path=ppt/slides/slide12.xml><?xml version="1.0" encoding="utf-8"?>
+<file path=ppt/slides/slide11.xml><?xml version="1.0" encoding="utf-8"?>
 <p:sld xmlns:a="http://schemas.openxmlformats.org/drawingml/2006/main" xmlns:r="http://schemas.openxmlformats.org/officeDocument/2006/relationships" xmlns:p="http://schemas.openxmlformats.org/presentationml/2006/main">
   <p:cSld name="Slide 12">
     <p:bg>
@@ -9621,7 +7840,7 @@
                 <a:ea typeface="Calibri" pitchFamily="34" charset="-122"/>
                 <a:cs typeface="Calibri" pitchFamily="34" charset="-120"/>
               </a:rPr>
-              <a:t>12 / 24</a:t>
+              <a:t>11 / 23</a:t>
             </a:r>
             <a:endParaRPr lang="en-US" sz="900" dirty="0"/>
           </a:p>
@@ -10176,7 +8395,7 @@
 </p:sld>
 </file>
 
-<file path=ppt/slides/slide13.xml><?xml version="1.0" encoding="utf-8"?>
+<file path=ppt/slides/slide12.xml><?xml version="1.0" encoding="utf-8"?>
 <p:sld xmlns:a="http://schemas.openxmlformats.org/drawingml/2006/main" xmlns:r="http://schemas.openxmlformats.org/officeDocument/2006/relationships" xmlns:p="http://schemas.openxmlformats.org/presentationml/2006/main">
   <p:cSld name="Slide 13">
     <p:bg>
@@ -10273,7 +8492,7 @@
                 <a:ea typeface="Calibri" pitchFamily="34" charset="-122"/>
                 <a:cs typeface="Calibri" pitchFamily="34" charset="-120"/>
               </a:rPr>
-              <a:t>13 / 24</a:t>
+              <a:t>12 / 23</a:t>
             </a:r>
             <a:endParaRPr lang="en-US" sz="900" dirty="0"/>
           </a:p>
@@ -11127,7 +9346,7 @@
 </p:sld>
 </file>
 
-<file path=ppt/slides/slide14.xml><?xml version="1.0" encoding="utf-8"?>
+<file path=ppt/slides/slide13.xml><?xml version="1.0" encoding="utf-8"?>
 <p:sld xmlns:a="http://schemas.openxmlformats.org/drawingml/2006/main" xmlns:r="http://schemas.openxmlformats.org/officeDocument/2006/relationships" xmlns:p="http://schemas.openxmlformats.org/presentationml/2006/main">
   <p:cSld>
     <p:bg>
@@ -11217,7 +9436,7 @@
                 </a:solidFill>
                 <a:latin typeface="Calibri"/>
               </a:rPr>
-              <a:t>14 / 24</a:t>
+              <a:t>13 / 23</a:t>
             </a:r>
           </a:p>
         </p:txBody>
@@ -11428,7 +9647,7 @@
 </p:sld>
 </file>
 
-<file path=ppt/slides/slide15.xml><?xml version="1.0" encoding="utf-8"?>
+<file path=ppt/slides/slide14.xml><?xml version="1.0" encoding="utf-8"?>
 <p:sld xmlns:a="http://schemas.openxmlformats.org/drawingml/2006/main" xmlns:r="http://schemas.openxmlformats.org/officeDocument/2006/relationships" xmlns:p="http://schemas.openxmlformats.org/presentationml/2006/main">
   <p:cSld name="Slide 14">
     <p:bg>
@@ -11525,7 +9744,7 @@
                 <a:ea typeface="Calibri" pitchFamily="34" charset="-122"/>
                 <a:cs typeface="Calibri" pitchFamily="34" charset="-120"/>
               </a:rPr>
-              <a:t>15 / 24</a:t>
+              <a:t>14 / 23</a:t>
             </a:r>
             <a:endParaRPr lang="en-US" sz="900" dirty="0"/>
           </a:p>
@@ -13494,7 +11713,7 @@
 </p:sld>
 </file>
 
-<file path=ppt/slides/slide16.xml><?xml version="1.0" encoding="utf-8"?>
+<file path=ppt/slides/slide15.xml><?xml version="1.0" encoding="utf-8"?>
 <p:sld xmlns:a="http://schemas.openxmlformats.org/drawingml/2006/main" xmlns:r="http://schemas.openxmlformats.org/officeDocument/2006/relationships" xmlns:p="http://schemas.openxmlformats.org/presentationml/2006/main">
   <p:cSld name="Slide 15">
     <p:bg>
@@ -13591,7 +11810,7 @@
                 <a:ea typeface="Calibri" pitchFamily="34" charset="-122"/>
                 <a:cs typeface="Calibri" pitchFamily="34" charset="-120"/>
               </a:rPr>
-              <a:t>16 / 24</a:t>
+              <a:t>15 / 23</a:t>
             </a:r>
             <a:endParaRPr lang="en-US" sz="900" dirty="0"/>
           </a:p>
@@ -13789,7 +12008,7 @@
 </p:sld>
 </file>
 
-<file path=ppt/slides/slide17.xml><?xml version="1.0" encoding="utf-8"?>
+<file path=ppt/slides/slide16.xml><?xml version="1.0" encoding="utf-8"?>
 <p:sld xmlns:a="http://schemas.openxmlformats.org/drawingml/2006/main" xmlns:r="http://schemas.openxmlformats.org/officeDocument/2006/relationships" xmlns:p="http://schemas.openxmlformats.org/presentationml/2006/main">
   <p:cSld name="Slide 16">
     <p:bg>
@@ -13886,7 +12105,7 @@
                 <a:ea typeface="Calibri" pitchFamily="34" charset="-122"/>
                 <a:cs typeface="Calibri" pitchFamily="34" charset="-120"/>
               </a:rPr>
-              <a:t>17 / 24</a:t>
+              <a:t>16 / 23</a:t>
             </a:r>
             <a:endParaRPr lang="en-US" sz="900" dirty="0"/>
           </a:p>
@@ -15997,7 +14216,7 @@
 </p:sld>
 </file>
 
-<file path=ppt/slides/slide18.xml><?xml version="1.0" encoding="utf-8"?>
+<file path=ppt/slides/slide17.xml><?xml version="1.0" encoding="utf-8"?>
 <p:sld xmlns:a="http://schemas.openxmlformats.org/drawingml/2006/main" xmlns:r="http://schemas.openxmlformats.org/officeDocument/2006/relationships" xmlns:p="http://schemas.openxmlformats.org/presentationml/2006/main">
   <p:cSld name="Slide 17">
     <p:bg>
@@ -16094,7 +14313,7 @@
                 <a:ea typeface="Calibri" pitchFamily="34" charset="-122"/>
                 <a:cs typeface="Calibri" pitchFamily="34" charset="-120"/>
               </a:rPr>
-              <a:t>18 / 24</a:t>
+              <a:t>17 / 23</a:t>
             </a:r>
             <a:endParaRPr lang="en-US" sz="900" dirty="0"/>
           </a:p>
@@ -17759,7 +15978,7 @@
 </p:sld>
 </file>
 
-<file path=ppt/slides/slide19.xml><?xml version="1.0" encoding="utf-8"?>
+<file path=ppt/slides/slide18.xml><?xml version="1.0" encoding="utf-8"?>
 <p:sld xmlns:a="http://schemas.openxmlformats.org/drawingml/2006/main" xmlns:r="http://schemas.openxmlformats.org/officeDocument/2006/relationships" xmlns:p="http://schemas.openxmlformats.org/presentationml/2006/main">
   <p:cSld name="Slide 18">
     <p:bg>
@@ -17856,7 +16075,7 @@
                 <a:ea typeface="Calibri" pitchFamily="34" charset="-122"/>
                 <a:cs typeface="Calibri" pitchFamily="34" charset="-120"/>
               </a:rPr>
-              <a:t>19 / 24</a:t>
+              <a:t>18 / 23</a:t>
             </a:r>
             <a:endParaRPr lang="en-US" sz="900" dirty="0"/>
           </a:p>
@@ -18728,6 +16947,1254 @@
               <a:t>Resultados en tabla interactiva, ordenados por grado de ahorro, con gráfico de tarta.</a:t>
             </a:r>
             <a:endParaRPr lang="en-US" sz="1250" dirty="0"/>
+          </a:p>
+        </p:txBody>
+      </p:sp>
+    </p:spTree>
+  </p:cSld>
+  <p:clrMapOvr>
+    <a:masterClrMapping/>
+  </p:clrMapOvr>
+</p:sld>
+</file>
+
+<file path=ppt/slides/slide19.xml><?xml version="1.0" encoding="utf-8"?>
+<p:sld xmlns:a="http://schemas.openxmlformats.org/drawingml/2006/main" xmlns:r="http://schemas.openxmlformats.org/officeDocument/2006/relationships" xmlns:p="http://schemas.openxmlformats.org/presentationml/2006/main">
+  <p:cSld name="Slide 19">
+    <p:bg>
+      <p:bgPr>
+        <a:solidFill>
+          <a:srgbClr val="FFFFFF"/>
+        </a:solidFill>
+        <a:effectLst/>
+      </p:bgPr>
+    </p:bg>
+    <p:spTree>
+      <p:nvGrpSpPr>
+        <p:cNvPr id="1" name=""/>
+        <p:cNvGrpSpPr/>
+        <p:nvPr/>
+      </p:nvGrpSpPr>
+      <p:grpSpPr>
+        <a:xfrm>
+          <a:off x="0" y="0"/>
+          <a:ext cx="0" cy="0"/>
+          <a:chOff x="0" y="0"/>
+          <a:chExt cx="0" cy="0"/>
+        </a:xfrm>
+      </p:grpSpPr>
+      <p:sp>
+        <p:nvSpPr>
+          <p:cNvPr id="2" name="Text 0"/>
+          <p:cNvSpPr/>
+          <p:nvPr/>
+        </p:nvSpPr>
+        <p:spPr>
+          <a:xfrm>
+            <a:off x="548640" y="6473952"/>
+            <a:ext cx="7315200" cy="274320"/>
+          </a:xfrm>
+          <a:prstGeom prst="rect">
+            <a:avLst/>
+          </a:prstGeom>
+          <a:noFill/>
+          <a:ln/>
+        </p:spPr>
+        <p:txBody>
+          <a:bodyPr wrap="square" lIns="0" tIns="0" rIns="0" bIns="0" rtlCol="0" anchor="ctr"/>
+          <a:lstStyle/>
+          <a:p>
+            <a:pPr marL="0" indent="0" algn="l">
+              <a:buNone/>
+            </a:pPr>
+            <a:r>
+              <a:rPr lang="en-US" sz="900" dirty="0">
+                <a:solidFill>
+                  <a:srgbClr val="7A6F68"/>
+                </a:solidFill>
+                <a:latin typeface="Calibri" pitchFamily="34" charset="0"/>
+                <a:ea typeface="Calibri" pitchFamily="34" charset="-122"/>
+                <a:cs typeface="Calibri" pitchFamily="34" charset="-120"/>
+              </a:rPr>
+              <a:t>Detección de Alojamientos Turísticos con Precio Real Inferior — TFG</a:t>
+            </a:r>
+            <a:endParaRPr lang="en-US" sz="900" dirty="0"/>
+          </a:p>
+        </p:txBody>
+      </p:sp>
+      <p:sp>
+        <p:nvSpPr>
+          <p:cNvPr id="3" name="Text 1"/>
+          <p:cNvSpPr/>
+          <p:nvPr/>
+        </p:nvSpPr>
+        <p:spPr>
+          <a:xfrm>
+            <a:off x="10545775" y="6473952"/>
+            <a:ext cx="1097280" cy="274320"/>
+          </a:xfrm>
+          <a:prstGeom prst="rect">
+            <a:avLst/>
+          </a:prstGeom>
+          <a:noFill/>
+          <a:ln/>
+        </p:spPr>
+        <p:txBody>
+          <a:bodyPr wrap="square" lIns="0" tIns="0" rIns="0" bIns="0" rtlCol="0" anchor="ctr"/>
+          <a:lstStyle/>
+          <a:p>
+            <a:pPr marL="0" indent="0" algn="r">
+              <a:buNone/>
+            </a:pPr>
+            <a:r>
+              <a:rPr lang="en-US" sz="900" dirty="0">
+                <a:solidFill>
+                  <a:srgbClr val="7A6F68"/>
+                </a:solidFill>
+                <a:latin typeface="Calibri" pitchFamily="34" charset="0"/>
+                <a:ea typeface="Calibri" pitchFamily="34" charset="-122"/>
+                <a:cs typeface="Calibri" pitchFamily="34" charset="-120"/>
+              </a:rPr>
+              <a:t>19 / 23</a:t>
+            </a:r>
+            <a:endParaRPr lang="en-US" sz="900" dirty="0"/>
+          </a:p>
+        </p:txBody>
+      </p:sp>
+      <p:sp>
+        <p:nvSpPr>
+          <p:cNvPr id="4" name="Shape 2"/>
+          <p:cNvSpPr/>
+          <p:nvPr/>
+        </p:nvSpPr>
+        <p:spPr>
+          <a:xfrm>
+            <a:off x="548640" y="457200"/>
+            <a:ext cx="566928" cy="566928"/>
+          </a:xfrm>
+          <a:prstGeom prst="ellipse">
+            <a:avLst/>
+          </a:prstGeom>
+          <a:solidFill>
+            <a:srgbClr val="B8563A"/>
+          </a:solidFill>
+          <a:ln/>
+        </p:spPr>
+        <p:txBody>
+          <a:bodyPr/>
+          <a:lstStyle/>
+          <a:p>
+            <a:endParaRPr/>
+          </a:p>
+        </p:txBody>
+      </p:sp>
+      <p:sp>
+        <p:nvSpPr>
+          <p:cNvPr id="5" name="Text 3"/>
+          <p:cNvSpPr/>
+          <p:nvPr/>
+        </p:nvSpPr>
+        <p:spPr>
+          <a:xfrm>
+            <a:off x="1316736" y="420624"/>
+            <a:ext cx="9601200" cy="256032"/>
+          </a:xfrm>
+          <a:prstGeom prst="rect">
+            <a:avLst/>
+          </a:prstGeom>
+          <a:noFill/>
+          <a:ln/>
+        </p:spPr>
+        <p:txBody>
+          <a:bodyPr wrap="square" lIns="0" tIns="0" rIns="0" bIns="0" rtlCol="0" anchor="ctr"/>
+          <a:lstStyle/>
+          <a:p>
+            <a:pPr marL="0" indent="0">
+              <a:buNone/>
+            </a:pPr>
+            <a:r>
+              <a:rPr lang="en-US" sz="1100" b="1" kern="0" spc="200" dirty="0">
+                <a:solidFill>
+                  <a:srgbClr val="7A6F68"/>
+                </a:solidFill>
+                <a:latin typeface="Calibri" pitchFamily="34" charset="0"/>
+                <a:ea typeface="Calibri" pitchFamily="34" charset="-122"/>
+                <a:cs typeface="Calibri" pitchFamily="34" charset="-120"/>
+              </a:rPr>
+              <a:t>APLICACIÓN WEB</a:t>
+            </a:r>
+            <a:endParaRPr lang="en-US" sz="1100" dirty="0"/>
+          </a:p>
+        </p:txBody>
+      </p:sp>
+      <p:sp>
+        <p:nvSpPr>
+          <p:cNvPr id="6" name="Text 4"/>
+          <p:cNvSpPr/>
+          <p:nvPr/>
+        </p:nvSpPr>
+        <p:spPr>
+          <a:xfrm>
+            <a:off x="1316736" y="640080"/>
+            <a:ext cx="9966960" cy="640080"/>
+          </a:xfrm>
+          <a:prstGeom prst="rect">
+            <a:avLst/>
+          </a:prstGeom>
+          <a:noFill/>
+          <a:ln/>
+        </p:spPr>
+        <p:txBody>
+          <a:bodyPr wrap="square" lIns="0" tIns="0" rIns="0" bIns="0" rtlCol="0" anchor="t"/>
+          <a:lstStyle/>
+          <a:p>
+            <a:pPr marL="0" indent="0">
+              <a:buNone/>
+            </a:pPr>
+            <a:r>
+              <a:rPr lang="en-US" sz="2800" b="1" dirty="0">
+                <a:solidFill>
+                  <a:srgbClr val="2B2320"/>
+                </a:solidFill>
+                <a:latin typeface="Cambria" pitchFamily="34" charset="0"/>
+                <a:ea typeface="Cambria" pitchFamily="34" charset="-122"/>
+                <a:cs typeface="Cambria" pitchFamily="34" charset="-120"/>
+              </a:rPr>
+              <a:t>Flujo de trabajo de la búsqueda</a:t>
+            </a:r>
+            <a:endParaRPr lang="en-US" sz="2800" dirty="0"/>
+          </a:p>
+        </p:txBody>
+      </p:sp>
+      <p:pic>
+        <p:nvPicPr>
+          <p:cNvPr id="7" name="Image 0" descr="preencoded.png"/>
+          <p:cNvPicPr>
+            <a:picLocks noChangeAspect="1"/>
+          </p:cNvPicPr>
+          <p:nvPr/>
+        </p:nvPicPr>
+        <p:blipFill>
+          <a:blip r:embed="rId3"/>
+          <a:stretch>
+            <a:fillRect/>
+          </a:stretch>
+        </p:blipFill>
+        <p:spPr>
+          <a:xfrm>
+            <a:off x="656356" y="564916"/>
+            <a:ext cx="351495" cy="351495"/>
+          </a:xfrm>
+          <a:prstGeom prst="rect">
+            <a:avLst/>
+          </a:prstGeom>
+        </p:spPr>
+      </p:pic>
+      <p:sp>
+        <p:nvSpPr>
+          <p:cNvPr id="8" name="Shape 5"/>
+          <p:cNvSpPr/>
+          <p:nvPr/>
+        </p:nvSpPr>
+        <p:spPr>
+          <a:xfrm>
+            <a:off x="548640" y="1481328"/>
+            <a:ext cx="457200" cy="457200"/>
+          </a:xfrm>
+          <a:prstGeom prst="ellipse">
+            <a:avLst/>
+          </a:prstGeom>
+          <a:solidFill>
+            <a:srgbClr val="3B6E77"/>
+          </a:solidFill>
+          <a:ln/>
+        </p:spPr>
+        <p:txBody>
+          <a:bodyPr/>
+          <a:lstStyle/>
+          <a:p>
+            <a:endParaRPr/>
+          </a:p>
+        </p:txBody>
+      </p:sp>
+      <p:sp>
+        <p:nvSpPr>
+          <p:cNvPr id="9" name="Text 6"/>
+          <p:cNvSpPr/>
+          <p:nvPr/>
+        </p:nvSpPr>
+        <p:spPr>
+          <a:xfrm>
+            <a:off x="548640" y="1481328"/>
+            <a:ext cx="457200" cy="457200"/>
+          </a:xfrm>
+          <a:prstGeom prst="rect">
+            <a:avLst/>
+          </a:prstGeom>
+          <a:noFill/>
+          <a:ln/>
+        </p:spPr>
+        <p:txBody>
+          <a:bodyPr wrap="square" lIns="0" tIns="0" rIns="0" bIns="0" rtlCol="0" anchor="ctr"/>
+          <a:lstStyle/>
+          <a:p>
+            <a:pPr marL="0" indent="0" algn="ctr">
+              <a:buNone/>
+            </a:pPr>
+            <a:r>
+              <a:rPr lang="en-US" sz="1400" b="1" dirty="0">
+                <a:solidFill>
+                  <a:srgbClr val="FFFFFF"/>
+                </a:solidFill>
+                <a:latin typeface="Cambria" pitchFamily="34" charset="0"/>
+                <a:ea typeface="Cambria" pitchFamily="34" charset="-122"/>
+                <a:cs typeface="Cambria" pitchFamily="34" charset="-120"/>
+              </a:rPr>
+              <a:t>1</a:t>
+            </a:r>
+            <a:endParaRPr lang="en-US" sz="1400" dirty="0"/>
+          </a:p>
+        </p:txBody>
+      </p:sp>
+      <p:pic>
+        <p:nvPicPr>
+          <p:cNvPr id="10" name="Image 1" descr="preencoded.png"/>
+          <p:cNvPicPr>
+            <a:picLocks noChangeAspect="1"/>
+          </p:cNvPicPr>
+          <p:nvPr/>
+        </p:nvPicPr>
+        <p:blipFill>
+          <a:blip r:embed="rId4"/>
+          <a:stretch>
+            <a:fillRect/>
+          </a:stretch>
+        </p:blipFill>
+        <p:spPr>
+          <a:xfrm>
+            <a:off x="1143000" y="1554480"/>
+            <a:ext cx="310896" cy="310896"/>
+          </a:xfrm>
+          <a:prstGeom prst="rect">
+            <a:avLst/>
+          </a:prstGeom>
+        </p:spPr>
+      </p:pic>
+      <p:sp>
+        <p:nvSpPr>
+          <p:cNvPr id="11" name="Text 7"/>
+          <p:cNvSpPr/>
+          <p:nvPr/>
+        </p:nvSpPr>
+        <p:spPr>
+          <a:xfrm>
+            <a:off x="1600200" y="1444752"/>
+            <a:ext cx="4206240" cy="320040"/>
+          </a:xfrm>
+          <a:prstGeom prst="rect">
+            <a:avLst/>
+          </a:prstGeom>
+          <a:noFill/>
+          <a:ln/>
+        </p:spPr>
+        <p:txBody>
+          <a:bodyPr wrap="square" lIns="0" tIns="0" rIns="0" bIns="0" rtlCol="0" anchor="ctr"/>
+          <a:lstStyle/>
+          <a:p>
+            <a:pPr marL="0" indent="0">
+              <a:buNone/>
+            </a:pPr>
+            <a:r>
+              <a:rPr lang="en-US" sz="1350" b="1" dirty="0">
+                <a:solidFill>
+                  <a:srgbClr val="2B2320"/>
+                </a:solidFill>
+                <a:latin typeface="Calibri" pitchFamily="34" charset="0"/>
+                <a:ea typeface="Calibri" pitchFamily="34" charset="-122"/>
+                <a:cs typeface="Calibri" pitchFamily="34" charset="-120"/>
+              </a:rPr>
+              <a:t>Formulario de preferencias</a:t>
+            </a:r>
+            <a:endParaRPr lang="en-US" sz="1350" dirty="0"/>
+          </a:p>
+        </p:txBody>
+      </p:sp>
+      <p:sp>
+        <p:nvSpPr>
+          <p:cNvPr id="12" name="Text 8"/>
+          <p:cNvSpPr/>
+          <p:nvPr/>
+        </p:nvSpPr>
+        <p:spPr>
+          <a:xfrm>
+            <a:off x="6035040" y="1463040"/>
+            <a:ext cx="5669280" cy="502920"/>
+          </a:xfrm>
+          <a:prstGeom prst="rect">
+            <a:avLst/>
+          </a:prstGeom>
+          <a:noFill/>
+          <a:ln/>
+        </p:spPr>
+        <p:txBody>
+          <a:bodyPr wrap="square" lIns="0" tIns="0" rIns="0" bIns="0" rtlCol="0" anchor="ctr"/>
+          <a:lstStyle/>
+          <a:p>
+            <a:pPr marL="0" indent="0">
+              <a:buNone/>
+            </a:pPr>
+            <a:r>
+              <a:rPr lang="en-US" sz="1200" dirty="0">
+                <a:solidFill>
+                  <a:srgbClr val="7A6F68"/>
+                </a:solidFill>
+                <a:latin typeface="Calibri" pitchFamily="34" charset="0"/>
+                <a:ea typeface="Calibri" pitchFamily="34" charset="-122"/>
+                <a:cs typeface="Calibri" pitchFamily="34" charset="-120"/>
+              </a:rPr>
+              <a:t>Destino, fechas, tipo, servicios y nivel de exigencia</a:t>
+            </a:r>
+            <a:endParaRPr lang="en-US" sz="1200" dirty="0"/>
+          </a:p>
+        </p:txBody>
+      </p:sp>
+      <p:sp>
+        <p:nvSpPr>
+          <p:cNvPr id="13" name="Shape 9"/>
+          <p:cNvSpPr/>
+          <p:nvPr/>
+        </p:nvSpPr>
+        <p:spPr>
+          <a:xfrm>
+            <a:off x="548640" y="2258568"/>
+            <a:ext cx="457200" cy="457200"/>
+          </a:xfrm>
+          <a:prstGeom prst="ellipse">
+            <a:avLst/>
+          </a:prstGeom>
+          <a:solidFill>
+            <a:srgbClr val="3B6E77"/>
+          </a:solidFill>
+          <a:ln/>
+        </p:spPr>
+        <p:txBody>
+          <a:bodyPr/>
+          <a:lstStyle/>
+          <a:p>
+            <a:endParaRPr/>
+          </a:p>
+        </p:txBody>
+      </p:sp>
+      <p:sp>
+        <p:nvSpPr>
+          <p:cNvPr id="14" name="Text 10"/>
+          <p:cNvSpPr/>
+          <p:nvPr/>
+        </p:nvSpPr>
+        <p:spPr>
+          <a:xfrm>
+            <a:off x="548640" y="2258568"/>
+            <a:ext cx="457200" cy="457200"/>
+          </a:xfrm>
+          <a:prstGeom prst="rect">
+            <a:avLst/>
+          </a:prstGeom>
+          <a:noFill/>
+          <a:ln/>
+        </p:spPr>
+        <p:txBody>
+          <a:bodyPr wrap="square" lIns="0" tIns="0" rIns="0" bIns="0" rtlCol="0" anchor="ctr"/>
+          <a:lstStyle/>
+          <a:p>
+            <a:pPr marL="0" indent="0" algn="ctr">
+              <a:buNone/>
+            </a:pPr>
+            <a:r>
+              <a:rPr lang="en-US" sz="1400" b="1" dirty="0">
+                <a:solidFill>
+                  <a:srgbClr val="FFFFFF"/>
+                </a:solidFill>
+                <a:latin typeface="Cambria" pitchFamily="34" charset="0"/>
+                <a:ea typeface="Cambria" pitchFamily="34" charset="-122"/>
+                <a:cs typeface="Cambria" pitchFamily="34" charset="-120"/>
+              </a:rPr>
+              <a:t>2</a:t>
+            </a:r>
+            <a:endParaRPr lang="en-US" sz="1400" dirty="0"/>
+          </a:p>
+        </p:txBody>
+      </p:sp>
+      <p:pic>
+        <p:nvPicPr>
+          <p:cNvPr id="15" name="Image 2" descr="preencoded.png"/>
+          <p:cNvPicPr>
+            <a:picLocks noChangeAspect="1"/>
+          </p:cNvPicPr>
+          <p:nvPr/>
+        </p:nvPicPr>
+        <p:blipFill>
+          <a:blip r:embed="rId5"/>
+          <a:stretch>
+            <a:fillRect/>
+          </a:stretch>
+        </p:blipFill>
+        <p:spPr>
+          <a:xfrm>
+            <a:off x="1143000" y="2331720"/>
+            <a:ext cx="310896" cy="310896"/>
+          </a:xfrm>
+          <a:prstGeom prst="rect">
+            <a:avLst/>
+          </a:prstGeom>
+        </p:spPr>
+      </p:pic>
+      <p:sp>
+        <p:nvSpPr>
+          <p:cNvPr id="16" name="Text 11"/>
+          <p:cNvSpPr/>
+          <p:nvPr/>
+        </p:nvSpPr>
+        <p:spPr>
+          <a:xfrm>
+            <a:off x="1600200" y="2221992"/>
+            <a:ext cx="4206240" cy="320040"/>
+          </a:xfrm>
+          <a:prstGeom prst="rect">
+            <a:avLst/>
+          </a:prstGeom>
+          <a:noFill/>
+          <a:ln/>
+        </p:spPr>
+        <p:txBody>
+          <a:bodyPr wrap="square" lIns="0" tIns="0" rIns="0" bIns="0" rtlCol="0" anchor="ctr"/>
+          <a:lstStyle/>
+          <a:p>
+            <a:pPr marL="0" indent="0">
+              <a:buNone/>
+            </a:pPr>
+            <a:r>
+              <a:rPr lang="en-US" sz="1350" b="1" dirty="0">
+                <a:solidFill>
+                  <a:srgbClr val="2B2320"/>
+                </a:solidFill>
+                <a:latin typeface="Calibri" pitchFamily="34" charset="0"/>
+                <a:ea typeface="Calibri" pitchFamily="34" charset="-122"/>
+                <a:cs typeface="Calibri" pitchFamily="34" charset="-120"/>
+              </a:rPr>
+              <a:t>Extracción en tiempo real</a:t>
+            </a:r>
+            <a:endParaRPr lang="en-US" sz="1350" dirty="0"/>
+          </a:p>
+        </p:txBody>
+      </p:sp>
+      <p:sp>
+        <p:nvSpPr>
+          <p:cNvPr id="17" name="Text 12"/>
+          <p:cNvSpPr/>
+          <p:nvPr/>
+        </p:nvSpPr>
+        <p:spPr>
+          <a:xfrm>
+            <a:off x="6035040" y="2240280"/>
+            <a:ext cx="5669280" cy="502920"/>
+          </a:xfrm>
+          <a:prstGeom prst="rect">
+            <a:avLst/>
+          </a:prstGeom>
+          <a:noFill/>
+          <a:ln/>
+        </p:spPr>
+        <p:txBody>
+          <a:bodyPr wrap="square" lIns="0" tIns="0" rIns="0" bIns="0" rtlCol="0" anchor="ctr"/>
+          <a:lstStyle/>
+          <a:p>
+            <a:pPr marL="0" indent="0">
+              <a:buNone/>
+            </a:pPr>
+            <a:r>
+              <a:rPr lang="en-US" sz="1200" dirty="0">
+                <a:solidFill>
+                  <a:srgbClr val="7A6F68"/>
+                </a:solidFill>
+                <a:latin typeface="Calibri" pitchFamily="34" charset="0"/>
+                <a:ea typeface="Calibri" pitchFamily="34" charset="-122"/>
+                <a:cs typeface="Calibri" pitchFamily="34" charset="-120"/>
+              </a:rPr>
+              <a:t>Hasta 25 alojamientos por localidad seleccionada</a:t>
+            </a:r>
+            <a:endParaRPr lang="en-US" sz="1200" dirty="0"/>
+          </a:p>
+        </p:txBody>
+      </p:sp>
+      <p:sp>
+        <p:nvSpPr>
+          <p:cNvPr id="18" name="Shape 13"/>
+          <p:cNvSpPr/>
+          <p:nvPr/>
+        </p:nvSpPr>
+        <p:spPr>
+          <a:xfrm>
+            <a:off x="548640" y="3035808"/>
+            <a:ext cx="457200" cy="457200"/>
+          </a:xfrm>
+          <a:prstGeom prst="ellipse">
+            <a:avLst/>
+          </a:prstGeom>
+          <a:solidFill>
+            <a:srgbClr val="3B6E77"/>
+          </a:solidFill>
+          <a:ln/>
+        </p:spPr>
+        <p:txBody>
+          <a:bodyPr/>
+          <a:lstStyle/>
+          <a:p>
+            <a:endParaRPr/>
+          </a:p>
+        </p:txBody>
+      </p:sp>
+      <p:sp>
+        <p:nvSpPr>
+          <p:cNvPr id="19" name="Text 14"/>
+          <p:cNvSpPr/>
+          <p:nvPr/>
+        </p:nvSpPr>
+        <p:spPr>
+          <a:xfrm>
+            <a:off x="548640" y="3035808"/>
+            <a:ext cx="457200" cy="457200"/>
+          </a:xfrm>
+          <a:prstGeom prst="rect">
+            <a:avLst/>
+          </a:prstGeom>
+          <a:noFill/>
+          <a:ln/>
+        </p:spPr>
+        <p:txBody>
+          <a:bodyPr wrap="square" lIns="0" tIns="0" rIns="0" bIns="0" rtlCol="0" anchor="ctr"/>
+          <a:lstStyle/>
+          <a:p>
+            <a:pPr marL="0" indent="0" algn="ctr">
+              <a:buNone/>
+            </a:pPr>
+            <a:r>
+              <a:rPr lang="en-US" sz="1400" b="1" dirty="0">
+                <a:solidFill>
+                  <a:srgbClr val="FFFFFF"/>
+                </a:solidFill>
+                <a:latin typeface="Cambria" pitchFamily="34" charset="0"/>
+                <a:ea typeface="Cambria" pitchFamily="34" charset="-122"/>
+                <a:cs typeface="Cambria" pitchFamily="34" charset="-120"/>
+              </a:rPr>
+              <a:t>3</a:t>
+            </a:r>
+            <a:endParaRPr lang="en-US" sz="1400" dirty="0"/>
+          </a:p>
+        </p:txBody>
+      </p:sp>
+      <p:pic>
+        <p:nvPicPr>
+          <p:cNvPr id="20" name="Image 3" descr="preencoded.png"/>
+          <p:cNvPicPr>
+            <a:picLocks noChangeAspect="1"/>
+          </p:cNvPicPr>
+          <p:nvPr/>
+        </p:nvPicPr>
+        <p:blipFill>
+          <a:blip r:embed="rId6"/>
+          <a:stretch>
+            <a:fillRect/>
+          </a:stretch>
+        </p:blipFill>
+        <p:spPr>
+          <a:xfrm>
+            <a:off x="1143000" y="3108960"/>
+            <a:ext cx="310896" cy="310896"/>
+          </a:xfrm>
+          <a:prstGeom prst="rect">
+            <a:avLst/>
+          </a:prstGeom>
+        </p:spPr>
+      </p:pic>
+      <p:sp>
+        <p:nvSpPr>
+          <p:cNvPr id="21" name="Text 15"/>
+          <p:cNvSpPr/>
+          <p:nvPr/>
+        </p:nvSpPr>
+        <p:spPr>
+          <a:xfrm>
+            <a:off x="1600200" y="2999232"/>
+            <a:ext cx="4206240" cy="320040"/>
+          </a:xfrm>
+          <a:prstGeom prst="rect">
+            <a:avLst/>
+          </a:prstGeom>
+          <a:noFill/>
+          <a:ln/>
+        </p:spPr>
+        <p:txBody>
+          <a:bodyPr wrap="square" lIns="0" tIns="0" rIns="0" bIns="0" rtlCol="0" anchor="ctr"/>
+          <a:lstStyle/>
+          <a:p>
+            <a:pPr marL="0" indent="0">
+              <a:buNone/>
+            </a:pPr>
+            <a:r>
+              <a:rPr lang="en-US" sz="1350" b="1" dirty="0">
+                <a:solidFill>
+                  <a:srgbClr val="2B2320"/>
+                </a:solidFill>
+                <a:latin typeface="Calibri" pitchFamily="34" charset="0"/>
+                <a:ea typeface="Calibri" pitchFamily="34" charset="-122"/>
+                <a:cs typeface="Calibri" pitchFamily="34" charset="-120"/>
+              </a:rPr>
+              <a:t>Preprocesamiento</a:t>
+            </a:r>
+            <a:endParaRPr lang="en-US" sz="1350" dirty="0"/>
+          </a:p>
+        </p:txBody>
+      </p:sp>
+      <p:sp>
+        <p:nvSpPr>
+          <p:cNvPr id="22" name="Text 16"/>
+          <p:cNvSpPr/>
+          <p:nvPr/>
+        </p:nvSpPr>
+        <p:spPr>
+          <a:xfrm>
+            <a:off x="6035040" y="3017520"/>
+            <a:ext cx="5669280" cy="502920"/>
+          </a:xfrm>
+          <a:prstGeom prst="rect">
+            <a:avLst/>
+          </a:prstGeom>
+          <a:noFill/>
+          <a:ln/>
+        </p:spPr>
+        <p:txBody>
+          <a:bodyPr wrap="square" lIns="0" tIns="0" rIns="0" bIns="0" rtlCol="0" anchor="ctr"/>
+          <a:lstStyle/>
+          <a:p>
+            <a:pPr marL="0" indent="0">
+              <a:buNone/>
+            </a:pPr>
+            <a:r>
+              <a:rPr lang="en-US" sz="1200" dirty="0">
+                <a:solidFill>
+                  <a:srgbClr val="7A6F68"/>
+                </a:solidFill>
+                <a:latin typeface="Calibri" pitchFamily="34" charset="0"/>
+                <a:ea typeface="Calibri" pitchFamily="34" charset="-122"/>
+                <a:cs typeface="Calibri" pitchFamily="34" charset="-120"/>
+              </a:rPr>
+              <a:t>Misma secuencia de transformaciones que en el entrenamiento</a:t>
+            </a:r>
+            <a:endParaRPr lang="en-US" sz="1200" dirty="0"/>
+          </a:p>
+        </p:txBody>
+      </p:sp>
+      <p:sp>
+        <p:nvSpPr>
+          <p:cNvPr id="23" name="Shape 17"/>
+          <p:cNvSpPr/>
+          <p:nvPr/>
+        </p:nvSpPr>
+        <p:spPr>
+          <a:xfrm>
+            <a:off x="548640" y="3813048"/>
+            <a:ext cx="457200" cy="457200"/>
+          </a:xfrm>
+          <a:prstGeom prst="ellipse">
+            <a:avLst/>
+          </a:prstGeom>
+          <a:solidFill>
+            <a:srgbClr val="3B6E77"/>
+          </a:solidFill>
+          <a:ln/>
+        </p:spPr>
+        <p:txBody>
+          <a:bodyPr/>
+          <a:lstStyle/>
+          <a:p>
+            <a:endParaRPr/>
+          </a:p>
+        </p:txBody>
+      </p:sp>
+      <p:sp>
+        <p:nvSpPr>
+          <p:cNvPr id="24" name="Text 18"/>
+          <p:cNvSpPr/>
+          <p:nvPr/>
+        </p:nvSpPr>
+        <p:spPr>
+          <a:xfrm>
+            <a:off x="548640" y="3813048"/>
+            <a:ext cx="457200" cy="457200"/>
+          </a:xfrm>
+          <a:prstGeom prst="rect">
+            <a:avLst/>
+          </a:prstGeom>
+          <a:noFill/>
+          <a:ln/>
+        </p:spPr>
+        <p:txBody>
+          <a:bodyPr wrap="square" lIns="0" tIns="0" rIns="0" bIns="0" rtlCol="0" anchor="ctr"/>
+          <a:lstStyle/>
+          <a:p>
+            <a:pPr marL="0" indent="0" algn="ctr">
+              <a:buNone/>
+            </a:pPr>
+            <a:r>
+              <a:rPr lang="en-US" sz="1400" b="1" dirty="0">
+                <a:solidFill>
+                  <a:srgbClr val="FFFFFF"/>
+                </a:solidFill>
+                <a:latin typeface="Cambria" pitchFamily="34" charset="0"/>
+                <a:ea typeface="Cambria" pitchFamily="34" charset="-122"/>
+                <a:cs typeface="Cambria" pitchFamily="34" charset="-120"/>
+              </a:rPr>
+              <a:t>4</a:t>
+            </a:r>
+            <a:endParaRPr lang="en-US" sz="1400" dirty="0"/>
+          </a:p>
+        </p:txBody>
+      </p:sp>
+      <p:pic>
+        <p:nvPicPr>
+          <p:cNvPr id="25" name="Image 4" descr="preencoded.png"/>
+          <p:cNvPicPr>
+            <a:picLocks noChangeAspect="1"/>
+          </p:cNvPicPr>
+          <p:nvPr/>
+        </p:nvPicPr>
+        <p:blipFill>
+          <a:blip r:embed="rId7"/>
+          <a:stretch>
+            <a:fillRect/>
+          </a:stretch>
+        </p:blipFill>
+        <p:spPr>
+          <a:xfrm>
+            <a:off x="1143000" y="3886200"/>
+            <a:ext cx="310896" cy="310896"/>
+          </a:xfrm>
+          <a:prstGeom prst="rect">
+            <a:avLst/>
+          </a:prstGeom>
+        </p:spPr>
+      </p:pic>
+      <p:sp>
+        <p:nvSpPr>
+          <p:cNvPr id="26" name="Text 19"/>
+          <p:cNvSpPr/>
+          <p:nvPr/>
+        </p:nvSpPr>
+        <p:spPr>
+          <a:xfrm>
+            <a:off x="1600200" y="3776472"/>
+            <a:ext cx="4206240" cy="320040"/>
+          </a:xfrm>
+          <a:prstGeom prst="rect">
+            <a:avLst/>
+          </a:prstGeom>
+          <a:noFill/>
+          <a:ln/>
+        </p:spPr>
+        <p:txBody>
+          <a:bodyPr wrap="square" lIns="0" tIns="0" rIns="0" bIns="0" rtlCol="0" anchor="ctr"/>
+          <a:lstStyle/>
+          <a:p>
+            <a:pPr marL="0" indent="0">
+              <a:buNone/>
+            </a:pPr>
+            <a:r>
+              <a:rPr lang="en-US" sz="1350" b="1" dirty="0">
+                <a:solidFill>
+                  <a:srgbClr val="2B2320"/>
+                </a:solidFill>
+                <a:latin typeface="Calibri" pitchFamily="34" charset="0"/>
+                <a:ea typeface="Calibri" pitchFamily="34" charset="-122"/>
+                <a:cs typeface="Calibri" pitchFamily="34" charset="-120"/>
+              </a:rPr>
+              <a:t>Codificación</a:t>
+            </a:r>
+            <a:endParaRPr lang="en-US" sz="1350" dirty="0"/>
+          </a:p>
+        </p:txBody>
+      </p:sp>
+      <p:sp>
+        <p:nvSpPr>
+          <p:cNvPr id="27" name="Text 20"/>
+          <p:cNvSpPr/>
+          <p:nvPr/>
+        </p:nvSpPr>
+        <p:spPr>
+          <a:xfrm>
+            <a:off x="6035040" y="3794760"/>
+            <a:ext cx="5669280" cy="502920"/>
+          </a:xfrm>
+          <a:prstGeom prst="rect">
+            <a:avLst/>
+          </a:prstGeom>
+          <a:noFill/>
+          <a:ln/>
+        </p:spPr>
+        <p:txBody>
+          <a:bodyPr wrap="square" lIns="0" tIns="0" rIns="0" bIns="0" rtlCol="0" anchor="ctr"/>
+          <a:lstStyle/>
+          <a:p>
+            <a:pPr marL="0" indent="0">
+              <a:buNone/>
+            </a:pPr>
+            <a:r>
+              <a:rPr lang="en-US" sz="1200" dirty="0">
+                <a:solidFill>
+                  <a:srgbClr val="7A6F68"/>
+                </a:solidFill>
+                <a:latin typeface="Calibri" pitchFamily="34" charset="0"/>
+                <a:ea typeface="Calibri" pitchFamily="34" charset="-122"/>
+                <a:cs typeface="Calibri" pitchFamily="34" charset="-120"/>
+              </a:rPr>
+              <a:t>Encoders serializados con joblib (mismo espacio de características)</a:t>
+            </a:r>
+            <a:endParaRPr lang="en-US" sz="1200" dirty="0"/>
+          </a:p>
+        </p:txBody>
+      </p:sp>
+      <p:sp>
+        <p:nvSpPr>
+          <p:cNvPr id="28" name="Shape 21"/>
+          <p:cNvSpPr/>
+          <p:nvPr/>
+        </p:nvSpPr>
+        <p:spPr>
+          <a:xfrm>
+            <a:off x="548640" y="4590288"/>
+            <a:ext cx="457200" cy="457200"/>
+          </a:xfrm>
+          <a:prstGeom prst="ellipse">
+            <a:avLst/>
+          </a:prstGeom>
+          <a:solidFill>
+            <a:srgbClr val="B8563A"/>
+          </a:solidFill>
+          <a:ln/>
+        </p:spPr>
+        <p:txBody>
+          <a:bodyPr/>
+          <a:lstStyle/>
+          <a:p>
+            <a:endParaRPr/>
+          </a:p>
+        </p:txBody>
+      </p:sp>
+      <p:sp>
+        <p:nvSpPr>
+          <p:cNvPr id="29" name="Text 22"/>
+          <p:cNvSpPr/>
+          <p:nvPr/>
+        </p:nvSpPr>
+        <p:spPr>
+          <a:xfrm>
+            <a:off x="548640" y="4590288"/>
+            <a:ext cx="457200" cy="457200"/>
+          </a:xfrm>
+          <a:prstGeom prst="rect">
+            <a:avLst/>
+          </a:prstGeom>
+          <a:noFill/>
+          <a:ln/>
+        </p:spPr>
+        <p:txBody>
+          <a:bodyPr wrap="square" lIns="0" tIns="0" rIns="0" bIns="0" rtlCol="0" anchor="ctr"/>
+          <a:lstStyle/>
+          <a:p>
+            <a:pPr marL="0" indent="0" algn="ctr">
+              <a:buNone/>
+            </a:pPr>
+            <a:r>
+              <a:rPr lang="en-US" sz="1400" b="1" dirty="0">
+                <a:solidFill>
+                  <a:srgbClr val="FFFFFF"/>
+                </a:solidFill>
+                <a:latin typeface="Cambria" pitchFamily="34" charset="0"/>
+                <a:ea typeface="Cambria" pitchFamily="34" charset="-122"/>
+                <a:cs typeface="Cambria" pitchFamily="34" charset="-120"/>
+              </a:rPr>
+              <a:t>5</a:t>
+            </a:r>
+            <a:endParaRPr lang="en-US" sz="1400" dirty="0"/>
+          </a:p>
+        </p:txBody>
+      </p:sp>
+      <p:pic>
+        <p:nvPicPr>
+          <p:cNvPr id="30" name="Image 5" descr="preencoded.png"/>
+          <p:cNvPicPr>
+            <a:picLocks noChangeAspect="1"/>
+          </p:cNvPicPr>
+          <p:nvPr/>
+        </p:nvPicPr>
+        <p:blipFill>
+          <a:blip r:embed="rId8"/>
+          <a:stretch>
+            <a:fillRect/>
+          </a:stretch>
+        </p:blipFill>
+        <p:spPr>
+          <a:xfrm>
+            <a:off x="1143000" y="4663440"/>
+            <a:ext cx="310896" cy="310896"/>
+          </a:xfrm>
+          <a:prstGeom prst="rect">
+            <a:avLst/>
+          </a:prstGeom>
+        </p:spPr>
+      </p:pic>
+      <p:sp>
+        <p:nvSpPr>
+          <p:cNvPr id="31" name="Text 23"/>
+          <p:cNvSpPr/>
+          <p:nvPr/>
+        </p:nvSpPr>
+        <p:spPr>
+          <a:xfrm>
+            <a:off x="1600200" y="4553712"/>
+            <a:ext cx="4206240" cy="320040"/>
+          </a:xfrm>
+          <a:prstGeom prst="rect">
+            <a:avLst/>
+          </a:prstGeom>
+          <a:noFill/>
+          <a:ln/>
+        </p:spPr>
+        <p:txBody>
+          <a:bodyPr wrap="square" lIns="0" tIns="0" rIns="0" bIns="0" rtlCol="0" anchor="ctr"/>
+          <a:lstStyle/>
+          <a:p>
+            <a:pPr marL="0" indent="0">
+              <a:buNone/>
+            </a:pPr>
+            <a:r>
+              <a:rPr lang="en-US" sz="1350" b="1" dirty="0">
+                <a:solidFill>
+                  <a:srgbClr val="2B2320"/>
+                </a:solidFill>
+                <a:latin typeface="Calibri" pitchFamily="34" charset="0"/>
+                <a:ea typeface="Calibri" pitchFamily="34" charset="-122"/>
+                <a:cs typeface="Calibri" pitchFamily="34" charset="-120"/>
+              </a:rPr>
+              <a:t>Predicción y categorización</a:t>
+            </a:r>
+            <a:endParaRPr lang="en-US" sz="1350" dirty="0"/>
+          </a:p>
+        </p:txBody>
+      </p:sp>
+      <p:sp>
+        <p:nvSpPr>
+          <p:cNvPr id="32" name="Text 24"/>
+          <p:cNvSpPr/>
+          <p:nvPr/>
+        </p:nvSpPr>
+        <p:spPr>
+          <a:xfrm>
+            <a:off x="6035040" y="4572000"/>
+            <a:ext cx="5669280" cy="502920"/>
+          </a:xfrm>
+          <a:prstGeom prst="rect">
+            <a:avLst/>
+          </a:prstGeom>
+          <a:noFill/>
+          <a:ln/>
+        </p:spPr>
+        <p:txBody>
+          <a:bodyPr wrap="square" lIns="0" tIns="0" rIns="0" bIns="0" rtlCol="0" anchor="ctr"/>
+          <a:lstStyle/>
+          <a:p>
+            <a:pPr marL="0" indent="0">
+              <a:buNone/>
+            </a:pPr>
+            <a:r>
+              <a:rPr lang="en-US" sz="1200" dirty="0">
+                <a:solidFill>
+                  <a:srgbClr val="7A6F68"/>
+                </a:solidFill>
+                <a:latin typeface="Calibri" pitchFamily="34" charset="0"/>
+                <a:ea typeface="Calibri" pitchFamily="34" charset="-122"/>
+                <a:cs typeface="Calibri" pitchFamily="34" charset="-120"/>
+              </a:rPr>
+              <a:t>Modelo podado + ratio r + umbrales del nivel elegido</a:t>
+            </a:r>
+            <a:endParaRPr lang="en-US" sz="1200" dirty="0"/>
+          </a:p>
+        </p:txBody>
+      </p:sp>
+      <p:sp>
+        <p:nvSpPr>
+          <p:cNvPr id="33" name="Shape 25"/>
+          <p:cNvSpPr/>
+          <p:nvPr/>
+        </p:nvSpPr>
+        <p:spPr>
+          <a:xfrm>
+            <a:off x="548640" y="5367528"/>
+            <a:ext cx="457200" cy="457200"/>
+          </a:xfrm>
+          <a:prstGeom prst="ellipse">
+            <a:avLst/>
+          </a:prstGeom>
+          <a:solidFill>
+            <a:srgbClr val="3B6E77"/>
+          </a:solidFill>
+          <a:ln/>
+        </p:spPr>
+        <p:txBody>
+          <a:bodyPr/>
+          <a:lstStyle/>
+          <a:p>
+            <a:endParaRPr/>
+          </a:p>
+        </p:txBody>
+      </p:sp>
+      <p:sp>
+        <p:nvSpPr>
+          <p:cNvPr id="34" name="Text 26"/>
+          <p:cNvSpPr/>
+          <p:nvPr/>
+        </p:nvSpPr>
+        <p:spPr>
+          <a:xfrm>
+            <a:off x="548640" y="5367528"/>
+            <a:ext cx="457200" cy="457200"/>
+          </a:xfrm>
+          <a:prstGeom prst="rect">
+            <a:avLst/>
+          </a:prstGeom>
+          <a:noFill/>
+          <a:ln/>
+        </p:spPr>
+        <p:txBody>
+          <a:bodyPr wrap="square" lIns="0" tIns="0" rIns="0" bIns="0" rtlCol="0" anchor="ctr"/>
+          <a:lstStyle/>
+          <a:p>
+            <a:pPr marL="0" indent="0" algn="ctr">
+              <a:buNone/>
+            </a:pPr>
+            <a:r>
+              <a:rPr lang="en-US" sz="1400" b="1" dirty="0">
+                <a:solidFill>
+                  <a:srgbClr val="FFFFFF"/>
+                </a:solidFill>
+                <a:latin typeface="Cambria" pitchFamily="34" charset="0"/>
+                <a:ea typeface="Cambria" pitchFamily="34" charset="-122"/>
+                <a:cs typeface="Cambria" pitchFamily="34" charset="-120"/>
+              </a:rPr>
+              <a:t>6</a:t>
+            </a:r>
+            <a:endParaRPr lang="en-US" sz="1400" dirty="0"/>
+          </a:p>
+        </p:txBody>
+      </p:sp>
+      <p:pic>
+        <p:nvPicPr>
+          <p:cNvPr id="35" name="Image 6" descr="preencoded.png"/>
+          <p:cNvPicPr>
+            <a:picLocks noChangeAspect="1"/>
+          </p:cNvPicPr>
+          <p:nvPr/>
+        </p:nvPicPr>
+        <p:blipFill>
+          <a:blip r:embed="rId9"/>
+          <a:stretch>
+            <a:fillRect/>
+          </a:stretch>
+        </p:blipFill>
+        <p:spPr>
+          <a:xfrm>
+            <a:off x="1143000" y="5440680"/>
+            <a:ext cx="310896" cy="310896"/>
+          </a:xfrm>
+          <a:prstGeom prst="rect">
+            <a:avLst/>
+          </a:prstGeom>
+        </p:spPr>
+      </p:pic>
+      <p:sp>
+        <p:nvSpPr>
+          <p:cNvPr id="36" name="Text 27"/>
+          <p:cNvSpPr/>
+          <p:nvPr/>
+        </p:nvSpPr>
+        <p:spPr>
+          <a:xfrm>
+            <a:off x="1600200" y="5330952"/>
+            <a:ext cx="4206240" cy="320040"/>
+          </a:xfrm>
+          <a:prstGeom prst="rect">
+            <a:avLst/>
+          </a:prstGeom>
+          <a:noFill/>
+          <a:ln/>
+        </p:spPr>
+        <p:txBody>
+          <a:bodyPr wrap="square" lIns="0" tIns="0" rIns="0" bIns="0" rtlCol="0" anchor="ctr"/>
+          <a:lstStyle/>
+          <a:p>
+            <a:pPr marL="0" indent="0">
+              <a:buNone/>
+            </a:pPr>
+            <a:r>
+              <a:rPr lang="en-US" sz="1350" b="1" dirty="0">
+                <a:solidFill>
+                  <a:srgbClr val="2B2320"/>
+                </a:solidFill>
+                <a:latin typeface="Calibri" pitchFamily="34" charset="0"/>
+                <a:ea typeface="Calibri" pitchFamily="34" charset="-122"/>
+                <a:cs typeface="Calibri" pitchFamily="34" charset="-120"/>
+              </a:rPr>
+              <a:t>Presentación de resultados</a:t>
+            </a:r>
+            <a:endParaRPr lang="en-US" sz="1350" dirty="0"/>
+          </a:p>
+        </p:txBody>
+      </p:sp>
+      <p:sp>
+        <p:nvSpPr>
+          <p:cNvPr id="37" name="Text 28"/>
+          <p:cNvSpPr/>
+          <p:nvPr/>
+        </p:nvSpPr>
+        <p:spPr>
+          <a:xfrm>
+            <a:off x="6035040" y="5349240"/>
+            <a:ext cx="5669280" cy="502920"/>
+          </a:xfrm>
+          <a:prstGeom prst="rect">
+            <a:avLst/>
+          </a:prstGeom>
+          <a:noFill/>
+          <a:ln/>
+        </p:spPr>
+        <p:txBody>
+          <a:bodyPr wrap="square" lIns="0" tIns="0" rIns="0" bIns="0" rtlCol="0" anchor="ctr"/>
+          <a:lstStyle/>
+          <a:p>
+            <a:pPr marL="0" indent="0">
+              <a:buNone/>
+            </a:pPr>
+            <a:r>
+              <a:rPr lang="en-US" sz="1200" dirty="0">
+                <a:solidFill>
+                  <a:srgbClr val="7A6F68"/>
+                </a:solidFill>
+                <a:latin typeface="Calibri" pitchFamily="34" charset="0"/>
+                <a:ea typeface="Calibri" pitchFamily="34" charset="-122"/>
+                <a:cs typeface="Calibri" pitchFamily="34" charset="-120"/>
+              </a:rPr>
+              <a:t>Tabla ordenada por ahorro y gráfico de categorías</a:t>
+            </a:r>
+            <a:endParaRPr lang="en-US" sz="1200" dirty="0"/>
           </a:p>
         </p:txBody>
       </p:sp>
@@ -18836,7 +18303,7 @@
                 <a:ea typeface="Calibri" pitchFamily="34" charset="-122"/>
                 <a:cs typeface="Calibri" pitchFamily="34" charset="-120"/>
               </a:rPr>
-              <a:t>2 / 24</a:t>
+              <a:t>2 / 23</a:t>
             </a:r>
             <a:endParaRPr lang="en-US" sz="900" dirty="0"/>
           </a:p>
@@ -19844,1254 +19311,6 @@
 </file>
 
 <file path=ppt/slides/slide20.xml><?xml version="1.0" encoding="utf-8"?>
-<p:sld xmlns:a="http://schemas.openxmlformats.org/drawingml/2006/main" xmlns:r="http://schemas.openxmlformats.org/officeDocument/2006/relationships" xmlns:p="http://schemas.openxmlformats.org/presentationml/2006/main">
-  <p:cSld name="Slide 19">
-    <p:bg>
-      <p:bgPr>
-        <a:solidFill>
-          <a:srgbClr val="FFFFFF"/>
-        </a:solidFill>
-        <a:effectLst/>
-      </p:bgPr>
-    </p:bg>
-    <p:spTree>
-      <p:nvGrpSpPr>
-        <p:cNvPr id="1" name=""/>
-        <p:cNvGrpSpPr/>
-        <p:nvPr/>
-      </p:nvGrpSpPr>
-      <p:grpSpPr>
-        <a:xfrm>
-          <a:off x="0" y="0"/>
-          <a:ext cx="0" cy="0"/>
-          <a:chOff x="0" y="0"/>
-          <a:chExt cx="0" cy="0"/>
-        </a:xfrm>
-      </p:grpSpPr>
-      <p:sp>
-        <p:nvSpPr>
-          <p:cNvPr id="2" name="Text 0"/>
-          <p:cNvSpPr/>
-          <p:nvPr/>
-        </p:nvSpPr>
-        <p:spPr>
-          <a:xfrm>
-            <a:off x="548640" y="6473952"/>
-            <a:ext cx="7315200" cy="274320"/>
-          </a:xfrm>
-          <a:prstGeom prst="rect">
-            <a:avLst/>
-          </a:prstGeom>
-          <a:noFill/>
-          <a:ln/>
-        </p:spPr>
-        <p:txBody>
-          <a:bodyPr wrap="square" lIns="0" tIns="0" rIns="0" bIns="0" rtlCol="0" anchor="ctr"/>
-          <a:lstStyle/>
-          <a:p>
-            <a:pPr marL="0" indent="0" algn="l">
-              <a:buNone/>
-            </a:pPr>
-            <a:r>
-              <a:rPr lang="en-US" sz="900" dirty="0">
-                <a:solidFill>
-                  <a:srgbClr val="7A6F68"/>
-                </a:solidFill>
-                <a:latin typeface="Calibri" pitchFamily="34" charset="0"/>
-                <a:ea typeface="Calibri" pitchFamily="34" charset="-122"/>
-                <a:cs typeface="Calibri" pitchFamily="34" charset="-120"/>
-              </a:rPr>
-              <a:t>Detección de Alojamientos Turísticos con Precio Real Inferior — TFG</a:t>
-            </a:r>
-            <a:endParaRPr lang="en-US" sz="900" dirty="0"/>
-          </a:p>
-        </p:txBody>
-      </p:sp>
-      <p:sp>
-        <p:nvSpPr>
-          <p:cNvPr id="3" name="Text 1"/>
-          <p:cNvSpPr/>
-          <p:nvPr/>
-        </p:nvSpPr>
-        <p:spPr>
-          <a:xfrm>
-            <a:off x="10545775" y="6473952"/>
-            <a:ext cx="1097280" cy="274320"/>
-          </a:xfrm>
-          <a:prstGeom prst="rect">
-            <a:avLst/>
-          </a:prstGeom>
-          <a:noFill/>
-          <a:ln/>
-        </p:spPr>
-        <p:txBody>
-          <a:bodyPr wrap="square" lIns="0" tIns="0" rIns="0" bIns="0" rtlCol="0" anchor="ctr"/>
-          <a:lstStyle/>
-          <a:p>
-            <a:pPr marL="0" indent="0" algn="r">
-              <a:buNone/>
-            </a:pPr>
-            <a:r>
-              <a:rPr lang="en-US" sz="900" dirty="0">
-                <a:solidFill>
-                  <a:srgbClr val="7A6F68"/>
-                </a:solidFill>
-                <a:latin typeface="Calibri" pitchFamily="34" charset="0"/>
-                <a:ea typeface="Calibri" pitchFamily="34" charset="-122"/>
-                <a:cs typeface="Calibri" pitchFamily="34" charset="-120"/>
-              </a:rPr>
-              <a:t>20 / 24</a:t>
-            </a:r>
-            <a:endParaRPr lang="en-US" sz="900" dirty="0"/>
-          </a:p>
-        </p:txBody>
-      </p:sp>
-      <p:sp>
-        <p:nvSpPr>
-          <p:cNvPr id="4" name="Shape 2"/>
-          <p:cNvSpPr/>
-          <p:nvPr/>
-        </p:nvSpPr>
-        <p:spPr>
-          <a:xfrm>
-            <a:off x="548640" y="457200"/>
-            <a:ext cx="566928" cy="566928"/>
-          </a:xfrm>
-          <a:prstGeom prst="ellipse">
-            <a:avLst/>
-          </a:prstGeom>
-          <a:solidFill>
-            <a:srgbClr val="B8563A"/>
-          </a:solidFill>
-          <a:ln/>
-        </p:spPr>
-        <p:txBody>
-          <a:bodyPr/>
-          <a:lstStyle/>
-          <a:p>
-            <a:endParaRPr/>
-          </a:p>
-        </p:txBody>
-      </p:sp>
-      <p:sp>
-        <p:nvSpPr>
-          <p:cNvPr id="5" name="Text 3"/>
-          <p:cNvSpPr/>
-          <p:nvPr/>
-        </p:nvSpPr>
-        <p:spPr>
-          <a:xfrm>
-            <a:off x="1316736" y="420624"/>
-            <a:ext cx="9601200" cy="256032"/>
-          </a:xfrm>
-          <a:prstGeom prst="rect">
-            <a:avLst/>
-          </a:prstGeom>
-          <a:noFill/>
-          <a:ln/>
-        </p:spPr>
-        <p:txBody>
-          <a:bodyPr wrap="square" lIns="0" tIns="0" rIns="0" bIns="0" rtlCol="0" anchor="ctr"/>
-          <a:lstStyle/>
-          <a:p>
-            <a:pPr marL="0" indent="0">
-              <a:buNone/>
-            </a:pPr>
-            <a:r>
-              <a:rPr lang="en-US" sz="1100" b="1" kern="0" spc="200" dirty="0">
-                <a:solidFill>
-                  <a:srgbClr val="7A6F68"/>
-                </a:solidFill>
-                <a:latin typeface="Calibri" pitchFamily="34" charset="0"/>
-                <a:ea typeface="Calibri" pitchFamily="34" charset="-122"/>
-                <a:cs typeface="Calibri" pitchFamily="34" charset="-120"/>
-              </a:rPr>
-              <a:t>APLICACIÓN WEB</a:t>
-            </a:r>
-            <a:endParaRPr lang="en-US" sz="1100" dirty="0"/>
-          </a:p>
-        </p:txBody>
-      </p:sp>
-      <p:sp>
-        <p:nvSpPr>
-          <p:cNvPr id="6" name="Text 4"/>
-          <p:cNvSpPr/>
-          <p:nvPr/>
-        </p:nvSpPr>
-        <p:spPr>
-          <a:xfrm>
-            <a:off x="1316736" y="640080"/>
-            <a:ext cx="9966960" cy="640080"/>
-          </a:xfrm>
-          <a:prstGeom prst="rect">
-            <a:avLst/>
-          </a:prstGeom>
-          <a:noFill/>
-          <a:ln/>
-        </p:spPr>
-        <p:txBody>
-          <a:bodyPr wrap="square" lIns="0" tIns="0" rIns="0" bIns="0" rtlCol="0" anchor="t"/>
-          <a:lstStyle/>
-          <a:p>
-            <a:pPr marL="0" indent="0">
-              <a:buNone/>
-            </a:pPr>
-            <a:r>
-              <a:rPr lang="en-US" sz="2800" b="1" dirty="0">
-                <a:solidFill>
-                  <a:srgbClr val="2B2320"/>
-                </a:solidFill>
-                <a:latin typeface="Cambria" pitchFamily="34" charset="0"/>
-                <a:ea typeface="Cambria" pitchFamily="34" charset="-122"/>
-                <a:cs typeface="Cambria" pitchFamily="34" charset="-120"/>
-              </a:rPr>
-              <a:t>Flujo de trabajo de la búsqueda</a:t>
-            </a:r>
-            <a:endParaRPr lang="en-US" sz="2800" dirty="0"/>
-          </a:p>
-        </p:txBody>
-      </p:sp>
-      <p:pic>
-        <p:nvPicPr>
-          <p:cNvPr id="7" name="Image 0" descr="preencoded.png"/>
-          <p:cNvPicPr>
-            <a:picLocks noChangeAspect="1"/>
-          </p:cNvPicPr>
-          <p:nvPr/>
-        </p:nvPicPr>
-        <p:blipFill>
-          <a:blip r:embed="rId3"/>
-          <a:stretch>
-            <a:fillRect/>
-          </a:stretch>
-        </p:blipFill>
-        <p:spPr>
-          <a:xfrm>
-            <a:off x="656356" y="564916"/>
-            <a:ext cx="351495" cy="351495"/>
-          </a:xfrm>
-          <a:prstGeom prst="rect">
-            <a:avLst/>
-          </a:prstGeom>
-        </p:spPr>
-      </p:pic>
-      <p:sp>
-        <p:nvSpPr>
-          <p:cNvPr id="8" name="Shape 5"/>
-          <p:cNvSpPr/>
-          <p:nvPr/>
-        </p:nvSpPr>
-        <p:spPr>
-          <a:xfrm>
-            <a:off x="548640" y="1481328"/>
-            <a:ext cx="457200" cy="457200"/>
-          </a:xfrm>
-          <a:prstGeom prst="ellipse">
-            <a:avLst/>
-          </a:prstGeom>
-          <a:solidFill>
-            <a:srgbClr val="3B6E77"/>
-          </a:solidFill>
-          <a:ln/>
-        </p:spPr>
-        <p:txBody>
-          <a:bodyPr/>
-          <a:lstStyle/>
-          <a:p>
-            <a:endParaRPr/>
-          </a:p>
-        </p:txBody>
-      </p:sp>
-      <p:sp>
-        <p:nvSpPr>
-          <p:cNvPr id="9" name="Text 6"/>
-          <p:cNvSpPr/>
-          <p:nvPr/>
-        </p:nvSpPr>
-        <p:spPr>
-          <a:xfrm>
-            <a:off x="548640" y="1481328"/>
-            <a:ext cx="457200" cy="457200"/>
-          </a:xfrm>
-          <a:prstGeom prst="rect">
-            <a:avLst/>
-          </a:prstGeom>
-          <a:noFill/>
-          <a:ln/>
-        </p:spPr>
-        <p:txBody>
-          <a:bodyPr wrap="square" lIns="0" tIns="0" rIns="0" bIns="0" rtlCol="0" anchor="ctr"/>
-          <a:lstStyle/>
-          <a:p>
-            <a:pPr marL="0" indent="0" algn="ctr">
-              <a:buNone/>
-            </a:pPr>
-            <a:r>
-              <a:rPr lang="en-US" sz="1400" b="1" dirty="0">
-                <a:solidFill>
-                  <a:srgbClr val="FFFFFF"/>
-                </a:solidFill>
-                <a:latin typeface="Cambria" pitchFamily="34" charset="0"/>
-                <a:ea typeface="Cambria" pitchFamily="34" charset="-122"/>
-                <a:cs typeface="Cambria" pitchFamily="34" charset="-120"/>
-              </a:rPr>
-              <a:t>1</a:t>
-            </a:r>
-            <a:endParaRPr lang="en-US" sz="1400" dirty="0"/>
-          </a:p>
-        </p:txBody>
-      </p:sp>
-      <p:pic>
-        <p:nvPicPr>
-          <p:cNvPr id="10" name="Image 1" descr="preencoded.png"/>
-          <p:cNvPicPr>
-            <a:picLocks noChangeAspect="1"/>
-          </p:cNvPicPr>
-          <p:nvPr/>
-        </p:nvPicPr>
-        <p:blipFill>
-          <a:blip r:embed="rId4"/>
-          <a:stretch>
-            <a:fillRect/>
-          </a:stretch>
-        </p:blipFill>
-        <p:spPr>
-          <a:xfrm>
-            <a:off x="1143000" y="1554480"/>
-            <a:ext cx="310896" cy="310896"/>
-          </a:xfrm>
-          <a:prstGeom prst="rect">
-            <a:avLst/>
-          </a:prstGeom>
-        </p:spPr>
-      </p:pic>
-      <p:sp>
-        <p:nvSpPr>
-          <p:cNvPr id="11" name="Text 7"/>
-          <p:cNvSpPr/>
-          <p:nvPr/>
-        </p:nvSpPr>
-        <p:spPr>
-          <a:xfrm>
-            <a:off x="1600200" y="1444752"/>
-            <a:ext cx="4206240" cy="320040"/>
-          </a:xfrm>
-          <a:prstGeom prst="rect">
-            <a:avLst/>
-          </a:prstGeom>
-          <a:noFill/>
-          <a:ln/>
-        </p:spPr>
-        <p:txBody>
-          <a:bodyPr wrap="square" lIns="0" tIns="0" rIns="0" bIns="0" rtlCol="0" anchor="ctr"/>
-          <a:lstStyle/>
-          <a:p>
-            <a:pPr marL="0" indent="0">
-              <a:buNone/>
-            </a:pPr>
-            <a:r>
-              <a:rPr lang="en-US" sz="1350" b="1" dirty="0">
-                <a:solidFill>
-                  <a:srgbClr val="2B2320"/>
-                </a:solidFill>
-                <a:latin typeface="Calibri" pitchFamily="34" charset="0"/>
-                <a:ea typeface="Calibri" pitchFamily="34" charset="-122"/>
-                <a:cs typeface="Calibri" pitchFamily="34" charset="-120"/>
-              </a:rPr>
-              <a:t>Formulario de preferencias</a:t>
-            </a:r>
-            <a:endParaRPr lang="en-US" sz="1350" dirty="0"/>
-          </a:p>
-        </p:txBody>
-      </p:sp>
-      <p:sp>
-        <p:nvSpPr>
-          <p:cNvPr id="12" name="Text 8"/>
-          <p:cNvSpPr/>
-          <p:nvPr/>
-        </p:nvSpPr>
-        <p:spPr>
-          <a:xfrm>
-            <a:off x="6035040" y="1463040"/>
-            <a:ext cx="5669280" cy="502920"/>
-          </a:xfrm>
-          <a:prstGeom prst="rect">
-            <a:avLst/>
-          </a:prstGeom>
-          <a:noFill/>
-          <a:ln/>
-        </p:spPr>
-        <p:txBody>
-          <a:bodyPr wrap="square" lIns="0" tIns="0" rIns="0" bIns="0" rtlCol="0" anchor="ctr"/>
-          <a:lstStyle/>
-          <a:p>
-            <a:pPr marL="0" indent="0">
-              <a:buNone/>
-            </a:pPr>
-            <a:r>
-              <a:rPr lang="en-US" sz="1200" dirty="0">
-                <a:solidFill>
-                  <a:srgbClr val="7A6F68"/>
-                </a:solidFill>
-                <a:latin typeface="Calibri" pitchFamily="34" charset="0"/>
-                <a:ea typeface="Calibri" pitchFamily="34" charset="-122"/>
-                <a:cs typeface="Calibri" pitchFamily="34" charset="-120"/>
-              </a:rPr>
-              <a:t>Destino, fechas, tipo, servicios y nivel de exigencia</a:t>
-            </a:r>
-            <a:endParaRPr lang="en-US" sz="1200" dirty="0"/>
-          </a:p>
-        </p:txBody>
-      </p:sp>
-      <p:sp>
-        <p:nvSpPr>
-          <p:cNvPr id="13" name="Shape 9"/>
-          <p:cNvSpPr/>
-          <p:nvPr/>
-        </p:nvSpPr>
-        <p:spPr>
-          <a:xfrm>
-            <a:off x="548640" y="2258568"/>
-            <a:ext cx="457200" cy="457200"/>
-          </a:xfrm>
-          <a:prstGeom prst="ellipse">
-            <a:avLst/>
-          </a:prstGeom>
-          <a:solidFill>
-            <a:srgbClr val="3B6E77"/>
-          </a:solidFill>
-          <a:ln/>
-        </p:spPr>
-        <p:txBody>
-          <a:bodyPr/>
-          <a:lstStyle/>
-          <a:p>
-            <a:endParaRPr/>
-          </a:p>
-        </p:txBody>
-      </p:sp>
-      <p:sp>
-        <p:nvSpPr>
-          <p:cNvPr id="14" name="Text 10"/>
-          <p:cNvSpPr/>
-          <p:nvPr/>
-        </p:nvSpPr>
-        <p:spPr>
-          <a:xfrm>
-            <a:off x="548640" y="2258568"/>
-            <a:ext cx="457200" cy="457200"/>
-          </a:xfrm>
-          <a:prstGeom prst="rect">
-            <a:avLst/>
-          </a:prstGeom>
-          <a:noFill/>
-          <a:ln/>
-        </p:spPr>
-        <p:txBody>
-          <a:bodyPr wrap="square" lIns="0" tIns="0" rIns="0" bIns="0" rtlCol="0" anchor="ctr"/>
-          <a:lstStyle/>
-          <a:p>
-            <a:pPr marL="0" indent="0" algn="ctr">
-              <a:buNone/>
-            </a:pPr>
-            <a:r>
-              <a:rPr lang="en-US" sz="1400" b="1" dirty="0">
-                <a:solidFill>
-                  <a:srgbClr val="FFFFFF"/>
-                </a:solidFill>
-                <a:latin typeface="Cambria" pitchFamily="34" charset="0"/>
-                <a:ea typeface="Cambria" pitchFamily="34" charset="-122"/>
-                <a:cs typeface="Cambria" pitchFamily="34" charset="-120"/>
-              </a:rPr>
-              <a:t>2</a:t>
-            </a:r>
-            <a:endParaRPr lang="en-US" sz="1400" dirty="0"/>
-          </a:p>
-        </p:txBody>
-      </p:sp>
-      <p:pic>
-        <p:nvPicPr>
-          <p:cNvPr id="15" name="Image 2" descr="preencoded.png"/>
-          <p:cNvPicPr>
-            <a:picLocks noChangeAspect="1"/>
-          </p:cNvPicPr>
-          <p:nvPr/>
-        </p:nvPicPr>
-        <p:blipFill>
-          <a:blip r:embed="rId5"/>
-          <a:stretch>
-            <a:fillRect/>
-          </a:stretch>
-        </p:blipFill>
-        <p:spPr>
-          <a:xfrm>
-            <a:off x="1143000" y="2331720"/>
-            <a:ext cx="310896" cy="310896"/>
-          </a:xfrm>
-          <a:prstGeom prst="rect">
-            <a:avLst/>
-          </a:prstGeom>
-        </p:spPr>
-      </p:pic>
-      <p:sp>
-        <p:nvSpPr>
-          <p:cNvPr id="16" name="Text 11"/>
-          <p:cNvSpPr/>
-          <p:nvPr/>
-        </p:nvSpPr>
-        <p:spPr>
-          <a:xfrm>
-            <a:off x="1600200" y="2221992"/>
-            <a:ext cx="4206240" cy="320040"/>
-          </a:xfrm>
-          <a:prstGeom prst="rect">
-            <a:avLst/>
-          </a:prstGeom>
-          <a:noFill/>
-          <a:ln/>
-        </p:spPr>
-        <p:txBody>
-          <a:bodyPr wrap="square" lIns="0" tIns="0" rIns="0" bIns="0" rtlCol="0" anchor="ctr"/>
-          <a:lstStyle/>
-          <a:p>
-            <a:pPr marL="0" indent="0">
-              <a:buNone/>
-            </a:pPr>
-            <a:r>
-              <a:rPr lang="en-US" sz="1350" b="1" dirty="0">
-                <a:solidFill>
-                  <a:srgbClr val="2B2320"/>
-                </a:solidFill>
-                <a:latin typeface="Calibri" pitchFamily="34" charset="0"/>
-                <a:ea typeface="Calibri" pitchFamily="34" charset="-122"/>
-                <a:cs typeface="Calibri" pitchFamily="34" charset="-120"/>
-              </a:rPr>
-              <a:t>Extracción en tiempo real</a:t>
-            </a:r>
-            <a:endParaRPr lang="en-US" sz="1350" dirty="0"/>
-          </a:p>
-        </p:txBody>
-      </p:sp>
-      <p:sp>
-        <p:nvSpPr>
-          <p:cNvPr id="17" name="Text 12"/>
-          <p:cNvSpPr/>
-          <p:nvPr/>
-        </p:nvSpPr>
-        <p:spPr>
-          <a:xfrm>
-            <a:off x="6035040" y="2240280"/>
-            <a:ext cx="5669280" cy="502920"/>
-          </a:xfrm>
-          <a:prstGeom prst="rect">
-            <a:avLst/>
-          </a:prstGeom>
-          <a:noFill/>
-          <a:ln/>
-        </p:spPr>
-        <p:txBody>
-          <a:bodyPr wrap="square" lIns="0" tIns="0" rIns="0" bIns="0" rtlCol="0" anchor="ctr"/>
-          <a:lstStyle/>
-          <a:p>
-            <a:pPr marL="0" indent="0">
-              <a:buNone/>
-            </a:pPr>
-            <a:r>
-              <a:rPr lang="en-US" sz="1200" dirty="0">
-                <a:solidFill>
-                  <a:srgbClr val="7A6F68"/>
-                </a:solidFill>
-                <a:latin typeface="Calibri" pitchFamily="34" charset="0"/>
-                <a:ea typeface="Calibri" pitchFamily="34" charset="-122"/>
-                <a:cs typeface="Calibri" pitchFamily="34" charset="-120"/>
-              </a:rPr>
-              <a:t>Hasta 25 alojamientos por localidad seleccionada</a:t>
-            </a:r>
-            <a:endParaRPr lang="en-US" sz="1200" dirty="0"/>
-          </a:p>
-        </p:txBody>
-      </p:sp>
-      <p:sp>
-        <p:nvSpPr>
-          <p:cNvPr id="18" name="Shape 13"/>
-          <p:cNvSpPr/>
-          <p:nvPr/>
-        </p:nvSpPr>
-        <p:spPr>
-          <a:xfrm>
-            <a:off x="548640" y="3035808"/>
-            <a:ext cx="457200" cy="457200"/>
-          </a:xfrm>
-          <a:prstGeom prst="ellipse">
-            <a:avLst/>
-          </a:prstGeom>
-          <a:solidFill>
-            <a:srgbClr val="3B6E77"/>
-          </a:solidFill>
-          <a:ln/>
-        </p:spPr>
-        <p:txBody>
-          <a:bodyPr/>
-          <a:lstStyle/>
-          <a:p>
-            <a:endParaRPr/>
-          </a:p>
-        </p:txBody>
-      </p:sp>
-      <p:sp>
-        <p:nvSpPr>
-          <p:cNvPr id="19" name="Text 14"/>
-          <p:cNvSpPr/>
-          <p:nvPr/>
-        </p:nvSpPr>
-        <p:spPr>
-          <a:xfrm>
-            <a:off x="548640" y="3035808"/>
-            <a:ext cx="457200" cy="457200"/>
-          </a:xfrm>
-          <a:prstGeom prst="rect">
-            <a:avLst/>
-          </a:prstGeom>
-          <a:noFill/>
-          <a:ln/>
-        </p:spPr>
-        <p:txBody>
-          <a:bodyPr wrap="square" lIns="0" tIns="0" rIns="0" bIns="0" rtlCol="0" anchor="ctr"/>
-          <a:lstStyle/>
-          <a:p>
-            <a:pPr marL="0" indent="0" algn="ctr">
-              <a:buNone/>
-            </a:pPr>
-            <a:r>
-              <a:rPr lang="en-US" sz="1400" b="1" dirty="0">
-                <a:solidFill>
-                  <a:srgbClr val="FFFFFF"/>
-                </a:solidFill>
-                <a:latin typeface="Cambria" pitchFamily="34" charset="0"/>
-                <a:ea typeface="Cambria" pitchFamily="34" charset="-122"/>
-                <a:cs typeface="Cambria" pitchFamily="34" charset="-120"/>
-              </a:rPr>
-              <a:t>3</a:t>
-            </a:r>
-            <a:endParaRPr lang="en-US" sz="1400" dirty="0"/>
-          </a:p>
-        </p:txBody>
-      </p:sp>
-      <p:pic>
-        <p:nvPicPr>
-          <p:cNvPr id="20" name="Image 3" descr="preencoded.png"/>
-          <p:cNvPicPr>
-            <a:picLocks noChangeAspect="1"/>
-          </p:cNvPicPr>
-          <p:nvPr/>
-        </p:nvPicPr>
-        <p:blipFill>
-          <a:blip r:embed="rId6"/>
-          <a:stretch>
-            <a:fillRect/>
-          </a:stretch>
-        </p:blipFill>
-        <p:spPr>
-          <a:xfrm>
-            <a:off x="1143000" y="3108960"/>
-            <a:ext cx="310896" cy="310896"/>
-          </a:xfrm>
-          <a:prstGeom prst="rect">
-            <a:avLst/>
-          </a:prstGeom>
-        </p:spPr>
-      </p:pic>
-      <p:sp>
-        <p:nvSpPr>
-          <p:cNvPr id="21" name="Text 15"/>
-          <p:cNvSpPr/>
-          <p:nvPr/>
-        </p:nvSpPr>
-        <p:spPr>
-          <a:xfrm>
-            <a:off x="1600200" y="2999232"/>
-            <a:ext cx="4206240" cy="320040"/>
-          </a:xfrm>
-          <a:prstGeom prst="rect">
-            <a:avLst/>
-          </a:prstGeom>
-          <a:noFill/>
-          <a:ln/>
-        </p:spPr>
-        <p:txBody>
-          <a:bodyPr wrap="square" lIns="0" tIns="0" rIns="0" bIns="0" rtlCol="0" anchor="ctr"/>
-          <a:lstStyle/>
-          <a:p>
-            <a:pPr marL="0" indent="0">
-              <a:buNone/>
-            </a:pPr>
-            <a:r>
-              <a:rPr lang="en-US" sz="1350" b="1" dirty="0">
-                <a:solidFill>
-                  <a:srgbClr val="2B2320"/>
-                </a:solidFill>
-                <a:latin typeface="Calibri" pitchFamily="34" charset="0"/>
-                <a:ea typeface="Calibri" pitchFamily="34" charset="-122"/>
-                <a:cs typeface="Calibri" pitchFamily="34" charset="-120"/>
-              </a:rPr>
-              <a:t>Preprocesamiento</a:t>
-            </a:r>
-            <a:endParaRPr lang="en-US" sz="1350" dirty="0"/>
-          </a:p>
-        </p:txBody>
-      </p:sp>
-      <p:sp>
-        <p:nvSpPr>
-          <p:cNvPr id="22" name="Text 16"/>
-          <p:cNvSpPr/>
-          <p:nvPr/>
-        </p:nvSpPr>
-        <p:spPr>
-          <a:xfrm>
-            <a:off x="6035040" y="3017520"/>
-            <a:ext cx="5669280" cy="502920"/>
-          </a:xfrm>
-          <a:prstGeom prst="rect">
-            <a:avLst/>
-          </a:prstGeom>
-          <a:noFill/>
-          <a:ln/>
-        </p:spPr>
-        <p:txBody>
-          <a:bodyPr wrap="square" lIns="0" tIns="0" rIns="0" bIns="0" rtlCol="0" anchor="ctr"/>
-          <a:lstStyle/>
-          <a:p>
-            <a:pPr marL="0" indent="0">
-              <a:buNone/>
-            </a:pPr>
-            <a:r>
-              <a:rPr lang="en-US" sz="1200" dirty="0">
-                <a:solidFill>
-                  <a:srgbClr val="7A6F68"/>
-                </a:solidFill>
-                <a:latin typeface="Calibri" pitchFamily="34" charset="0"/>
-                <a:ea typeface="Calibri" pitchFamily="34" charset="-122"/>
-                <a:cs typeface="Calibri" pitchFamily="34" charset="-120"/>
-              </a:rPr>
-              <a:t>Misma secuencia de transformaciones que en el entrenamiento</a:t>
-            </a:r>
-            <a:endParaRPr lang="en-US" sz="1200" dirty="0"/>
-          </a:p>
-        </p:txBody>
-      </p:sp>
-      <p:sp>
-        <p:nvSpPr>
-          <p:cNvPr id="23" name="Shape 17"/>
-          <p:cNvSpPr/>
-          <p:nvPr/>
-        </p:nvSpPr>
-        <p:spPr>
-          <a:xfrm>
-            <a:off x="548640" y="3813048"/>
-            <a:ext cx="457200" cy="457200"/>
-          </a:xfrm>
-          <a:prstGeom prst="ellipse">
-            <a:avLst/>
-          </a:prstGeom>
-          <a:solidFill>
-            <a:srgbClr val="3B6E77"/>
-          </a:solidFill>
-          <a:ln/>
-        </p:spPr>
-        <p:txBody>
-          <a:bodyPr/>
-          <a:lstStyle/>
-          <a:p>
-            <a:endParaRPr/>
-          </a:p>
-        </p:txBody>
-      </p:sp>
-      <p:sp>
-        <p:nvSpPr>
-          <p:cNvPr id="24" name="Text 18"/>
-          <p:cNvSpPr/>
-          <p:nvPr/>
-        </p:nvSpPr>
-        <p:spPr>
-          <a:xfrm>
-            <a:off x="548640" y="3813048"/>
-            <a:ext cx="457200" cy="457200"/>
-          </a:xfrm>
-          <a:prstGeom prst="rect">
-            <a:avLst/>
-          </a:prstGeom>
-          <a:noFill/>
-          <a:ln/>
-        </p:spPr>
-        <p:txBody>
-          <a:bodyPr wrap="square" lIns="0" tIns="0" rIns="0" bIns="0" rtlCol="0" anchor="ctr"/>
-          <a:lstStyle/>
-          <a:p>
-            <a:pPr marL="0" indent="0" algn="ctr">
-              <a:buNone/>
-            </a:pPr>
-            <a:r>
-              <a:rPr lang="en-US" sz="1400" b="1" dirty="0">
-                <a:solidFill>
-                  <a:srgbClr val="FFFFFF"/>
-                </a:solidFill>
-                <a:latin typeface="Cambria" pitchFamily="34" charset="0"/>
-                <a:ea typeface="Cambria" pitchFamily="34" charset="-122"/>
-                <a:cs typeface="Cambria" pitchFamily="34" charset="-120"/>
-              </a:rPr>
-              <a:t>4</a:t>
-            </a:r>
-            <a:endParaRPr lang="en-US" sz="1400" dirty="0"/>
-          </a:p>
-        </p:txBody>
-      </p:sp>
-      <p:pic>
-        <p:nvPicPr>
-          <p:cNvPr id="25" name="Image 4" descr="preencoded.png"/>
-          <p:cNvPicPr>
-            <a:picLocks noChangeAspect="1"/>
-          </p:cNvPicPr>
-          <p:nvPr/>
-        </p:nvPicPr>
-        <p:blipFill>
-          <a:blip r:embed="rId7"/>
-          <a:stretch>
-            <a:fillRect/>
-          </a:stretch>
-        </p:blipFill>
-        <p:spPr>
-          <a:xfrm>
-            <a:off x="1143000" y="3886200"/>
-            <a:ext cx="310896" cy="310896"/>
-          </a:xfrm>
-          <a:prstGeom prst="rect">
-            <a:avLst/>
-          </a:prstGeom>
-        </p:spPr>
-      </p:pic>
-      <p:sp>
-        <p:nvSpPr>
-          <p:cNvPr id="26" name="Text 19"/>
-          <p:cNvSpPr/>
-          <p:nvPr/>
-        </p:nvSpPr>
-        <p:spPr>
-          <a:xfrm>
-            <a:off x="1600200" y="3776472"/>
-            <a:ext cx="4206240" cy="320040"/>
-          </a:xfrm>
-          <a:prstGeom prst="rect">
-            <a:avLst/>
-          </a:prstGeom>
-          <a:noFill/>
-          <a:ln/>
-        </p:spPr>
-        <p:txBody>
-          <a:bodyPr wrap="square" lIns="0" tIns="0" rIns="0" bIns="0" rtlCol="0" anchor="ctr"/>
-          <a:lstStyle/>
-          <a:p>
-            <a:pPr marL="0" indent="0">
-              <a:buNone/>
-            </a:pPr>
-            <a:r>
-              <a:rPr lang="en-US" sz="1350" b="1" dirty="0">
-                <a:solidFill>
-                  <a:srgbClr val="2B2320"/>
-                </a:solidFill>
-                <a:latin typeface="Calibri" pitchFamily="34" charset="0"/>
-                <a:ea typeface="Calibri" pitchFamily="34" charset="-122"/>
-                <a:cs typeface="Calibri" pitchFamily="34" charset="-120"/>
-              </a:rPr>
-              <a:t>Codificación</a:t>
-            </a:r>
-            <a:endParaRPr lang="en-US" sz="1350" dirty="0"/>
-          </a:p>
-        </p:txBody>
-      </p:sp>
-      <p:sp>
-        <p:nvSpPr>
-          <p:cNvPr id="27" name="Text 20"/>
-          <p:cNvSpPr/>
-          <p:nvPr/>
-        </p:nvSpPr>
-        <p:spPr>
-          <a:xfrm>
-            <a:off x="6035040" y="3794760"/>
-            <a:ext cx="5669280" cy="502920"/>
-          </a:xfrm>
-          <a:prstGeom prst="rect">
-            <a:avLst/>
-          </a:prstGeom>
-          <a:noFill/>
-          <a:ln/>
-        </p:spPr>
-        <p:txBody>
-          <a:bodyPr wrap="square" lIns="0" tIns="0" rIns="0" bIns="0" rtlCol="0" anchor="ctr"/>
-          <a:lstStyle/>
-          <a:p>
-            <a:pPr marL="0" indent="0">
-              <a:buNone/>
-            </a:pPr>
-            <a:r>
-              <a:rPr lang="en-US" sz="1200" dirty="0">
-                <a:solidFill>
-                  <a:srgbClr val="7A6F68"/>
-                </a:solidFill>
-                <a:latin typeface="Calibri" pitchFamily="34" charset="0"/>
-                <a:ea typeface="Calibri" pitchFamily="34" charset="-122"/>
-                <a:cs typeface="Calibri" pitchFamily="34" charset="-120"/>
-              </a:rPr>
-              <a:t>Encoders serializados con joblib (mismo espacio de características)</a:t>
-            </a:r>
-            <a:endParaRPr lang="en-US" sz="1200" dirty="0"/>
-          </a:p>
-        </p:txBody>
-      </p:sp>
-      <p:sp>
-        <p:nvSpPr>
-          <p:cNvPr id="28" name="Shape 21"/>
-          <p:cNvSpPr/>
-          <p:nvPr/>
-        </p:nvSpPr>
-        <p:spPr>
-          <a:xfrm>
-            <a:off x="548640" y="4590288"/>
-            <a:ext cx="457200" cy="457200"/>
-          </a:xfrm>
-          <a:prstGeom prst="ellipse">
-            <a:avLst/>
-          </a:prstGeom>
-          <a:solidFill>
-            <a:srgbClr val="B8563A"/>
-          </a:solidFill>
-          <a:ln/>
-        </p:spPr>
-        <p:txBody>
-          <a:bodyPr/>
-          <a:lstStyle/>
-          <a:p>
-            <a:endParaRPr/>
-          </a:p>
-        </p:txBody>
-      </p:sp>
-      <p:sp>
-        <p:nvSpPr>
-          <p:cNvPr id="29" name="Text 22"/>
-          <p:cNvSpPr/>
-          <p:nvPr/>
-        </p:nvSpPr>
-        <p:spPr>
-          <a:xfrm>
-            <a:off x="548640" y="4590288"/>
-            <a:ext cx="457200" cy="457200"/>
-          </a:xfrm>
-          <a:prstGeom prst="rect">
-            <a:avLst/>
-          </a:prstGeom>
-          <a:noFill/>
-          <a:ln/>
-        </p:spPr>
-        <p:txBody>
-          <a:bodyPr wrap="square" lIns="0" tIns="0" rIns="0" bIns="0" rtlCol="0" anchor="ctr"/>
-          <a:lstStyle/>
-          <a:p>
-            <a:pPr marL="0" indent="0" algn="ctr">
-              <a:buNone/>
-            </a:pPr>
-            <a:r>
-              <a:rPr lang="en-US" sz="1400" b="1" dirty="0">
-                <a:solidFill>
-                  <a:srgbClr val="FFFFFF"/>
-                </a:solidFill>
-                <a:latin typeface="Cambria" pitchFamily="34" charset="0"/>
-                <a:ea typeface="Cambria" pitchFamily="34" charset="-122"/>
-                <a:cs typeface="Cambria" pitchFamily="34" charset="-120"/>
-              </a:rPr>
-              <a:t>5</a:t>
-            </a:r>
-            <a:endParaRPr lang="en-US" sz="1400" dirty="0"/>
-          </a:p>
-        </p:txBody>
-      </p:sp>
-      <p:pic>
-        <p:nvPicPr>
-          <p:cNvPr id="30" name="Image 5" descr="preencoded.png"/>
-          <p:cNvPicPr>
-            <a:picLocks noChangeAspect="1"/>
-          </p:cNvPicPr>
-          <p:nvPr/>
-        </p:nvPicPr>
-        <p:blipFill>
-          <a:blip r:embed="rId8"/>
-          <a:stretch>
-            <a:fillRect/>
-          </a:stretch>
-        </p:blipFill>
-        <p:spPr>
-          <a:xfrm>
-            <a:off x="1143000" y="4663440"/>
-            <a:ext cx="310896" cy="310896"/>
-          </a:xfrm>
-          <a:prstGeom prst="rect">
-            <a:avLst/>
-          </a:prstGeom>
-        </p:spPr>
-      </p:pic>
-      <p:sp>
-        <p:nvSpPr>
-          <p:cNvPr id="31" name="Text 23"/>
-          <p:cNvSpPr/>
-          <p:nvPr/>
-        </p:nvSpPr>
-        <p:spPr>
-          <a:xfrm>
-            <a:off x="1600200" y="4553712"/>
-            <a:ext cx="4206240" cy="320040"/>
-          </a:xfrm>
-          <a:prstGeom prst="rect">
-            <a:avLst/>
-          </a:prstGeom>
-          <a:noFill/>
-          <a:ln/>
-        </p:spPr>
-        <p:txBody>
-          <a:bodyPr wrap="square" lIns="0" tIns="0" rIns="0" bIns="0" rtlCol="0" anchor="ctr"/>
-          <a:lstStyle/>
-          <a:p>
-            <a:pPr marL="0" indent="0">
-              <a:buNone/>
-            </a:pPr>
-            <a:r>
-              <a:rPr lang="en-US" sz="1350" b="1" dirty="0">
-                <a:solidFill>
-                  <a:srgbClr val="2B2320"/>
-                </a:solidFill>
-                <a:latin typeface="Calibri" pitchFamily="34" charset="0"/>
-                <a:ea typeface="Calibri" pitchFamily="34" charset="-122"/>
-                <a:cs typeface="Calibri" pitchFamily="34" charset="-120"/>
-              </a:rPr>
-              <a:t>Predicción y categorización</a:t>
-            </a:r>
-            <a:endParaRPr lang="en-US" sz="1350" dirty="0"/>
-          </a:p>
-        </p:txBody>
-      </p:sp>
-      <p:sp>
-        <p:nvSpPr>
-          <p:cNvPr id="32" name="Text 24"/>
-          <p:cNvSpPr/>
-          <p:nvPr/>
-        </p:nvSpPr>
-        <p:spPr>
-          <a:xfrm>
-            <a:off x="6035040" y="4572000"/>
-            <a:ext cx="5669280" cy="502920"/>
-          </a:xfrm>
-          <a:prstGeom prst="rect">
-            <a:avLst/>
-          </a:prstGeom>
-          <a:noFill/>
-          <a:ln/>
-        </p:spPr>
-        <p:txBody>
-          <a:bodyPr wrap="square" lIns="0" tIns="0" rIns="0" bIns="0" rtlCol="0" anchor="ctr"/>
-          <a:lstStyle/>
-          <a:p>
-            <a:pPr marL="0" indent="0">
-              <a:buNone/>
-            </a:pPr>
-            <a:r>
-              <a:rPr lang="en-US" sz="1200" dirty="0">
-                <a:solidFill>
-                  <a:srgbClr val="7A6F68"/>
-                </a:solidFill>
-                <a:latin typeface="Calibri" pitchFamily="34" charset="0"/>
-                <a:ea typeface="Calibri" pitchFamily="34" charset="-122"/>
-                <a:cs typeface="Calibri" pitchFamily="34" charset="-120"/>
-              </a:rPr>
-              <a:t>Modelo podado + ratio r + umbrales del nivel elegido</a:t>
-            </a:r>
-            <a:endParaRPr lang="en-US" sz="1200" dirty="0"/>
-          </a:p>
-        </p:txBody>
-      </p:sp>
-      <p:sp>
-        <p:nvSpPr>
-          <p:cNvPr id="33" name="Shape 25"/>
-          <p:cNvSpPr/>
-          <p:nvPr/>
-        </p:nvSpPr>
-        <p:spPr>
-          <a:xfrm>
-            <a:off x="548640" y="5367528"/>
-            <a:ext cx="457200" cy="457200"/>
-          </a:xfrm>
-          <a:prstGeom prst="ellipse">
-            <a:avLst/>
-          </a:prstGeom>
-          <a:solidFill>
-            <a:srgbClr val="3B6E77"/>
-          </a:solidFill>
-          <a:ln/>
-        </p:spPr>
-        <p:txBody>
-          <a:bodyPr/>
-          <a:lstStyle/>
-          <a:p>
-            <a:endParaRPr/>
-          </a:p>
-        </p:txBody>
-      </p:sp>
-      <p:sp>
-        <p:nvSpPr>
-          <p:cNvPr id="34" name="Text 26"/>
-          <p:cNvSpPr/>
-          <p:nvPr/>
-        </p:nvSpPr>
-        <p:spPr>
-          <a:xfrm>
-            <a:off x="548640" y="5367528"/>
-            <a:ext cx="457200" cy="457200"/>
-          </a:xfrm>
-          <a:prstGeom prst="rect">
-            <a:avLst/>
-          </a:prstGeom>
-          <a:noFill/>
-          <a:ln/>
-        </p:spPr>
-        <p:txBody>
-          <a:bodyPr wrap="square" lIns="0" tIns="0" rIns="0" bIns="0" rtlCol="0" anchor="ctr"/>
-          <a:lstStyle/>
-          <a:p>
-            <a:pPr marL="0" indent="0" algn="ctr">
-              <a:buNone/>
-            </a:pPr>
-            <a:r>
-              <a:rPr lang="en-US" sz="1400" b="1" dirty="0">
-                <a:solidFill>
-                  <a:srgbClr val="FFFFFF"/>
-                </a:solidFill>
-                <a:latin typeface="Cambria" pitchFamily="34" charset="0"/>
-                <a:ea typeface="Cambria" pitchFamily="34" charset="-122"/>
-                <a:cs typeface="Cambria" pitchFamily="34" charset="-120"/>
-              </a:rPr>
-              <a:t>6</a:t>
-            </a:r>
-            <a:endParaRPr lang="en-US" sz="1400" dirty="0"/>
-          </a:p>
-        </p:txBody>
-      </p:sp>
-      <p:pic>
-        <p:nvPicPr>
-          <p:cNvPr id="35" name="Image 6" descr="preencoded.png"/>
-          <p:cNvPicPr>
-            <a:picLocks noChangeAspect="1"/>
-          </p:cNvPicPr>
-          <p:nvPr/>
-        </p:nvPicPr>
-        <p:blipFill>
-          <a:blip r:embed="rId9"/>
-          <a:stretch>
-            <a:fillRect/>
-          </a:stretch>
-        </p:blipFill>
-        <p:spPr>
-          <a:xfrm>
-            <a:off x="1143000" y="5440680"/>
-            <a:ext cx="310896" cy="310896"/>
-          </a:xfrm>
-          <a:prstGeom prst="rect">
-            <a:avLst/>
-          </a:prstGeom>
-        </p:spPr>
-      </p:pic>
-      <p:sp>
-        <p:nvSpPr>
-          <p:cNvPr id="36" name="Text 27"/>
-          <p:cNvSpPr/>
-          <p:nvPr/>
-        </p:nvSpPr>
-        <p:spPr>
-          <a:xfrm>
-            <a:off x="1600200" y="5330952"/>
-            <a:ext cx="4206240" cy="320040"/>
-          </a:xfrm>
-          <a:prstGeom prst="rect">
-            <a:avLst/>
-          </a:prstGeom>
-          <a:noFill/>
-          <a:ln/>
-        </p:spPr>
-        <p:txBody>
-          <a:bodyPr wrap="square" lIns="0" tIns="0" rIns="0" bIns="0" rtlCol="0" anchor="ctr"/>
-          <a:lstStyle/>
-          <a:p>
-            <a:pPr marL="0" indent="0">
-              <a:buNone/>
-            </a:pPr>
-            <a:r>
-              <a:rPr lang="en-US" sz="1350" b="1" dirty="0">
-                <a:solidFill>
-                  <a:srgbClr val="2B2320"/>
-                </a:solidFill>
-                <a:latin typeface="Calibri" pitchFamily="34" charset="0"/>
-                <a:ea typeface="Calibri" pitchFamily="34" charset="-122"/>
-                <a:cs typeface="Calibri" pitchFamily="34" charset="-120"/>
-              </a:rPr>
-              <a:t>Presentación de resultados</a:t>
-            </a:r>
-            <a:endParaRPr lang="en-US" sz="1350" dirty="0"/>
-          </a:p>
-        </p:txBody>
-      </p:sp>
-      <p:sp>
-        <p:nvSpPr>
-          <p:cNvPr id="37" name="Text 28"/>
-          <p:cNvSpPr/>
-          <p:nvPr/>
-        </p:nvSpPr>
-        <p:spPr>
-          <a:xfrm>
-            <a:off x="6035040" y="5349240"/>
-            <a:ext cx="5669280" cy="502920"/>
-          </a:xfrm>
-          <a:prstGeom prst="rect">
-            <a:avLst/>
-          </a:prstGeom>
-          <a:noFill/>
-          <a:ln/>
-        </p:spPr>
-        <p:txBody>
-          <a:bodyPr wrap="square" lIns="0" tIns="0" rIns="0" bIns="0" rtlCol="0" anchor="ctr"/>
-          <a:lstStyle/>
-          <a:p>
-            <a:pPr marL="0" indent="0">
-              <a:buNone/>
-            </a:pPr>
-            <a:r>
-              <a:rPr lang="en-US" sz="1200" dirty="0">
-                <a:solidFill>
-                  <a:srgbClr val="7A6F68"/>
-                </a:solidFill>
-                <a:latin typeface="Calibri" pitchFamily="34" charset="0"/>
-                <a:ea typeface="Calibri" pitchFamily="34" charset="-122"/>
-                <a:cs typeface="Calibri" pitchFamily="34" charset="-120"/>
-              </a:rPr>
-              <a:t>Tabla ordenada por ahorro y gráfico de categorías</a:t>
-            </a:r>
-            <a:endParaRPr lang="en-US" sz="1200" dirty="0"/>
-          </a:p>
-        </p:txBody>
-      </p:sp>
-    </p:spTree>
-  </p:cSld>
-  <p:clrMapOvr>
-    <a:masterClrMapping/>
-  </p:clrMapOvr>
-</p:sld>
-</file>
-
-<file path=ppt/slides/slide21.xml><?xml version="1.0" encoding="utf-8"?>
 <p:sld xmlns:a="http://schemas.openxmlformats.org/drawingml/2006/main" xmlns:r="http://schemas.openxmlformats.org/officeDocument/2006/relationships" xmlns:p="http://schemas.openxmlformats.org/presentationml/2006/main">
   <p:cSld name="Slide 20">
     <p:bg>
@@ -21188,7 +19407,7 @@
                 <a:ea typeface="Calibri" pitchFamily="34" charset="-122"/>
                 <a:cs typeface="Calibri" pitchFamily="34" charset="-120"/>
               </a:rPr>
-              <a:t>21 / 24</a:t>
+              <a:t>20 / 23</a:t>
             </a:r>
             <a:endParaRPr lang="en-US" sz="900" dirty="0"/>
           </a:p>
@@ -23524,7 +21743,7 @@
 </p:sld>
 </file>
 
-<file path=ppt/slides/slide22.xml><?xml version="1.0" encoding="utf-8"?>
+<file path=ppt/slides/slide21.xml><?xml version="1.0" encoding="utf-8"?>
 <p:sld xmlns:a="http://schemas.openxmlformats.org/drawingml/2006/main" xmlns:r="http://schemas.openxmlformats.org/officeDocument/2006/relationships" xmlns:p="http://schemas.openxmlformats.org/presentationml/2006/main">
   <p:cSld name="Slide 21">
     <p:bg>
@@ -23621,7 +21840,7 @@
                 <a:ea typeface="Calibri" pitchFamily="34" charset="-122"/>
                 <a:cs typeface="Calibri" pitchFamily="34" charset="-120"/>
               </a:rPr>
-              <a:t>22 / 24</a:t>
+              <a:t>21 / 23</a:t>
             </a:r>
             <a:endParaRPr lang="en-US" sz="900" dirty="0"/>
           </a:p>
@@ -24424,7 +22643,7 @@
 </p:sld>
 </file>
 
-<file path=ppt/slides/slide23.xml><?xml version="1.0" encoding="utf-8"?>
+<file path=ppt/slides/slide22.xml><?xml version="1.0" encoding="utf-8"?>
 <p:sld xmlns:a="http://schemas.openxmlformats.org/drawingml/2006/main" xmlns:r="http://schemas.openxmlformats.org/officeDocument/2006/relationships" xmlns:p="http://schemas.openxmlformats.org/presentationml/2006/main">
   <p:cSld name="Slide 22">
     <p:bg>
@@ -24521,7 +22740,7 @@
                 <a:ea typeface="Calibri" pitchFamily="34" charset="-122"/>
                 <a:cs typeface="Calibri" pitchFamily="34" charset="-120"/>
               </a:rPr>
-              <a:t>23 / 24</a:t>
+              <a:t>22 / 23</a:t>
             </a:r>
             <a:endParaRPr lang="en-US" sz="900" dirty="0"/>
           </a:p>
@@ -25309,7 +23528,7 @@
 </p:sld>
 </file>
 
-<file path=ppt/slides/slide24.xml><?xml version="1.0" encoding="utf-8"?>
+<file path=ppt/slides/slide23.xml><?xml version="1.0" encoding="utf-8"?>
 <p:sld xmlns:a="http://schemas.openxmlformats.org/drawingml/2006/main" xmlns:r="http://schemas.openxmlformats.org/officeDocument/2006/relationships" xmlns:p="http://schemas.openxmlformats.org/presentationml/2006/main">
   <p:cSld name="Slide 23">
     <p:bg>
@@ -25872,7 +24091,7 @@
                 <a:ea typeface="Calibri" pitchFamily="34" charset="-122"/>
                 <a:cs typeface="Calibri" pitchFamily="34" charset="-120"/>
               </a:rPr>
-              <a:t>3 / 24</a:t>
+              <a:t>3 / 23</a:t>
             </a:r>
             <a:endParaRPr lang="en-US" sz="900" dirty="0"/>
           </a:p>
@@ -26451,7 +24670,7 @@
                 <a:ea typeface="Calibri" pitchFamily="34" charset="-122"/>
                 <a:cs typeface="Calibri" pitchFamily="34" charset="-120"/>
               </a:rPr>
-              <a:t>4 / 24</a:t>
+              <a:t>4 / 23</a:t>
             </a:r>
             <a:endParaRPr lang="en-US" sz="900" dirty="0"/>
           </a:p>
@@ -26677,20 +24896,56 @@
       </p:sp>
       <p:sp>
         <p:nvSpPr>
-          <p:cNvPr id="10" name="Shape 7"/>
-          <p:cNvSpPr/>
-          <p:nvPr/>
-        </p:nvSpPr>
-        <p:spPr>
-          <a:xfrm>
-            <a:off x="548640" y="2606040"/>
-            <a:ext cx="457200" cy="457200"/>
+          <p:cNvPr id="44" name="Shape 5"/>
+          <p:cNvSpPr/>
+          <p:nvPr/>
+        </p:nvSpPr>
+        <p:spPr>
+          <a:xfrm>
+            <a:off x="777240" y="2665217"/>
+            <a:ext cx="1572768" cy="2119165"/>
+          </a:xfrm>
+          <a:prstGeom prst="roundRect">
+            <a:avLst>
+              <a:gd name="adj" fmla="val 4651"/>
+            </a:avLst>
+          </a:prstGeom>
+          <a:solidFill>
+            <a:srgbClr val="FFFFFF"/>
+          </a:solidFill>
+          <a:ln/>
+          <a:effectLst>
+            <a:outerShdw blurRad="101600" dist="38100" dir="5400000" algn="bl" rotWithShape="0">
+              <a:srgbClr val="000000">
+                <a:alpha val="10000"/>
+              </a:srgbClr>
+            </a:outerShdw>
+          </a:effectLst>
+        </p:spPr>
+        <p:txBody>
+          <a:bodyPr/>
+          <a:lstStyle/>
+          <a:p>
+            <a:endParaRPr/>
+          </a:p>
+        </p:txBody>
+      </p:sp>
+      <p:sp>
+        <p:nvSpPr>
+          <p:cNvPr id="45" name="Shape 6"/>
+          <p:cNvSpPr/>
+          <p:nvPr/>
+        </p:nvSpPr>
+        <p:spPr>
+          <a:xfrm>
+            <a:off x="1307592" y="2829809"/>
+            <a:ext cx="512064" cy="512064"/>
           </a:xfrm>
           <a:prstGeom prst="ellipse">
             <a:avLst/>
           </a:prstGeom>
           <a:solidFill>
-            <a:srgbClr val="3B6E77"/>
+            <a:srgbClr val="B8563A"/>
           </a:solidFill>
           <a:ln/>
         </p:spPr>
@@ -26704,7 +24959,7 @@
       </p:sp>
       <p:pic>
         <p:nvPicPr>
-          <p:cNvPr id="11" name="Image 1" descr="preencoded.png"/>
+          <p:cNvPr id="10" name="Picture 9" descr="image.png"/>
           <p:cNvPicPr>
             <a:picLocks noChangeAspect="1"/>
           </p:cNvPicPr>
@@ -26718,8 +24973,8 @@
         </p:blipFill>
         <p:spPr>
           <a:xfrm>
-            <a:off x="649224" y="2706624"/>
-            <a:ext cx="256032" cy="256032"/>
+            <a:off x="1408176" y="2930393"/>
+            <a:ext cx="310896" cy="310896"/>
           </a:xfrm>
           <a:prstGeom prst="rect">
             <a:avLst/>
@@ -26728,14 +24983,14 @@
       </p:pic>
       <p:sp>
         <p:nvSpPr>
-          <p:cNvPr id="12" name="Text 8"/>
-          <p:cNvSpPr/>
-          <p:nvPr/>
-        </p:nvSpPr>
-        <p:spPr>
-          <a:xfrm>
-            <a:off x="1234440" y="2578608"/>
-            <a:ext cx="4709160" cy="292608"/>
+          <p:cNvPr id="11" name="Text 7"/>
+          <p:cNvSpPr/>
+          <p:nvPr/>
+        </p:nvSpPr>
+        <p:spPr>
+          <a:xfrm>
+            <a:off x="850392" y="3442457"/>
+            <a:ext cx="1426464" cy="1234440"/>
           </a:xfrm>
           <a:prstGeom prst="rect">
             <a:avLst/>
@@ -26744,14 +24999,14 @@
           <a:ln/>
         </p:spPr>
         <p:txBody>
-          <a:bodyPr wrap="square" lIns="0" tIns="0" rIns="0" bIns="0" rtlCol="0" anchor="ctr"/>
-          <a:lstStyle/>
-          <a:p>
-            <a:pPr marL="0" indent="0">
+          <a:bodyPr wrap="square" lIns="0" tIns="0" rIns="0" bIns="0" rtlCol="0" anchor="t"/>
+          <a:lstStyle/>
+          <a:p>
+            <a:pPr marL="0" indent="0" algn="ctr">
               <a:buNone/>
             </a:pPr>
             <a:r>
-              <a:rPr lang="en-US" sz="1450" b="1" dirty="0">
+              <a:rPr lang="en-US" sz="1150" b="1" dirty="0">
                 <a:solidFill>
                   <a:srgbClr val="2B2320"/>
                 </a:solidFill>
@@ -26759,38 +25014,55 @@
                 <a:ea typeface="Calibri" pitchFamily="34" charset="-122"/>
                 <a:cs typeface="Calibri" pitchFamily="34" charset="-120"/>
               </a:rPr>
-              <a:t>1. Pipeline de extracción de datos</a:t>
-            </a:r>
-            <a:endParaRPr lang="en-US" sz="1450" dirty="0"/>
-          </a:p>
-        </p:txBody>
-      </p:sp>
-      <p:sp>
-        <p:nvSpPr>
-          <p:cNvPr id="13" name="Text 9"/>
-          <p:cNvSpPr/>
-          <p:nvPr/>
-        </p:nvSpPr>
-        <p:spPr>
-          <a:xfrm>
-            <a:off x="1234440" y="2862072"/>
-            <a:ext cx="4709160" cy="457200"/>
-          </a:xfrm>
-          <a:prstGeom prst="rect">
-            <a:avLst/>
-          </a:prstGeom>
-          <a:noFill/>
-          <a:ln/>
-        </p:spPr>
-        <p:txBody>
-          <a:bodyPr wrap="square" lIns="0" tIns="0" rIns="0" bIns="0" rtlCol="0" anchor="ctr"/>
-          <a:lstStyle/>
-          <a:p>
-            <a:pPr marL="0" indent="0">
+              <a:t>Extracción</a:t>
+            </a:r>
+            <a:endParaRPr lang="en-US" sz="1150" dirty="0"/>
+          </a:p>
+          <a:p>
+            <a:pPr marL="0" indent="0" algn="ctr">
               <a:buNone/>
             </a:pPr>
             <a:r>
-              <a:rPr lang="en-US" sz="1100" dirty="0">
+              <a:rPr lang="en-US" sz="1150" b="1" dirty="0">
+                <a:solidFill>
+                  <a:srgbClr val="2B2320"/>
+                </a:solidFill>
+                <a:latin typeface="Calibri" pitchFamily="34" charset="0"/>
+                <a:ea typeface="Calibri" pitchFamily="34" charset="-122"/>
+                <a:cs typeface="Calibri" pitchFamily="34" charset="-120"/>
+              </a:rPr>
+              <a:t>(Selenium + Playwright)</a:t>
+            </a:r>
+            <a:endParaRPr lang="en-US" sz="1150" dirty="0"/>
+          </a:p>
+        </p:txBody>
+      </p:sp>
+      <p:sp>
+        <p:nvSpPr>
+          <p:cNvPr id="12" name="Text 8"/>
+          <p:cNvSpPr/>
+          <p:nvPr/>
+        </p:nvSpPr>
+        <p:spPr>
+          <a:xfrm>
+            <a:off x="2350008" y="3488177"/>
+            <a:ext cx="224028" cy="457200"/>
+          </a:xfrm>
+          <a:prstGeom prst="rect">
+            <a:avLst/>
+          </a:prstGeom>
+          <a:noFill/>
+          <a:ln/>
+        </p:spPr>
+        <p:txBody>
+          <a:bodyPr wrap="square" lIns="0" tIns="0" rIns="0" bIns="0" rtlCol="0" anchor="ctr"/>
+          <a:lstStyle/>
+          <a:p>
+            <a:pPr marL="0" indent="0" algn="ctr">
+              <a:buNone/>
+            </a:pPr>
+            <a:r>
+              <a:rPr lang="en-US" sz="2000" dirty="0">
                 <a:solidFill>
                   <a:srgbClr val="7A6F68"/>
                 </a:solidFill>
@@ -26798,9 +25070,45 @@
                 <a:ea typeface="Calibri" pitchFamily="34" charset="-122"/>
                 <a:cs typeface="Calibri" pitchFamily="34" charset="-120"/>
               </a:rPr>
-              <a:t>8 provincias andaluzas: precio, tipo, estrellas, valoración, servicios, coordenadas</a:t>
-            </a:r>
-            <a:endParaRPr lang="en-US" sz="1100" dirty="0"/>
+              <a:t>→</a:t>
+            </a:r>
+            <a:endParaRPr lang="en-US" sz="2000" dirty="0"/>
+          </a:p>
+        </p:txBody>
+      </p:sp>
+      <p:sp>
+        <p:nvSpPr>
+          <p:cNvPr id="13" name="Shape 9"/>
+          <p:cNvSpPr/>
+          <p:nvPr/>
+        </p:nvSpPr>
+        <p:spPr>
+          <a:xfrm>
+            <a:off x="2574036" y="2665217"/>
+            <a:ext cx="1572768" cy="2119165"/>
+          </a:xfrm>
+          <a:prstGeom prst="roundRect">
+            <a:avLst>
+              <a:gd name="adj" fmla="val 4651"/>
+            </a:avLst>
+          </a:prstGeom>
+          <a:solidFill>
+            <a:srgbClr val="FFFFFF"/>
+          </a:solidFill>
+          <a:ln/>
+          <a:effectLst>
+            <a:outerShdw blurRad="101600" dist="38100" dir="5400000" algn="bl" rotWithShape="0">
+              <a:srgbClr val="000000">
+                <a:alpha val="10000"/>
+              </a:srgbClr>
+            </a:outerShdw>
+          </a:effectLst>
+        </p:spPr>
+        <p:txBody>
+          <a:bodyPr/>
+          <a:lstStyle/>
+          <a:p>
+            <a:endParaRPr/>
           </a:p>
         </p:txBody>
       </p:sp>
@@ -26812,14 +25120,14 @@
         </p:nvSpPr>
         <p:spPr>
           <a:xfrm>
-            <a:off x="548640" y="3904488"/>
-            <a:ext cx="457200" cy="457200"/>
+            <a:off x="3104388" y="2829809"/>
+            <a:ext cx="512064" cy="512064"/>
           </a:xfrm>
           <a:prstGeom prst="ellipse">
             <a:avLst/>
           </a:prstGeom>
           <a:solidFill>
-            <a:srgbClr val="3B6E77"/>
+            <a:srgbClr val="B8563A"/>
           </a:solidFill>
           <a:ln/>
         </p:spPr>
@@ -26833,7 +25141,7 @@
       </p:sp>
       <p:pic>
         <p:nvPicPr>
-          <p:cNvPr id="15" name="Image 2" descr="preencoded.png"/>
+          <p:cNvPr id="15" name="Picture 14" descr="image.png"/>
           <p:cNvPicPr>
             <a:picLocks noChangeAspect="1"/>
           </p:cNvPicPr>
@@ -26847,8 +25155,8 @@
         </p:blipFill>
         <p:spPr>
           <a:xfrm>
-            <a:off x="649224" y="4005072"/>
-            <a:ext cx="256032" cy="256032"/>
+            <a:off x="3204972" y="2930393"/>
+            <a:ext cx="310896" cy="310896"/>
           </a:xfrm>
           <a:prstGeom prst="rect">
             <a:avLst/>
@@ -26863,8 +25171,8 @@
         </p:nvSpPr>
         <p:spPr>
           <a:xfrm>
-            <a:off x="1234440" y="3877056"/>
-            <a:ext cx="4709160" cy="292608"/>
+            <a:off x="2647188" y="3442457"/>
+            <a:ext cx="1426464" cy="1234440"/>
           </a:xfrm>
           <a:prstGeom prst="rect">
             <a:avLst/>
@@ -26873,14 +25181,14 @@
           <a:ln/>
         </p:spPr>
         <p:txBody>
-          <a:bodyPr wrap="square" lIns="0" tIns="0" rIns="0" bIns="0" rtlCol="0" anchor="ctr"/>
-          <a:lstStyle/>
-          <a:p>
-            <a:pPr marL="0" indent="0">
+          <a:bodyPr wrap="square" lIns="0" tIns="0" rIns="0" bIns="0" rtlCol="0" anchor="t"/>
+          <a:lstStyle/>
+          <a:p>
+            <a:pPr marL="0" indent="0" algn="ctr">
               <a:buNone/>
             </a:pPr>
             <a:r>
-              <a:rPr lang="en-US" sz="1450" b="1" dirty="0">
+              <a:rPr lang="en-US" sz="1150" b="1" dirty="0">
                 <a:solidFill>
                   <a:srgbClr val="2B2320"/>
                 </a:solidFill>
@@ -26888,9 +25196,9 @@
                 <a:ea typeface="Calibri" pitchFamily="34" charset="-122"/>
                 <a:cs typeface="Calibri" pitchFamily="34" charset="-120"/>
               </a:rPr>
-              <a:t>2. Preprocesamiento y limpieza robusta</a:t>
-            </a:r>
-            <a:endParaRPr lang="en-US" sz="1450" dirty="0"/>
+              <a:t>Preprocesamiento</a:t>
+            </a:r>
+            <a:endParaRPr lang="en-US" sz="1150" dirty="0"/>
           </a:p>
         </p:txBody>
       </p:sp>
@@ -26902,8 +25210,8 @@
         </p:nvSpPr>
         <p:spPr>
           <a:xfrm>
-            <a:off x="1234440" y="4160520"/>
-            <a:ext cx="4709160" cy="457200"/>
+            <a:off x="4146804" y="3488177"/>
+            <a:ext cx="224028" cy="457200"/>
           </a:xfrm>
           <a:prstGeom prst="rect">
             <a:avLst/>
@@ -26915,11 +25223,11 @@
           <a:bodyPr wrap="square" lIns="0" tIns="0" rIns="0" bIns="0" rtlCol="0" anchor="ctr"/>
           <a:lstStyle/>
           <a:p>
-            <a:pPr marL="0" indent="0">
+            <a:pPr marL="0" indent="0" algn="ctr">
               <a:buNone/>
             </a:pPr>
             <a:r>
-              <a:rPr lang="en-US" sz="1100" dirty="0">
+              <a:rPr lang="en-US" sz="2000" dirty="0">
                 <a:solidFill>
                   <a:srgbClr val="7A6F68"/>
                 </a:solidFill>
@@ -26927,9 +25235,9 @@
                 <a:ea typeface="Calibri" pitchFamily="34" charset="-122"/>
                 <a:cs typeface="Calibri" pitchFamily="34" charset="-120"/>
               </a:rPr>
-              <a:t>Nulos, valores atípicos, extracción de servicios y variables derivadas</a:t>
-            </a:r>
-            <a:endParaRPr lang="en-US" sz="1100" dirty="0"/>
+              <a:t>→</a:t>
+            </a:r>
+            <a:endParaRPr lang="en-US" sz="2000" dirty="0"/>
           </a:p>
         </p:txBody>
       </p:sp>
@@ -26941,14 +25249,50 @@
         </p:nvSpPr>
         <p:spPr>
           <a:xfrm>
-            <a:off x="548640" y="5202936"/>
-            <a:ext cx="457200" cy="457200"/>
+            <a:off x="4370832" y="2665217"/>
+            <a:ext cx="1572768" cy="2119165"/>
+          </a:xfrm>
+          <a:prstGeom prst="roundRect">
+            <a:avLst>
+              <a:gd name="adj" fmla="val 4651"/>
+            </a:avLst>
+          </a:prstGeom>
+          <a:solidFill>
+            <a:srgbClr val="FFFFFF"/>
+          </a:solidFill>
+          <a:ln/>
+          <a:effectLst>
+            <a:outerShdw blurRad="101600" dist="38100" dir="5400000" algn="bl" rotWithShape="0">
+              <a:srgbClr val="000000">
+                <a:alpha val="10000"/>
+              </a:srgbClr>
+            </a:outerShdw>
+          </a:effectLst>
+        </p:spPr>
+        <p:txBody>
+          <a:bodyPr/>
+          <a:lstStyle/>
+          <a:p>
+            <a:endParaRPr/>
+          </a:p>
+        </p:txBody>
+      </p:sp>
+      <p:sp>
+        <p:nvSpPr>
+          <p:cNvPr id="19" name="Shape 14"/>
+          <p:cNvSpPr/>
+          <p:nvPr/>
+        </p:nvSpPr>
+        <p:spPr>
+          <a:xfrm>
+            <a:off x="4901184" y="2829809"/>
+            <a:ext cx="512064" cy="512064"/>
           </a:xfrm>
           <a:prstGeom prst="ellipse">
             <a:avLst/>
           </a:prstGeom>
           <a:solidFill>
-            <a:srgbClr val="3B6E77"/>
+            <a:srgbClr val="B8563A"/>
           </a:solidFill>
           <a:ln/>
         </p:spPr>
@@ -26962,7 +25306,7 @@
       </p:sp>
       <p:pic>
         <p:nvPicPr>
-          <p:cNvPr id="19" name="Image 3" descr="preencoded.png"/>
+          <p:cNvPr id="20" name="Picture 19" descr="image.png"/>
           <p:cNvPicPr>
             <a:picLocks noChangeAspect="1"/>
           </p:cNvPicPr>
@@ -26976,8 +25320,8 @@
         </p:blipFill>
         <p:spPr>
           <a:xfrm>
-            <a:off x="649224" y="5303520"/>
-            <a:ext cx="256032" cy="256032"/>
+            <a:off x="5001768" y="2930393"/>
+            <a:ext cx="310896" cy="310896"/>
           </a:xfrm>
           <a:prstGeom prst="rect">
             <a:avLst/>
@@ -26986,14 +25330,14 @@
       </p:pic>
       <p:sp>
         <p:nvSpPr>
-          <p:cNvPr id="20" name="Text 14"/>
-          <p:cNvSpPr/>
-          <p:nvPr/>
-        </p:nvSpPr>
-        <p:spPr>
-          <a:xfrm>
-            <a:off x="1234440" y="5175504"/>
-            <a:ext cx="4709160" cy="292608"/>
+          <p:cNvPr id="21" name="Text 15"/>
+          <p:cNvSpPr/>
+          <p:nvPr/>
+        </p:nvSpPr>
+        <p:spPr>
+          <a:xfrm>
+            <a:off x="4443984" y="3442457"/>
+            <a:ext cx="1426464" cy="1234440"/>
           </a:xfrm>
           <a:prstGeom prst="rect">
             <a:avLst/>
@@ -27002,14 +25346,14 @@
           <a:ln/>
         </p:spPr>
         <p:txBody>
-          <a:bodyPr wrap="square" lIns="0" tIns="0" rIns="0" bIns="0" rtlCol="0" anchor="ctr"/>
-          <a:lstStyle/>
-          <a:p>
-            <a:pPr marL="0" indent="0">
+          <a:bodyPr wrap="square" lIns="0" tIns="0" rIns="0" bIns="0" rtlCol="0" anchor="t"/>
+          <a:lstStyle/>
+          <a:p>
+            <a:pPr marL="0" indent="0" algn="ctr">
               <a:buNone/>
             </a:pPr>
             <a:r>
-              <a:rPr lang="en-US" sz="1450" b="1" dirty="0">
+              <a:rPr lang="en-US" sz="1150" b="1" dirty="0">
                 <a:solidFill>
                   <a:srgbClr val="2B2320"/>
                 </a:solidFill>
@@ -27017,38 +25361,55 @@
                 <a:ea typeface="Calibri" pitchFamily="34" charset="-122"/>
                 <a:cs typeface="Calibri" pitchFamily="34" charset="-120"/>
               </a:rPr>
-              <a:t>3. Entrenar y comparar 4 modelos de regresión</a:t>
-            </a:r>
-            <a:endParaRPr lang="en-US" sz="1450" dirty="0"/>
-          </a:p>
-        </p:txBody>
-      </p:sp>
-      <p:sp>
-        <p:nvSpPr>
-          <p:cNvPr id="21" name="Text 15"/>
-          <p:cNvSpPr/>
-          <p:nvPr/>
-        </p:nvSpPr>
-        <p:spPr>
-          <a:xfrm>
-            <a:off x="1234440" y="5458968"/>
-            <a:ext cx="4709160" cy="457200"/>
-          </a:xfrm>
-          <a:prstGeom prst="rect">
-            <a:avLst/>
-          </a:prstGeom>
-          <a:noFill/>
-          <a:ln/>
-        </p:spPr>
-        <p:txBody>
-          <a:bodyPr wrap="square" lIns="0" tIns="0" rIns="0" bIns="0" rtlCol="0" anchor="ctr"/>
-          <a:lstStyle/>
-          <a:p>
-            <a:pPr marL="0" indent="0">
+              <a:t>Ingeniería de</a:t>
+            </a:r>
+            <a:endParaRPr lang="en-US" sz="1150" dirty="0"/>
+          </a:p>
+          <a:p>
+            <a:pPr marL="0" indent="0" algn="ctr">
               <a:buNone/>
             </a:pPr>
             <a:r>
-              <a:rPr lang="en-US" sz="1100" dirty="0">
+              <a:rPr lang="en-US" sz="1150" b="1" dirty="0">
+                <a:solidFill>
+                  <a:srgbClr val="2B2320"/>
+                </a:solidFill>
+                <a:latin typeface="Calibri" pitchFamily="34" charset="0"/>
+                <a:ea typeface="Calibri" pitchFamily="34" charset="-122"/>
+                <a:cs typeface="Calibri" pitchFamily="34" charset="-120"/>
+              </a:rPr>
+              <a:t>características</a:t>
+            </a:r>
+            <a:endParaRPr lang="en-US" sz="1150" dirty="0"/>
+          </a:p>
+        </p:txBody>
+      </p:sp>
+      <p:sp>
+        <p:nvSpPr>
+          <p:cNvPr id="22" name="Text 16"/>
+          <p:cNvSpPr/>
+          <p:nvPr/>
+        </p:nvSpPr>
+        <p:spPr>
+          <a:xfrm>
+            <a:off x="5943600" y="3488177"/>
+            <a:ext cx="224028" cy="457200"/>
+          </a:xfrm>
+          <a:prstGeom prst="rect">
+            <a:avLst/>
+          </a:prstGeom>
+          <a:noFill/>
+          <a:ln/>
+        </p:spPr>
+        <p:txBody>
+          <a:bodyPr wrap="square" lIns="0" tIns="0" rIns="0" bIns="0" rtlCol="0" anchor="ctr"/>
+          <a:lstStyle/>
+          <a:p>
+            <a:pPr marL="0" indent="0" algn="ctr">
+              <a:buNone/>
+            </a:pPr>
+            <a:r>
+              <a:rPr lang="en-US" sz="2000" dirty="0">
                 <a:solidFill>
                   <a:srgbClr val="7A6F68"/>
                 </a:solidFill>
@@ -27056,28 +25417,64 @@
                 <a:ea typeface="Calibri" pitchFamily="34" charset="-122"/>
                 <a:cs typeface="Calibri" pitchFamily="34" charset="-120"/>
               </a:rPr>
-              <a:t>Selección del mejor mediante validación cruzada y conjunto de prueba</a:t>
-            </a:r>
-            <a:endParaRPr lang="en-US" sz="1100" dirty="0"/>
-          </a:p>
-        </p:txBody>
-      </p:sp>
-      <p:sp>
-        <p:nvSpPr>
-          <p:cNvPr id="22" name="Shape 16"/>
-          <p:cNvSpPr/>
-          <p:nvPr/>
-        </p:nvSpPr>
-        <p:spPr>
-          <a:xfrm>
-            <a:off x="6172200" y="2606040"/>
-            <a:ext cx="457200" cy="457200"/>
+              <a:t>→</a:t>
+            </a:r>
+            <a:endParaRPr lang="en-US" sz="2000" dirty="0"/>
+          </a:p>
+        </p:txBody>
+      </p:sp>
+      <p:sp>
+        <p:nvSpPr>
+          <p:cNvPr id="23" name="Shape 17"/>
+          <p:cNvSpPr/>
+          <p:nvPr/>
+        </p:nvSpPr>
+        <p:spPr>
+          <a:xfrm>
+            <a:off x="6167628" y="2665217"/>
+            <a:ext cx="1572768" cy="2121738"/>
+          </a:xfrm>
+          <a:prstGeom prst="roundRect">
+            <a:avLst>
+              <a:gd name="adj" fmla="val 4651"/>
+            </a:avLst>
+          </a:prstGeom>
+          <a:solidFill>
+            <a:srgbClr val="FFFFFF"/>
+          </a:solidFill>
+          <a:ln/>
+          <a:effectLst>
+            <a:outerShdw blurRad="101600" dist="38100" dir="5400000" algn="bl" rotWithShape="0">
+              <a:srgbClr val="000000">
+                <a:alpha val="10000"/>
+              </a:srgbClr>
+            </a:outerShdw>
+          </a:effectLst>
+        </p:spPr>
+        <p:txBody>
+          <a:bodyPr/>
+          <a:lstStyle/>
+          <a:p>
+            <a:endParaRPr/>
+          </a:p>
+        </p:txBody>
+      </p:sp>
+      <p:sp>
+        <p:nvSpPr>
+          <p:cNvPr id="24" name="Shape 18"/>
+          <p:cNvSpPr/>
+          <p:nvPr/>
+        </p:nvSpPr>
+        <p:spPr>
+          <a:xfrm>
+            <a:off x="6697980" y="2829809"/>
+            <a:ext cx="512064" cy="512064"/>
           </a:xfrm>
           <a:prstGeom prst="ellipse">
             <a:avLst/>
           </a:prstGeom>
           <a:solidFill>
-            <a:srgbClr val="3B6E77"/>
+            <a:srgbClr val="B8563A"/>
           </a:solidFill>
           <a:ln/>
         </p:spPr>
@@ -27091,7 +25488,7 @@
       </p:sp>
       <p:pic>
         <p:nvPicPr>
-          <p:cNvPr id="23" name="Image 4" descr="preencoded.png"/>
+          <p:cNvPr id="25" name="Picture 24" descr="image.png"/>
           <p:cNvPicPr>
             <a:picLocks noChangeAspect="1"/>
           </p:cNvPicPr>
@@ -27105,8 +25502,8 @@
         </p:blipFill>
         <p:spPr>
           <a:xfrm>
-            <a:off x="6272784" y="2706624"/>
-            <a:ext cx="256032" cy="256032"/>
+            <a:off x="6798564" y="2930393"/>
+            <a:ext cx="310896" cy="310896"/>
           </a:xfrm>
           <a:prstGeom prst="rect">
             <a:avLst/>
@@ -27115,14 +25512,14 @@
       </p:pic>
       <p:sp>
         <p:nvSpPr>
-          <p:cNvPr id="24" name="Text 17"/>
-          <p:cNvSpPr/>
-          <p:nvPr/>
-        </p:nvSpPr>
-        <p:spPr>
-          <a:xfrm>
-            <a:off x="6858000" y="2578608"/>
-            <a:ext cx="4709160" cy="292608"/>
+          <p:cNvPr id="26" name="Text 19"/>
+          <p:cNvSpPr/>
+          <p:nvPr/>
+        </p:nvSpPr>
+        <p:spPr>
+          <a:xfrm>
+            <a:off x="6240780" y="3442457"/>
+            <a:ext cx="1426464" cy="1234440"/>
           </a:xfrm>
           <a:prstGeom prst="rect">
             <a:avLst/>
@@ -27131,14 +25528,14 @@
           <a:ln/>
         </p:spPr>
         <p:txBody>
-          <a:bodyPr wrap="square" lIns="0" tIns="0" rIns="0" bIns="0" rtlCol="0" anchor="ctr"/>
-          <a:lstStyle/>
-          <a:p>
-            <a:pPr marL="0" indent="0">
+          <a:bodyPr wrap="square" lIns="0" tIns="0" rIns="0" bIns="0" rtlCol="0" anchor="t"/>
+          <a:lstStyle/>
+          <a:p>
+            <a:pPr marL="0" indent="0" algn="ctr">
               <a:buNone/>
             </a:pPr>
             <a:r>
-              <a:rPr lang="en-US" sz="1450" b="1" dirty="0">
+              <a:rPr lang="en-US" sz="1150" b="1" dirty="0">
                 <a:solidFill>
                   <a:srgbClr val="2B2320"/>
                 </a:solidFill>
@@ -27146,38 +25543,55 @@
                 <a:ea typeface="Calibri" pitchFamily="34" charset="-122"/>
                 <a:cs typeface="Calibri" pitchFamily="34" charset="-120"/>
               </a:rPr>
-              <a:t>4. Regla determinista de categorización</a:t>
-            </a:r>
-            <a:endParaRPr lang="en-US" sz="1450" dirty="0"/>
-          </a:p>
-        </p:txBody>
-      </p:sp>
-      <p:sp>
-        <p:nvSpPr>
-          <p:cNvPr id="25" name="Text 18"/>
-          <p:cNvSpPr/>
-          <p:nvPr/>
-        </p:nvSpPr>
-        <p:spPr>
-          <a:xfrm>
-            <a:off x="6858000" y="2862072"/>
-            <a:ext cx="4709160" cy="457200"/>
-          </a:xfrm>
-          <a:prstGeom prst="rect">
-            <a:avLst/>
-          </a:prstGeom>
-          <a:noFill/>
-          <a:ln/>
-        </p:spPr>
-        <p:txBody>
-          <a:bodyPr wrap="square" lIns="0" tIns="0" rIns="0" bIns="0" rtlCol="0" anchor="ctr"/>
-          <a:lstStyle/>
-          <a:p>
-            <a:pPr marL="0" indent="0">
+              <a:t>Modelización</a:t>
+            </a:r>
+            <a:endParaRPr lang="en-US" sz="1150" dirty="0"/>
+          </a:p>
+          <a:p>
+            <a:pPr marL="0" indent="0" algn="ctr">
               <a:buNone/>
             </a:pPr>
             <a:r>
-              <a:rPr lang="en-US" sz="1100" dirty="0">
+              <a:rPr lang="en-US" sz="1150" b="1" dirty="0">
+                <a:solidFill>
+                  <a:srgbClr val="2B2320"/>
+                </a:solidFill>
+                <a:latin typeface="Calibri" pitchFamily="34" charset="0"/>
+                <a:ea typeface="Calibri" pitchFamily="34" charset="-122"/>
+                <a:cs typeface="Calibri" pitchFamily="34" charset="-120"/>
+              </a:rPr>
+              <a:t>(4 modelos + CV)</a:t>
+            </a:r>
+            <a:endParaRPr lang="en-US" sz="1150" dirty="0"/>
+          </a:p>
+        </p:txBody>
+      </p:sp>
+      <p:sp>
+        <p:nvSpPr>
+          <p:cNvPr id="27" name="Text 20"/>
+          <p:cNvSpPr/>
+          <p:nvPr/>
+        </p:nvSpPr>
+        <p:spPr>
+          <a:xfrm>
+            <a:off x="7740396" y="3488177"/>
+            <a:ext cx="224028" cy="457200"/>
+          </a:xfrm>
+          <a:prstGeom prst="rect">
+            <a:avLst/>
+          </a:prstGeom>
+          <a:noFill/>
+          <a:ln/>
+        </p:spPr>
+        <p:txBody>
+          <a:bodyPr wrap="square" lIns="0" tIns="0" rIns="0" bIns="0" rtlCol="0" anchor="ctr"/>
+          <a:lstStyle/>
+          <a:p>
+            <a:pPr marL="0" indent="0" algn="ctr">
+              <a:buNone/>
+            </a:pPr>
+            <a:r>
+              <a:rPr lang="en-US" sz="2000" dirty="0">
                 <a:solidFill>
                   <a:srgbClr val="7A6F68"/>
                 </a:solidFill>
@@ -27185,28 +25599,64 @@
                 <a:ea typeface="Calibri" pitchFamily="34" charset="-122"/>
                 <a:cs typeface="Calibri" pitchFamily="34" charset="-120"/>
               </a:rPr>
-              <a:t>A partir del cociente entre precio real y precio predicho</a:t>
-            </a:r>
-            <a:endParaRPr lang="en-US" sz="1100" dirty="0"/>
-          </a:p>
-        </p:txBody>
-      </p:sp>
-      <p:sp>
-        <p:nvSpPr>
-          <p:cNvPr id="26" name="Shape 19"/>
-          <p:cNvSpPr/>
-          <p:nvPr/>
-        </p:nvSpPr>
-        <p:spPr>
-          <a:xfrm>
-            <a:off x="6172200" y="3904488"/>
-            <a:ext cx="457200" cy="457200"/>
+              <a:t>→</a:t>
+            </a:r>
+            <a:endParaRPr lang="en-US" sz="2000" dirty="0"/>
+          </a:p>
+        </p:txBody>
+      </p:sp>
+      <p:sp>
+        <p:nvSpPr>
+          <p:cNvPr id="28" name="Shape 21"/>
+          <p:cNvSpPr/>
+          <p:nvPr/>
+        </p:nvSpPr>
+        <p:spPr>
+          <a:xfrm>
+            <a:off x="7964424" y="2665217"/>
+            <a:ext cx="1572768" cy="2121738"/>
+          </a:xfrm>
+          <a:prstGeom prst="roundRect">
+            <a:avLst>
+              <a:gd name="adj" fmla="val 4651"/>
+            </a:avLst>
+          </a:prstGeom>
+          <a:solidFill>
+            <a:srgbClr val="FFFFFF"/>
+          </a:solidFill>
+          <a:ln/>
+          <a:effectLst>
+            <a:outerShdw blurRad="101600" dist="38100" dir="5400000" algn="bl" rotWithShape="0">
+              <a:srgbClr val="000000">
+                <a:alpha val="10000"/>
+              </a:srgbClr>
+            </a:outerShdw>
+          </a:effectLst>
+        </p:spPr>
+        <p:txBody>
+          <a:bodyPr/>
+          <a:lstStyle/>
+          <a:p>
+            <a:endParaRPr/>
+          </a:p>
+        </p:txBody>
+      </p:sp>
+      <p:sp>
+        <p:nvSpPr>
+          <p:cNvPr id="29" name="Shape 22"/>
+          <p:cNvSpPr/>
+          <p:nvPr/>
+        </p:nvSpPr>
+        <p:spPr>
+          <a:xfrm>
+            <a:off x="8494776" y="2829809"/>
+            <a:ext cx="512064" cy="512064"/>
           </a:xfrm>
           <a:prstGeom prst="ellipse">
             <a:avLst/>
           </a:prstGeom>
           <a:solidFill>
-            <a:srgbClr val="3B6E77"/>
+            <a:srgbClr val="B8563A"/>
           </a:solidFill>
           <a:ln/>
         </p:spPr>
@@ -27220,7 +25670,7 @@
       </p:sp>
       <p:pic>
         <p:nvPicPr>
-          <p:cNvPr id="27" name="Image 5" descr="preencoded.png"/>
+          <p:cNvPr id="30" name="Picture 29" descr="image.png"/>
           <p:cNvPicPr>
             <a:picLocks noChangeAspect="1"/>
           </p:cNvPicPr>
@@ -27234,8 +25684,8 @@
         </p:blipFill>
         <p:spPr>
           <a:xfrm>
-            <a:off x="6272784" y="4005072"/>
-            <a:ext cx="256032" cy="256032"/>
+            <a:off x="8595360" y="2930393"/>
+            <a:ext cx="310896" cy="310896"/>
           </a:xfrm>
           <a:prstGeom prst="rect">
             <a:avLst/>
@@ -27244,14 +25694,14 @@
       </p:pic>
       <p:sp>
         <p:nvSpPr>
-          <p:cNvPr id="28" name="Text 20"/>
-          <p:cNvSpPr/>
-          <p:nvPr/>
-        </p:nvSpPr>
-        <p:spPr>
-          <a:xfrm>
-            <a:off x="6858000" y="3877056"/>
-            <a:ext cx="4709160" cy="292608"/>
+          <p:cNvPr id="31" name="Text 23"/>
+          <p:cNvSpPr/>
+          <p:nvPr/>
+        </p:nvSpPr>
+        <p:spPr>
+          <a:xfrm>
+            <a:off x="8037576" y="3442457"/>
+            <a:ext cx="1426464" cy="1234440"/>
           </a:xfrm>
           <a:prstGeom prst="rect">
             <a:avLst/>
@@ -27260,14 +25710,14 @@
           <a:ln/>
         </p:spPr>
         <p:txBody>
-          <a:bodyPr wrap="square" lIns="0" tIns="0" rIns="0" bIns="0" rtlCol="0" anchor="ctr"/>
-          <a:lstStyle/>
-          <a:p>
-            <a:pPr marL="0" indent="0">
+          <a:bodyPr wrap="square" lIns="0" tIns="0" rIns="0" bIns="0" rtlCol="0" anchor="t"/>
+          <a:lstStyle/>
+          <a:p>
+            <a:pPr marL="0" indent="0" algn="ctr">
               <a:buNone/>
             </a:pPr>
             <a:r>
-              <a:rPr lang="en-US" sz="1450" b="1" dirty="0">
+              <a:rPr lang="en-US" sz="1150" b="1" dirty="0">
                 <a:solidFill>
                   <a:srgbClr val="2B2320"/>
                 </a:solidFill>
@@ -27275,38 +25725,55 @@
                 <a:ea typeface="Calibri" pitchFamily="34" charset="-122"/>
                 <a:cs typeface="Calibri" pitchFamily="34" charset="-120"/>
               </a:rPr>
-              <a:t>5. Aplicación web interactiva end-to-end</a:t>
-            </a:r>
-            <a:endParaRPr lang="en-US" sz="1450" dirty="0"/>
-          </a:p>
-        </p:txBody>
-      </p:sp>
-      <p:sp>
-        <p:nvSpPr>
-          <p:cNvPr id="29" name="Text 21"/>
-          <p:cNvSpPr/>
-          <p:nvPr/>
-        </p:nvSpPr>
-        <p:spPr>
-          <a:xfrm>
-            <a:off x="6858000" y="4160520"/>
-            <a:ext cx="4709160" cy="457200"/>
-          </a:xfrm>
-          <a:prstGeom prst="rect">
-            <a:avLst/>
-          </a:prstGeom>
-          <a:noFill/>
-          <a:ln/>
-        </p:spPr>
-        <p:txBody>
-          <a:bodyPr wrap="square" lIns="0" tIns="0" rIns="0" bIns="0" rtlCol="0" anchor="ctr"/>
-          <a:lstStyle/>
-          <a:p>
-            <a:pPr marL="0" indent="0">
+              <a:t>Categorización</a:t>
+            </a:r>
+            <a:endParaRPr lang="en-US" sz="1150" dirty="0"/>
+          </a:p>
+          <a:p>
+            <a:pPr marL="0" indent="0" algn="ctr">
               <a:buNone/>
             </a:pPr>
             <a:r>
-              <a:rPr lang="en-US" sz="1100" dirty="0">
+              <a:rPr lang="en-US" sz="1150" b="1" dirty="0">
+                <a:solidFill>
+                  <a:srgbClr val="2B2320"/>
+                </a:solidFill>
+                <a:latin typeface="Calibri" pitchFamily="34" charset="0"/>
+                <a:ea typeface="Calibri" pitchFamily="34" charset="-122"/>
+                <a:cs typeface="Calibri" pitchFamily="34" charset="-120"/>
+              </a:rPr>
+              <a:t>determinista</a:t>
+            </a:r>
+            <a:endParaRPr lang="en-US" sz="1150" dirty="0"/>
+          </a:p>
+        </p:txBody>
+      </p:sp>
+      <p:sp>
+        <p:nvSpPr>
+          <p:cNvPr id="32" name="Text 24"/>
+          <p:cNvSpPr/>
+          <p:nvPr/>
+        </p:nvSpPr>
+        <p:spPr>
+          <a:xfrm>
+            <a:off x="9537192" y="3488177"/>
+            <a:ext cx="224028" cy="457200"/>
+          </a:xfrm>
+          <a:prstGeom prst="rect">
+            <a:avLst/>
+          </a:prstGeom>
+          <a:noFill/>
+          <a:ln/>
+        </p:spPr>
+        <p:txBody>
+          <a:bodyPr wrap="square" lIns="0" tIns="0" rIns="0" bIns="0" rtlCol="0" anchor="ctr"/>
+          <a:lstStyle/>
+          <a:p>
+            <a:pPr marL="0" indent="0" algn="ctr">
+              <a:buNone/>
+            </a:pPr>
+            <a:r>
+              <a:rPr lang="en-US" sz="2000" dirty="0">
                 <a:solidFill>
                   <a:srgbClr val="7A6F68"/>
                 </a:solidFill>
@@ -27314,9 +25781,719 @@
                 <a:ea typeface="Calibri" pitchFamily="34" charset="-122"/>
                 <a:cs typeface="Calibri" pitchFamily="34" charset="-120"/>
               </a:rPr>
-              <a:t>Preferencias del usuario → extracción → predicción → resultados</a:t>
-            </a:r>
-            <a:endParaRPr lang="en-US" sz="1100" dirty="0"/>
+              <a:t>→</a:t>
+            </a:r>
+            <a:endParaRPr lang="en-US" sz="2000" dirty="0"/>
+          </a:p>
+        </p:txBody>
+      </p:sp>
+      <p:sp>
+        <p:nvSpPr>
+          <p:cNvPr id="33" name="Shape 25"/>
+          <p:cNvSpPr/>
+          <p:nvPr/>
+        </p:nvSpPr>
+        <p:spPr>
+          <a:xfrm>
+            <a:off x="9761220" y="2665217"/>
+            <a:ext cx="1572768" cy="2121738"/>
+          </a:xfrm>
+          <a:prstGeom prst="roundRect">
+            <a:avLst>
+              <a:gd name="adj" fmla="val 4651"/>
+            </a:avLst>
+          </a:prstGeom>
+          <a:solidFill>
+            <a:srgbClr val="FFFFFF"/>
+          </a:solidFill>
+          <a:ln/>
+          <a:effectLst>
+            <a:outerShdw blurRad="101600" dist="38100" dir="5400000" algn="bl" rotWithShape="0">
+              <a:srgbClr val="000000">
+                <a:alpha val="10000"/>
+              </a:srgbClr>
+            </a:outerShdw>
+          </a:effectLst>
+        </p:spPr>
+        <p:txBody>
+          <a:bodyPr/>
+          <a:lstStyle/>
+          <a:p>
+            <a:endParaRPr/>
+          </a:p>
+        </p:txBody>
+      </p:sp>
+      <p:sp>
+        <p:nvSpPr>
+          <p:cNvPr id="34" name="Shape 26"/>
+          <p:cNvSpPr/>
+          <p:nvPr/>
+        </p:nvSpPr>
+        <p:spPr>
+          <a:xfrm>
+            <a:off x="10291572" y="2829809"/>
+            <a:ext cx="512064" cy="512064"/>
+          </a:xfrm>
+          <a:prstGeom prst="ellipse">
+            <a:avLst/>
+          </a:prstGeom>
+          <a:solidFill>
+            <a:srgbClr val="B8563A"/>
+          </a:solidFill>
+          <a:ln/>
+        </p:spPr>
+        <p:txBody>
+          <a:bodyPr/>
+          <a:lstStyle/>
+          <a:p>
+            <a:endParaRPr/>
+          </a:p>
+        </p:txBody>
+      </p:sp>
+      <p:pic>
+        <p:nvPicPr>
+          <p:cNvPr id="35" name="Picture 34" descr="image.png"/>
+          <p:cNvPicPr>
+            <a:picLocks noChangeAspect="1"/>
+          </p:cNvPicPr>
+          <p:nvPr/>
+        </p:nvPicPr>
+        <p:blipFill>
+          <a:blip r:embed="rId9"/>
+          <a:stretch>
+            <a:fillRect/>
+          </a:stretch>
+        </p:blipFill>
+        <p:spPr>
+          <a:xfrm>
+            <a:off x="10392156" y="2930393"/>
+            <a:ext cx="310896" cy="310896"/>
+          </a:xfrm>
+          <a:prstGeom prst="rect">
+            <a:avLst/>
+          </a:prstGeom>
+        </p:spPr>
+      </p:pic>
+      <p:sp>
+        <p:nvSpPr>
+          <p:cNvPr id="36" name="Text 27"/>
+          <p:cNvSpPr/>
+          <p:nvPr/>
+        </p:nvSpPr>
+        <p:spPr>
+          <a:xfrm>
+            <a:off x="9834372" y="3442457"/>
+            <a:ext cx="1426464" cy="1234440"/>
+          </a:xfrm>
+          <a:prstGeom prst="rect">
+            <a:avLst/>
+          </a:prstGeom>
+          <a:noFill/>
+          <a:ln/>
+        </p:spPr>
+        <p:txBody>
+          <a:bodyPr wrap="square" lIns="0" tIns="0" rIns="0" bIns="0" rtlCol="0" anchor="t"/>
+          <a:lstStyle/>
+          <a:p>
+            <a:pPr marL="0" indent="0" algn="ctr">
+              <a:buNone/>
+            </a:pPr>
+            <a:r>
+              <a:rPr lang="en-US" sz="1150" b="1" dirty="0">
+                <a:solidFill>
+                  <a:srgbClr val="2B2320"/>
+                </a:solidFill>
+                <a:latin typeface="Calibri" pitchFamily="34" charset="0"/>
+                <a:ea typeface="Calibri" pitchFamily="34" charset="-122"/>
+                <a:cs typeface="Calibri" pitchFamily="34" charset="-120"/>
+              </a:rPr>
+              <a:t>Aplicación web</a:t>
+            </a:r>
+            <a:endParaRPr lang="en-US" sz="1150" dirty="0"/>
+          </a:p>
+          <a:p>
+            <a:pPr marL="0" indent="0" algn="ctr">
+              <a:buNone/>
+            </a:pPr>
+            <a:r>
+              <a:rPr lang="en-US" sz="1150" b="1" dirty="0">
+                <a:solidFill>
+                  <a:srgbClr val="2B2320"/>
+                </a:solidFill>
+                <a:latin typeface="Calibri" pitchFamily="34" charset="0"/>
+                <a:ea typeface="Calibri" pitchFamily="34" charset="-122"/>
+                <a:cs typeface="Calibri" pitchFamily="34" charset="-120"/>
+              </a:rPr>
+              <a:t>(Streamlit)</a:t>
+            </a:r>
+            <a:endParaRPr lang="en-US" sz="1150" dirty="0"/>
+          </a:p>
+        </p:txBody>
+      </p:sp>
+      <p:sp>
+        <p:nvSpPr>
+          <p:cNvPr id="37" name="Text 28"/>
+          <p:cNvSpPr/>
+          <p:nvPr/>
+        </p:nvSpPr>
+        <p:spPr>
+          <a:xfrm>
+            <a:off x="1280160" y="5121840"/>
+            <a:ext cx="9601200" cy="640080"/>
+          </a:xfrm>
+          <a:prstGeom prst="rect">
+            <a:avLst/>
+          </a:prstGeom>
+          <a:noFill/>
+          <a:ln/>
+        </p:spPr>
+        <p:txBody>
+          <a:bodyPr wrap="square" lIns="0" tIns="0" rIns="0" bIns="0" rtlCol="0" anchor="t"/>
+          <a:lstStyle/>
+          <a:p>
+            <a:pPr marL="0" indent="0" algn="ctr">
+              <a:buNone/>
+            </a:pPr>
+            <a:r>
+              <a:rPr lang="en-US" sz="1300" i="1" dirty="0">
+                <a:solidFill>
+                  <a:srgbClr val="7A6F68"/>
+                </a:solidFill>
+                <a:latin typeface="Calibri" pitchFamily="34" charset="0"/>
+                <a:ea typeface="Calibri" pitchFamily="34" charset="-122"/>
+                <a:cs typeface="Calibri" pitchFamily="34" charset="-120"/>
+              </a:rPr>
+              <a:t>Un único sistema reproducible: los codificadores, el escalador y el modelo comparten exactamente el mismo espacio de características entre entrenamiento y producción.</a:t>
+            </a:r>
+            <a:endParaRPr lang="en-US" sz="1300" dirty="0"/>
+          </a:p>
+        </p:txBody>
+      </p:sp>
+      <p:sp>
+        <p:nvSpPr>
+          <p:cNvPr id="38" name="TextBox 37"/>
+          <p:cNvSpPr txBox="1"/>
+          <p:nvPr/>
+        </p:nvSpPr>
+        <p:spPr>
+          <a:xfrm>
+            <a:off x="850392" y="4228841"/>
+            <a:ext cx="1426464" cy="548640"/>
+          </a:xfrm>
+          <a:prstGeom prst="rect">
+            <a:avLst/>
+          </a:prstGeom>
+          <a:noFill/>
+        </p:spPr>
+        <p:txBody>
+          <a:bodyPr wrap="square" lIns="0" tIns="0" rIns="0" bIns="0">
+            <a:spAutoFit/>
+          </a:bodyPr>
+          <a:lstStyle/>
+          <a:p>
+            <a:r>
+              <a:rPr sz="950" dirty="0">
+                <a:solidFill>
+                  <a:srgbClr val="7A6F68"/>
+                </a:solidFill>
+                <a:latin typeface="Calibri"/>
+              </a:rPr>
+              <a:t>8 </a:t>
+            </a:r>
+            <a:r>
+              <a:rPr sz="950" dirty="0" err="1">
+                <a:solidFill>
+                  <a:srgbClr val="7A6F68"/>
+                </a:solidFill>
+                <a:latin typeface="Calibri"/>
+              </a:rPr>
+              <a:t>provincias</a:t>
+            </a:r>
+            <a:r>
+              <a:rPr sz="950" dirty="0">
+                <a:solidFill>
+                  <a:srgbClr val="7A6F68"/>
+                </a:solidFill>
+                <a:latin typeface="Calibri"/>
+              </a:rPr>
+              <a:t>: </a:t>
+            </a:r>
+            <a:r>
+              <a:rPr sz="950" dirty="0" err="1">
+                <a:solidFill>
+                  <a:srgbClr val="7A6F68"/>
+                </a:solidFill>
+                <a:latin typeface="Calibri"/>
+              </a:rPr>
+              <a:t>precio</a:t>
+            </a:r>
+            <a:r>
+              <a:rPr sz="950" dirty="0">
+                <a:solidFill>
+                  <a:srgbClr val="7A6F68"/>
+                </a:solidFill>
+                <a:latin typeface="Calibri"/>
+              </a:rPr>
+              <a:t>, </a:t>
+            </a:r>
+            <a:r>
+              <a:rPr sz="950" dirty="0" err="1">
+                <a:solidFill>
+                  <a:srgbClr val="7A6F68"/>
+                </a:solidFill>
+                <a:latin typeface="Calibri"/>
+              </a:rPr>
+              <a:t>tipo</a:t>
+            </a:r>
+            <a:r>
+              <a:rPr sz="950" dirty="0">
+                <a:solidFill>
+                  <a:srgbClr val="7A6F68"/>
+                </a:solidFill>
+                <a:latin typeface="Calibri"/>
+              </a:rPr>
+              <a:t>, </a:t>
+            </a:r>
+            <a:r>
+              <a:rPr sz="950" dirty="0" err="1">
+                <a:solidFill>
+                  <a:srgbClr val="7A6F68"/>
+                </a:solidFill>
+                <a:latin typeface="Calibri"/>
+              </a:rPr>
+              <a:t>estrellas</a:t>
+            </a:r>
+            <a:r>
+              <a:rPr sz="950" dirty="0">
+                <a:solidFill>
+                  <a:srgbClr val="7A6F68"/>
+                </a:solidFill>
+                <a:latin typeface="Calibri"/>
+              </a:rPr>
+              <a:t>, </a:t>
+            </a:r>
+            <a:r>
+              <a:rPr sz="950" dirty="0" err="1">
+                <a:solidFill>
+                  <a:srgbClr val="7A6F68"/>
+                </a:solidFill>
+                <a:latin typeface="Calibri"/>
+              </a:rPr>
+              <a:t>servicios</a:t>
+            </a:r>
+            <a:r>
+              <a:rPr sz="950" dirty="0">
+                <a:solidFill>
+                  <a:srgbClr val="7A6F68"/>
+                </a:solidFill>
+                <a:latin typeface="Calibri"/>
+              </a:rPr>
+              <a:t>, </a:t>
+            </a:r>
+            <a:r>
+              <a:rPr sz="950" dirty="0" err="1">
+                <a:solidFill>
+                  <a:srgbClr val="7A6F68"/>
+                </a:solidFill>
+                <a:latin typeface="Calibri"/>
+              </a:rPr>
+              <a:t>coordenadas</a:t>
+            </a:r>
+            <a:endParaRPr sz="950" dirty="0">
+              <a:solidFill>
+                <a:srgbClr val="7A6F68"/>
+              </a:solidFill>
+              <a:latin typeface="Calibri"/>
+            </a:endParaRPr>
+          </a:p>
+        </p:txBody>
+      </p:sp>
+      <p:sp>
+        <p:nvSpPr>
+          <p:cNvPr id="39" name="TextBox 38"/>
+          <p:cNvSpPr txBox="1"/>
+          <p:nvPr/>
+        </p:nvSpPr>
+        <p:spPr>
+          <a:xfrm>
+            <a:off x="2647188" y="4235742"/>
+            <a:ext cx="1426464" cy="146194"/>
+          </a:xfrm>
+          <a:prstGeom prst="rect">
+            <a:avLst/>
+          </a:prstGeom>
+          <a:noFill/>
+        </p:spPr>
+        <p:txBody>
+          <a:bodyPr wrap="square" lIns="0" tIns="0" rIns="0" bIns="0">
+            <a:spAutoFit/>
+          </a:bodyPr>
+          <a:lstStyle/>
+          <a:p>
+            <a:r>
+              <a:rPr sz="950" dirty="0" err="1">
+                <a:solidFill>
+                  <a:srgbClr val="7A6F68"/>
+                </a:solidFill>
+                <a:latin typeface="Calibri"/>
+              </a:rPr>
+              <a:t>Nulos</a:t>
+            </a:r>
+            <a:r>
+              <a:rPr sz="950" dirty="0">
+                <a:solidFill>
+                  <a:srgbClr val="7A6F68"/>
+                </a:solidFill>
+                <a:latin typeface="Calibri"/>
+              </a:rPr>
+              <a:t> y </a:t>
+            </a:r>
+            <a:r>
+              <a:rPr sz="950" dirty="0" err="1">
+                <a:solidFill>
+                  <a:srgbClr val="7A6F68"/>
+                </a:solidFill>
+                <a:latin typeface="Calibri"/>
+              </a:rPr>
+              <a:t>valores</a:t>
+            </a:r>
+            <a:r>
+              <a:rPr sz="950" dirty="0">
+                <a:solidFill>
+                  <a:srgbClr val="7A6F68"/>
+                </a:solidFill>
+                <a:latin typeface="Calibri"/>
+              </a:rPr>
+              <a:t> </a:t>
+            </a:r>
+            <a:r>
+              <a:rPr sz="950" dirty="0" err="1">
+                <a:solidFill>
+                  <a:srgbClr val="7A6F68"/>
+                </a:solidFill>
+                <a:latin typeface="Calibri"/>
+              </a:rPr>
+              <a:t>atípicos</a:t>
+            </a:r>
+            <a:endParaRPr sz="950" dirty="0">
+              <a:solidFill>
+                <a:srgbClr val="7A6F68"/>
+              </a:solidFill>
+              <a:latin typeface="Calibri"/>
+            </a:endParaRPr>
+          </a:p>
+        </p:txBody>
+      </p:sp>
+      <p:sp>
+        <p:nvSpPr>
+          <p:cNvPr id="40" name="TextBox 39"/>
+          <p:cNvSpPr txBox="1"/>
+          <p:nvPr/>
+        </p:nvSpPr>
+        <p:spPr>
+          <a:xfrm>
+            <a:off x="4443984" y="4235742"/>
+            <a:ext cx="1426464" cy="548640"/>
+          </a:xfrm>
+          <a:prstGeom prst="rect">
+            <a:avLst/>
+          </a:prstGeom>
+          <a:noFill/>
+        </p:spPr>
+        <p:txBody>
+          <a:bodyPr wrap="square" lIns="0" tIns="0" rIns="0" bIns="0">
+            <a:spAutoFit/>
+          </a:bodyPr>
+          <a:lstStyle/>
+          <a:p>
+            <a:r>
+              <a:rPr sz="950" dirty="0" err="1">
+                <a:solidFill>
+                  <a:srgbClr val="7A6F68"/>
+                </a:solidFill>
+                <a:latin typeface="Calibri"/>
+              </a:rPr>
+              <a:t>Extracción</a:t>
+            </a:r>
+            <a:r>
+              <a:rPr sz="950" dirty="0">
+                <a:solidFill>
+                  <a:srgbClr val="7A6F68"/>
+                </a:solidFill>
+                <a:latin typeface="Calibri"/>
+              </a:rPr>
+              <a:t> de </a:t>
+            </a:r>
+            <a:r>
+              <a:rPr sz="950" dirty="0" err="1">
+                <a:solidFill>
+                  <a:srgbClr val="7A6F68"/>
+                </a:solidFill>
+                <a:latin typeface="Calibri"/>
+              </a:rPr>
+              <a:t>servicios</a:t>
+            </a:r>
+            <a:r>
+              <a:rPr sz="950" dirty="0">
+                <a:solidFill>
+                  <a:srgbClr val="7A6F68"/>
+                </a:solidFill>
+                <a:latin typeface="Calibri"/>
+              </a:rPr>
+              <a:t> y variables </a:t>
+            </a:r>
+            <a:r>
+              <a:rPr sz="950" dirty="0" err="1">
+                <a:solidFill>
+                  <a:srgbClr val="7A6F68"/>
+                </a:solidFill>
+                <a:latin typeface="Calibri"/>
+              </a:rPr>
+              <a:t>derivadas</a:t>
+            </a:r>
+            <a:endParaRPr sz="950" dirty="0">
+              <a:solidFill>
+                <a:srgbClr val="7A6F68"/>
+              </a:solidFill>
+              <a:latin typeface="Calibri"/>
+            </a:endParaRPr>
+          </a:p>
+        </p:txBody>
+      </p:sp>
+      <p:sp>
+        <p:nvSpPr>
+          <p:cNvPr id="41" name="TextBox 40"/>
+          <p:cNvSpPr txBox="1"/>
+          <p:nvPr/>
+        </p:nvSpPr>
+        <p:spPr>
+          <a:xfrm>
+            <a:off x="6240780" y="4238315"/>
+            <a:ext cx="1426464" cy="438582"/>
+          </a:xfrm>
+          <a:prstGeom prst="rect">
+            <a:avLst/>
+          </a:prstGeom>
+          <a:noFill/>
+        </p:spPr>
+        <p:txBody>
+          <a:bodyPr wrap="square" lIns="0" tIns="0" rIns="0" bIns="0">
+            <a:spAutoFit/>
+          </a:bodyPr>
+          <a:lstStyle/>
+          <a:p>
+            <a:r>
+              <a:rPr lang="es-ES" sz="950" dirty="0">
+                <a:solidFill>
+                  <a:srgbClr val="7A6F68"/>
+                </a:solidFill>
+                <a:latin typeface="Calibri"/>
+              </a:rPr>
+              <a:t>Selección del mejor modelo por v</a:t>
+            </a:r>
+            <a:r>
+              <a:rPr sz="950" dirty="0" err="1">
+                <a:solidFill>
+                  <a:srgbClr val="7A6F68"/>
+                </a:solidFill>
+                <a:latin typeface="Calibri"/>
+              </a:rPr>
+              <a:t>alidación</a:t>
+            </a:r>
+            <a:r>
+              <a:rPr sz="950" dirty="0">
+                <a:solidFill>
+                  <a:srgbClr val="7A6F68"/>
+                </a:solidFill>
+                <a:latin typeface="Calibri"/>
+              </a:rPr>
+              <a:t> </a:t>
+            </a:r>
+            <a:r>
+              <a:rPr sz="950" dirty="0" err="1">
+                <a:solidFill>
+                  <a:srgbClr val="7A6F68"/>
+                </a:solidFill>
+                <a:latin typeface="Calibri"/>
+              </a:rPr>
+              <a:t>cruzada</a:t>
+            </a:r>
+            <a:r>
+              <a:rPr sz="950" dirty="0">
+                <a:solidFill>
+                  <a:srgbClr val="7A6F68"/>
+                </a:solidFill>
+                <a:latin typeface="Calibri"/>
+              </a:rPr>
+              <a:t> y conjunto de </a:t>
+            </a:r>
+            <a:r>
+              <a:rPr sz="950" dirty="0" err="1">
+                <a:solidFill>
+                  <a:srgbClr val="7A6F68"/>
+                </a:solidFill>
+                <a:latin typeface="Calibri"/>
+              </a:rPr>
+              <a:t>prueba</a:t>
+            </a:r>
+            <a:endParaRPr sz="950" dirty="0">
+              <a:solidFill>
+                <a:srgbClr val="7A6F68"/>
+              </a:solidFill>
+              <a:latin typeface="Calibri"/>
+            </a:endParaRPr>
+          </a:p>
+        </p:txBody>
+      </p:sp>
+      <p:sp>
+        <p:nvSpPr>
+          <p:cNvPr id="42" name="TextBox 41"/>
+          <p:cNvSpPr txBox="1"/>
+          <p:nvPr/>
+        </p:nvSpPr>
+        <p:spPr>
+          <a:xfrm>
+            <a:off x="8037576" y="4238315"/>
+            <a:ext cx="1426464" cy="548640"/>
+          </a:xfrm>
+          <a:prstGeom prst="rect">
+            <a:avLst/>
+          </a:prstGeom>
+          <a:noFill/>
+        </p:spPr>
+        <p:txBody>
+          <a:bodyPr wrap="square" lIns="0" tIns="0" rIns="0" bIns="0">
+            <a:spAutoFit/>
+          </a:bodyPr>
+          <a:lstStyle/>
+          <a:p>
+            <a:r>
+              <a:rPr sz="950" dirty="0" err="1">
+                <a:solidFill>
+                  <a:srgbClr val="7A6F68"/>
+                </a:solidFill>
+                <a:latin typeface="Calibri"/>
+              </a:rPr>
+              <a:t>Cociente</a:t>
+            </a:r>
+            <a:r>
+              <a:rPr sz="950" dirty="0">
+                <a:solidFill>
+                  <a:srgbClr val="7A6F68"/>
+                </a:solidFill>
+                <a:latin typeface="Calibri"/>
+              </a:rPr>
+              <a:t> entre </a:t>
+            </a:r>
+            <a:r>
+              <a:rPr sz="950" dirty="0" err="1">
+                <a:solidFill>
+                  <a:srgbClr val="7A6F68"/>
+                </a:solidFill>
+                <a:latin typeface="Calibri"/>
+              </a:rPr>
+              <a:t>precio</a:t>
+            </a:r>
+            <a:r>
+              <a:rPr sz="950" dirty="0">
+                <a:solidFill>
+                  <a:srgbClr val="7A6F68"/>
+                </a:solidFill>
+                <a:latin typeface="Calibri"/>
+              </a:rPr>
+              <a:t> real y </a:t>
+            </a:r>
+            <a:r>
+              <a:rPr sz="950" dirty="0" err="1">
+                <a:solidFill>
+                  <a:srgbClr val="7A6F68"/>
+                </a:solidFill>
+                <a:latin typeface="Calibri"/>
+              </a:rPr>
+              <a:t>predicho</a:t>
+            </a:r>
+            <a:endParaRPr sz="950" dirty="0">
+              <a:solidFill>
+                <a:srgbClr val="7A6F68"/>
+              </a:solidFill>
+              <a:latin typeface="Calibri"/>
+            </a:endParaRPr>
+          </a:p>
+        </p:txBody>
+      </p:sp>
+      <p:sp>
+        <p:nvSpPr>
+          <p:cNvPr id="43" name="TextBox 42"/>
+          <p:cNvSpPr txBox="1"/>
+          <p:nvPr/>
+        </p:nvSpPr>
+        <p:spPr>
+          <a:xfrm>
+            <a:off x="9816998" y="4228841"/>
+            <a:ext cx="1426464" cy="548640"/>
+          </a:xfrm>
+          <a:prstGeom prst="rect">
+            <a:avLst/>
+          </a:prstGeom>
+          <a:noFill/>
+        </p:spPr>
+        <p:txBody>
+          <a:bodyPr wrap="square" lIns="0" tIns="0" rIns="0" bIns="0">
+            <a:spAutoFit/>
+          </a:bodyPr>
+          <a:lstStyle/>
+          <a:p>
+            <a:r>
+              <a:rPr sz="950" dirty="0" err="1">
+                <a:solidFill>
+                  <a:srgbClr val="7A6F68"/>
+                </a:solidFill>
+                <a:latin typeface="Calibri"/>
+              </a:rPr>
+              <a:t>Preferencias</a:t>
+            </a:r>
+            <a:r>
+              <a:rPr sz="950" dirty="0">
+                <a:solidFill>
+                  <a:srgbClr val="7A6F68"/>
+                </a:solidFill>
+                <a:latin typeface="Calibri"/>
+              </a:rPr>
+              <a:t> → </a:t>
+            </a:r>
+            <a:r>
+              <a:rPr sz="950" dirty="0" err="1">
+                <a:solidFill>
+                  <a:srgbClr val="7A6F68"/>
+                </a:solidFill>
+                <a:latin typeface="Calibri"/>
+              </a:rPr>
+              <a:t>predicción</a:t>
+            </a:r>
+            <a:r>
+              <a:rPr sz="950" dirty="0">
+                <a:solidFill>
+                  <a:srgbClr val="7A6F68"/>
+                </a:solidFill>
+                <a:latin typeface="Calibri"/>
+              </a:rPr>
+              <a:t> → </a:t>
+            </a:r>
+            <a:r>
+              <a:rPr sz="950" dirty="0" err="1">
+                <a:solidFill>
+                  <a:srgbClr val="7A6F68"/>
+                </a:solidFill>
+                <a:latin typeface="Calibri"/>
+              </a:rPr>
+              <a:t>resultados</a:t>
+            </a:r>
+            <a:endParaRPr sz="950" dirty="0">
+              <a:solidFill>
+                <a:srgbClr val="7A6F68"/>
+              </a:solidFill>
+              <a:latin typeface="Calibri"/>
+            </a:endParaRPr>
           </a:p>
         </p:txBody>
       </p:sp>
@@ -27425,7 +26602,7 @@
                 <a:ea typeface="Calibri" pitchFamily="34" charset="-122"/>
                 <a:cs typeface="Calibri" pitchFamily="34" charset="-120"/>
               </a:rPr>
-              <a:t>5 / 24</a:t>
+              <a:t>5 / 23</a:t>
             </a:r>
             <a:endParaRPr lang="en-US" sz="900" dirty="0"/>
           </a:p>
@@ -28696,1321 +27873,6 @@
 </file>
 
 <file path=ppt/slides/slide6.xml><?xml version="1.0" encoding="utf-8"?>
-<p:sld xmlns:a="http://schemas.openxmlformats.org/drawingml/2006/main" xmlns:r="http://schemas.openxmlformats.org/officeDocument/2006/relationships" xmlns:p="http://schemas.openxmlformats.org/presentationml/2006/main">
-  <p:cSld name="Slide 6">
-    <p:bg>
-      <p:bgPr>
-        <a:solidFill>
-          <a:srgbClr val="FFFFFF"/>
-        </a:solidFill>
-        <a:effectLst/>
-      </p:bgPr>
-    </p:bg>
-    <p:spTree>
-      <p:nvGrpSpPr>
-        <p:cNvPr id="1" name=""/>
-        <p:cNvGrpSpPr/>
-        <p:nvPr/>
-      </p:nvGrpSpPr>
-      <p:grpSpPr>
-        <a:xfrm>
-          <a:off x="0" y="0"/>
-          <a:ext cx="0" cy="0"/>
-          <a:chOff x="0" y="0"/>
-          <a:chExt cx="0" cy="0"/>
-        </a:xfrm>
-      </p:grpSpPr>
-      <p:sp>
-        <p:nvSpPr>
-          <p:cNvPr id="2" name="Text 0"/>
-          <p:cNvSpPr/>
-          <p:nvPr/>
-        </p:nvSpPr>
-        <p:spPr>
-          <a:xfrm>
-            <a:off x="548640" y="6473952"/>
-            <a:ext cx="7315200" cy="274320"/>
-          </a:xfrm>
-          <a:prstGeom prst="rect">
-            <a:avLst/>
-          </a:prstGeom>
-          <a:noFill/>
-          <a:ln/>
-        </p:spPr>
-        <p:txBody>
-          <a:bodyPr wrap="square" lIns="0" tIns="0" rIns="0" bIns="0" rtlCol="0" anchor="ctr"/>
-          <a:lstStyle/>
-          <a:p>
-            <a:pPr marL="0" indent="0" algn="l">
-              <a:buNone/>
-            </a:pPr>
-            <a:r>
-              <a:rPr lang="en-US" sz="900" dirty="0">
-                <a:solidFill>
-                  <a:srgbClr val="7A6F68"/>
-                </a:solidFill>
-                <a:latin typeface="Calibri" pitchFamily="34" charset="0"/>
-                <a:ea typeface="Calibri" pitchFamily="34" charset="-122"/>
-                <a:cs typeface="Calibri" pitchFamily="34" charset="-120"/>
-              </a:rPr>
-              <a:t>Detección de Alojamientos Turísticos con Precio Real Inferior — TFG</a:t>
-            </a:r>
-            <a:endParaRPr lang="en-US" sz="900" dirty="0"/>
-          </a:p>
-        </p:txBody>
-      </p:sp>
-      <p:sp>
-        <p:nvSpPr>
-          <p:cNvPr id="3" name="Text 1"/>
-          <p:cNvSpPr/>
-          <p:nvPr/>
-        </p:nvSpPr>
-        <p:spPr>
-          <a:xfrm>
-            <a:off x="10545775" y="6473952"/>
-            <a:ext cx="1097280" cy="274320"/>
-          </a:xfrm>
-          <a:prstGeom prst="rect">
-            <a:avLst/>
-          </a:prstGeom>
-          <a:noFill/>
-          <a:ln/>
-        </p:spPr>
-        <p:txBody>
-          <a:bodyPr wrap="square" lIns="0" tIns="0" rIns="0" bIns="0" rtlCol="0" anchor="ctr"/>
-          <a:lstStyle/>
-          <a:p>
-            <a:pPr marL="0" indent="0" algn="r">
-              <a:buNone/>
-            </a:pPr>
-            <a:r>
-              <a:rPr lang="en-US" sz="900" dirty="0">
-                <a:solidFill>
-                  <a:srgbClr val="7A6F68"/>
-                </a:solidFill>
-                <a:latin typeface="Calibri" pitchFamily="34" charset="0"/>
-                <a:ea typeface="Calibri" pitchFamily="34" charset="-122"/>
-                <a:cs typeface="Calibri" pitchFamily="34" charset="-120"/>
-              </a:rPr>
-              <a:t>6 / 24</a:t>
-            </a:r>
-            <a:endParaRPr lang="en-US" sz="900" dirty="0"/>
-          </a:p>
-        </p:txBody>
-      </p:sp>
-      <p:sp>
-        <p:nvSpPr>
-          <p:cNvPr id="4" name="Shape 2"/>
-          <p:cNvSpPr/>
-          <p:nvPr/>
-        </p:nvSpPr>
-        <p:spPr>
-          <a:xfrm>
-            <a:off x="548640" y="457200"/>
-            <a:ext cx="566928" cy="566928"/>
-          </a:xfrm>
-          <a:prstGeom prst="ellipse">
-            <a:avLst/>
-          </a:prstGeom>
-          <a:solidFill>
-            <a:srgbClr val="B8563A"/>
-          </a:solidFill>
-          <a:ln/>
-        </p:spPr>
-        <p:txBody>
-          <a:bodyPr/>
-          <a:lstStyle/>
-          <a:p>
-            <a:endParaRPr/>
-          </a:p>
-        </p:txBody>
-      </p:sp>
-      <p:sp>
-        <p:nvSpPr>
-          <p:cNvPr id="5" name="Text 3"/>
-          <p:cNvSpPr/>
-          <p:nvPr/>
-        </p:nvSpPr>
-        <p:spPr>
-          <a:xfrm>
-            <a:off x="1316736" y="420624"/>
-            <a:ext cx="9601200" cy="256032"/>
-          </a:xfrm>
-          <a:prstGeom prst="rect">
-            <a:avLst/>
-          </a:prstGeom>
-          <a:noFill/>
-          <a:ln/>
-        </p:spPr>
-        <p:txBody>
-          <a:bodyPr wrap="square" lIns="0" tIns="0" rIns="0" bIns="0" rtlCol="0" anchor="ctr"/>
-          <a:lstStyle/>
-          <a:p>
-            <a:pPr marL="0" indent="0">
-              <a:buNone/>
-            </a:pPr>
-            <a:r>
-              <a:rPr lang="en-US" sz="1100" b="1" kern="0" spc="200" dirty="0">
-                <a:solidFill>
-                  <a:srgbClr val="7A6F68"/>
-                </a:solidFill>
-                <a:latin typeface="Calibri" pitchFamily="34" charset="0"/>
-                <a:ea typeface="Calibri" pitchFamily="34" charset="-122"/>
-                <a:cs typeface="Calibri" pitchFamily="34" charset="-120"/>
-              </a:rPr>
-              <a:t>METODOLOGÍA</a:t>
-            </a:r>
-            <a:endParaRPr lang="en-US" sz="1100" dirty="0"/>
-          </a:p>
-        </p:txBody>
-      </p:sp>
-      <p:sp>
-        <p:nvSpPr>
-          <p:cNvPr id="6" name="Text 4"/>
-          <p:cNvSpPr/>
-          <p:nvPr/>
-        </p:nvSpPr>
-        <p:spPr>
-          <a:xfrm>
-            <a:off x="1316736" y="640080"/>
-            <a:ext cx="9966960" cy="640080"/>
-          </a:xfrm>
-          <a:prstGeom prst="rect">
-            <a:avLst/>
-          </a:prstGeom>
-          <a:noFill/>
-          <a:ln/>
-        </p:spPr>
-        <p:txBody>
-          <a:bodyPr wrap="square" lIns="0" tIns="0" rIns="0" bIns="0" rtlCol="0" anchor="t"/>
-          <a:lstStyle/>
-          <a:p>
-            <a:pPr marL="0" indent="0">
-              <a:buNone/>
-            </a:pPr>
-            <a:r>
-              <a:rPr lang="en-US" sz="2800" b="1" dirty="0">
-                <a:solidFill>
-                  <a:srgbClr val="2B2320"/>
-                </a:solidFill>
-                <a:latin typeface="Cambria" pitchFamily="34" charset="0"/>
-                <a:ea typeface="Cambria" pitchFamily="34" charset="-122"/>
-                <a:cs typeface="Cambria" pitchFamily="34" charset="-120"/>
-              </a:rPr>
-              <a:t>Arquitectura del sistema</a:t>
-            </a:r>
-            <a:endParaRPr lang="en-US" sz="2800" dirty="0"/>
-          </a:p>
-        </p:txBody>
-      </p:sp>
-      <p:pic>
-        <p:nvPicPr>
-          <p:cNvPr id="7" name="Image 0" descr="preencoded.png"/>
-          <p:cNvPicPr>
-            <a:picLocks noChangeAspect="1"/>
-          </p:cNvPicPr>
-          <p:nvPr/>
-        </p:nvPicPr>
-        <p:blipFill>
-          <a:blip r:embed="rId3"/>
-          <a:stretch>
-            <a:fillRect/>
-          </a:stretch>
-        </p:blipFill>
-        <p:spPr>
-          <a:xfrm>
-            <a:off x="656356" y="564916"/>
-            <a:ext cx="351495" cy="351495"/>
-          </a:xfrm>
-          <a:prstGeom prst="rect">
-            <a:avLst/>
-          </a:prstGeom>
-        </p:spPr>
-      </p:pic>
-      <p:sp>
-        <p:nvSpPr>
-          <p:cNvPr id="8" name="Shape 5"/>
-          <p:cNvSpPr/>
-          <p:nvPr/>
-        </p:nvSpPr>
-        <p:spPr>
-          <a:xfrm>
-            <a:off x="817474" y="2331720"/>
-            <a:ext cx="1572768" cy="2103120"/>
-          </a:xfrm>
-          <a:prstGeom prst="roundRect">
-            <a:avLst>
-              <a:gd name="adj" fmla="val 4651"/>
-            </a:avLst>
-          </a:prstGeom>
-          <a:solidFill>
-            <a:srgbClr val="FFFFFF"/>
-          </a:solidFill>
-          <a:ln/>
-          <a:effectLst>
-            <a:outerShdw blurRad="101600" dist="38100" dir="5400000" algn="bl" rotWithShape="0">
-              <a:srgbClr val="000000">
-                <a:alpha val="10000"/>
-              </a:srgbClr>
-            </a:outerShdw>
-          </a:effectLst>
-        </p:spPr>
-        <p:txBody>
-          <a:bodyPr/>
-          <a:lstStyle/>
-          <a:p>
-            <a:endParaRPr/>
-          </a:p>
-        </p:txBody>
-      </p:sp>
-      <p:sp>
-        <p:nvSpPr>
-          <p:cNvPr id="9" name="Shape 6"/>
-          <p:cNvSpPr/>
-          <p:nvPr/>
-        </p:nvSpPr>
-        <p:spPr>
-          <a:xfrm>
-            <a:off x="1347826" y="2496312"/>
-            <a:ext cx="512064" cy="512064"/>
-          </a:xfrm>
-          <a:prstGeom prst="ellipse">
-            <a:avLst/>
-          </a:prstGeom>
-          <a:solidFill>
-            <a:srgbClr val="B8563A"/>
-          </a:solidFill>
-          <a:ln/>
-        </p:spPr>
-        <p:txBody>
-          <a:bodyPr/>
-          <a:lstStyle/>
-          <a:p>
-            <a:endParaRPr/>
-          </a:p>
-        </p:txBody>
-      </p:sp>
-      <p:pic>
-        <p:nvPicPr>
-          <p:cNvPr id="10" name="Image 1" descr="preencoded.png"/>
-          <p:cNvPicPr>
-            <a:picLocks noChangeAspect="1"/>
-          </p:cNvPicPr>
-          <p:nvPr/>
-        </p:nvPicPr>
-        <p:blipFill>
-          <a:blip r:embed="rId4"/>
-          <a:stretch>
-            <a:fillRect/>
-          </a:stretch>
-        </p:blipFill>
-        <p:spPr>
-          <a:xfrm>
-            <a:off x="1448410" y="2596896"/>
-            <a:ext cx="310896" cy="310896"/>
-          </a:xfrm>
-          <a:prstGeom prst="rect">
-            <a:avLst/>
-          </a:prstGeom>
-        </p:spPr>
-      </p:pic>
-      <p:sp>
-        <p:nvSpPr>
-          <p:cNvPr id="11" name="Text 7"/>
-          <p:cNvSpPr/>
-          <p:nvPr/>
-        </p:nvSpPr>
-        <p:spPr>
-          <a:xfrm>
-            <a:off x="890626" y="3108960"/>
-            <a:ext cx="1426464" cy="1234440"/>
-          </a:xfrm>
-          <a:prstGeom prst="rect">
-            <a:avLst/>
-          </a:prstGeom>
-          <a:noFill/>
-          <a:ln/>
-        </p:spPr>
-        <p:txBody>
-          <a:bodyPr wrap="square" lIns="0" tIns="0" rIns="0" bIns="0" rtlCol="0" anchor="t"/>
-          <a:lstStyle/>
-          <a:p>
-            <a:pPr marL="0" indent="0" algn="ctr">
-              <a:buNone/>
-            </a:pPr>
-            <a:r>
-              <a:rPr lang="en-US" sz="1150" b="1" dirty="0">
-                <a:solidFill>
-                  <a:srgbClr val="2B2320"/>
-                </a:solidFill>
-                <a:latin typeface="Calibri" pitchFamily="34" charset="0"/>
-                <a:ea typeface="Calibri" pitchFamily="34" charset="-122"/>
-                <a:cs typeface="Calibri" pitchFamily="34" charset="-120"/>
-              </a:rPr>
-              <a:t>Extracción</a:t>
-            </a:r>
-            <a:endParaRPr lang="en-US" sz="1150" dirty="0"/>
-          </a:p>
-          <a:p>
-            <a:pPr marL="0" indent="0" algn="ctr">
-              <a:buNone/>
-            </a:pPr>
-            <a:r>
-              <a:rPr lang="en-US" sz="1150" b="1" dirty="0">
-                <a:solidFill>
-                  <a:srgbClr val="2B2320"/>
-                </a:solidFill>
-                <a:latin typeface="Calibri" pitchFamily="34" charset="0"/>
-                <a:ea typeface="Calibri" pitchFamily="34" charset="-122"/>
-                <a:cs typeface="Calibri" pitchFamily="34" charset="-120"/>
-              </a:rPr>
-              <a:t>(Selenium + Playwright)</a:t>
-            </a:r>
-            <a:endParaRPr lang="en-US" sz="1150" dirty="0"/>
-          </a:p>
-        </p:txBody>
-      </p:sp>
-      <p:sp>
-        <p:nvSpPr>
-          <p:cNvPr id="12" name="Text 8"/>
-          <p:cNvSpPr/>
-          <p:nvPr/>
-        </p:nvSpPr>
-        <p:spPr>
-          <a:xfrm>
-            <a:off x="2390242" y="3154680"/>
-            <a:ext cx="224028" cy="457200"/>
-          </a:xfrm>
-          <a:prstGeom prst="rect">
-            <a:avLst/>
-          </a:prstGeom>
-          <a:noFill/>
-          <a:ln/>
-        </p:spPr>
-        <p:txBody>
-          <a:bodyPr wrap="square" lIns="0" tIns="0" rIns="0" bIns="0" rtlCol="0" anchor="ctr"/>
-          <a:lstStyle/>
-          <a:p>
-            <a:pPr marL="0" indent="0" algn="ctr">
-              <a:buNone/>
-            </a:pPr>
-            <a:r>
-              <a:rPr lang="en-US" sz="2000" dirty="0">
-                <a:solidFill>
-                  <a:srgbClr val="7A6F68"/>
-                </a:solidFill>
-                <a:latin typeface="Calibri" pitchFamily="34" charset="0"/>
-                <a:ea typeface="Calibri" pitchFamily="34" charset="-122"/>
-                <a:cs typeface="Calibri" pitchFamily="34" charset="-120"/>
-              </a:rPr>
-              <a:t>→</a:t>
-            </a:r>
-            <a:endParaRPr lang="en-US" sz="2000" dirty="0"/>
-          </a:p>
-        </p:txBody>
-      </p:sp>
-      <p:sp>
-        <p:nvSpPr>
-          <p:cNvPr id="13" name="Shape 9"/>
-          <p:cNvSpPr/>
-          <p:nvPr/>
-        </p:nvSpPr>
-        <p:spPr>
-          <a:xfrm>
-            <a:off x="2614270" y="2331720"/>
-            <a:ext cx="1572768" cy="2103120"/>
-          </a:xfrm>
-          <a:prstGeom prst="roundRect">
-            <a:avLst>
-              <a:gd name="adj" fmla="val 4651"/>
-            </a:avLst>
-          </a:prstGeom>
-          <a:solidFill>
-            <a:srgbClr val="FFFFFF"/>
-          </a:solidFill>
-          <a:ln/>
-          <a:effectLst>
-            <a:outerShdw blurRad="101600" dist="38100" dir="5400000" algn="bl" rotWithShape="0">
-              <a:srgbClr val="000000">
-                <a:alpha val="10000"/>
-              </a:srgbClr>
-            </a:outerShdw>
-          </a:effectLst>
-        </p:spPr>
-        <p:txBody>
-          <a:bodyPr/>
-          <a:lstStyle/>
-          <a:p>
-            <a:endParaRPr/>
-          </a:p>
-        </p:txBody>
-      </p:sp>
-      <p:sp>
-        <p:nvSpPr>
-          <p:cNvPr id="14" name="Shape 10"/>
-          <p:cNvSpPr/>
-          <p:nvPr/>
-        </p:nvSpPr>
-        <p:spPr>
-          <a:xfrm>
-            <a:off x="3144622" y="2496312"/>
-            <a:ext cx="512064" cy="512064"/>
-          </a:xfrm>
-          <a:prstGeom prst="ellipse">
-            <a:avLst/>
-          </a:prstGeom>
-          <a:solidFill>
-            <a:srgbClr val="B8563A"/>
-          </a:solidFill>
-          <a:ln/>
-        </p:spPr>
-        <p:txBody>
-          <a:bodyPr/>
-          <a:lstStyle/>
-          <a:p>
-            <a:endParaRPr/>
-          </a:p>
-        </p:txBody>
-      </p:sp>
-      <p:pic>
-        <p:nvPicPr>
-          <p:cNvPr id="15" name="Image 2" descr="preencoded.png"/>
-          <p:cNvPicPr>
-            <a:picLocks noChangeAspect="1"/>
-          </p:cNvPicPr>
-          <p:nvPr/>
-        </p:nvPicPr>
-        <p:blipFill>
-          <a:blip r:embed="rId5"/>
-          <a:stretch>
-            <a:fillRect/>
-          </a:stretch>
-        </p:blipFill>
-        <p:spPr>
-          <a:xfrm>
-            <a:off x="3245206" y="2596896"/>
-            <a:ext cx="310896" cy="310896"/>
-          </a:xfrm>
-          <a:prstGeom prst="rect">
-            <a:avLst/>
-          </a:prstGeom>
-        </p:spPr>
-      </p:pic>
-      <p:sp>
-        <p:nvSpPr>
-          <p:cNvPr id="16" name="Text 11"/>
-          <p:cNvSpPr/>
-          <p:nvPr/>
-        </p:nvSpPr>
-        <p:spPr>
-          <a:xfrm>
-            <a:off x="2687422" y="3108960"/>
-            <a:ext cx="1426464" cy="1234440"/>
-          </a:xfrm>
-          <a:prstGeom prst="rect">
-            <a:avLst/>
-          </a:prstGeom>
-          <a:noFill/>
-          <a:ln/>
-        </p:spPr>
-        <p:txBody>
-          <a:bodyPr wrap="square" lIns="0" tIns="0" rIns="0" bIns="0" rtlCol="0" anchor="t"/>
-          <a:lstStyle/>
-          <a:p>
-            <a:pPr marL="0" indent="0" algn="ctr">
-              <a:buNone/>
-            </a:pPr>
-            <a:r>
-              <a:rPr lang="en-US" sz="1150" b="1" dirty="0">
-                <a:solidFill>
-                  <a:srgbClr val="2B2320"/>
-                </a:solidFill>
-                <a:latin typeface="Calibri" pitchFamily="34" charset="0"/>
-                <a:ea typeface="Calibri" pitchFamily="34" charset="-122"/>
-                <a:cs typeface="Calibri" pitchFamily="34" charset="-120"/>
-              </a:rPr>
-              <a:t>Preprocesamiento</a:t>
-            </a:r>
-            <a:endParaRPr lang="en-US" sz="1150" dirty="0"/>
-          </a:p>
-        </p:txBody>
-      </p:sp>
-      <p:sp>
-        <p:nvSpPr>
-          <p:cNvPr id="17" name="Text 12"/>
-          <p:cNvSpPr/>
-          <p:nvPr/>
-        </p:nvSpPr>
-        <p:spPr>
-          <a:xfrm>
-            <a:off x="4187038" y="3154680"/>
-            <a:ext cx="224028" cy="457200"/>
-          </a:xfrm>
-          <a:prstGeom prst="rect">
-            <a:avLst/>
-          </a:prstGeom>
-          <a:noFill/>
-          <a:ln/>
-        </p:spPr>
-        <p:txBody>
-          <a:bodyPr wrap="square" lIns="0" tIns="0" rIns="0" bIns="0" rtlCol="0" anchor="ctr"/>
-          <a:lstStyle/>
-          <a:p>
-            <a:pPr marL="0" indent="0" algn="ctr">
-              <a:buNone/>
-            </a:pPr>
-            <a:r>
-              <a:rPr lang="en-US" sz="2000" dirty="0">
-                <a:solidFill>
-                  <a:srgbClr val="7A6F68"/>
-                </a:solidFill>
-                <a:latin typeface="Calibri" pitchFamily="34" charset="0"/>
-                <a:ea typeface="Calibri" pitchFamily="34" charset="-122"/>
-                <a:cs typeface="Calibri" pitchFamily="34" charset="-120"/>
-              </a:rPr>
-              <a:t>→</a:t>
-            </a:r>
-            <a:endParaRPr lang="en-US" sz="2000" dirty="0"/>
-          </a:p>
-        </p:txBody>
-      </p:sp>
-      <p:sp>
-        <p:nvSpPr>
-          <p:cNvPr id="18" name="Shape 13"/>
-          <p:cNvSpPr/>
-          <p:nvPr/>
-        </p:nvSpPr>
-        <p:spPr>
-          <a:xfrm>
-            <a:off x="4411066" y="2331720"/>
-            <a:ext cx="1572768" cy="2103120"/>
-          </a:xfrm>
-          <a:prstGeom prst="roundRect">
-            <a:avLst>
-              <a:gd name="adj" fmla="val 4651"/>
-            </a:avLst>
-          </a:prstGeom>
-          <a:solidFill>
-            <a:srgbClr val="FFFFFF"/>
-          </a:solidFill>
-          <a:ln/>
-          <a:effectLst>
-            <a:outerShdw blurRad="101600" dist="38100" dir="5400000" algn="bl" rotWithShape="0">
-              <a:srgbClr val="000000">
-                <a:alpha val="10000"/>
-              </a:srgbClr>
-            </a:outerShdw>
-          </a:effectLst>
-        </p:spPr>
-        <p:txBody>
-          <a:bodyPr/>
-          <a:lstStyle/>
-          <a:p>
-            <a:endParaRPr/>
-          </a:p>
-        </p:txBody>
-      </p:sp>
-      <p:sp>
-        <p:nvSpPr>
-          <p:cNvPr id="19" name="Shape 14"/>
-          <p:cNvSpPr/>
-          <p:nvPr/>
-        </p:nvSpPr>
-        <p:spPr>
-          <a:xfrm>
-            <a:off x="4941418" y="2496312"/>
-            <a:ext cx="512064" cy="512064"/>
-          </a:xfrm>
-          <a:prstGeom prst="ellipse">
-            <a:avLst/>
-          </a:prstGeom>
-          <a:solidFill>
-            <a:srgbClr val="B8563A"/>
-          </a:solidFill>
-          <a:ln/>
-        </p:spPr>
-        <p:txBody>
-          <a:bodyPr/>
-          <a:lstStyle/>
-          <a:p>
-            <a:endParaRPr/>
-          </a:p>
-        </p:txBody>
-      </p:sp>
-      <p:pic>
-        <p:nvPicPr>
-          <p:cNvPr id="20" name="Image 3" descr="preencoded.png"/>
-          <p:cNvPicPr>
-            <a:picLocks noChangeAspect="1"/>
-          </p:cNvPicPr>
-          <p:nvPr/>
-        </p:nvPicPr>
-        <p:blipFill>
-          <a:blip r:embed="rId6"/>
-          <a:stretch>
-            <a:fillRect/>
-          </a:stretch>
-        </p:blipFill>
-        <p:spPr>
-          <a:xfrm>
-            <a:off x="5042002" y="2596896"/>
-            <a:ext cx="310896" cy="310896"/>
-          </a:xfrm>
-          <a:prstGeom prst="rect">
-            <a:avLst/>
-          </a:prstGeom>
-        </p:spPr>
-      </p:pic>
-      <p:sp>
-        <p:nvSpPr>
-          <p:cNvPr id="21" name="Text 15"/>
-          <p:cNvSpPr/>
-          <p:nvPr/>
-        </p:nvSpPr>
-        <p:spPr>
-          <a:xfrm>
-            <a:off x="4484218" y="3108960"/>
-            <a:ext cx="1426464" cy="1234440"/>
-          </a:xfrm>
-          <a:prstGeom prst="rect">
-            <a:avLst/>
-          </a:prstGeom>
-          <a:noFill/>
-          <a:ln/>
-        </p:spPr>
-        <p:txBody>
-          <a:bodyPr wrap="square" lIns="0" tIns="0" rIns="0" bIns="0" rtlCol="0" anchor="t"/>
-          <a:lstStyle/>
-          <a:p>
-            <a:pPr marL="0" indent="0" algn="ctr">
-              <a:buNone/>
-            </a:pPr>
-            <a:r>
-              <a:rPr lang="en-US" sz="1150" b="1" dirty="0">
-                <a:solidFill>
-                  <a:srgbClr val="2B2320"/>
-                </a:solidFill>
-                <a:latin typeface="Calibri" pitchFamily="34" charset="0"/>
-                <a:ea typeface="Calibri" pitchFamily="34" charset="-122"/>
-                <a:cs typeface="Calibri" pitchFamily="34" charset="-120"/>
-              </a:rPr>
-              <a:t>Ingeniería de</a:t>
-            </a:r>
-            <a:endParaRPr lang="en-US" sz="1150" dirty="0"/>
-          </a:p>
-          <a:p>
-            <a:pPr marL="0" indent="0" algn="ctr">
-              <a:buNone/>
-            </a:pPr>
-            <a:r>
-              <a:rPr lang="en-US" sz="1150" b="1" dirty="0">
-                <a:solidFill>
-                  <a:srgbClr val="2B2320"/>
-                </a:solidFill>
-                <a:latin typeface="Calibri" pitchFamily="34" charset="0"/>
-                <a:ea typeface="Calibri" pitchFamily="34" charset="-122"/>
-                <a:cs typeface="Calibri" pitchFamily="34" charset="-120"/>
-              </a:rPr>
-              <a:t>características</a:t>
-            </a:r>
-            <a:endParaRPr lang="en-US" sz="1150" dirty="0"/>
-          </a:p>
-        </p:txBody>
-      </p:sp>
-      <p:sp>
-        <p:nvSpPr>
-          <p:cNvPr id="22" name="Text 16"/>
-          <p:cNvSpPr/>
-          <p:nvPr/>
-        </p:nvSpPr>
-        <p:spPr>
-          <a:xfrm>
-            <a:off x="5983834" y="3154680"/>
-            <a:ext cx="224028" cy="457200"/>
-          </a:xfrm>
-          <a:prstGeom prst="rect">
-            <a:avLst/>
-          </a:prstGeom>
-          <a:noFill/>
-          <a:ln/>
-        </p:spPr>
-        <p:txBody>
-          <a:bodyPr wrap="square" lIns="0" tIns="0" rIns="0" bIns="0" rtlCol="0" anchor="ctr"/>
-          <a:lstStyle/>
-          <a:p>
-            <a:pPr marL="0" indent="0" algn="ctr">
-              <a:buNone/>
-            </a:pPr>
-            <a:r>
-              <a:rPr lang="en-US" sz="2000" dirty="0">
-                <a:solidFill>
-                  <a:srgbClr val="7A6F68"/>
-                </a:solidFill>
-                <a:latin typeface="Calibri" pitchFamily="34" charset="0"/>
-                <a:ea typeface="Calibri" pitchFamily="34" charset="-122"/>
-                <a:cs typeface="Calibri" pitchFamily="34" charset="-120"/>
-              </a:rPr>
-              <a:t>→</a:t>
-            </a:r>
-            <a:endParaRPr lang="en-US" sz="2000" dirty="0"/>
-          </a:p>
-        </p:txBody>
-      </p:sp>
-      <p:sp>
-        <p:nvSpPr>
-          <p:cNvPr id="23" name="Shape 17"/>
-          <p:cNvSpPr/>
-          <p:nvPr/>
-        </p:nvSpPr>
-        <p:spPr>
-          <a:xfrm>
-            <a:off x="6207862" y="2331720"/>
-            <a:ext cx="1572768" cy="2103120"/>
-          </a:xfrm>
-          <a:prstGeom prst="roundRect">
-            <a:avLst>
-              <a:gd name="adj" fmla="val 4651"/>
-            </a:avLst>
-          </a:prstGeom>
-          <a:solidFill>
-            <a:srgbClr val="FFFFFF"/>
-          </a:solidFill>
-          <a:ln/>
-          <a:effectLst>
-            <a:outerShdw blurRad="101600" dist="38100" dir="5400000" algn="bl" rotWithShape="0">
-              <a:srgbClr val="000000">
-                <a:alpha val="10000"/>
-              </a:srgbClr>
-            </a:outerShdw>
-          </a:effectLst>
-        </p:spPr>
-        <p:txBody>
-          <a:bodyPr/>
-          <a:lstStyle/>
-          <a:p>
-            <a:endParaRPr/>
-          </a:p>
-        </p:txBody>
-      </p:sp>
-      <p:sp>
-        <p:nvSpPr>
-          <p:cNvPr id="24" name="Shape 18"/>
-          <p:cNvSpPr/>
-          <p:nvPr/>
-        </p:nvSpPr>
-        <p:spPr>
-          <a:xfrm>
-            <a:off x="6738214" y="2496312"/>
-            <a:ext cx="512064" cy="512064"/>
-          </a:xfrm>
-          <a:prstGeom prst="ellipse">
-            <a:avLst/>
-          </a:prstGeom>
-          <a:solidFill>
-            <a:srgbClr val="B8563A"/>
-          </a:solidFill>
-          <a:ln/>
-        </p:spPr>
-        <p:txBody>
-          <a:bodyPr/>
-          <a:lstStyle/>
-          <a:p>
-            <a:endParaRPr/>
-          </a:p>
-        </p:txBody>
-      </p:sp>
-      <p:pic>
-        <p:nvPicPr>
-          <p:cNvPr id="25" name="Image 4" descr="preencoded.png"/>
-          <p:cNvPicPr>
-            <a:picLocks noChangeAspect="1"/>
-          </p:cNvPicPr>
-          <p:nvPr/>
-        </p:nvPicPr>
-        <p:blipFill>
-          <a:blip r:embed="rId7"/>
-          <a:stretch>
-            <a:fillRect/>
-          </a:stretch>
-        </p:blipFill>
-        <p:spPr>
-          <a:xfrm>
-            <a:off x="6838798" y="2596896"/>
-            <a:ext cx="310896" cy="310896"/>
-          </a:xfrm>
-          <a:prstGeom prst="rect">
-            <a:avLst/>
-          </a:prstGeom>
-        </p:spPr>
-      </p:pic>
-      <p:sp>
-        <p:nvSpPr>
-          <p:cNvPr id="26" name="Text 19"/>
-          <p:cNvSpPr/>
-          <p:nvPr/>
-        </p:nvSpPr>
-        <p:spPr>
-          <a:xfrm>
-            <a:off x="6281014" y="3108960"/>
-            <a:ext cx="1426464" cy="1234440"/>
-          </a:xfrm>
-          <a:prstGeom prst="rect">
-            <a:avLst/>
-          </a:prstGeom>
-          <a:noFill/>
-          <a:ln/>
-        </p:spPr>
-        <p:txBody>
-          <a:bodyPr wrap="square" lIns="0" tIns="0" rIns="0" bIns="0" rtlCol="0" anchor="t"/>
-          <a:lstStyle/>
-          <a:p>
-            <a:pPr marL="0" indent="0" algn="ctr">
-              <a:buNone/>
-            </a:pPr>
-            <a:r>
-              <a:rPr lang="en-US" sz="1150" b="1" dirty="0">
-                <a:solidFill>
-                  <a:srgbClr val="2B2320"/>
-                </a:solidFill>
-                <a:latin typeface="Calibri" pitchFamily="34" charset="0"/>
-                <a:ea typeface="Calibri" pitchFamily="34" charset="-122"/>
-                <a:cs typeface="Calibri" pitchFamily="34" charset="-120"/>
-              </a:rPr>
-              <a:t>Modelización</a:t>
-            </a:r>
-            <a:endParaRPr lang="en-US" sz="1150" dirty="0"/>
-          </a:p>
-          <a:p>
-            <a:pPr marL="0" indent="0" algn="ctr">
-              <a:buNone/>
-            </a:pPr>
-            <a:r>
-              <a:rPr lang="en-US" sz="1150" b="1" dirty="0">
-                <a:solidFill>
-                  <a:srgbClr val="2B2320"/>
-                </a:solidFill>
-                <a:latin typeface="Calibri" pitchFamily="34" charset="0"/>
-                <a:ea typeface="Calibri" pitchFamily="34" charset="-122"/>
-                <a:cs typeface="Calibri" pitchFamily="34" charset="-120"/>
-              </a:rPr>
-              <a:t>(4 modelos + CV)</a:t>
-            </a:r>
-            <a:endParaRPr lang="en-US" sz="1150" dirty="0"/>
-          </a:p>
-        </p:txBody>
-      </p:sp>
-      <p:sp>
-        <p:nvSpPr>
-          <p:cNvPr id="27" name="Text 20"/>
-          <p:cNvSpPr/>
-          <p:nvPr/>
-        </p:nvSpPr>
-        <p:spPr>
-          <a:xfrm>
-            <a:off x="7780630" y="3154680"/>
-            <a:ext cx="224028" cy="457200"/>
-          </a:xfrm>
-          <a:prstGeom prst="rect">
-            <a:avLst/>
-          </a:prstGeom>
-          <a:noFill/>
-          <a:ln/>
-        </p:spPr>
-        <p:txBody>
-          <a:bodyPr wrap="square" lIns="0" tIns="0" rIns="0" bIns="0" rtlCol="0" anchor="ctr"/>
-          <a:lstStyle/>
-          <a:p>
-            <a:pPr marL="0" indent="0" algn="ctr">
-              <a:buNone/>
-            </a:pPr>
-            <a:r>
-              <a:rPr lang="en-US" sz="2000" dirty="0">
-                <a:solidFill>
-                  <a:srgbClr val="7A6F68"/>
-                </a:solidFill>
-                <a:latin typeface="Calibri" pitchFamily="34" charset="0"/>
-                <a:ea typeface="Calibri" pitchFamily="34" charset="-122"/>
-                <a:cs typeface="Calibri" pitchFamily="34" charset="-120"/>
-              </a:rPr>
-              <a:t>→</a:t>
-            </a:r>
-            <a:endParaRPr lang="en-US" sz="2000" dirty="0"/>
-          </a:p>
-        </p:txBody>
-      </p:sp>
-      <p:sp>
-        <p:nvSpPr>
-          <p:cNvPr id="28" name="Shape 21"/>
-          <p:cNvSpPr/>
-          <p:nvPr/>
-        </p:nvSpPr>
-        <p:spPr>
-          <a:xfrm>
-            <a:off x="8004658" y="2331720"/>
-            <a:ext cx="1572768" cy="2103120"/>
-          </a:xfrm>
-          <a:prstGeom prst="roundRect">
-            <a:avLst>
-              <a:gd name="adj" fmla="val 4651"/>
-            </a:avLst>
-          </a:prstGeom>
-          <a:solidFill>
-            <a:srgbClr val="FFFFFF"/>
-          </a:solidFill>
-          <a:ln/>
-          <a:effectLst>
-            <a:outerShdw blurRad="101600" dist="38100" dir="5400000" algn="bl" rotWithShape="0">
-              <a:srgbClr val="000000">
-                <a:alpha val="10000"/>
-              </a:srgbClr>
-            </a:outerShdw>
-          </a:effectLst>
-        </p:spPr>
-        <p:txBody>
-          <a:bodyPr/>
-          <a:lstStyle/>
-          <a:p>
-            <a:endParaRPr/>
-          </a:p>
-        </p:txBody>
-      </p:sp>
-      <p:sp>
-        <p:nvSpPr>
-          <p:cNvPr id="29" name="Shape 22"/>
-          <p:cNvSpPr/>
-          <p:nvPr/>
-        </p:nvSpPr>
-        <p:spPr>
-          <a:xfrm>
-            <a:off x="8535010" y="2496312"/>
-            <a:ext cx="512064" cy="512064"/>
-          </a:xfrm>
-          <a:prstGeom prst="ellipse">
-            <a:avLst/>
-          </a:prstGeom>
-          <a:solidFill>
-            <a:srgbClr val="B8563A"/>
-          </a:solidFill>
-          <a:ln/>
-        </p:spPr>
-        <p:txBody>
-          <a:bodyPr/>
-          <a:lstStyle/>
-          <a:p>
-            <a:endParaRPr/>
-          </a:p>
-        </p:txBody>
-      </p:sp>
-      <p:pic>
-        <p:nvPicPr>
-          <p:cNvPr id="30" name="Image 5" descr="preencoded.png"/>
-          <p:cNvPicPr>
-            <a:picLocks noChangeAspect="1"/>
-          </p:cNvPicPr>
-          <p:nvPr/>
-        </p:nvPicPr>
-        <p:blipFill>
-          <a:blip r:embed="rId8"/>
-          <a:stretch>
-            <a:fillRect/>
-          </a:stretch>
-        </p:blipFill>
-        <p:spPr>
-          <a:xfrm>
-            <a:off x="8635594" y="2596896"/>
-            <a:ext cx="310896" cy="310896"/>
-          </a:xfrm>
-          <a:prstGeom prst="rect">
-            <a:avLst/>
-          </a:prstGeom>
-        </p:spPr>
-      </p:pic>
-      <p:sp>
-        <p:nvSpPr>
-          <p:cNvPr id="31" name="Text 23"/>
-          <p:cNvSpPr/>
-          <p:nvPr/>
-        </p:nvSpPr>
-        <p:spPr>
-          <a:xfrm>
-            <a:off x="8077810" y="3108960"/>
-            <a:ext cx="1426464" cy="1234440"/>
-          </a:xfrm>
-          <a:prstGeom prst="rect">
-            <a:avLst/>
-          </a:prstGeom>
-          <a:noFill/>
-          <a:ln/>
-        </p:spPr>
-        <p:txBody>
-          <a:bodyPr wrap="square" lIns="0" tIns="0" rIns="0" bIns="0" rtlCol="0" anchor="t"/>
-          <a:lstStyle/>
-          <a:p>
-            <a:pPr marL="0" indent="0" algn="ctr">
-              <a:buNone/>
-            </a:pPr>
-            <a:r>
-              <a:rPr lang="en-US" sz="1150" b="1" dirty="0">
-                <a:solidFill>
-                  <a:srgbClr val="2B2320"/>
-                </a:solidFill>
-                <a:latin typeface="Calibri" pitchFamily="34" charset="0"/>
-                <a:ea typeface="Calibri" pitchFamily="34" charset="-122"/>
-                <a:cs typeface="Calibri" pitchFamily="34" charset="-120"/>
-              </a:rPr>
-              <a:t>Categorización</a:t>
-            </a:r>
-            <a:endParaRPr lang="en-US" sz="1150" dirty="0"/>
-          </a:p>
-          <a:p>
-            <a:pPr marL="0" indent="0" algn="ctr">
-              <a:buNone/>
-            </a:pPr>
-            <a:r>
-              <a:rPr lang="en-US" sz="1150" b="1" dirty="0">
-                <a:solidFill>
-                  <a:srgbClr val="2B2320"/>
-                </a:solidFill>
-                <a:latin typeface="Calibri" pitchFamily="34" charset="0"/>
-                <a:ea typeface="Calibri" pitchFamily="34" charset="-122"/>
-                <a:cs typeface="Calibri" pitchFamily="34" charset="-120"/>
-              </a:rPr>
-              <a:t>determinista</a:t>
-            </a:r>
-            <a:endParaRPr lang="en-US" sz="1150" dirty="0"/>
-          </a:p>
-        </p:txBody>
-      </p:sp>
-      <p:sp>
-        <p:nvSpPr>
-          <p:cNvPr id="32" name="Text 24"/>
-          <p:cNvSpPr/>
-          <p:nvPr/>
-        </p:nvSpPr>
-        <p:spPr>
-          <a:xfrm>
-            <a:off x="9577426" y="3154680"/>
-            <a:ext cx="224028" cy="457200"/>
-          </a:xfrm>
-          <a:prstGeom prst="rect">
-            <a:avLst/>
-          </a:prstGeom>
-          <a:noFill/>
-          <a:ln/>
-        </p:spPr>
-        <p:txBody>
-          <a:bodyPr wrap="square" lIns="0" tIns="0" rIns="0" bIns="0" rtlCol="0" anchor="ctr"/>
-          <a:lstStyle/>
-          <a:p>
-            <a:pPr marL="0" indent="0" algn="ctr">
-              <a:buNone/>
-            </a:pPr>
-            <a:r>
-              <a:rPr lang="en-US" sz="2000" dirty="0">
-                <a:solidFill>
-                  <a:srgbClr val="7A6F68"/>
-                </a:solidFill>
-                <a:latin typeface="Calibri" pitchFamily="34" charset="0"/>
-                <a:ea typeface="Calibri" pitchFamily="34" charset="-122"/>
-                <a:cs typeface="Calibri" pitchFamily="34" charset="-120"/>
-              </a:rPr>
-              <a:t>→</a:t>
-            </a:r>
-            <a:endParaRPr lang="en-US" sz="2000" dirty="0"/>
-          </a:p>
-        </p:txBody>
-      </p:sp>
-      <p:sp>
-        <p:nvSpPr>
-          <p:cNvPr id="33" name="Shape 25"/>
-          <p:cNvSpPr/>
-          <p:nvPr/>
-        </p:nvSpPr>
-        <p:spPr>
-          <a:xfrm>
-            <a:off x="9801454" y="2331720"/>
-            <a:ext cx="1572768" cy="2103120"/>
-          </a:xfrm>
-          <a:prstGeom prst="roundRect">
-            <a:avLst>
-              <a:gd name="adj" fmla="val 4651"/>
-            </a:avLst>
-          </a:prstGeom>
-          <a:solidFill>
-            <a:srgbClr val="FFFFFF"/>
-          </a:solidFill>
-          <a:ln/>
-          <a:effectLst>
-            <a:outerShdw blurRad="101600" dist="38100" dir="5400000" algn="bl" rotWithShape="0">
-              <a:srgbClr val="000000">
-                <a:alpha val="10000"/>
-              </a:srgbClr>
-            </a:outerShdw>
-          </a:effectLst>
-        </p:spPr>
-        <p:txBody>
-          <a:bodyPr/>
-          <a:lstStyle/>
-          <a:p>
-            <a:endParaRPr/>
-          </a:p>
-        </p:txBody>
-      </p:sp>
-      <p:sp>
-        <p:nvSpPr>
-          <p:cNvPr id="34" name="Shape 26"/>
-          <p:cNvSpPr/>
-          <p:nvPr/>
-        </p:nvSpPr>
-        <p:spPr>
-          <a:xfrm>
-            <a:off x="10331806" y="2496312"/>
-            <a:ext cx="512064" cy="512064"/>
-          </a:xfrm>
-          <a:prstGeom prst="ellipse">
-            <a:avLst/>
-          </a:prstGeom>
-          <a:solidFill>
-            <a:srgbClr val="B8563A"/>
-          </a:solidFill>
-          <a:ln/>
-        </p:spPr>
-        <p:txBody>
-          <a:bodyPr/>
-          <a:lstStyle/>
-          <a:p>
-            <a:endParaRPr/>
-          </a:p>
-        </p:txBody>
-      </p:sp>
-      <p:pic>
-        <p:nvPicPr>
-          <p:cNvPr id="35" name="Image 6" descr="preencoded.png"/>
-          <p:cNvPicPr>
-            <a:picLocks noChangeAspect="1"/>
-          </p:cNvPicPr>
-          <p:nvPr/>
-        </p:nvPicPr>
-        <p:blipFill>
-          <a:blip r:embed="rId9"/>
-          <a:stretch>
-            <a:fillRect/>
-          </a:stretch>
-        </p:blipFill>
-        <p:spPr>
-          <a:xfrm>
-            <a:off x="10432390" y="2596896"/>
-            <a:ext cx="310896" cy="310896"/>
-          </a:xfrm>
-          <a:prstGeom prst="rect">
-            <a:avLst/>
-          </a:prstGeom>
-        </p:spPr>
-      </p:pic>
-      <p:sp>
-        <p:nvSpPr>
-          <p:cNvPr id="36" name="Text 27"/>
-          <p:cNvSpPr/>
-          <p:nvPr/>
-        </p:nvSpPr>
-        <p:spPr>
-          <a:xfrm>
-            <a:off x="9874606" y="3108960"/>
-            <a:ext cx="1426464" cy="1234440"/>
-          </a:xfrm>
-          <a:prstGeom prst="rect">
-            <a:avLst/>
-          </a:prstGeom>
-          <a:noFill/>
-          <a:ln/>
-        </p:spPr>
-        <p:txBody>
-          <a:bodyPr wrap="square" lIns="0" tIns="0" rIns="0" bIns="0" rtlCol="0" anchor="t"/>
-          <a:lstStyle/>
-          <a:p>
-            <a:pPr marL="0" indent="0" algn="ctr">
-              <a:buNone/>
-            </a:pPr>
-            <a:r>
-              <a:rPr lang="en-US" sz="1150" b="1" dirty="0">
-                <a:solidFill>
-                  <a:srgbClr val="2B2320"/>
-                </a:solidFill>
-                <a:latin typeface="Calibri" pitchFamily="34" charset="0"/>
-                <a:ea typeface="Calibri" pitchFamily="34" charset="-122"/>
-                <a:cs typeface="Calibri" pitchFamily="34" charset="-120"/>
-              </a:rPr>
-              <a:t>Aplicación web</a:t>
-            </a:r>
-            <a:endParaRPr lang="en-US" sz="1150" dirty="0"/>
-          </a:p>
-          <a:p>
-            <a:pPr marL="0" indent="0" algn="ctr">
-              <a:buNone/>
-            </a:pPr>
-            <a:r>
-              <a:rPr lang="en-US" sz="1150" b="1" dirty="0">
-                <a:solidFill>
-                  <a:srgbClr val="2B2320"/>
-                </a:solidFill>
-                <a:latin typeface="Calibri" pitchFamily="34" charset="0"/>
-                <a:ea typeface="Calibri" pitchFamily="34" charset="-122"/>
-                <a:cs typeface="Calibri" pitchFamily="34" charset="-120"/>
-              </a:rPr>
-              <a:t>(Streamlit)</a:t>
-            </a:r>
-            <a:endParaRPr lang="en-US" sz="1150" dirty="0"/>
-          </a:p>
-        </p:txBody>
-      </p:sp>
-      <p:sp>
-        <p:nvSpPr>
-          <p:cNvPr id="37" name="Text 28"/>
-          <p:cNvSpPr/>
-          <p:nvPr/>
-        </p:nvSpPr>
-        <p:spPr>
-          <a:xfrm>
-            <a:off x="1280160" y="4709160"/>
-            <a:ext cx="9601200" cy="640080"/>
-          </a:xfrm>
-          <a:prstGeom prst="rect">
-            <a:avLst/>
-          </a:prstGeom>
-          <a:noFill/>
-          <a:ln/>
-        </p:spPr>
-        <p:txBody>
-          <a:bodyPr wrap="square" lIns="0" tIns="0" rIns="0" bIns="0" rtlCol="0" anchor="t"/>
-          <a:lstStyle/>
-          <a:p>
-            <a:pPr marL="0" indent="0" algn="ctr">
-              <a:buNone/>
-            </a:pPr>
-            <a:r>
-              <a:rPr lang="en-US" sz="1300" i="1" dirty="0">
-                <a:solidFill>
-                  <a:srgbClr val="7A6F68"/>
-                </a:solidFill>
-                <a:latin typeface="Calibri" pitchFamily="34" charset="0"/>
-                <a:ea typeface="Calibri" pitchFamily="34" charset="-122"/>
-                <a:cs typeface="Calibri" pitchFamily="34" charset="-120"/>
-              </a:rPr>
-              <a:t>Un único sistema reproducible: los codificadores, el escalador y el modelo comparten exactamente el mismo espacio de características entre entrenamiento y producción.</a:t>
-            </a:r>
-            <a:endParaRPr lang="en-US" sz="1300" dirty="0"/>
-          </a:p>
-        </p:txBody>
-      </p:sp>
-    </p:spTree>
-  </p:cSld>
-  <p:clrMapOvr>
-    <a:masterClrMapping/>
-  </p:clrMapOvr>
-</p:sld>
-</file>
-
-<file path=ppt/slides/slide7.xml><?xml version="1.0" encoding="utf-8"?>
 <p:sld xmlns:a="http://schemas.openxmlformats.org/drawingml/2006/main" xmlns:r="http://schemas.openxmlformats.org/officeDocument/2006/relationships" xmlns:p="http://schemas.openxmlformats.org/presentationml/2006/main">
   <p:cSld name="Slide 7">
     <p:bg>
@@ -30107,7 +27969,7 @@
                 <a:ea typeface="Calibri" pitchFamily="34" charset="-122"/>
                 <a:cs typeface="Calibri" pitchFamily="34" charset="-120"/>
               </a:rPr>
-              <a:t>7 / 24</a:t>
+              <a:t>6 / 23</a:t>
             </a:r>
             <a:endParaRPr lang="en-US" sz="900" dirty="0"/>
           </a:p>
@@ -30907,7 +28769,7 @@
 </p:sld>
 </file>
 
-<file path=ppt/slides/slide8.xml><?xml version="1.0" encoding="utf-8"?>
+<file path=ppt/slides/slide7.xml><?xml version="1.0" encoding="utf-8"?>
 <p:sld xmlns:a="http://schemas.openxmlformats.org/drawingml/2006/main" xmlns:r="http://schemas.openxmlformats.org/officeDocument/2006/relationships" xmlns:p="http://schemas.openxmlformats.org/presentationml/2006/main">
   <p:cSld name="Slide 8">
     <p:bg>
@@ -31004,7 +28866,7 @@
                 <a:ea typeface="Calibri" pitchFamily="34" charset="-122"/>
                 <a:cs typeface="Calibri" pitchFamily="34" charset="-120"/>
               </a:rPr>
-              <a:t>8 / 24</a:t>
+              <a:t>7 / 23</a:t>
             </a:r>
             <a:endParaRPr lang="en-US" sz="900" dirty="0"/>
           </a:p>
@@ -32800,7 +30662,7 @@
 </p:sld>
 </file>
 
-<file path=ppt/slides/slide9.xml><?xml version="1.0" encoding="utf-8"?>
+<file path=ppt/slides/slide8.xml><?xml version="1.0" encoding="utf-8"?>
 <p:sld xmlns:a="http://schemas.openxmlformats.org/drawingml/2006/main" xmlns:r="http://schemas.openxmlformats.org/officeDocument/2006/relationships" xmlns:p="http://schemas.openxmlformats.org/presentationml/2006/main">
   <p:cSld name="Slide 9">
     <p:bg>
@@ -32897,7 +30759,7 @@
                 <a:ea typeface="Calibri" pitchFamily="34" charset="-122"/>
                 <a:cs typeface="Calibri" pitchFamily="34" charset="-120"/>
               </a:rPr>
-              <a:t>9 / 24</a:t>
+              <a:t>8 / 23</a:t>
             </a:r>
             <a:endParaRPr lang="en-US" sz="900" dirty="0"/>
           </a:p>
@@ -34506,6 +32368,1702 @@
               <a:t>→</a:t>
             </a:r>
             <a:endParaRPr lang="en-US" sz="2400" dirty="0"/>
+          </a:p>
+        </p:txBody>
+      </p:sp>
+    </p:spTree>
+  </p:cSld>
+  <p:clrMapOvr>
+    <a:masterClrMapping/>
+  </p:clrMapOvr>
+</p:sld>
+</file>
+
+<file path=ppt/slides/slide9.xml><?xml version="1.0" encoding="utf-8"?>
+<p:sld xmlns:a="http://schemas.openxmlformats.org/drawingml/2006/main" xmlns:r="http://schemas.openxmlformats.org/officeDocument/2006/relationships" xmlns:p="http://schemas.openxmlformats.org/presentationml/2006/main">
+  <p:cSld name="Slide 10">
+    <p:bg>
+      <p:bgPr>
+        <a:solidFill>
+          <a:srgbClr val="FFFFFF"/>
+        </a:solidFill>
+        <a:effectLst/>
+      </p:bgPr>
+    </p:bg>
+    <p:spTree>
+      <p:nvGrpSpPr>
+        <p:cNvPr id="1" name=""/>
+        <p:cNvGrpSpPr/>
+        <p:nvPr/>
+      </p:nvGrpSpPr>
+      <p:grpSpPr>
+        <a:xfrm>
+          <a:off x="0" y="0"/>
+          <a:ext cx="0" cy="0"/>
+          <a:chOff x="0" y="0"/>
+          <a:chExt cx="0" cy="0"/>
+        </a:xfrm>
+      </p:grpSpPr>
+      <p:sp>
+        <p:nvSpPr>
+          <p:cNvPr id="2" name="Text 0"/>
+          <p:cNvSpPr/>
+          <p:nvPr/>
+        </p:nvSpPr>
+        <p:spPr>
+          <a:xfrm>
+            <a:off x="548640" y="6473952"/>
+            <a:ext cx="7315200" cy="274320"/>
+          </a:xfrm>
+          <a:prstGeom prst="rect">
+            <a:avLst/>
+          </a:prstGeom>
+          <a:noFill/>
+          <a:ln/>
+        </p:spPr>
+        <p:txBody>
+          <a:bodyPr wrap="square" lIns="0" tIns="0" rIns="0" bIns="0" rtlCol="0" anchor="ctr"/>
+          <a:lstStyle/>
+          <a:p>
+            <a:pPr marL="0" indent="0" algn="l">
+              <a:buNone/>
+            </a:pPr>
+            <a:r>
+              <a:rPr lang="en-US" sz="900" dirty="0">
+                <a:solidFill>
+                  <a:srgbClr val="7A6F68"/>
+                </a:solidFill>
+                <a:latin typeface="Calibri" pitchFamily="34" charset="0"/>
+                <a:ea typeface="Calibri" pitchFamily="34" charset="-122"/>
+                <a:cs typeface="Calibri" pitchFamily="34" charset="-120"/>
+              </a:rPr>
+              <a:t>Detección de Alojamientos Turísticos con Precio Real Inferior — TFG</a:t>
+            </a:r>
+            <a:endParaRPr lang="en-US" sz="900" dirty="0"/>
+          </a:p>
+        </p:txBody>
+      </p:sp>
+      <p:sp>
+        <p:nvSpPr>
+          <p:cNvPr id="3" name="Text 1"/>
+          <p:cNvSpPr/>
+          <p:nvPr/>
+        </p:nvSpPr>
+        <p:spPr>
+          <a:xfrm>
+            <a:off x="10545775" y="6473952"/>
+            <a:ext cx="1097280" cy="274320"/>
+          </a:xfrm>
+          <a:prstGeom prst="rect">
+            <a:avLst/>
+          </a:prstGeom>
+          <a:noFill/>
+          <a:ln/>
+        </p:spPr>
+        <p:txBody>
+          <a:bodyPr wrap="square" lIns="0" tIns="0" rIns="0" bIns="0" rtlCol="0" anchor="ctr"/>
+          <a:lstStyle/>
+          <a:p>
+            <a:pPr marL="0" indent="0" algn="r">
+              <a:buNone/>
+            </a:pPr>
+            <a:r>
+              <a:rPr lang="en-US" sz="900" dirty="0">
+                <a:solidFill>
+                  <a:srgbClr val="7A6F68"/>
+                </a:solidFill>
+                <a:latin typeface="Calibri" pitchFamily="34" charset="0"/>
+                <a:ea typeface="Calibri" pitchFamily="34" charset="-122"/>
+                <a:cs typeface="Calibri" pitchFamily="34" charset="-120"/>
+              </a:rPr>
+              <a:t>9 / 23</a:t>
+            </a:r>
+            <a:endParaRPr lang="en-US" sz="900" dirty="0"/>
+          </a:p>
+        </p:txBody>
+      </p:sp>
+      <p:sp>
+        <p:nvSpPr>
+          <p:cNvPr id="4" name="Shape 2"/>
+          <p:cNvSpPr/>
+          <p:nvPr/>
+        </p:nvSpPr>
+        <p:spPr>
+          <a:xfrm>
+            <a:off x="548640" y="457200"/>
+            <a:ext cx="566928" cy="566928"/>
+          </a:xfrm>
+          <a:prstGeom prst="ellipse">
+            <a:avLst/>
+          </a:prstGeom>
+          <a:solidFill>
+            <a:srgbClr val="B8563A"/>
+          </a:solidFill>
+          <a:ln/>
+        </p:spPr>
+        <p:txBody>
+          <a:bodyPr/>
+          <a:lstStyle/>
+          <a:p>
+            <a:endParaRPr/>
+          </a:p>
+        </p:txBody>
+      </p:sp>
+      <p:sp>
+        <p:nvSpPr>
+          <p:cNvPr id="5" name="Text 3"/>
+          <p:cNvSpPr/>
+          <p:nvPr/>
+        </p:nvSpPr>
+        <p:spPr>
+          <a:xfrm>
+            <a:off x="1316736" y="420624"/>
+            <a:ext cx="9601200" cy="256032"/>
+          </a:xfrm>
+          <a:prstGeom prst="rect">
+            <a:avLst/>
+          </a:prstGeom>
+          <a:noFill/>
+          <a:ln/>
+        </p:spPr>
+        <p:txBody>
+          <a:bodyPr wrap="square" lIns="0" tIns="0" rIns="0" bIns="0" rtlCol="0" anchor="ctr"/>
+          <a:lstStyle/>
+          <a:p>
+            <a:pPr marL="0" indent="0">
+              <a:buNone/>
+            </a:pPr>
+            <a:r>
+              <a:rPr lang="en-US" sz="1100" b="1" kern="0" spc="200" dirty="0">
+                <a:solidFill>
+                  <a:srgbClr val="7A6F68"/>
+                </a:solidFill>
+                <a:latin typeface="Calibri" pitchFamily="34" charset="0"/>
+                <a:ea typeface="Calibri" pitchFamily="34" charset="-122"/>
+                <a:cs typeface="Calibri" pitchFamily="34" charset="-120"/>
+              </a:rPr>
+              <a:t>DATOS Y METODOLOGÍA</a:t>
+            </a:r>
+            <a:endParaRPr lang="en-US" sz="1100" dirty="0"/>
+          </a:p>
+        </p:txBody>
+      </p:sp>
+      <p:sp>
+        <p:nvSpPr>
+          <p:cNvPr id="6" name="Text 4"/>
+          <p:cNvSpPr/>
+          <p:nvPr/>
+        </p:nvSpPr>
+        <p:spPr>
+          <a:xfrm>
+            <a:off x="1316736" y="640080"/>
+            <a:ext cx="9966960" cy="640080"/>
+          </a:xfrm>
+          <a:prstGeom prst="rect">
+            <a:avLst/>
+          </a:prstGeom>
+          <a:noFill/>
+          <a:ln/>
+        </p:spPr>
+        <p:txBody>
+          <a:bodyPr wrap="square" lIns="0" tIns="0" rIns="0" bIns="0" rtlCol="0" anchor="t"/>
+          <a:lstStyle/>
+          <a:p>
+            <a:pPr marL="0" indent="0">
+              <a:buNone/>
+            </a:pPr>
+            <a:r>
+              <a:rPr lang="en-US" sz="2800" b="1" dirty="0">
+                <a:solidFill>
+                  <a:srgbClr val="2B2320"/>
+                </a:solidFill>
+                <a:latin typeface="Cambria" pitchFamily="34" charset="0"/>
+                <a:ea typeface="Cambria" pitchFamily="34" charset="-122"/>
+                <a:cs typeface="Cambria" pitchFamily="34" charset="-120"/>
+              </a:rPr>
+              <a:t>Ingeniería de características</a:t>
+            </a:r>
+            <a:endParaRPr lang="en-US" sz="2800" dirty="0"/>
+          </a:p>
+        </p:txBody>
+      </p:sp>
+      <p:pic>
+        <p:nvPicPr>
+          <p:cNvPr id="7" name="Image 0" descr="preencoded.png"/>
+          <p:cNvPicPr>
+            <a:picLocks noChangeAspect="1"/>
+          </p:cNvPicPr>
+          <p:nvPr/>
+        </p:nvPicPr>
+        <p:blipFill>
+          <a:blip r:embed="rId3"/>
+          <a:stretch>
+            <a:fillRect/>
+          </a:stretch>
+        </p:blipFill>
+        <p:spPr>
+          <a:xfrm>
+            <a:off x="656356" y="564916"/>
+            <a:ext cx="351495" cy="351495"/>
+          </a:xfrm>
+          <a:prstGeom prst="rect">
+            <a:avLst/>
+          </a:prstGeom>
+        </p:spPr>
+      </p:pic>
+      <p:sp>
+        <p:nvSpPr>
+          <p:cNvPr id="8" name="Text 5"/>
+          <p:cNvSpPr/>
+          <p:nvPr/>
+        </p:nvSpPr>
+        <p:spPr>
+          <a:xfrm>
+            <a:off x="548640" y="1417320"/>
+            <a:ext cx="5486400" cy="365760"/>
+          </a:xfrm>
+          <a:prstGeom prst="rect">
+            <a:avLst/>
+          </a:prstGeom>
+          <a:noFill/>
+          <a:ln/>
+        </p:spPr>
+        <p:txBody>
+          <a:bodyPr wrap="square" lIns="0" tIns="0" rIns="0" bIns="0" rtlCol="0" anchor="ctr"/>
+          <a:lstStyle/>
+          <a:p>
+            <a:pPr marL="0" indent="0">
+              <a:buNone/>
+            </a:pPr>
+            <a:r>
+              <a:rPr lang="en-US" sz="1300" b="1" dirty="0">
+                <a:solidFill>
+                  <a:srgbClr val="8C4029"/>
+                </a:solidFill>
+                <a:latin typeface="Calibri" pitchFamily="34" charset="0"/>
+                <a:ea typeface="Calibri" pitchFamily="34" charset="-122"/>
+                <a:cs typeface="Calibri" pitchFamily="34" charset="-120"/>
+              </a:rPr>
+              <a:t>12 servicios binarios extraídos por búsqueda de subcadenas en los campos de texto (API)</a:t>
+            </a:r>
+            <a:endParaRPr lang="en-US" sz="1300" dirty="0"/>
+          </a:p>
+        </p:txBody>
+      </p:sp>
+      <p:sp>
+        <p:nvSpPr>
+          <p:cNvPr id="9" name="Shape 6"/>
+          <p:cNvSpPr/>
+          <p:nvPr/>
+        </p:nvSpPr>
+        <p:spPr>
+          <a:xfrm>
+            <a:off x="548640" y="1874520"/>
+            <a:ext cx="1691640" cy="457200"/>
+          </a:xfrm>
+          <a:prstGeom prst="roundRect">
+            <a:avLst>
+              <a:gd name="adj" fmla="val 50000"/>
+            </a:avLst>
+          </a:prstGeom>
+          <a:solidFill>
+            <a:srgbClr val="F6EEE8"/>
+          </a:solidFill>
+          <a:ln w="12700">
+            <a:solidFill>
+              <a:srgbClr val="E7DDD3"/>
+            </a:solidFill>
+            <a:prstDash val="solid"/>
+          </a:ln>
+        </p:spPr>
+        <p:txBody>
+          <a:bodyPr/>
+          <a:lstStyle/>
+          <a:p>
+            <a:endParaRPr/>
+          </a:p>
+        </p:txBody>
+      </p:sp>
+      <p:sp>
+        <p:nvSpPr>
+          <p:cNvPr id="10" name="Text 7"/>
+          <p:cNvSpPr/>
+          <p:nvPr/>
+        </p:nvSpPr>
+        <p:spPr>
+          <a:xfrm>
+            <a:off x="548640" y="1874520"/>
+            <a:ext cx="1691640" cy="457200"/>
+          </a:xfrm>
+          <a:prstGeom prst="rect">
+            <a:avLst/>
+          </a:prstGeom>
+          <a:noFill/>
+          <a:ln/>
+        </p:spPr>
+        <p:txBody>
+          <a:bodyPr wrap="square" lIns="0" tIns="0" rIns="0" bIns="0" rtlCol="0" anchor="ctr"/>
+          <a:lstStyle/>
+          <a:p>
+            <a:pPr marL="0" indent="0" algn="ctr">
+              <a:buNone/>
+            </a:pPr>
+            <a:r>
+              <a:rPr lang="en-US" sz="1050" dirty="0">
+                <a:solidFill>
+                  <a:srgbClr val="2B2320"/>
+                </a:solidFill>
+                <a:latin typeface="Calibri" pitchFamily="34" charset="0"/>
+                <a:ea typeface="Calibri" pitchFamily="34" charset="-122"/>
+                <a:cs typeface="Calibri" pitchFamily="34" charset="-120"/>
+              </a:rPr>
+              <a:t>Parking</a:t>
+            </a:r>
+            <a:endParaRPr lang="en-US" sz="1050" dirty="0"/>
+          </a:p>
+        </p:txBody>
+      </p:sp>
+      <p:sp>
+        <p:nvSpPr>
+          <p:cNvPr id="11" name="Shape 8"/>
+          <p:cNvSpPr/>
+          <p:nvPr/>
+        </p:nvSpPr>
+        <p:spPr>
+          <a:xfrm>
+            <a:off x="2368296" y="1874520"/>
+            <a:ext cx="1691640" cy="457200"/>
+          </a:xfrm>
+          <a:prstGeom prst="roundRect">
+            <a:avLst>
+              <a:gd name="adj" fmla="val 50000"/>
+            </a:avLst>
+          </a:prstGeom>
+          <a:solidFill>
+            <a:srgbClr val="F6EEE8"/>
+          </a:solidFill>
+          <a:ln w="12700">
+            <a:solidFill>
+              <a:srgbClr val="E7DDD3"/>
+            </a:solidFill>
+            <a:prstDash val="solid"/>
+          </a:ln>
+        </p:spPr>
+        <p:txBody>
+          <a:bodyPr/>
+          <a:lstStyle/>
+          <a:p>
+            <a:endParaRPr/>
+          </a:p>
+        </p:txBody>
+      </p:sp>
+      <p:sp>
+        <p:nvSpPr>
+          <p:cNvPr id="12" name="Text 9"/>
+          <p:cNvSpPr/>
+          <p:nvPr/>
+        </p:nvSpPr>
+        <p:spPr>
+          <a:xfrm>
+            <a:off x="2368296" y="1874520"/>
+            <a:ext cx="1691640" cy="457200"/>
+          </a:xfrm>
+          <a:prstGeom prst="rect">
+            <a:avLst/>
+          </a:prstGeom>
+          <a:noFill/>
+          <a:ln/>
+        </p:spPr>
+        <p:txBody>
+          <a:bodyPr wrap="square" lIns="0" tIns="0" rIns="0" bIns="0" rtlCol="0" anchor="ctr"/>
+          <a:lstStyle/>
+          <a:p>
+            <a:pPr marL="0" indent="0" algn="ctr">
+              <a:buNone/>
+            </a:pPr>
+            <a:r>
+              <a:rPr lang="en-US" sz="1050" dirty="0">
+                <a:solidFill>
+                  <a:srgbClr val="2B2320"/>
+                </a:solidFill>
+                <a:latin typeface="Calibri" pitchFamily="34" charset="0"/>
+                <a:ea typeface="Calibri" pitchFamily="34" charset="-122"/>
+                <a:cs typeface="Calibri" pitchFamily="34" charset="-120"/>
+              </a:rPr>
+              <a:t>Parking gratis</a:t>
+            </a:r>
+            <a:endParaRPr lang="en-US" sz="1050" dirty="0"/>
+          </a:p>
+        </p:txBody>
+      </p:sp>
+      <p:sp>
+        <p:nvSpPr>
+          <p:cNvPr id="13" name="Shape 10"/>
+          <p:cNvSpPr/>
+          <p:nvPr/>
+        </p:nvSpPr>
+        <p:spPr>
+          <a:xfrm>
+            <a:off x="4187952" y="1874520"/>
+            <a:ext cx="1691640" cy="457200"/>
+          </a:xfrm>
+          <a:prstGeom prst="roundRect">
+            <a:avLst>
+              <a:gd name="adj" fmla="val 50000"/>
+            </a:avLst>
+          </a:prstGeom>
+          <a:solidFill>
+            <a:srgbClr val="F6EEE8"/>
+          </a:solidFill>
+          <a:ln w="12700">
+            <a:solidFill>
+              <a:srgbClr val="E7DDD3"/>
+            </a:solidFill>
+            <a:prstDash val="solid"/>
+          </a:ln>
+        </p:spPr>
+        <p:txBody>
+          <a:bodyPr/>
+          <a:lstStyle/>
+          <a:p>
+            <a:endParaRPr/>
+          </a:p>
+        </p:txBody>
+      </p:sp>
+      <p:sp>
+        <p:nvSpPr>
+          <p:cNvPr id="14" name="Text 11"/>
+          <p:cNvSpPr/>
+          <p:nvPr/>
+        </p:nvSpPr>
+        <p:spPr>
+          <a:xfrm>
+            <a:off x="4187952" y="1874520"/>
+            <a:ext cx="1691640" cy="457200"/>
+          </a:xfrm>
+          <a:prstGeom prst="rect">
+            <a:avLst/>
+          </a:prstGeom>
+          <a:noFill/>
+          <a:ln/>
+        </p:spPr>
+        <p:txBody>
+          <a:bodyPr wrap="square" lIns="0" tIns="0" rIns="0" bIns="0" rtlCol="0" anchor="ctr"/>
+          <a:lstStyle/>
+          <a:p>
+            <a:pPr marL="0" indent="0" algn="ctr">
+              <a:buNone/>
+            </a:pPr>
+            <a:r>
+              <a:rPr lang="en-US" sz="1050" dirty="0">
+                <a:solidFill>
+                  <a:srgbClr val="2B2320"/>
+                </a:solidFill>
+                <a:latin typeface="Calibri" pitchFamily="34" charset="0"/>
+                <a:ea typeface="Calibri" pitchFamily="34" charset="-122"/>
+                <a:cs typeface="Calibri" pitchFamily="34" charset="-120"/>
+              </a:rPr>
+              <a:t>Gimnasio</a:t>
+            </a:r>
+            <a:endParaRPr lang="en-US" sz="1050" dirty="0"/>
+          </a:p>
+        </p:txBody>
+      </p:sp>
+      <p:sp>
+        <p:nvSpPr>
+          <p:cNvPr id="15" name="Shape 12"/>
+          <p:cNvSpPr/>
+          <p:nvPr/>
+        </p:nvSpPr>
+        <p:spPr>
+          <a:xfrm>
+            <a:off x="548640" y="2441448"/>
+            <a:ext cx="1691640" cy="457200"/>
+          </a:xfrm>
+          <a:prstGeom prst="roundRect">
+            <a:avLst>
+              <a:gd name="adj" fmla="val 50000"/>
+            </a:avLst>
+          </a:prstGeom>
+          <a:solidFill>
+            <a:srgbClr val="F6EEE8"/>
+          </a:solidFill>
+          <a:ln w="12700">
+            <a:solidFill>
+              <a:srgbClr val="E7DDD3"/>
+            </a:solidFill>
+            <a:prstDash val="solid"/>
+          </a:ln>
+        </p:spPr>
+        <p:txBody>
+          <a:bodyPr/>
+          <a:lstStyle/>
+          <a:p>
+            <a:endParaRPr/>
+          </a:p>
+        </p:txBody>
+      </p:sp>
+      <p:sp>
+        <p:nvSpPr>
+          <p:cNvPr id="16" name="Text 13"/>
+          <p:cNvSpPr/>
+          <p:nvPr/>
+        </p:nvSpPr>
+        <p:spPr>
+          <a:xfrm>
+            <a:off x="548640" y="2441448"/>
+            <a:ext cx="1691640" cy="457200"/>
+          </a:xfrm>
+          <a:prstGeom prst="rect">
+            <a:avLst/>
+          </a:prstGeom>
+          <a:noFill/>
+          <a:ln/>
+        </p:spPr>
+        <p:txBody>
+          <a:bodyPr wrap="square" lIns="0" tIns="0" rIns="0" bIns="0" rtlCol="0" anchor="ctr"/>
+          <a:lstStyle/>
+          <a:p>
+            <a:pPr marL="0" indent="0" algn="ctr">
+              <a:buNone/>
+            </a:pPr>
+            <a:r>
+              <a:rPr lang="en-US" sz="1050" dirty="0">
+                <a:solidFill>
+                  <a:srgbClr val="2B2320"/>
+                </a:solidFill>
+                <a:latin typeface="Calibri" pitchFamily="34" charset="0"/>
+                <a:ea typeface="Calibri" pitchFamily="34" charset="-122"/>
+                <a:cs typeface="Calibri" pitchFamily="34" charset="-120"/>
+              </a:rPr>
+              <a:t>Restaurante</a:t>
+            </a:r>
+            <a:endParaRPr lang="en-US" sz="1050" dirty="0"/>
+          </a:p>
+        </p:txBody>
+      </p:sp>
+      <p:sp>
+        <p:nvSpPr>
+          <p:cNvPr id="17" name="Shape 14"/>
+          <p:cNvSpPr/>
+          <p:nvPr/>
+        </p:nvSpPr>
+        <p:spPr>
+          <a:xfrm>
+            <a:off x="2368296" y="2441448"/>
+            <a:ext cx="1691640" cy="457200"/>
+          </a:xfrm>
+          <a:prstGeom prst="roundRect">
+            <a:avLst>
+              <a:gd name="adj" fmla="val 50000"/>
+            </a:avLst>
+          </a:prstGeom>
+          <a:solidFill>
+            <a:srgbClr val="F6EEE8"/>
+          </a:solidFill>
+          <a:ln w="12700">
+            <a:solidFill>
+              <a:srgbClr val="E7DDD3"/>
+            </a:solidFill>
+            <a:prstDash val="solid"/>
+          </a:ln>
+        </p:spPr>
+        <p:txBody>
+          <a:bodyPr/>
+          <a:lstStyle/>
+          <a:p>
+            <a:endParaRPr/>
+          </a:p>
+        </p:txBody>
+      </p:sp>
+      <p:sp>
+        <p:nvSpPr>
+          <p:cNvPr id="18" name="Text 15"/>
+          <p:cNvSpPr/>
+          <p:nvPr/>
+        </p:nvSpPr>
+        <p:spPr>
+          <a:xfrm>
+            <a:off x="2368296" y="2441448"/>
+            <a:ext cx="1691640" cy="457200"/>
+          </a:xfrm>
+          <a:prstGeom prst="rect">
+            <a:avLst/>
+          </a:prstGeom>
+          <a:noFill/>
+          <a:ln/>
+        </p:spPr>
+        <p:txBody>
+          <a:bodyPr wrap="square" lIns="0" tIns="0" rIns="0" bIns="0" rtlCol="0" anchor="ctr"/>
+          <a:lstStyle/>
+          <a:p>
+            <a:pPr marL="0" indent="0" algn="ctr">
+              <a:buNone/>
+            </a:pPr>
+            <a:r>
+              <a:rPr lang="en-US" sz="1050" dirty="0">
+                <a:solidFill>
+                  <a:srgbClr val="2B2320"/>
+                </a:solidFill>
+                <a:latin typeface="Calibri" pitchFamily="34" charset="0"/>
+                <a:ea typeface="Calibri" pitchFamily="34" charset="-122"/>
+                <a:cs typeface="Calibri" pitchFamily="34" charset="-120"/>
+              </a:rPr>
+              <a:t>Piscina</a:t>
+            </a:r>
+            <a:endParaRPr lang="en-US" sz="1050" dirty="0"/>
+          </a:p>
+        </p:txBody>
+      </p:sp>
+      <p:sp>
+        <p:nvSpPr>
+          <p:cNvPr id="19" name="Shape 16"/>
+          <p:cNvSpPr/>
+          <p:nvPr/>
+        </p:nvSpPr>
+        <p:spPr>
+          <a:xfrm>
+            <a:off x="4187952" y="2441448"/>
+            <a:ext cx="1691640" cy="457200"/>
+          </a:xfrm>
+          <a:prstGeom prst="roundRect">
+            <a:avLst>
+              <a:gd name="adj" fmla="val 50000"/>
+            </a:avLst>
+          </a:prstGeom>
+          <a:solidFill>
+            <a:srgbClr val="F6EEE8"/>
+          </a:solidFill>
+          <a:ln w="12700">
+            <a:solidFill>
+              <a:srgbClr val="E7DDD3"/>
+            </a:solidFill>
+            <a:prstDash val="solid"/>
+          </a:ln>
+        </p:spPr>
+        <p:txBody>
+          <a:bodyPr/>
+          <a:lstStyle/>
+          <a:p>
+            <a:endParaRPr/>
+          </a:p>
+        </p:txBody>
+      </p:sp>
+      <p:sp>
+        <p:nvSpPr>
+          <p:cNvPr id="20" name="Text 17"/>
+          <p:cNvSpPr/>
+          <p:nvPr/>
+        </p:nvSpPr>
+        <p:spPr>
+          <a:xfrm>
+            <a:off x="4187952" y="2441448"/>
+            <a:ext cx="1691640" cy="457200"/>
+          </a:xfrm>
+          <a:prstGeom prst="rect">
+            <a:avLst/>
+          </a:prstGeom>
+          <a:noFill/>
+          <a:ln/>
+        </p:spPr>
+        <p:txBody>
+          <a:bodyPr wrap="square" lIns="0" tIns="0" rIns="0" bIns="0" rtlCol="0" anchor="ctr"/>
+          <a:lstStyle/>
+          <a:p>
+            <a:pPr marL="0" indent="0" algn="ctr">
+              <a:buNone/>
+            </a:pPr>
+            <a:r>
+              <a:rPr lang="en-US" sz="1050" dirty="0">
+                <a:solidFill>
+                  <a:srgbClr val="2B2320"/>
+                </a:solidFill>
+                <a:latin typeface="Calibri" pitchFamily="34" charset="0"/>
+                <a:ea typeface="Calibri" pitchFamily="34" charset="-122"/>
+                <a:cs typeface="Calibri" pitchFamily="34" charset="-120"/>
+              </a:rPr>
+              <a:t>Piscina interior</a:t>
+            </a:r>
+            <a:endParaRPr lang="en-US" sz="1050" dirty="0"/>
+          </a:p>
+        </p:txBody>
+      </p:sp>
+      <p:sp>
+        <p:nvSpPr>
+          <p:cNvPr id="21" name="Shape 18"/>
+          <p:cNvSpPr/>
+          <p:nvPr/>
+        </p:nvSpPr>
+        <p:spPr>
+          <a:xfrm>
+            <a:off x="548640" y="3008376"/>
+            <a:ext cx="1691640" cy="457200"/>
+          </a:xfrm>
+          <a:prstGeom prst="roundRect">
+            <a:avLst>
+              <a:gd name="adj" fmla="val 50000"/>
+            </a:avLst>
+          </a:prstGeom>
+          <a:solidFill>
+            <a:srgbClr val="F6EEE8"/>
+          </a:solidFill>
+          <a:ln w="12700">
+            <a:solidFill>
+              <a:srgbClr val="E7DDD3"/>
+            </a:solidFill>
+            <a:prstDash val="solid"/>
+          </a:ln>
+        </p:spPr>
+        <p:txBody>
+          <a:bodyPr/>
+          <a:lstStyle/>
+          <a:p>
+            <a:endParaRPr/>
+          </a:p>
+        </p:txBody>
+      </p:sp>
+      <p:sp>
+        <p:nvSpPr>
+          <p:cNvPr id="22" name="Text 19"/>
+          <p:cNvSpPr/>
+          <p:nvPr/>
+        </p:nvSpPr>
+        <p:spPr>
+          <a:xfrm>
+            <a:off x="548640" y="3008376"/>
+            <a:ext cx="1691640" cy="457200"/>
+          </a:xfrm>
+          <a:prstGeom prst="rect">
+            <a:avLst/>
+          </a:prstGeom>
+          <a:noFill/>
+          <a:ln/>
+        </p:spPr>
+        <p:txBody>
+          <a:bodyPr wrap="square" lIns="0" tIns="0" rIns="0" bIns="0" rtlCol="0" anchor="ctr"/>
+          <a:lstStyle/>
+          <a:p>
+            <a:pPr marL="0" indent="0" algn="ctr">
+              <a:buNone/>
+            </a:pPr>
+            <a:r>
+              <a:rPr lang="en-US" sz="1050" dirty="0">
+                <a:solidFill>
+                  <a:srgbClr val="2B2320"/>
+                </a:solidFill>
+                <a:latin typeface="Calibri" pitchFamily="34" charset="0"/>
+                <a:ea typeface="Calibri" pitchFamily="34" charset="-122"/>
+                <a:cs typeface="Calibri" pitchFamily="34" charset="-120"/>
+              </a:rPr>
+              <a:t>Piscina infinita</a:t>
+            </a:r>
+            <a:endParaRPr lang="en-US" sz="1050" dirty="0"/>
+          </a:p>
+        </p:txBody>
+      </p:sp>
+      <p:sp>
+        <p:nvSpPr>
+          <p:cNvPr id="23" name="Shape 20"/>
+          <p:cNvSpPr/>
+          <p:nvPr/>
+        </p:nvSpPr>
+        <p:spPr>
+          <a:xfrm>
+            <a:off x="2368296" y="3008376"/>
+            <a:ext cx="1691640" cy="457200"/>
+          </a:xfrm>
+          <a:prstGeom prst="roundRect">
+            <a:avLst>
+              <a:gd name="adj" fmla="val 50000"/>
+            </a:avLst>
+          </a:prstGeom>
+          <a:solidFill>
+            <a:srgbClr val="F6EEE8"/>
+          </a:solidFill>
+          <a:ln w="12700">
+            <a:solidFill>
+              <a:srgbClr val="E7DDD3"/>
+            </a:solidFill>
+            <a:prstDash val="solid"/>
+          </a:ln>
+        </p:spPr>
+        <p:txBody>
+          <a:bodyPr/>
+          <a:lstStyle/>
+          <a:p>
+            <a:endParaRPr/>
+          </a:p>
+        </p:txBody>
+      </p:sp>
+      <p:sp>
+        <p:nvSpPr>
+          <p:cNvPr id="24" name="Text 21"/>
+          <p:cNvSpPr/>
+          <p:nvPr/>
+        </p:nvSpPr>
+        <p:spPr>
+          <a:xfrm>
+            <a:off x="2368296" y="3008376"/>
+            <a:ext cx="1691640" cy="457200"/>
+          </a:xfrm>
+          <a:prstGeom prst="rect">
+            <a:avLst/>
+          </a:prstGeom>
+          <a:noFill/>
+          <a:ln/>
+        </p:spPr>
+        <p:txBody>
+          <a:bodyPr wrap="square" lIns="0" tIns="0" rIns="0" bIns="0" rtlCol="0" anchor="ctr"/>
+          <a:lstStyle/>
+          <a:p>
+            <a:pPr marL="0" indent="0" algn="ctr">
+              <a:buNone/>
+            </a:pPr>
+            <a:r>
+              <a:rPr lang="en-US" sz="1050" dirty="0">
+                <a:solidFill>
+                  <a:srgbClr val="2B2320"/>
+                </a:solidFill>
+                <a:latin typeface="Calibri" pitchFamily="34" charset="0"/>
+                <a:ea typeface="Calibri" pitchFamily="34" charset="-122"/>
+                <a:cs typeface="Calibri" pitchFamily="34" charset="-120"/>
+              </a:rPr>
+              <a:t>Aire acondic.</a:t>
+            </a:r>
+            <a:endParaRPr lang="en-US" sz="1050" dirty="0"/>
+          </a:p>
+        </p:txBody>
+      </p:sp>
+      <p:sp>
+        <p:nvSpPr>
+          <p:cNvPr id="25" name="Shape 22"/>
+          <p:cNvSpPr/>
+          <p:nvPr/>
+        </p:nvSpPr>
+        <p:spPr>
+          <a:xfrm>
+            <a:off x="4187952" y="3008376"/>
+            <a:ext cx="1691640" cy="457200"/>
+          </a:xfrm>
+          <a:prstGeom prst="roundRect">
+            <a:avLst>
+              <a:gd name="adj" fmla="val 50000"/>
+            </a:avLst>
+          </a:prstGeom>
+          <a:solidFill>
+            <a:srgbClr val="F6EEE8"/>
+          </a:solidFill>
+          <a:ln w="12700">
+            <a:solidFill>
+              <a:srgbClr val="E7DDD3"/>
+            </a:solidFill>
+            <a:prstDash val="solid"/>
+          </a:ln>
+        </p:spPr>
+        <p:txBody>
+          <a:bodyPr/>
+          <a:lstStyle/>
+          <a:p>
+            <a:endParaRPr/>
+          </a:p>
+        </p:txBody>
+      </p:sp>
+      <p:sp>
+        <p:nvSpPr>
+          <p:cNvPr id="26" name="Text 23"/>
+          <p:cNvSpPr/>
+          <p:nvPr/>
+        </p:nvSpPr>
+        <p:spPr>
+          <a:xfrm>
+            <a:off x="4187952" y="3008376"/>
+            <a:ext cx="1691640" cy="457200"/>
+          </a:xfrm>
+          <a:prstGeom prst="rect">
+            <a:avLst/>
+          </a:prstGeom>
+          <a:noFill/>
+          <a:ln/>
+        </p:spPr>
+        <p:txBody>
+          <a:bodyPr wrap="square" lIns="0" tIns="0" rIns="0" bIns="0" rtlCol="0" anchor="ctr"/>
+          <a:lstStyle/>
+          <a:p>
+            <a:pPr marL="0" indent="0" algn="ctr">
+              <a:buNone/>
+            </a:pPr>
+            <a:r>
+              <a:rPr lang="en-US" sz="1050" dirty="0">
+                <a:solidFill>
+                  <a:srgbClr val="2B2320"/>
+                </a:solidFill>
+                <a:latin typeface="Calibri" pitchFamily="34" charset="0"/>
+                <a:ea typeface="Calibri" pitchFamily="34" charset="-122"/>
+                <a:cs typeface="Calibri" pitchFamily="34" charset="-120"/>
+              </a:rPr>
+              <a:t>Calefacción</a:t>
+            </a:r>
+            <a:endParaRPr lang="en-US" sz="1050" dirty="0"/>
+          </a:p>
+        </p:txBody>
+      </p:sp>
+      <p:sp>
+        <p:nvSpPr>
+          <p:cNvPr id="27" name="Shape 24"/>
+          <p:cNvSpPr/>
+          <p:nvPr/>
+        </p:nvSpPr>
+        <p:spPr>
+          <a:xfrm>
+            <a:off x="548640" y="3575304"/>
+            <a:ext cx="1691640" cy="457200"/>
+          </a:xfrm>
+          <a:prstGeom prst="roundRect">
+            <a:avLst>
+              <a:gd name="adj" fmla="val 50000"/>
+            </a:avLst>
+          </a:prstGeom>
+          <a:solidFill>
+            <a:srgbClr val="F6EEE8"/>
+          </a:solidFill>
+          <a:ln w="12700">
+            <a:solidFill>
+              <a:srgbClr val="E7DDD3"/>
+            </a:solidFill>
+            <a:prstDash val="solid"/>
+          </a:ln>
+        </p:spPr>
+        <p:txBody>
+          <a:bodyPr/>
+          <a:lstStyle/>
+          <a:p>
+            <a:endParaRPr/>
+          </a:p>
+        </p:txBody>
+      </p:sp>
+      <p:sp>
+        <p:nvSpPr>
+          <p:cNvPr id="28" name="Text 25"/>
+          <p:cNvSpPr/>
+          <p:nvPr/>
+        </p:nvSpPr>
+        <p:spPr>
+          <a:xfrm>
+            <a:off x="548640" y="3575304"/>
+            <a:ext cx="1691640" cy="457200"/>
+          </a:xfrm>
+          <a:prstGeom prst="rect">
+            <a:avLst/>
+          </a:prstGeom>
+          <a:noFill/>
+          <a:ln/>
+        </p:spPr>
+        <p:txBody>
+          <a:bodyPr wrap="square" lIns="0" tIns="0" rIns="0" bIns="0" rtlCol="0" anchor="ctr"/>
+          <a:lstStyle/>
+          <a:p>
+            <a:pPr marL="0" indent="0" algn="ctr">
+              <a:buNone/>
+            </a:pPr>
+            <a:r>
+              <a:rPr lang="en-US" sz="1050" dirty="0">
+                <a:solidFill>
+                  <a:srgbClr val="2B2320"/>
+                </a:solidFill>
+                <a:latin typeface="Calibri" pitchFamily="34" charset="0"/>
+                <a:ea typeface="Calibri" pitchFamily="34" charset="-122"/>
+                <a:cs typeface="Calibri" pitchFamily="34" charset="-120"/>
+              </a:rPr>
+              <a:t>Vistas</a:t>
+            </a:r>
+            <a:endParaRPr lang="en-US" sz="1050" dirty="0"/>
+          </a:p>
+        </p:txBody>
+      </p:sp>
+      <p:sp>
+        <p:nvSpPr>
+          <p:cNvPr id="29" name="Shape 26"/>
+          <p:cNvSpPr/>
+          <p:nvPr/>
+        </p:nvSpPr>
+        <p:spPr>
+          <a:xfrm>
+            <a:off x="2368296" y="3575304"/>
+            <a:ext cx="1691640" cy="457200"/>
+          </a:xfrm>
+          <a:prstGeom prst="roundRect">
+            <a:avLst>
+              <a:gd name="adj" fmla="val 50000"/>
+            </a:avLst>
+          </a:prstGeom>
+          <a:solidFill>
+            <a:srgbClr val="F6EEE8"/>
+          </a:solidFill>
+          <a:ln w="12700">
+            <a:solidFill>
+              <a:srgbClr val="E7DDD3"/>
+            </a:solidFill>
+            <a:prstDash val="solid"/>
+          </a:ln>
+        </p:spPr>
+        <p:txBody>
+          <a:bodyPr/>
+          <a:lstStyle/>
+          <a:p>
+            <a:endParaRPr/>
+          </a:p>
+        </p:txBody>
+      </p:sp>
+      <p:sp>
+        <p:nvSpPr>
+          <p:cNvPr id="30" name="Text 27"/>
+          <p:cNvSpPr/>
+          <p:nvPr/>
+        </p:nvSpPr>
+        <p:spPr>
+          <a:xfrm>
+            <a:off x="2368296" y="3575304"/>
+            <a:ext cx="1691640" cy="457200"/>
+          </a:xfrm>
+          <a:prstGeom prst="rect">
+            <a:avLst/>
+          </a:prstGeom>
+          <a:noFill/>
+          <a:ln/>
+        </p:spPr>
+        <p:txBody>
+          <a:bodyPr wrap="square" lIns="0" tIns="0" rIns="0" bIns="0" rtlCol="0" anchor="ctr"/>
+          <a:lstStyle/>
+          <a:p>
+            <a:pPr marL="0" indent="0" algn="ctr">
+              <a:buNone/>
+            </a:pPr>
+            <a:r>
+              <a:rPr lang="en-US" sz="1050" dirty="0">
+                <a:solidFill>
+                  <a:srgbClr val="2B2320"/>
+                </a:solidFill>
+                <a:latin typeface="Calibri" pitchFamily="34" charset="0"/>
+                <a:ea typeface="Calibri" pitchFamily="34" charset="-122"/>
+                <a:cs typeface="Calibri" pitchFamily="34" charset="-120"/>
+              </a:rPr>
+              <a:t>Terraza</a:t>
+            </a:r>
+            <a:endParaRPr lang="en-US" sz="1050" dirty="0"/>
+          </a:p>
+        </p:txBody>
+      </p:sp>
+      <p:sp>
+        <p:nvSpPr>
+          <p:cNvPr id="31" name="Shape 28"/>
+          <p:cNvSpPr/>
+          <p:nvPr/>
+        </p:nvSpPr>
+        <p:spPr>
+          <a:xfrm>
+            <a:off x="4187952" y="3575304"/>
+            <a:ext cx="1691640" cy="457200"/>
+          </a:xfrm>
+          <a:prstGeom prst="roundRect">
+            <a:avLst>
+              <a:gd name="adj" fmla="val 50000"/>
+            </a:avLst>
+          </a:prstGeom>
+          <a:solidFill>
+            <a:srgbClr val="F6EEE8"/>
+          </a:solidFill>
+          <a:ln w="12700">
+            <a:solidFill>
+              <a:srgbClr val="E7DDD3"/>
+            </a:solidFill>
+            <a:prstDash val="solid"/>
+          </a:ln>
+        </p:spPr>
+        <p:txBody>
+          <a:bodyPr/>
+          <a:lstStyle/>
+          <a:p>
+            <a:endParaRPr/>
+          </a:p>
+        </p:txBody>
+      </p:sp>
+      <p:sp>
+        <p:nvSpPr>
+          <p:cNvPr id="32" name="Text 29"/>
+          <p:cNvSpPr/>
+          <p:nvPr/>
+        </p:nvSpPr>
+        <p:spPr>
+          <a:xfrm>
+            <a:off x="4187952" y="3575304"/>
+            <a:ext cx="1691640" cy="457200"/>
+          </a:xfrm>
+          <a:prstGeom prst="rect">
+            <a:avLst/>
+          </a:prstGeom>
+          <a:noFill/>
+          <a:ln/>
+        </p:spPr>
+        <p:txBody>
+          <a:bodyPr wrap="square" lIns="0" tIns="0" rIns="0" bIns="0" rtlCol="0" anchor="ctr"/>
+          <a:lstStyle/>
+          <a:p>
+            <a:pPr marL="0" indent="0" algn="ctr">
+              <a:buNone/>
+            </a:pPr>
+            <a:r>
+              <a:rPr lang="en-US" sz="1050" dirty="0">
+                <a:solidFill>
+                  <a:srgbClr val="2B2320"/>
+                </a:solidFill>
+                <a:latin typeface="Calibri" pitchFamily="34" charset="0"/>
+                <a:ea typeface="Calibri" pitchFamily="34" charset="-122"/>
+                <a:cs typeface="Calibri" pitchFamily="34" charset="-120"/>
+              </a:rPr>
+              <a:t>Baño privado</a:t>
+            </a:r>
+            <a:endParaRPr lang="en-US" sz="1050" dirty="0"/>
+          </a:p>
+        </p:txBody>
+      </p:sp>
+      <p:sp>
+        <p:nvSpPr>
+          <p:cNvPr id="33" name="Text 30"/>
+          <p:cNvSpPr/>
+          <p:nvPr/>
+        </p:nvSpPr>
+        <p:spPr>
+          <a:xfrm>
+            <a:off x="7086600" y="1417320"/>
+            <a:ext cx="4206240" cy="365760"/>
+          </a:xfrm>
+          <a:prstGeom prst="rect">
+            <a:avLst/>
+          </a:prstGeom>
+          <a:noFill/>
+          <a:ln/>
+        </p:spPr>
+        <p:txBody>
+          <a:bodyPr wrap="square" lIns="0" tIns="0" rIns="0" bIns="0" rtlCol="0" anchor="ctr"/>
+          <a:lstStyle/>
+          <a:p>
+            <a:pPr marL="0" indent="0">
+              <a:buNone/>
+            </a:pPr>
+            <a:r>
+              <a:rPr lang="en-US" sz="1300" b="1" dirty="0">
+                <a:solidFill>
+                  <a:srgbClr val="8C4029"/>
+                </a:solidFill>
+                <a:latin typeface="Calibri" pitchFamily="34" charset="0"/>
+                <a:ea typeface="Calibri" pitchFamily="34" charset="-122"/>
+                <a:cs typeface="Calibri" pitchFamily="34" charset="-120"/>
+              </a:rPr>
+              <a:t>Variables temporales</a:t>
+            </a:r>
+            <a:endParaRPr lang="en-US" sz="1300" dirty="0"/>
+          </a:p>
+        </p:txBody>
+      </p:sp>
+      <p:sp>
+        <p:nvSpPr>
+          <p:cNvPr id="34" name="Text 31"/>
+          <p:cNvSpPr/>
+          <p:nvPr/>
+        </p:nvSpPr>
+        <p:spPr>
+          <a:xfrm>
+            <a:off x="7086600" y="1828800"/>
+            <a:ext cx="4297680" cy="1828800"/>
+          </a:xfrm>
+          <a:prstGeom prst="rect">
+            <a:avLst/>
+          </a:prstGeom>
+          <a:noFill/>
+          <a:ln/>
+        </p:spPr>
+        <p:txBody>
+          <a:bodyPr wrap="square" lIns="0" tIns="0" rIns="0" bIns="0" rtlCol="0" anchor="t"/>
+          <a:lstStyle/>
+          <a:p>
+            <a:pPr marL="228600" indent="-228600">
+              <a:lnSpc>
+                <a:spcPct val="135000"/>
+              </a:lnSpc>
+              <a:buFont typeface="Arial" panose="020B0604020202020204" pitchFamily="34" charset="0"/>
+              <a:buChar char="•"/>
+            </a:pPr>
+            <a:r>
+              <a:rPr lang="en-US" sz="1200" b="1" dirty="0" err="1">
+                <a:solidFill>
+                  <a:srgbClr val="2B2320"/>
+                </a:solidFill>
+                <a:latin typeface="Calibri" pitchFamily="34" charset="0"/>
+                <a:ea typeface="Calibri" pitchFamily="34" charset="-122"/>
+                <a:cs typeface="Calibri" pitchFamily="34" charset="-120"/>
+              </a:rPr>
+              <a:t>es_finde</a:t>
+            </a:r>
+            <a:r>
+              <a:rPr lang="en-US" sz="1200" b="1" dirty="0">
+                <a:solidFill>
+                  <a:srgbClr val="7A6F68"/>
+                </a:solidFill>
+                <a:latin typeface="Calibri" pitchFamily="34" charset="0"/>
+                <a:ea typeface="Calibri" pitchFamily="34" charset="-122"/>
+                <a:cs typeface="Calibri" pitchFamily="34" charset="-120"/>
+              </a:rPr>
+              <a:t>:</a:t>
+            </a:r>
+            <a:r>
+              <a:rPr lang="en-US" sz="1200" dirty="0">
+                <a:solidFill>
+                  <a:srgbClr val="7A6F68"/>
+                </a:solidFill>
+                <a:latin typeface="Calibri" pitchFamily="34" charset="0"/>
+                <a:ea typeface="Calibri" pitchFamily="34" charset="-122"/>
+                <a:cs typeface="Calibri" pitchFamily="34" charset="-120"/>
+              </a:rPr>
+              <a:t> viernes o </a:t>
+            </a:r>
+            <a:r>
+              <a:rPr lang="en-US" sz="1200" dirty="0" err="1">
+                <a:solidFill>
+                  <a:srgbClr val="7A6F68"/>
+                </a:solidFill>
+                <a:latin typeface="Calibri" pitchFamily="34" charset="0"/>
+                <a:ea typeface="Calibri" pitchFamily="34" charset="-122"/>
+                <a:cs typeface="Calibri" pitchFamily="34" charset="-120"/>
+              </a:rPr>
+              <a:t>sábado</a:t>
+            </a:r>
+            <a:endParaRPr lang="en-US" sz="1200" dirty="0">
+              <a:solidFill>
+                <a:srgbClr val="7A6F68"/>
+              </a:solidFill>
+              <a:latin typeface="Calibri" pitchFamily="34" charset="0"/>
+              <a:ea typeface="Calibri" pitchFamily="34" charset="-122"/>
+              <a:cs typeface="Calibri" pitchFamily="34" charset="-120"/>
+            </a:endParaRPr>
+          </a:p>
+          <a:p>
+            <a:pPr marL="228600" indent="-228600">
+              <a:lnSpc>
+                <a:spcPct val="135000"/>
+              </a:lnSpc>
+              <a:buFont typeface="Arial" panose="020B0604020202020204" pitchFamily="34" charset="0"/>
+              <a:buChar char="•"/>
+            </a:pPr>
+            <a:r>
+              <a:rPr lang="en-US" sz="1200" b="1" dirty="0" err="1">
+                <a:solidFill>
+                  <a:srgbClr val="2B2320"/>
+                </a:solidFill>
+                <a:latin typeface="Calibri" pitchFamily="34" charset="0"/>
+                <a:ea typeface="Calibri" pitchFamily="34" charset="-122"/>
+                <a:cs typeface="Calibri" pitchFamily="34" charset="-120"/>
+              </a:rPr>
+              <a:t>es_domingo</a:t>
+            </a:r>
+            <a:r>
+              <a:rPr lang="en-US" sz="1200" b="1" dirty="0">
+                <a:solidFill>
+                  <a:srgbClr val="7A6F68"/>
+                </a:solidFill>
+                <a:latin typeface="Calibri" pitchFamily="34" charset="0"/>
+                <a:ea typeface="Calibri" pitchFamily="34" charset="-122"/>
+                <a:cs typeface="Calibri" pitchFamily="34" charset="-120"/>
+              </a:rPr>
+              <a:t>:</a:t>
+            </a:r>
+            <a:r>
+              <a:rPr lang="en-US" sz="1200" dirty="0">
+                <a:solidFill>
+                  <a:srgbClr val="7A6F68"/>
+                </a:solidFill>
+                <a:latin typeface="Calibri" pitchFamily="34" charset="0"/>
+                <a:ea typeface="Calibri" pitchFamily="34" charset="-122"/>
+                <a:cs typeface="Calibri" pitchFamily="34" charset="-120"/>
+              </a:rPr>
+              <a:t> </a:t>
+            </a:r>
+            <a:r>
+              <a:rPr lang="en-US" sz="1200" dirty="0" err="1">
+                <a:solidFill>
+                  <a:srgbClr val="7A6F68"/>
+                </a:solidFill>
+                <a:latin typeface="Calibri" pitchFamily="34" charset="0"/>
+                <a:ea typeface="Calibri" pitchFamily="34" charset="-122"/>
+                <a:cs typeface="Calibri" pitchFamily="34" charset="-120"/>
+              </a:rPr>
+              <a:t>comportamiento</a:t>
+            </a:r>
+            <a:r>
+              <a:rPr lang="en-US" sz="1200" dirty="0">
+                <a:solidFill>
+                  <a:srgbClr val="7A6F68"/>
+                </a:solidFill>
+                <a:latin typeface="Calibri" pitchFamily="34" charset="0"/>
+                <a:ea typeface="Calibri" pitchFamily="34" charset="-122"/>
+                <a:cs typeface="Calibri" pitchFamily="34" charset="-120"/>
+              </a:rPr>
+              <a:t> </a:t>
+            </a:r>
+            <a:r>
+              <a:rPr lang="en-US" sz="1200" dirty="0" err="1">
+                <a:solidFill>
+                  <a:srgbClr val="7A6F68"/>
+                </a:solidFill>
+                <a:latin typeface="Calibri" pitchFamily="34" charset="0"/>
+                <a:ea typeface="Calibri" pitchFamily="34" charset="-122"/>
+                <a:cs typeface="Calibri" pitchFamily="34" charset="-120"/>
+              </a:rPr>
+              <a:t>diferenciado</a:t>
+            </a:r>
+            <a:endParaRPr lang="en-US" sz="1200" dirty="0">
+              <a:solidFill>
+                <a:srgbClr val="7A6F68"/>
+              </a:solidFill>
+              <a:latin typeface="Calibri" pitchFamily="34" charset="0"/>
+              <a:ea typeface="Calibri" pitchFamily="34" charset="-122"/>
+              <a:cs typeface="Calibri" pitchFamily="34" charset="-120"/>
+            </a:endParaRPr>
+          </a:p>
+          <a:p>
+            <a:pPr marL="228600" indent="-228600">
+              <a:lnSpc>
+                <a:spcPct val="135000"/>
+              </a:lnSpc>
+              <a:buFont typeface="Arial" panose="020B0604020202020204" pitchFamily="34" charset="0"/>
+              <a:buChar char="•"/>
+            </a:pPr>
+            <a:r>
+              <a:rPr lang="en-US" sz="1200" b="1" dirty="0" err="1">
+                <a:solidFill>
+                  <a:srgbClr val="2B2320"/>
+                </a:solidFill>
+                <a:latin typeface="Calibri" pitchFamily="34" charset="0"/>
+                <a:ea typeface="Calibri" pitchFamily="34" charset="-122"/>
+                <a:cs typeface="Calibri" pitchFamily="34" charset="-120"/>
+              </a:rPr>
+              <a:t>dias_restantes</a:t>
+            </a:r>
+            <a:r>
+              <a:rPr lang="en-US" sz="1200" dirty="0">
+                <a:solidFill>
+                  <a:srgbClr val="7A6F68"/>
+                </a:solidFill>
+                <a:latin typeface="Calibri" pitchFamily="34" charset="0"/>
+                <a:ea typeface="Calibri" pitchFamily="34" charset="-122"/>
+                <a:cs typeface="Calibri" pitchFamily="34" charset="-120"/>
+              </a:rPr>
+              <a:t>: antelación de la </a:t>
+            </a:r>
+            <a:r>
+              <a:rPr lang="en-US" sz="1200" dirty="0" err="1">
+                <a:solidFill>
+                  <a:srgbClr val="7A6F68"/>
+                </a:solidFill>
+                <a:latin typeface="Calibri" pitchFamily="34" charset="0"/>
+                <a:ea typeface="Calibri" pitchFamily="34" charset="-122"/>
+                <a:cs typeface="Calibri" pitchFamily="34" charset="-120"/>
+              </a:rPr>
+              <a:t>reserva</a:t>
+            </a:r>
+            <a:endParaRPr lang="en-US" sz="1200" dirty="0">
+              <a:solidFill>
+                <a:srgbClr val="7A6F68"/>
+              </a:solidFill>
+              <a:latin typeface="Calibri" pitchFamily="34" charset="0"/>
+              <a:ea typeface="Calibri" pitchFamily="34" charset="-122"/>
+              <a:cs typeface="Calibri" pitchFamily="34" charset="-120"/>
+            </a:endParaRPr>
+          </a:p>
+          <a:p>
+            <a:pPr marL="228600" indent="-228600">
+              <a:lnSpc>
+                <a:spcPct val="135000"/>
+              </a:lnSpc>
+              <a:buFont typeface="Arial" panose="020B0604020202020204" pitchFamily="34" charset="0"/>
+              <a:buChar char="•"/>
+            </a:pPr>
+            <a:r>
+              <a:rPr lang="en-US" sz="1200" b="1" dirty="0" err="1">
+                <a:solidFill>
+                  <a:srgbClr val="2B2320"/>
+                </a:solidFill>
+                <a:latin typeface="Calibri" pitchFamily="34" charset="0"/>
+                <a:ea typeface="Calibri" pitchFamily="34" charset="-122"/>
+                <a:cs typeface="Calibri" pitchFamily="34" charset="-120"/>
+              </a:rPr>
+              <a:t>mes_disponible</a:t>
+            </a:r>
+            <a:r>
+              <a:rPr lang="en-US" sz="1200" dirty="0">
+                <a:solidFill>
+                  <a:srgbClr val="7A6F68"/>
+                </a:solidFill>
+                <a:latin typeface="Calibri" pitchFamily="34" charset="0"/>
+                <a:ea typeface="Calibri" pitchFamily="34" charset="-122"/>
+                <a:cs typeface="Calibri" pitchFamily="34" charset="-120"/>
+              </a:rPr>
+              <a:t>: </a:t>
+            </a:r>
+            <a:r>
+              <a:rPr lang="en-US" sz="1200" dirty="0" err="1">
+                <a:solidFill>
+                  <a:srgbClr val="7A6F68"/>
+                </a:solidFill>
+                <a:latin typeface="Calibri" pitchFamily="34" charset="0"/>
+                <a:ea typeface="Calibri" pitchFamily="34" charset="-122"/>
+                <a:cs typeface="Calibri" pitchFamily="34" charset="-120"/>
+              </a:rPr>
+              <a:t>mes</a:t>
+            </a:r>
+            <a:endParaRPr lang="en-US" sz="1200" dirty="0">
+              <a:solidFill>
+                <a:srgbClr val="7A6F68"/>
+              </a:solidFill>
+              <a:latin typeface="Calibri" pitchFamily="34" charset="0"/>
+              <a:ea typeface="Calibri" pitchFamily="34" charset="-122"/>
+              <a:cs typeface="Calibri" pitchFamily="34" charset="-120"/>
+            </a:endParaRPr>
+          </a:p>
+          <a:p>
+            <a:pPr marL="228600" indent="-228600">
+              <a:lnSpc>
+                <a:spcPct val="135000"/>
+              </a:lnSpc>
+              <a:buFont typeface="Arial" panose="020B0604020202020204" pitchFamily="34" charset="0"/>
+              <a:buChar char="•"/>
+            </a:pPr>
+            <a:r>
+              <a:rPr lang="en-US" sz="1200" b="1" dirty="0" err="1">
+                <a:solidFill>
+                  <a:srgbClr val="2B2320"/>
+                </a:solidFill>
+                <a:latin typeface="Calibri" pitchFamily="34" charset="0"/>
+                <a:ea typeface="Calibri" pitchFamily="34" charset="-122"/>
+                <a:cs typeface="Calibri" pitchFamily="34" charset="-120"/>
+              </a:rPr>
+              <a:t>dia_disponible</a:t>
+            </a:r>
+            <a:r>
+              <a:rPr lang="en-US" sz="1200" dirty="0">
+                <a:solidFill>
+                  <a:srgbClr val="7A6F68"/>
+                </a:solidFill>
+                <a:latin typeface="Calibri" pitchFamily="34" charset="0"/>
+                <a:ea typeface="Calibri" pitchFamily="34" charset="-122"/>
+                <a:cs typeface="Calibri" pitchFamily="34" charset="-120"/>
+              </a:rPr>
+              <a:t>: día del mes</a:t>
+            </a:r>
+            <a:endParaRPr lang="en-US" sz="1200" dirty="0"/>
+          </a:p>
+        </p:txBody>
+      </p:sp>
+      <p:sp>
+        <p:nvSpPr>
+          <p:cNvPr id="35" name="Shape 32"/>
+          <p:cNvSpPr/>
+          <p:nvPr/>
+        </p:nvSpPr>
+        <p:spPr>
+          <a:xfrm>
+            <a:off x="551383" y="4368849"/>
+            <a:ext cx="11091672" cy="1412144"/>
+          </a:xfrm>
+          <a:prstGeom prst="roundRect">
+            <a:avLst>
+              <a:gd name="adj" fmla="val 4103"/>
+            </a:avLst>
+          </a:prstGeom>
+          <a:solidFill>
+            <a:srgbClr val="F6EEE8"/>
+          </a:solidFill>
+          <a:ln/>
+          <a:effectLst>
+            <a:outerShdw blurRad="101600" dist="38100" dir="5400000" algn="bl" rotWithShape="0">
+              <a:srgbClr val="000000">
+                <a:alpha val="10000"/>
+              </a:srgbClr>
+            </a:outerShdw>
+          </a:effectLst>
+        </p:spPr>
+        <p:txBody>
+          <a:bodyPr/>
+          <a:lstStyle/>
+          <a:p>
+            <a:endParaRPr/>
+          </a:p>
+        </p:txBody>
+      </p:sp>
+      <p:sp>
+        <p:nvSpPr>
+          <p:cNvPr id="36" name="Text 33"/>
+          <p:cNvSpPr/>
+          <p:nvPr/>
+        </p:nvSpPr>
+        <p:spPr>
+          <a:xfrm>
+            <a:off x="807415" y="4551729"/>
+            <a:ext cx="7315200" cy="365760"/>
+          </a:xfrm>
+          <a:prstGeom prst="rect">
+            <a:avLst/>
+          </a:prstGeom>
+          <a:noFill/>
+          <a:ln/>
+        </p:spPr>
+        <p:txBody>
+          <a:bodyPr wrap="square" lIns="0" tIns="0" rIns="0" bIns="0" rtlCol="0" anchor="ctr"/>
+          <a:lstStyle/>
+          <a:p>
+            <a:pPr marL="0" indent="0">
+              <a:buNone/>
+            </a:pPr>
+            <a:r>
+              <a:rPr lang="en-US" sz="1350" b="1" dirty="0">
+                <a:solidFill>
+                  <a:srgbClr val="8C4029"/>
+                </a:solidFill>
+                <a:latin typeface="Calibri" pitchFamily="34" charset="0"/>
+                <a:ea typeface="Calibri" pitchFamily="34" charset="-122"/>
+                <a:cs typeface="Calibri" pitchFamily="34" charset="-120"/>
+              </a:rPr>
+              <a:t>Codificación de variables categóricas</a:t>
+            </a:r>
+            <a:endParaRPr lang="en-US" sz="1350" dirty="0"/>
+          </a:p>
+        </p:txBody>
+      </p:sp>
+      <p:sp>
+        <p:nvSpPr>
+          <p:cNvPr id="37" name="Text 34"/>
+          <p:cNvSpPr/>
+          <p:nvPr/>
+        </p:nvSpPr>
+        <p:spPr>
+          <a:xfrm>
+            <a:off x="807415" y="4963209"/>
+            <a:ext cx="10607040" cy="731520"/>
+          </a:xfrm>
+          <a:prstGeom prst="rect">
+            <a:avLst/>
+          </a:prstGeom>
+          <a:noFill/>
+          <a:ln/>
+        </p:spPr>
+        <p:txBody>
+          <a:bodyPr wrap="square" lIns="0" tIns="0" rIns="0" bIns="0" rtlCol="0" anchor="t"/>
+          <a:lstStyle/>
+          <a:p>
+            <a:pPr marL="285750" indent="-285750">
+              <a:lnSpc>
+                <a:spcPct val="120000"/>
+              </a:lnSpc>
+              <a:buFont typeface="Arial" panose="020B0604020202020204" pitchFamily="34" charset="0"/>
+              <a:buChar char="•"/>
+            </a:pPr>
+            <a:r>
+              <a:rPr lang="en-US" sz="1250" b="1" dirty="0">
+                <a:solidFill>
+                  <a:srgbClr val="000000"/>
+                </a:solidFill>
+                <a:latin typeface="Calibri" pitchFamily="34" charset="0"/>
+                <a:ea typeface="Calibri" pitchFamily="34" charset="-122"/>
+                <a:cs typeface="Calibri" pitchFamily="34" charset="-120"/>
+              </a:rPr>
+              <a:t>tipo_Hotel </a:t>
+            </a:r>
+            <a:r>
+              <a:rPr lang="en-US" sz="1250" dirty="0">
+                <a:solidFill>
+                  <a:srgbClr val="2B2320"/>
+                </a:solidFill>
+                <a:latin typeface="Calibri" pitchFamily="34" charset="0"/>
+                <a:ea typeface="Calibri" pitchFamily="34" charset="-122"/>
+                <a:cs typeface="Calibri" pitchFamily="34" charset="-120"/>
+              </a:rPr>
+              <a:t>(one-hot binario, 1 si es hotel) </a:t>
+            </a:r>
+          </a:p>
+          <a:p>
+            <a:pPr marL="285750" indent="-285750">
+              <a:lnSpc>
+                <a:spcPct val="120000"/>
+              </a:lnSpc>
+              <a:buFont typeface="Arial" panose="020B0604020202020204" pitchFamily="34" charset="0"/>
+              <a:buChar char="•"/>
+            </a:pPr>
+            <a:r>
+              <a:rPr lang="en-US" sz="1250" b="1" dirty="0" err="1">
+                <a:solidFill>
+                  <a:srgbClr val="000000"/>
+                </a:solidFill>
+                <a:latin typeface="Calibri" pitchFamily="34" charset="0"/>
+                <a:ea typeface="Calibri" pitchFamily="34" charset="-122"/>
+                <a:cs typeface="Calibri" pitchFamily="34" charset="-120"/>
+              </a:rPr>
+              <a:t>localidad</a:t>
+            </a:r>
+            <a:r>
+              <a:rPr lang="en-US" sz="1250" b="1" dirty="0">
+                <a:solidFill>
+                  <a:srgbClr val="000000"/>
+                </a:solidFill>
+                <a:latin typeface="Calibri" pitchFamily="34" charset="0"/>
+                <a:ea typeface="Calibri" pitchFamily="34" charset="-122"/>
+                <a:cs typeface="Calibri" pitchFamily="34" charset="-120"/>
+              </a:rPr>
+              <a:t> </a:t>
+            </a:r>
+            <a:r>
+              <a:rPr lang="en-US" sz="1250" dirty="0">
+                <a:solidFill>
+                  <a:srgbClr val="2B2320"/>
+                </a:solidFill>
+                <a:latin typeface="Calibri" pitchFamily="34" charset="0"/>
+                <a:ea typeface="Calibri" pitchFamily="34" charset="-122"/>
+                <a:cs typeface="Calibri" pitchFamily="34" charset="-120"/>
+              </a:rPr>
+              <a:t>y </a:t>
+            </a:r>
+            <a:r>
+              <a:rPr lang="en-US" sz="1250" b="1" dirty="0">
+                <a:solidFill>
+                  <a:srgbClr val="000000"/>
+                </a:solidFill>
+                <a:latin typeface="Calibri" pitchFamily="34" charset="0"/>
+                <a:ea typeface="Calibri" pitchFamily="34" charset="-122"/>
+                <a:cs typeface="Calibri" pitchFamily="34" charset="-120"/>
+              </a:rPr>
+              <a:t>provincia </a:t>
+            </a:r>
+            <a:r>
+              <a:rPr lang="en-US" sz="1250" dirty="0">
+                <a:solidFill>
+                  <a:srgbClr val="2B2320"/>
+                </a:solidFill>
+                <a:latin typeface="Calibri" pitchFamily="34" charset="0"/>
+                <a:ea typeface="Calibri" pitchFamily="34" charset="-122"/>
+                <a:cs typeface="Calibri" pitchFamily="34" charset="-120"/>
+              </a:rPr>
+              <a:t>(ordinal, para no disparar la dimensionalidad).</a:t>
+            </a:r>
+            <a:r>
+              <a:rPr lang="en-US" sz="1250" i="1" dirty="0">
+                <a:solidFill>
+                  <a:srgbClr val="7A6F68"/>
+                </a:solidFill>
+                <a:latin typeface="Calibri" pitchFamily="34" charset="0"/>
+                <a:ea typeface="Calibri" pitchFamily="34" charset="-122"/>
+                <a:cs typeface="Calibri" pitchFamily="34" charset="-120"/>
+              </a:rPr>
+              <a:t>Viable porque el modelo ganador es un ensemble de árboles: puede aislar cualquier localidad mediante particiones binarias sucesivas, sin depender de un orden real.</a:t>
+            </a:r>
+            <a:endParaRPr lang="en-US" sz="1250" dirty="0"/>
           </a:p>
         </p:txBody>
       </p:sp>

--- a/TFG_Chollos/Presentacion_Defensa_TFG.pptx
+++ b/TFG_Chollos/Presentacion_Defensa_TFG.pptx
@@ -3972,456 +3972,6 @@
       </p:sp>
       <p:sp>
         <p:nvSpPr>
-          <p:cNvPr id="6" name="Shape 4"/>
-          <p:cNvSpPr/>
-          <p:nvPr/>
-        </p:nvSpPr>
-        <p:spPr>
-          <a:xfrm>
-            <a:off x="548640" y="5623560"/>
-            <a:ext cx="420624" cy="420624"/>
-          </a:xfrm>
-          <a:prstGeom prst="ellipse">
-            <a:avLst/>
-          </a:prstGeom>
-          <a:solidFill>
-            <a:srgbClr val="3B6E77"/>
-          </a:solidFill>
-          <a:ln/>
-        </p:spPr>
-        <p:txBody>
-          <a:bodyPr/>
-          <a:lstStyle/>
-          <a:p>
-            <a:endParaRPr/>
-          </a:p>
-        </p:txBody>
-      </p:sp>
-      <p:pic>
-        <p:nvPicPr>
-          <p:cNvPr id="7" name="Image 0" descr="preencoded.png"/>
-          <p:cNvPicPr>
-            <a:picLocks noChangeAspect="1"/>
-          </p:cNvPicPr>
-          <p:nvPr/>
-        </p:nvPicPr>
-        <p:blipFill>
-          <a:blip r:embed="rId3"/>
-          <a:stretch>
-            <a:fillRect/>
-          </a:stretch>
-        </p:blipFill>
-        <p:spPr>
-          <a:xfrm>
-            <a:off x="640080" y="5715000"/>
-            <a:ext cx="237744" cy="237744"/>
-          </a:xfrm>
-          <a:prstGeom prst="rect">
-            <a:avLst/>
-          </a:prstGeom>
-        </p:spPr>
-      </p:pic>
-      <p:sp>
-        <p:nvSpPr>
-          <p:cNvPr id="8" name="Text 5"/>
-          <p:cNvSpPr/>
-          <p:nvPr/>
-        </p:nvSpPr>
-        <p:spPr>
-          <a:xfrm>
-            <a:off x="320040" y="6080760"/>
-            <a:ext cx="877824" cy="274320"/>
-          </a:xfrm>
-          <a:prstGeom prst="rect">
-            <a:avLst/>
-          </a:prstGeom>
-          <a:noFill/>
-          <a:ln/>
-        </p:spPr>
-        <p:txBody>
-          <a:bodyPr wrap="square" lIns="0" tIns="0" rIns="0" bIns="0" rtlCol="0" anchor="ctr"/>
-          <a:lstStyle/>
-          <a:p>
-            <a:pPr marL="0" indent="0" algn="ctr">
-              <a:buNone/>
-            </a:pPr>
-            <a:r>
-              <a:rPr lang="en-US" sz="900" dirty="0">
-                <a:solidFill>
-                  <a:srgbClr val="7A6F68"/>
-                </a:solidFill>
-                <a:latin typeface="Calibri" pitchFamily="34" charset="0"/>
-                <a:ea typeface="Calibri" pitchFamily="34" charset="-122"/>
-                <a:cs typeface="Calibri" pitchFamily="34" charset="-120"/>
-              </a:rPr>
-              <a:t>Selenium</a:t>
-            </a:r>
-            <a:endParaRPr lang="en-US" sz="900" dirty="0"/>
-          </a:p>
-        </p:txBody>
-      </p:sp>
-      <p:sp>
-        <p:nvSpPr>
-          <p:cNvPr id="9" name="Shape 6"/>
-          <p:cNvSpPr/>
-          <p:nvPr/>
-        </p:nvSpPr>
-        <p:spPr>
-          <a:xfrm>
-            <a:off x="1600200" y="5623560"/>
-            <a:ext cx="420624" cy="420624"/>
-          </a:xfrm>
-          <a:prstGeom prst="ellipse">
-            <a:avLst/>
-          </a:prstGeom>
-          <a:solidFill>
-            <a:srgbClr val="3B6E77"/>
-          </a:solidFill>
-          <a:ln/>
-        </p:spPr>
-        <p:txBody>
-          <a:bodyPr/>
-          <a:lstStyle/>
-          <a:p>
-            <a:endParaRPr/>
-          </a:p>
-        </p:txBody>
-      </p:sp>
-      <p:pic>
-        <p:nvPicPr>
-          <p:cNvPr id="10" name="Image 1" descr="preencoded.png"/>
-          <p:cNvPicPr>
-            <a:picLocks noChangeAspect="1"/>
-          </p:cNvPicPr>
-          <p:nvPr/>
-        </p:nvPicPr>
-        <p:blipFill>
-          <a:blip r:embed="rId4"/>
-          <a:stretch>
-            <a:fillRect/>
-          </a:stretch>
-        </p:blipFill>
-        <p:spPr>
-          <a:xfrm>
-            <a:off x="1691640" y="5715000"/>
-            <a:ext cx="237744" cy="237744"/>
-          </a:xfrm>
-          <a:prstGeom prst="rect">
-            <a:avLst/>
-          </a:prstGeom>
-        </p:spPr>
-      </p:pic>
-      <p:sp>
-        <p:nvSpPr>
-          <p:cNvPr id="11" name="Text 7"/>
-          <p:cNvSpPr/>
-          <p:nvPr/>
-        </p:nvSpPr>
-        <p:spPr>
-          <a:xfrm>
-            <a:off x="1371600" y="6080760"/>
-            <a:ext cx="877824" cy="274320"/>
-          </a:xfrm>
-          <a:prstGeom prst="rect">
-            <a:avLst/>
-          </a:prstGeom>
-          <a:noFill/>
-          <a:ln/>
-        </p:spPr>
-        <p:txBody>
-          <a:bodyPr wrap="square" lIns="0" tIns="0" rIns="0" bIns="0" rtlCol="0" anchor="ctr"/>
-          <a:lstStyle/>
-          <a:p>
-            <a:pPr marL="0" indent="0" algn="ctr">
-              <a:buNone/>
-            </a:pPr>
-            <a:r>
-              <a:rPr lang="en-US" sz="900" dirty="0">
-                <a:solidFill>
-                  <a:srgbClr val="7A6F68"/>
-                </a:solidFill>
-                <a:latin typeface="Calibri" pitchFamily="34" charset="0"/>
-                <a:ea typeface="Calibri" pitchFamily="34" charset="-122"/>
-                <a:cs typeface="Calibri" pitchFamily="34" charset="-120"/>
-              </a:rPr>
-              <a:t>Playwright</a:t>
-            </a:r>
-            <a:endParaRPr lang="en-US" sz="900" dirty="0"/>
-          </a:p>
-        </p:txBody>
-      </p:sp>
-      <p:sp>
-        <p:nvSpPr>
-          <p:cNvPr id="12" name="Shape 8"/>
-          <p:cNvSpPr/>
-          <p:nvPr/>
-        </p:nvSpPr>
-        <p:spPr>
-          <a:xfrm>
-            <a:off x="2651760" y="5623560"/>
-            <a:ext cx="420624" cy="420624"/>
-          </a:xfrm>
-          <a:prstGeom prst="ellipse">
-            <a:avLst/>
-          </a:prstGeom>
-          <a:solidFill>
-            <a:srgbClr val="3B6E77"/>
-          </a:solidFill>
-          <a:ln/>
-        </p:spPr>
-        <p:txBody>
-          <a:bodyPr/>
-          <a:lstStyle/>
-          <a:p>
-            <a:endParaRPr/>
-          </a:p>
-        </p:txBody>
-      </p:sp>
-      <p:pic>
-        <p:nvPicPr>
-          <p:cNvPr id="13" name="Image 2" descr="preencoded.png"/>
-          <p:cNvPicPr>
-            <a:picLocks noChangeAspect="1"/>
-          </p:cNvPicPr>
-          <p:nvPr/>
-        </p:nvPicPr>
-        <p:blipFill>
-          <a:blip r:embed="rId5"/>
-          <a:stretch>
-            <a:fillRect/>
-          </a:stretch>
-        </p:blipFill>
-        <p:spPr>
-          <a:xfrm>
-            <a:off x="2743200" y="5715000"/>
-            <a:ext cx="237744" cy="237744"/>
-          </a:xfrm>
-          <a:prstGeom prst="rect">
-            <a:avLst/>
-          </a:prstGeom>
-        </p:spPr>
-      </p:pic>
-      <p:sp>
-        <p:nvSpPr>
-          <p:cNvPr id="14" name="Text 9"/>
-          <p:cNvSpPr/>
-          <p:nvPr/>
-        </p:nvSpPr>
-        <p:spPr>
-          <a:xfrm>
-            <a:off x="2423160" y="6080760"/>
-            <a:ext cx="877824" cy="274320"/>
-          </a:xfrm>
-          <a:prstGeom prst="rect">
-            <a:avLst/>
-          </a:prstGeom>
-          <a:noFill/>
-          <a:ln/>
-        </p:spPr>
-        <p:txBody>
-          <a:bodyPr wrap="square" lIns="0" tIns="0" rIns="0" bIns="0" rtlCol="0" anchor="ctr"/>
-          <a:lstStyle/>
-          <a:p>
-            <a:pPr marL="0" indent="0" algn="ctr">
-              <a:buNone/>
-            </a:pPr>
-            <a:r>
-              <a:rPr lang="en-US" sz="900" dirty="0">
-                <a:solidFill>
-                  <a:srgbClr val="7A6F68"/>
-                </a:solidFill>
-                <a:latin typeface="Calibri" pitchFamily="34" charset="0"/>
-                <a:ea typeface="Calibri" pitchFamily="34" charset="-122"/>
-                <a:cs typeface="Calibri" pitchFamily="34" charset="-120"/>
-              </a:rPr>
-              <a:t>scikit-learn</a:t>
-            </a:r>
-            <a:endParaRPr lang="en-US" sz="900" dirty="0"/>
-          </a:p>
-        </p:txBody>
-      </p:sp>
-      <p:sp>
-        <p:nvSpPr>
-          <p:cNvPr id="15" name="Shape 10"/>
-          <p:cNvSpPr/>
-          <p:nvPr/>
-        </p:nvSpPr>
-        <p:spPr>
-          <a:xfrm>
-            <a:off x="3703320" y="5623560"/>
-            <a:ext cx="420624" cy="420624"/>
-          </a:xfrm>
-          <a:prstGeom prst="ellipse">
-            <a:avLst/>
-          </a:prstGeom>
-          <a:solidFill>
-            <a:srgbClr val="3B6E77"/>
-          </a:solidFill>
-          <a:ln/>
-        </p:spPr>
-        <p:txBody>
-          <a:bodyPr/>
-          <a:lstStyle/>
-          <a:p>
-            <a:endParaRPr/>
-          </a:p>
-        </p:txBody>
-      </p:sp>
-      <p:pic>
-        <p:nvPicPr>
-          <p:cNvPr id="16" name="Image 3" descr="preencoded.png"/>
-          <p:cNvPicPr>
-            <a:picLocks noChangeAspect="1"/>
-          </p:cNvPicPr>
-          <p:nvPr/>
-        </p:nvPicPr>
-        <p:blipFill>
-          <a:blip r:embed="rId6"/>
-          <a:stretch>
-            <a:fillRect/>
-          </a:stretch>
-        </p:blipFill>
-        <p:spPr>
-          <a:xfrm>
-            <a:off x="3794760" y="5715000"/>
-            <a:ext cx="237744" cy="237744"/>
-          </a:xfrm>
-          <a:prstGeom prst="rect">
-            <a:avLst/>
-          </a:prstGeom>
-        </p:spPr>
-      </p:pic>
-      <p:sp>
-        <p:nvSpPr>
-          <p:cNvPr id="17" name="Text 11"/>
-          <p:cNvSpPr/>
-          <p:nvPr/>
-        </p:nvSpPr>
-        <p:spPr>
-          <a:xfrm>
-            <a:off x="3474720" y="6080760"/>
-            <a:ext cx="877824" cy="274320"/>
-          </a:xfrm>
-          <a:prstGeom prst="rect">
-            <a:avLst/>
-          </a:prstGeom>
-          <a:noFill/>
-          <a:ln/>
-        </p:spPr>
-        <p:txBody>
-          <a:bodyPr wrap="square" lIns="0" tIns="0" rIns="0" bIns="0" rtlCol="0" anchor="ctr"/>
-          <a:lstStyle/>
-          <a:p>
-            <a:pPr marL="0" indent="0" algn="ctr">
-              <a:buNone/>
-            </a:pPr>
-            <a:r>
-              <a:rPr lang="en-US" sz="900" dirty="0">
-                <a:solidFill>
-                  <a:srgbClr val="7A6F68"/>
-                </a:solidFill>
-                <a:latin typeface="Calibri" pitchFamily="34" charset="0"/>
-                <a:ea typeface="Calibri" pitchFamily="34" charset="-122"/>
-                <a:cs typeface="Calibri" pitchFamily="34" charset="-120"/>
-              </a:rPr>
-              <a:t>XGBoost</a:t>
-            </a:r>
-            <a:endParaRPr lang="en-US" sz="900" dirty="0"/>
-          </a:p>
-        </p:txBody>
-      </p:sp>
-      <p:sp>
-        <p:nvSpPr>
-          <p:cNvPr id="18" name="Shape 12"/>
-          <p:cNvSpPr/>
-          <p:nvPr/>
-        </p:nvSpPr>
-        <p:spPr>
-          <a:xfrm>
-            <a:off x="4754880" y="5623560"/>
-            <a:ext cx="420624" cy="420624"/>
-          </a:xfrm>
-          <a:prstGeom prst="ellipse">
-            <a:avLst/>
-          </a:prstGeom>
-          <a:solidFill>
-            <a:srgbClr val="3B6E77"/>
-          </a:solidFill>
-          <a:ln/>
-        </p:spPr>
-        <p:txBody>
-          <a:bodyPr/>
-          <a:lstStyle/>
-          <a:p>
-            <a:endParaRPr/>
-          </a:p>
-        </p:txBody>
-      </p:sp>
-      <p:pic>
-        <p:nvPicPr>
-          <p:cNvPr id="19" name="Image 4" descr="preencoded.png"/>
-          <p:cNvPicPr>
-            <a:picLocks noChangeAspect="1"/>
-          </p:cNvPicPr>
-          <p:nvPr/>
-        </p:nvPicPr>
-        <p:blipFill>
-          <a:blip r:embed="rId7"/>
-          <a:stretch>
-            <a:fillRect/>
-          </a:stretch>
-        </p:blipFill>
-        <p:spPr>
-          <a:xfrm>
-            <a:off x="4846320" y="5715000"/>
-            <a:ext cx="237744" cy="237744"/>
-          </a:xfrm>
-          <a:prstGeom prst="rect">
-            <a:avLst/>
-          </a:prstGeom>
-        </p:spPr>
-      </p:pic>
-      <p:sp>
-        <p:nvSpPr>
-          <p:cNvPr id="20" name="Text 13"/>
-          <p:cNvSpPr/>
-          <p:nvPr/>
-        </p:nvSpPr>
-        <p:spPr>
-          <a:xfrm>
-            <a:off x="4526280" y="6080760"/>
-            <a:ext cx="877824" cy="274320"/>
-          </a:xfrm>
-          <a:prstGeom prst="rect">
-            <a:avLst/>
-          </a:prstGeom>
-          <a:noFill/>
-          <a:ln/>
-        </p:spPr>
-        <p:txBody>
-          <a:bodyPr wrap="square" lIns="0" tIns="0" rIns="0" bIns="0" rtlCol="0" anchor="ctr"/>
-          <a:lstStyle/>
-          <a:p>
-            <a:pPr marL="0" indent="0" algn="ctr">
-              <a:buNone/>
-            </a:pPr>
-            <a:r>
-              <a:rPr lang="en-US" sz="900" dirty="0">
-                <a:solidFill>
-                  <a:srgbClr val="7A6F68"/>
-                </a:solidFill>
-                <a:latin typeface="Calibri" pitchFamily="34" charset="0"/>
-                <a:ea typeface="Calibri" pitchFamily="34" charset="-122"/>
-                <a:cs typeface="Calibri" pitchFamily="34" charset="-120"/>
-              </a:rPr>
-              <a:t>Streamlit</a:t>
-            </a:r>
-            <a:endParaRPr lang="en-US" sz="900" dirty="0"/>
-          </a:p>
-        </p:txBody>
-      </p:sp>
-      <p:sp>
-        <p:nvSpPr>
           <p:cNvPr id="21" name="Text 14"/>
           <p:cNvSpPr/>
           <p:nvPr/>
@@ -8334,7 +7884,7 @@
         <p:spPr>
           <a:xfrm>
             <a:off x="7150735" y="4063732"/>
-            <a:ext cx="4263719" cy="1018780"/>
+            <a:ext cx="4367975" cy="1018780"/>
           </a:xfrm>
           <a:prstGeom prst="rect">
             <a:avLst/>
@@ -8915,7 +8465,29 @@
                 <a:ea typeface="Calibri" pitchFamily="34" charset="-122"/>
                 <a:cs typeface="Calibri" pitchFamily="34" charset="-120"/>
               </a:rPr>
-              <a:t>Árbol de Decisión (CART)</a:t>
+              <a:t>Árbol de </a:t>
+            </a:r>
+            <a:r>
+              <a:rPr lang="en-US" sz="1450" b="1" dirty="0" err="1">
+                <a:solidFill>
+                  <a:srgbClr val="2B2320"/>
+                </a:solidFill>
+                <a:latin typeface="Calibri" pitchFamily="34" charset="0"/>
+                <a:ea typeface="Calibri" pitchFamily="34" charset="-122"/>
+                <a:cs typeface="Calibri" pitchFamily="34" charset="-120"/>
+              </a:rPr>
+              <a:t>Regresión</a:t>
+            </a:r>
+            <a:r>
+              <a:rPr lang="en-US" sz="1450" b="1" dirty="0">
+                <a:solidFill>
+                  <a:srgbClr val="2B2320"/>
+                </a:solidFill>
+                <a:latin typeface="Calibri" pitchFamily="34" charset="0"/>
+                <a:ea typeface="Calibri" pitchFamily="34" charset="-122"/>
+                <a:cs typeface="Calibri" pitchFamily="34" charset="-120"/>
+              </a:rPr>
+              <a:t> (CART)</a:t>
             </a:r>
             <a:endParaRPr lang="en-US" sz="1450" dirty="0"/>
           </a:p>
@@ -9554,7 +9126,7 @@
         <p:spPr>
           <a:xfrm>
             <a:off x="1316736" y="640080"/>
-            <a:ext cx="9966960" cy="640080"/>
+            <a:ext cx="9966960" cy="430887"/>
           </a:xfrm>
           <a:prstGeom prst="rect">
             <a:avLst/>
@@ -9569,14 +9141,29 @@
           <a:p>
             <a:pPr algn="l"/>
             <a:r>
-              <a:rPr sz="2800" b="1" i="0">
+              <a:rPr sz="2800" b="1" i="0" dirty="0">
                 <a:solidFill>
                   <a:srgbClr val="2B2320"/>
                 </a:solidFill>
                 <a:latin typeface="Cambria"/>
               </a:rPr>
-              <a:t>Árbol de decisión</a:t>
-            </a:r>
+              <a:t>Árbol de </a:t>
+            </a:r>
+            <a:r>
+              <a:rPr lang="es-ES" sz="2800" b="1" i="0" dirty="0">
+                <a:solidFill>
+                  <a:srgbClr val="2B2320"/>
+                </a:solidFill>
+                <a:latin typeface="Cambria"/>
+              </a:rPr>
+              <a:t>regresión</a:t>
+            </a:r>
+            <a:endParaRPr sz="2800" b="1" i="0" dirty="0">
+              <a:solidFill>
+                <a:srgbClr val="2B2320"/>
+              </a:solidFill>
+              <a:latin typeface="Cambria"/>
+            </a:endParaRPr>
           </a:p>
         </p:txBody>
       </p:sp>
@@ -9596,8 +9183,8 @@
         </p:blipFill>
         <p:spPr>
           <a:xfrm>
-            <a:off x="1115568" y="1019072"/>
-            <a:ext cx="9815886" cy="4925052"/>
+            <a:off x="1115568" y="1070966"/>
+            <a:ext cx="9815886" cy="4873157"/>
           </a:xfrm>
           <a:prstGeom prst="rect">
             <a:avLst/>
@@ -9613,7 +9200,7 @@
         <p:spPr>
           <a:xfrm>
             <a:off x="1280160" y="5944124"/>
-            <a:ext cx="9601200" cy="548640"/>
+            <a:ext cx="9601200" cy="353943"/>
           </a:xfrm>
           <a:prstGeom prst="rect">
             <a:avLst/>
@@ -9628,13 +9215,265 @@
           <a:p>
             <a:pPr algn="ctr"/>
             <a:r>
-              <a:rPr sz="1150" b="0" i="1">
+              <a:rPr sz="1150" b="0" i="1" dirty="0">
                 <a:solidFill>
                   <a:srgbClr val="7A6F68"/>
                 </a:solidFill>
                 <a:latin typeface="Calibri"/>
               </a:rPr>
-              <a:t>Uno de los cuatro modelos candidatos (Sección 4.3): el árbol de decisión particiona el espacio de características de forma recursiva. La raíz es tamaño_habitacion (≤ 75,5m²); el segundo nivel es provincia.</a:t>
+              <a:t>Uno de </a:t>
+            </a:r>
+            <a:r>
+              <a:rPr sz="1150" b="0" i="1" dirty="0" err="1">
+                <a:solidFill>
+                  <a:srgbClr val="7A6F68"/>
+                </a:solidFill>
+                <a:latin typeface="Calibri"/>
+              </a:rPr>
+              <a:t>los</a:t>
+            </a:r>
+            <a:r>
+              <a:rPr sz="1150" b="0" i="1" dirty="0">
+                <a:solidFill>
+                  <a:srgbClr val="7A6F68"/>
+                </a:solidFill>
+                <a:latin typeface="Calibri"/>
+              </a:rPr>
+              <a:t> cuatro </a:t>
+            </a:r>
+            <a:r>
+              <a:rPr sz="1150" b="0" i="1" dirty="0" err="1">
+                <a:solidFill>
+                  <a:srgbClr val="7A6F68"/>
+                </a:solidFill>
+                <a:latin typeface="Calibri"/>
+              </a:rPr>
+              <a:t>modelos</a:t>
+            </a:r>
+            <a:r>
+              <a:rPr sz="1150" b="0" i="1" dirty="0">
+                <a:solidFill>
+                  <a:srgbClr val="7A6F68"/>
+                </a:solidFill>
+                <a:latin typeface="Calibri"/>
+              </a:rPr>
+              <a:t> </a:t>
+            </a:r>
+            <a:r>
+              <a:rPr sz="1150" b="0" i="1" dirty="0" err="1">
+                <a:solidFill>
+                  <a:srgbClr val="7A6F68"/>
+                </a:solidFill>
+                <a:latin typeface="Calibri"/>
+              </a:rPr>
+              <a:t>candidatos</a:t>
+            </a:r>
+            <a:r>
+              <a:rPr sz="1150" b="0" i="1" dirty="0">
+                <a:solidFill>
+                  <a:srgbClr val="7A6F68"/>
+                </a:solidFill>
+                <a:latin typeface="Calibri"/>
+              </a:rPr>
+              <a:t> (</a:t>
+            </a:r>
+            <a:r>
+              <a:rPr sz="1150" b="0" i="1" dirty="0" err="1">
+                <a:solidFill>
+                  <a:srgbClr val="7A6F68"/>
+                </a:solidFill>
+                <a:latin typeface="Calibri"/>
+              </a:rPr>
+              <a:t>Sección</a:t>
+            </a:r>
+            <a:r>
+              <a:rPr sz="1150" b="0" i="1" dirty="0">
+                <a:solidFill>
+                  <a:srgbClr val="7A6F68"/>
+                </a:solidFill>
+                <a:latin typeface="Calibri"/>
+              </a:rPr>
+              <a:t> 4.3): el árbol de </a:t>
+            </a:r>
+            <a:r>
+              <a:rPr lang="es-ES" sz="1150" b="0" i="1" dirty="0">
+                <a:solidFill>
+                  <a:srgbClr val="7A6F68"/>
+                </a:solidFill>
+                <a:latin typeface="Calibri"/>
+              </a:rPr>
+              <a:t>regresión</a:t>
+            </a:r>
+            <a:r>
+              <a:rPr sz="1150" b="0" i="1" dirty="0">
+                <a:solidFill>
+                  <a:srgbClr val="7A6F68"/>
+                </a:solidFill>
+                <a:latin typeface="Calibri"/>
+              </a:rPr>
+              <a:t> </a:t>
+            </a:r>
+            <a:r>
+              <a:rPr sz="1150" b="0" i="1" dirty="0" err="1">
+                <a:solidFill>
+                  <a:srgbClr val="7A6F68"/>
+                </a:solidFill>
+                <a:latin typeface="Calibri"/>
+              </a:rPr>
+              <a:t>particiona</a:t>
+            </a:r>
+            <a:r>
+              <a:rPr sz="1150" b="0" i="1" dirty="0">
+                <a:solidFill>
+                  <a:srgbClr val="7A6F68"/>
+                </a:solidFill>
+                <a:latin typeface="Calibri"/>
+              </a:rPr>
+              <a:t> el </a:t>
+            </a:r>
+            <a:r>
+              <a:rPr sz="1150" b="0" i="1" dirty="0" err="1">
+                <a:solidFill>
+                  <a:srgbClr val="7A6F68"/>
+                </a:solidFill>
+                <a:latin typeface="Calibri"/>
+              </a:rPr>
+              <a:t>espacio</a:t>
+            </a:r>
+            <a:r>
+              <a:rPr sz="1150" b="0" i="1" dirty="0">
+                <a:solidFill>
+                  <a:srgbClr val="7A6F68"/>
+                </a:solidFill>
+                <a:latin typeface="Calibri"/>
+              </a:rPr>
+              <a:t> de </a:t>
+            </a:r>
+            <a:r>
+              <a:rPr sz="1150" b="0" i="1" dirty="0" err="1">
+                <a:solidFill>
+                  <a:srgbClr val="7A6F68"/>
+                </a:solidFill>
+                <a:latin typeface="Calibri"/>
+              </a:rPr>
+              <a:t>características</a:t>
+            </a:r>
+            <a:r>
+              <a:rPr sz="1150" b="0" i="1" dirty="0">
+                <a:solidFill>
+                  <a:srgbClr val="7A6F68"/>
+                </a:solidFill>
+                <a:latin typeface="Calibri"/>
+              </a:rPr>
+              <a:t> de forma </a:t>
+            </a:r>
+            <a:r>
+              <a:rPr sz="1150" b="0" i="1" dirty="0" err="1">
+                <a:solidFill>
+                  <a:srgbClr val="7A6F68"/>
+                </a:solidFill>
+                <a:latin typeface="Calibri"/>
+              </a:rPr>
+              <a:t>recursiva</a:t>
+            </a:r>
+            <a:r>
+              <a:rPr sz="1150" b="0" i="1" dirty="0">
+                <a:solidFill>
+                  <a:srgbClr val="7A6F68"/>
+                </a:solidFill>
+                <a:latin typeface="Calibri"/>
+              </a:rPr>
+              <a:t>. La </a:t>
+            </a:r>
+            <a:r>
+              <a:rPr sz="1150" b="0" i="1" dirty="0" err="1">
+                <a:solidFill>
+                  <a:srgbClr val="7A6F68"/>
+                </a:solidFill>
+                <a:latin typeface="Calibri"/>
+              </a:rPr>
+              <a:t>raíz</a:t>
+            </a:r>
+            <a:r>
+              <a:rPr sz="1150" b="0" i="1" dirty="0">
+                <a:solidFill>
+                  <a:srgbClr val="7A6F68"/>
+                </a:solidFill>
+                <a:latin typeface="Calibri"/>
+              </a:rPr>
+              <a:t> es </a:t>
+            </a:r>
+            <a:r>
+              <a:rPr sz="1150" b="0" i="1" dirty="0" err="1">
+                <a:solidFill>
+                  <a:srgbClr val="7A6F68"/>
+                </a:solidFill>
+                <a:latin typeface="Calibri"/>
+              </a:rPr>
+              <a:t>tamaño_habitacion</a:t>
+            </a:r>
+            <a:r>
+              <a:rPr sz="1150" b="0" i="1" dirty="0">
+                <a:solidFill>
+                  <a:srgbClr val="7A6F68"/>
+                </a:solidFill>
+                <a:latin typeface="Calibri"/>
+              </a:rPr>
+              <a:t> (≤ 75,5m²); el </a:t>
+            </a:r>
+            <a:r>
+              <a:rPr sz="1150" b="0" i="1" dirty="0" err="1">
+                <a:solidFill>
+                  <a:srgbClr val="7A6F68"/>
+                </a:solidFill>
+                <a:latin typeface="Calibri"/>
+              </a:rPr>
+              <a:t>segundo</a:t>
+            </a:r>
+            <a:r>
+              <a:rPr sz="1150" b="0" i="1" dirty="0">
+                <a:solidFill>
+                  <a:srgbClr val="7A6F68"/>
+                </a:solidFill>
+                <a:latin typeface="Calibri"/>
+              </a:rPr>
+              <a:t> </a:t>
+            </a:r>
+            <a:r>
+              <a:rPr sz="1150" b="0" i="1" dirty="0" err="1">
+                <a:solidFill>
+                  <a:srgbClr val="7A6F68"/>
+                </a:solidFill>
+                <a:latin typeface="Calibri"/>
+              </a:rPr>
+              <a:t>nivel</a:t>
+            </a:r>
+            <a:r>
+              <a:rPr sz="1150" b="0" i="1" dirty="0">
+                <a:solidFill>
+                  <a:srgbClr val="7A6F68"/>
+                </a:solidFill>
+                <a:latin typeface="Calibri"/>
+              </a:rPr>
+              <a:t> es </a:t>
+            </a:r>
+            <a:r>
+              <a:rPr sz="1150" b="0" i="1" dirty="0" err="1">
+                <a:solidFill>
+                  <a:srgbClr val="7A6F68"/>
+                </a:solidFill>
+                <a:latin typeface="Calibri"/>
+              </a:rPr>
+              <a:t>provincia</a:t>
+            </a:r>
+            <a:r>
+              <a:rPr sz="1150" b="0" i="1" dirty="0">
+                <a:solidFill>
+                  <a:srgbClr val="7A6F68"/>
+                </a:solidFill>
+                <a:latin typeface="Calibri"/>
+              </a:rPr>
+              <a:t>.</a:t>
             </a:r>
           </a:p>
         </p:txBody>
@@ -9888,7 +9727,7 @@
           <p:nvPr>
             <p:extLst>
               <p:ext uri="{D42A27DB-BD31-4B8C-83A1-F6EECF244321}">
-                <p14:modId xmlns:p14="http://schemas.microsoft.com/office/powerpoint/2010/main" val="596502264"/>
+                <p14:modId xmlns:p14="http://schemas.microsoft.com/office/powerpoint/2010/main" val="3565569378"/>
               </p:ext>
             </p:extLst>
           </p:nvPr>
@@ -10762,7 +10601,18 @@
                           <a:ea typeface="Calibri" pitchFamily="34" charset="-122"/>
                           <a:cs typeface="Calibri" pitchFamily="34" charset="-120"/>
                         </a:rPr>
-                        <a:t>Árbol de decisión</a:t>
+                        <a:t>Árbol de </a:t>
+                      </a:r>
+                      <a:r>
+                        <a:rPr lang="en-US" sz="1300" dirty="0" err="1">
+                          <a:solidFill>
+                            <a:srgbClr val="2B2320"/>
+                          </a:solidFill>
+                          <a:latin typeface="Calibri" pitchFamily="34" charset="0"/>
+                          <a:ea typeface="Calibri" pitchFamily="34" charset="-122"/>
+                          <a:cs typeface="Calibri" pitchFamily="34" charset="-120"/>
+                        </a:rPr>
+                        <a:t>regresión</a:t>
                       </a:r>
                       <a:endParaRPr lang="en-US" sz="1300" dirty="0">
                         <a:latin typeface="Calibri" charset="0"/>
@@ -11672,7 +11522,7 @@
         <p:spPr>
           <a:xfrm>
             <a:off x="7754111" y="4709160"/>
-            <a:ext cx="3749040" cy="1280160"/>
+            <a:ext cx="3888944" cy="1280160"/>
           </a:xfrm>
           <a:prstGeom prst="rect">
             <a:avLst/>
@@ -14479,7 +14329,7 @@
         <p:spPr>
           <a:xfrm>
             <a:off x="6492240" y="1554480"/>
-            <a:ext cx="5120640" cy="1645920"/>
+            <a:ext cx="5120640" cy="1800000"/>
           </a:xfrm>
           <a:prstGeom prst="roundRect">
             <a:avLst>
@@ -14514,8 +14364,8 @@
         </p:nvSpPr>
         <p:spPr>
           <a:xfrm>
-            <a:off x="6629400" y="1664208"/>
-            <a:ext cx="4846320" cy="905256"/>
+            <a:off x="6629400" y="1706880"/>
+            <a:ext cx="4846320" cy="800100"/>
           </a:xfrm>
           <a:prstGeom prst="rect">
             <a:avLst/>
@@ -14553,8 +14403,8 @@
         </p:nvSpPr>
         <p:spPr>
           <a:xfrm>
-            <a:off x="6629400" y="2574950"/>
-            <a:ext cx="4983480" cy="592531"/>
+            <a:off x="6629400" y="2560320"/>
+            <a:ext cx="4983480" cy="411480"/>
           </a:xfrm>
           <a:prstGeom prst="rect">
             <a:avLst/>
@@ -14578,51 +14428,7 @@
                 <a:ea typeface="Calibri" pitchFamily="34" charset="-122"/>
                 <a:cs typeface="Calibri" pitchFamily="34" charset="-120"/>
               </a:rPr>
-              <a:t>de los alojamientos del conjunto de </a:t>
-            </a:r>
-            <a:r>
-              <a:rPr lang="en-US" sz="1050" dirty="0" err="1">
-                <a:solidFill>
-                  <a:srgbClr val="7A6F68"/>
-                </a:solidFill>
-                <a:latin typeface="Calibri" pitchFamily="34" charset="0"/>
-                <a:ea typeface="Calibri" pitchFamily="34" charset="-122"/>
-                <a:cs typeface="Calibri" pitchFamily="34" charset="-120"/>
-              </a:rPr>
-              <a:t>prueba</a:t>
-            </a:r>
-            <a:r>
-              <a:rPr lang="en-US" sz="1050" dirty="0">
-                <a:solidFill>
-                  <a:srgbClr val="7A6F68"/>
-                </a:solidFill>
-                <a:latin typeface="Calibri" pitchFamily="34" charset="0"/>
-                <a:ea typeface="Calibri" pitchFamily="34" charset="-122"/>
-                <a:cs typeface="Calibri" pitchFamily="34" charset="-120"/>
-              </a:rPr>
-              <a:t> </a:t>
-            </a:r>
-            <a:r>
-              <a:rPr lang="en-US" sz="1050" dirty="0" err="1">
-                <a:solidFill>
-                  <a:srgbClr val="7A6F68"/>
-                </a:solidFill>
-                <a:latin typeface="Calibri" pitchFamily="34" charset="0"/>
-                <a:ea typeface="Calibri" pitchFamily="34" charset="-122"/>
-                <a:cs typeface="Calibri" pitchFamily="34" charset="-120"/>
-              </a:rPr>
-              <a:t>constituyen</a:t>
-            </a:r>
-            <a:r>
-              <a:rPr lang="en-US" sz="1050" dirty="0">
-                <a:solidFill>
-                  <a:srgbClr val="7A6F68"/>
-                </a:solidFill>
-                <a:latin typeface="Calibri" pitchFamily="34" charset="0"/>
-                <a:ea typeface="Calibri" pitchFamily="34" charset="-122"/>
-                <a:cs typeface="Calibri" pitchFamily="34" charset="-120"/>
-              </a:rPr>
-              <a:t> un chollo (Chollo + Super + Hiper)</a:t>
+              <a:t>son un chollo (Chollo + Super + Hiper)</a:t>
             </a:r>
             <a:endParaRPr lang="en-US" sz="1050" dirty="0"/>
           </a:p>
@@ -15906,8 +15712,8 @@
         </p:nvSpPr>
         <p:spPr>
           <a:xfrm>
-            <a:off x="6787804" y="1847088"/>
-            <a:ext cx="5120640" cy="274320"/>
+            <a:off x="6787804" y="3017520"/>
+            <a:ext cx="5120640" cy="228600"/>
           </a:xfrm>
           <a:prstGeom prst="rect">
             <a:avLst/>
@@ -15923,7 +15729,7 @@
               <a:buNone/>
             </a:pPr>
             <a:r>
-              <a:rPr lang="en-US" sz="1050" i="1" dirty="0">
+              <a:rPr lang="en-US" sz="900" i="1" dirty="0">
                 <a:solidFill>
                   <a:srgbClr val="7A6F68"/>
                 </a:solidFill>
@@ -15931,40 +15737,7 @@
                 <a:ea typeface="Calibri" pitchFamily="34" charset="-122"/>
                 <a:cs typeface="Calibri" pitchFamily="34" charset="-120"/>
               </a:rPr>
-              <a:t>Sobre 390.462 registros del conjunto de </a:t>
-            </a:r>
-            <a:r>
-              <a:rPr lang="en-US" sz="1050" i="1" dirty="0" err="1">
-                <a:solidFill>
-                  <a:srgbClr val="7A6F68"/>
-                </a:solidFill>
-                <a:latin typeface="Calibri" pitchFamily="34" charset="0"/>
-                <a:ea typeface="Calibri" pitchFamily="34" charset="-122"/>
-                <a:cs typeface="Calibri" pitchFamily="34" charset="-120"/>
-              </a:rPr>
-              <a:t>prueba</a:t>
-            </a:r>
-            <a:r>
-              <a:rPr lang="en-US" sz="1050" i="1" dirty="0">
-                <a:solidFill>
-                  <a:srgbClr val="7A6F68"/>
-                </a:solidFill>
-                <a:latin typeface="Calibri" pitchFamily="34" charset="0"/>
-                <a:ea typeface="Calibri" pitchFamily="34" charset="-122"/>
-                <a:cs typeface="Calibri" pitchFamily="34" charset="-120"/>
-              </a:rPr>
-              <a:t>, </a:t>
-            </a:r>
-            <a:r>
-              <a:rPr lang="en-US" sz="1050" i="1" dirty="0" err="1">
-                <a:solidFill>
-                  <a:srgbClr val="7A6F68"/>
-                </a:solidFill>
-                <a:latin typeface="Calibri" pitchFamily="34" charset="0"/>
-                <a:ea typeface="Calibri" pitchFamily="34" charset="-122"/>
-                <a:cs typeface="Calibri" pitchFamily="34" charset="-120"/>
-              </a:rPr>
-              <a:t>el</a:t>
+              <a:t>390.462 registros del conjunto de prueba</a:t>
             </a:r>
             <a:endParaRPr lang="en-US" sz="1050" dirty="0"/>
           </a:p>
@@ -17160,7 +16933,18 @@
                 <a:ea typeface="Cambria" pitchFamily="34" charset="-122"/>
                 <a:cs typeface="Cambria" pitchFamily="34" charset="-120"/>
               </a:rPr>
-              <a:t>Flujo de trabajo de la búsqueda</a:t>
+              <a:t>Flujo de trabajo de la </a:t>
+            </a:r>
+            <a:r>
+              <a:rPr lang="en-US" sz="2800" b="1">
+                <a:solidFill>
+                  <a:srgbClr val="2B2320"/>
+                </a:solidFill>
+                <a:latin typeface="Cambria" pitchFamily="34" charset="0"/>
+                <a:ea typeface="Cambria" pitchFamily="34" charset="-122"/>
+                <a:cs typeface="Cambria" pitchFamily="34" charset="-120"/>
+              </a:rPr>
+              <a:t>aplicación</a:t>
             </a:r>
             <a:endParaRPr lang="en-US" sz="2800" dirty="0"/>
           </a:p>
@@ -17742,9 +17526,7 @@
           <a:bodyPr wrap="square" lIns="0" tIns="0" rIns="0" bIns="0" rtlCol="0" anchor="ctr"/>
           <a:lstStyle/>
           <a:p>
-            <a:pPr marL="0" indent="0" algn="ctr">
-              <a:buNone/>
-            </a:pPr>
+            <a:pPr algn="ctr"/>
             <a:r>
               <a:rPr lang="en-US" sz="1400" b="1" dirty="0">
                 <a:solidFill>
@@ -17864,33 +17646,6 @@
       </p:sp>
       <p:sp>
         <p:nvSpPr>
-          <p:cNvPr id="28" name="Shape 21"/>
-          <p:cNvSpPr/>
-          <p:nvPr/>
-        </p:nvSpPr>
-        <p:spPr>
-          <a:xfrm>
-            <a:off x="548640" y="4590288"/>
-            <a:ext cx="457200" cy="457200"/>
-          </a:xfrm>
-          <a:prstGeom prst="ellipse">
-            <a:avLst/>
-          </a:prstGeom>
-          <a:solidFill>
-            <a:srgbClr val="B8563A"/>
-          </a:solidFill>
-          <a:ln/>
-        </p:spPr>
-        <p:txBody>
-          <a:bodyPr/>
-          <a:lstStyle/>
-          <a:p>
-            <a:endParaRPr/>
-          </a:p>
-        </p:txBody>
-      </p:sp>
-      <p:sp>
-        <p:nvSpPr>
           <p:cNvPr id="29" name="Text 22"/>
           <p:cNvSpPr/>
           <p:nvPr/>
@@ -18195,6 +17950,55 @@
               <a:t>Tabla ordenada por ahorro y gráfico de categorías</a:t>
             </a:r>
             <a:endParaRPr lang="en-US" sz="1200" dirty="0"/>
+          </a:p>
+        </p:txBody>
+      </p:sp>
+      <p:sp>
+        <p:nvSpPr>
+          <p:cNvPr id="39" name="Shape 17">
+            <a:extLst>
+              <a:ext uri="{FF2B5EF4-FFF2-40B4-BE49-F238E27FC236}">
+                <a16:creationId xmlns:a16="http://schemas.microsoft.com/office/drawing/2014/main" id="{DE033A3F-F28A-8445-EE73-3FE5D95C9782}"/>
+              </a:ext>
+            </a:extLst>
+          </p:cNvPr>
+          <p:cNvSpPr/>
+          <p:nvPr/>
+        </p:nvSpPr>
+        <p:spPr>
+          <a:xfrm>
+            <a:off x="545092" y="4594860"/>
+            <a:ext cx="457200" cy="457200"/>
+          </a:xfrm>
+          <a:prstGeom prst="ellipse">
+            <a:avLst/>
+          </a:prstGeom>
+          <a:solidFill>
+            <a:srgbClr val="3B6E77"/>
+          </a:solidFill>
+          <a:ln/>
+        </p:spPr>
+        <p:txBody>
+          <a:bodyPr/>
+          <a:lstStyle/>
+          <a:p>
+            <a:r>
+              <a:rPr lang="es-ES" sz="1400" dirty="0">
+                <a:solidFill>
+                  <a:schemeClr val="bg1"/>
+                </a:solidFill>
+                <a:latin typeface="Cambria" panose="02040503050406030204" pitchFamily="18" charset="0"/>
+                <a:ea typeface="Cambria" panose="02040503050406030204" pitchFamily="18" charset="0"/>
+              </a:rPr>
+              <a:t>5</a:t>
+            </a:r>
+            <a:endParaRPr sz="1400" dirty="0">
+              <a:solidFill>
+                <a:schemeClr val="bg1"/>
+              </a:solidFill>
+              <a:latin typeface="Cambria" panose="02040503050406030204" pitchFamily="18" charset="0"/>
+              <a:ea typeface="Cambria" panose="02040503050406030204" pitchFamily="18" charset="0"/>
+            </a:endParaRPr>
           </a:p>
         </p:txBody>
       </p:sp>
@@ -18488,7 +18292,7 @@
         </p:nvSpPr>
         <p:spPr>
           <a:xfrm>
-            <a:off x="1325880" y="1362456"/>
+            <a:off x="1325880" y="1485900"/>
             <a:ext cx="7772400" cy="365760"/>
           </a:xfrm>
           <a:prstGeom prst="rect">
@@ -18516,45 +18320,6 @@
               <a:t>Motivación y objetivos</a:t>
             </a:r>
             <a:endParaRPr lang="en-US" sz="1650" dirty="0"/>
-          </a:p>
-        </p:txBody>
-      </p:sp>
-      <p:sp>
-        <p:nvSpPr>
-          <p:cNvPr id="10" name="Text 8"/>
-          <p:cNvSpPr/>
-          <p:nvPr/>
-        </p:nvSpPr>
-        <p:spPr>
-          <a:xfrm>
-            <a:off x="1325880" y="1709928"/>
-            <a:ext cx="8686800" cy="320040"/>
-          </a:xfrm>
-          <a:prstGeom prst="rect">
-            <a:avLst/>
-          </a:prstGeom>
-          <a:noFill/>
-          <a:ln/>
-        </p:spPr>
-        <p:txBody>
-          <a:bodyPr wrap="square" lIns="0" tIns="0" rIns="0" bIns="0" rtlCol="0" anchor="ctr"/>
-          <a:lstStyle/>
-          <a:p>
-            <a:pPr marL="0" indent="0">
-              <a:buNone/>
-            </a:pPr>
-            <a:r>
-              <a:rPr lang="en-US" sz="1150" dirty="0">
-                <a:solidFill>
-                  <a:srgbClr val="7A6F68"/>
-                </a:solidFill>
-                <a:latin typeface="Calibri" pitchFamily="34" charset="0"/>
-                <a:ea typeface="Calibri" pitchFamily="34" charset="-122"/>
-                <a:cs typeface="Calibri" pitchFamily="34" charset="-120"/>
-              </a:rPr>
-              <a:t>Contexto del problema y alcance del trabajo</a:t>
-            </a:r>
-            <a:endParaRPr lang="en-US" sz="1150" dirty="0"/>
           </a:p>
         </p:txBody>
       </p:sp>
@@ -18632,7 +18397,7 @@
         </p:nvSpPr>
         <p:spPr>
           <a:xfrm>
-            <a:off x="1325880" y="2139696"/>
+            <a:off x="1325880" y="2263140"/>
             <a:ext cx="7772400" cy="365760"/>
           </a:xfrm>
           <a:prstGeom prst="rect">
@@ -18660,45 +18425,6 @@
               <a:t>Datos y metodología</a:t>
             </a:r>
             <a:endParaRPr lang="en-US" sz="1650" dirty="0"/>
-          </a:p>
-        </p:txBody>
-      </p:sp>
-      <p:sp>
-        <p:nvSpPr>
-          <p:cNvPr id="14" name="Text 12"/>
-          <p:cNvSpPr/>
-          <p:nvPr/>
-        </p:nvSpPr>
-        <p:spPr>
-          <a:xfrm>
-            <a:off x="1325880" y="2487168"/>
-            <a:ext cx="8686800" cy="320040"/>
-          </a:xfrm>
-          <a:prstGeom prst="rect">
-            <a:avLst/>
-          </a:prstGeom>
-          <a:noFill/>
-          <a:ln/>
-        </p:spPr>
-        <p:txBody>
-          <a:bodyPr wrap="square" lIns="0" tIns="0" rIns="0" bIns="0" rtlCol="0" anchor="ctr"/>
-          <a:lstStyle/>
-          <a:p>
-            <a:pPr marL="0" indent="0">
-              <a:buNone/>
-            </a:pPr>
-            <a:r>
-              <a:rPr lang="en-US" sz="1150" dirty="0">
-                <a:solidFill>
-                  <a:srgbClr val="7A6F68"/>
-                </a:solidFill>
-                <a:latin typeface="Calibri" pitchFamily="34" charset="0"/>
-                <a:ea typeface="Calibri" pitchFamily="34" charset="-122"/>
-                <a:cs typeface="Calibri" pitchFamily="34" charset="-120"/>
-              </a:rPr>
-              <a:t>Recopilación, limpieza e ingeniería de características</a:t>
-            </a:r>
-            <a:endParaRPr lang="en-US" sz="1150" dirty="0"/>
           </a:p>
         </p:txBody>
       </p:sp>
@@ -18776,7 +18502,7 @@
         </p:nvSpPr>
         <p:spPr>
           <a:xfrm>
-            <a:off x="1325880" y="2916936"/>
+            <a:off x="1325880" y="3040380"/>
             <a:ext cx="7772400" cy="365760"/>
           </a:xfrm>
           <a:prstGeom prst="rect">
@@ -18804,45 +18530,6 @@
               <a:t>Modelización y resultados</a:t>
             </a:r>
             <a:endParaRPr lang="en-US" sz="1650" dirty="0"/>
-          </a:p>
-        </p:txBody>
-      </p:sp>
-      <p:sp>
-        <p:nvSpPr>
-          <p:cNvPr id="18" name="Text 16"/>
-          <p:cNvSpPr/>
-          <p:nvPr/>
-        </p:nvSpPr>
-        <p:spPr>
-          <a:xfrm>
-            <a:off x="1325880" y="3264408"/>
-            <a:ext cx="8686800" cy="320040"/>
-          </a:xfrm>
-          <a:prstGeom prst="rect">
-            <a:avLst/>
-          </a:prstGeom>
-          <a:noFill/>
-          <a:ln/>
-        </p:spPr>
-        <p:txBody>
-          <a:bodyPr wrap="square" lIns="0" tIns="0" rIns="0" bIns="0" rtlCol="0" anchor="ctr"/>
-          <a:lstStyle/>
-          <a:p>
-            <a:pPr marL="0" indent="0">
-              <a:buNone/>
-            </a:pPr>
-            <a:r>
-              <a:rPr lang="en-US" sz="1150" dirty="0">
-                <a:solidFill>
-                  <a:srgbClr val="7A6F68"/>
-                </a:solidFill>
-                <a:latin typeface="Calibri" pitchFamily="34" charset="0"/>
-                <a:ea typeface="Calibri" pitchFamily="34" charset="-122"/>
-                <a:cs typeface="Calibri" pitchFamily="34" charset="-120"/>
-              </a:rPr>
-              <a:t>Cuatro modelos de regresión y su evaluación</a:t>
-            </a:r>
-            <a:endParaRPr lang="en-US" sz="1150" dirty="0"/>
           </a:p>
         </p:txBody>
       </p:sp>
@@ -18920,7 +18607,7 @@
         </p:nvSpPr>
         <p:spPr>
           <a:xfrm>
-            <a:off x="1325880" y="3694176"/>
+            <a:off x="1325880" y="3817620"/>
             <a:ext cx="7772400" cy="365760"/>
           </a:xfrm>
           <a:prstGeom prst="rect">
@@ -18948,45 +18635,6 @@
               <a:t>Categorización de chollos</a:t>
             </a:r>
             <a:endParaRPr lang="en-US" sz="1650" dirty="0"/>
-          </a:p>
-        </p:txBody>
-      </p:sp>
-      <p:sp>
-        <p:nvSpPr>
-          <p:cNvPr id="22" name="Text 20"/>
-          <p:cNvSpPr/>
-          <p:nvPr/>
-        </p:nvSpPr>
-        <p:spPr>
-          <a:xfrm>
-            <a:off x="1325880" y="4041648"/>
-            <a:ext cx="8686800" cy="320040"/>
-          </a:xfrm>
-          <a:prstGeom prst="rect">
-            <a:avLst/>
-          </a:prstGeom>
-          <a:noFill/>
-          <a:ln/>
-        </p:spPr>
-        <p:txBody>
-          <a:bodyPr wrap="square" lIns="0" tIns="0" rIns="0" bIns="0" rtlCol="0" anchor="ctr"/>
-          <a:lstStyle/>
-          <a:p>
-            <a:pPr marL="0" indent="0">
-              <a:buNone/>
-            </a:pPr>
-            <a:r>
-              <a:rPr lang="en-US" sz="1150" dirty="0">
-                <a:solidFill>
-                  <a:srgbClr val="7A6F68"/>
-                </a:solidFill>
-                <a:latin typeface="Calibri" pitchFamily="34" charset="0"/>
-                <a:ea typeface="Calibri" pitchFamily="34" charset="-122"/>
-                <a:cs typeface="Calibri" pitchFamily="34" charset="-120"/>
-              </a:rPr>
-              <a:t>Regla determinista y distribución obtenida</a:t>
-            </a:r>
-            <a:endParaRPr lang="en-US" sz="1150" dirty="0"/>
           </a:p>
         </p:txBody>
       </p:sp>
@@ -19064,7 +18712,7 @@
         </p:nvSpPr>
         <p:spPr>
           <a:xfrm>
-            <a:off x="1325880" y="4471416"/>
+            <a:off x="1325880" y="4594860"/>
             <a:ext cx="7772400" cy="365760"/>
           </a:xfrm>
           <a:prstGeom prst="rect">
@@ -19092,45 +18740,6 @@
               <a:t>Aplicación web</a:t>
             </a:r>
             <a:endParaRPr lang="en-US" sz="1650" dirty="0"/>
-          </a:p>
-        </p:txBody>
-      </p:sp>
-      <p:sp>
-        <p:nvSpPr>
-          <p:cNvPr id="26" name="Text 24"/>
-          <p:cNvSpPr/>
-          <p:nvPr/>
-        </p:nvSpPr>
-        <p:spPr>
-          <a:xfrm>
-            <a:off x="1325880" y="4818888"/>
-            <a:ext cx="8686800" cy="320040"/>
-          </a:xfrm>
-          <a:prstGeom prst="rect">
-            <a:avLst/>
-          </a:prstGeom>
-          <a:noFill/>
-          <a:ln/>
-        </p:spPr>
-        <p:txBody>
-          <a:bodyPr wrap="square" lIns="0" tIns="0" rIns="0" bIns="0" rtlCol="0" anchor="ctr"/>
-          <a:lstStyle/>
-          <a:p>
-            <a:pPr marL="0" indent="0">
-              <a:buNone/>
-            </a:pPr>
-            <a:r>
-              <a:rPr lang="en-US" sz="1150" dirty="0">
-                <a:solidFill>
-                  <a:srgbClr val="7A6F68"/>
-                </a:solidFill>
-                <a:latin typeface="Calibri" pitchFamily="34" charset="0"/>
-                <a:ea typeface="Calibri" pitchFamily="34" charset="-122"/>
-                <a:cs typeface="Calibri" pitchFamily="34" charset="-120"/>
-              </a:rPr>
-              <a:t>Arquitectura, flujo de uso y despliegue</a:t>
-            </a:r>
-            <a:endParaRPr lang="en-US" sz="1150" dirty="0"/>
           </a:p>
         </p:txBody>
       </p:sp>
@@ -19208,7 +18817,7 @@
         </p:nvSpPr>
         <p:spPr>
           <a:xfrm>
-            <a:off x="1325880" y="5248656"/>
+            <a:off x="1316736" y="5372100"/>
             <a:ext cx="7772400" cy="365760"/>
           </a:xfrm>
           <a:prstGeom prst="rect">
@@ -19236,45 +18845,6 @@
               <a:t>Conclusiones y trabajo futuro</a:t>
             </a:r>
             <a:endParaRPr lang="en-US" sz="1650" dirty="0"/>
-          </a:p>
-        </p:txBody>
-      </p:sp>
-      <p:sp>
-        <p:nvSpPr>
-          <p:cNvPr id="30" name="Text 28"/>
-          <p:cNvSpPr/>
-          <p:nvPr/>
-        </p:nvSpPr>
-        <p:spPr>
-          <a:xfrm>
-            <a:off x="1325880" y="5596128"/>
-            <a:ext cx="8686800" cy="320040"/>
-          </a:xfrm>
-          <a:prstGeom prst="rect">
-            <a:avLst/>
-          </a:prstGeom>
-          <a:noFill/>
-          <a:ln/>
-        </p:spPr>
-        <p:txBody>
-          <a:bodyPr wrap="square" lIns="0" tIns="0" rIns="0" bIns="0" rtlCol="0" anchor="ctr"/>
-          <a:lstStyle/>
-          <a:p>
-            <a:pPr marL="0" indent="0">
-              <a:buNone/>
-            </a:pPr>
-            <a:r>
-              <a:rPr lang="en-US" sz="1150" dirty="0">
-                <a:solidFill>
-                  <a:srgbClr val="7A6F68"/>
-                </a:solidFill>
-                <a:latin typeface="Calibri" pitchFamily="34" charset="0"/>
-                <a:ea typeface="Calibri" pitchFamily="34" charset="-122"/>
-                <a:cs typeface="Calibri" pitchFamily="34" charset="-120"/>
-              </a:rPr>
-              <a:t>Aportaciones principales y líneas de continuación</a:t>
-            </a:r>
-            <a:endParaRPr lang="en-US" sz="1150" dirty="0"/>
           </a:p>
         </p:txBody>
       </p:sp>
@@ -22095,7 +21665,84 @@
                 <a:ea typeface="Calibri" pitchFamily="34" charset="-122"/>
                 <a:cs typeface="Calibri" pitchFamily="34" charset="-120"/>
               </a:rPr>
-              <a:t>El precio de un alojamiento no es aleatorio</a:t>
+              <a:t>El </a:t>
+            </a:r>
+            <a:r>
+              <a:rPr lang="en-US" sz="1450" b="1" dirty="0" err="1">
+                <a:solidFill>
+                  <a:srgbClr val="2B2320"/>
+                </a:solidFill>
+                <a:latin typeface="Calibri" pitchFamily="34" charset="0"/>
+                <a:ea typeface="Calibri" pitchFamily="34" charset="-122"/>
+                <a:cs typeface="Calibri" pitchFamily="34" charset="-120"/>
+              </a:rPr>
+              <a:t>precio</a:t>
+            </a:r>
+            <a:r>
+              <a:rPr lang="en-US" sz="1450" b="1" dirty="0">
+                <a:solidFill>
+                  <a:srgbClr val="2B2320"/>
+                </a:solidFill>
+                <a:latin typeface="Calibri" pitchFamily="34" charset="0"/>
+                <a:ea typeface="Calibri" pitchFamily="34" charset="-122"/>
+                <a:cs typeface="Calibri" pitchFamily="34" charset="-120"/>
+              </a:rPr>
+              <a:t> </a:t>
+            </a:r>
+            <a:r>
+              <a:rPr lang="en-US" sz="1450" b="1" dirty="0" err="1">
+                <a:solidFill>
+                  <a:srgbClr val="2B2320"/>
+                </a:solidFill>
+                <a:latin typeface="Calibri" pitchFamily="34" charset="0"/>
+                <a:ea typeface="Calibri" pitchFamily="34" charset="-122"/>
+                <a:cs typeface="Calibri" pitchFamily="34" charset="-120"/>
+              </a:rPr>
+              <a:t>presenta</a:t>
+            </a:r>
+            <a:r>
+              <a:rPr lang="en-US" sz="1450" b="1" dirty="0">
+                <a:solidFill>
+                  <a:srgbClr val="2B2320"/>
+                </a:solidFill>
+                <a:latin typeface="Calibri" pitchFamily="34" charset="0"/>
+                <a:ea typeface="Calibri" pitchFamily="34" charset="-122"/>
+                <a:cs typeface="Calibri" pitchFamily="34" charset="-120"/>
+              </a:rPr>
+              <a:t> </a:t>
+            </a:r>
+            <a:r>
+              <a:rPr lang="en-US" sz="1450" b="1" dirty="0" err="1">
+                <a:solidFill>
+                  <a:srgbClr val="2B2320"/>
+                </a:solidFill>
+                <a:latin typeface="Calibri" pitchFamily="34" charset="0"/>
+                <a:ea typeface="Calibri" pitchFamily="34" charset="-122"/>
+                <a:cs typeface="Calibri" pitchFamily="34" charset="-120"/>
+              </a:rPr>
+              <a:t>patrones</a:t>
+            </a:r>
+            <a:r>
+              <a:rPr lang="en-US" sz="1450" b="1" dirty="0">
+                <a:solidFill>
+                  <a:srgbClr val="2B2320"/>
+                </a:solidFill>
+                <a:latin typeface="Calibri" pitchFamily="34" charset="0"/>
+                <a:ea typeface="Calibri" pitchFamily="34" charset="-122"/>
+                <a:cs typeface="Calibri" pitchFamily="34" charset="-120"/>
+              </a:rPr>
+              <a:t> </a:t>
+            </a:r>
+            <a:r>
+              <a:rPr lang="en-US" sz="1450" b="1" dirty="0" err="1">
+                <a:solidFill>
+                  <a:srgbClr val="2B2320"/>
+                </a:solidFill>
+                <a:latin typeface="Calibri" pitchFamily="34" charset="0"/>
+                <a:ea typeface="Calibri" pitchFamily="34" charset="-122"/>
+                <a:cs typeface="Calibri" pitchFamily="34" charset="-120"/>
+              </a:rPr>
+              <a:t>predictivos</a:t>
             </a:r>
             <a:endParaRPr lang="en-US" sz="1450" dirty="0"/>
           </a:p>
@@ -22883,7 +22530,7 @@
         </p:nvSpPr>
         <p:spPr>
           <a:xfrm>
-            <a:off x="548640" y="1508760"/>
+            <a:off x="548640" y="2276856"/>
             <a:ext cx="502920" cy="502920"/>
           </a:xfrm>
           <a:prstGeom prst="ellipse">
@@ -22918,7 +22565,7 @@
         </p:blipFill>
         <p:spPr>
           <a:xfrm>
-            <a:off x="659282" y="1619402"/>
+            <a:off x="659282" y="2387498"/>
             <a:ext cx="281635" cy="281635"/>
           </a:xfrm>
           <a:prstGeom prst="rect">
@@ -22934,7 +22581,7 @@
         </p:nvSpPr>
         <p:spPr>
           <a:xfrm>
-            <a:off x="1280160" y="1481328"/>
+            <a:off x="1280160" y="2249424"/>
             <a:ext cx="10360152" cy="292608"/>
           </a:xfrm>
           <a:prstGeom prst="rect">
@@ -22973,7 +22620,7 @@
         </p:nvSpPr>
         <p:spPr>
           <a:xfrm>
-            <a:off x="1280160" y="1764792"/>
+            <a:off x="1280160" y="2532888"/>
             <a:ext cx="10360152" cy="457200"/>
           </a:xfrm>
           <a:prstGeom prst="rect">
@@ -22992,7 +22639,10 @@
             <a:r>
               <a:rPr lang="en-US" sz="1100" dirty="0">
                 <a:solidFill>
-                  <a:srgbClr val="7A6F68"/>
+                  <a:schemeClr val="tx1">
+                    <a:lumMod val="50000"/>
+                    <a:lumOff val="50000"/>
+                  </a:schemeClr>
                 </a:solidFill>
                 <a:latin typeface="Calibri" pitchFamily="34" charset="0"/>
                 <a:ea typeface="Calibri" pitchFamily="34" charset="-122"/>
@@ -23000,7 +22650,14 @@
               </a:rPr>
               <a:t>Extender la cobertura a otras comunidades autónomas u otras OTA</a:t>
             </a:r>
-            <a:endParaRPr lang="en-US" sz="1100" dirty="0"/>
+            <a:endParaRPr lang="en-US" sz="1100" dirty="0">
+              <a:solidFill>
+                <a:schemeClr val="tx1">
+                  <a:lumMod val="50000"/>
+                  <a:lumOff val="50000"/>
+                </a:schemeClr>
+              </a:solidFill>
+            </a:endParaRPr>
           </a:p>
         </p:txBody>
       </p:sp>
@@ -23012,7 +22669,7 @@
         </p:nvSpPr>
         <p:spPr>
           <a:xfrm>
-            <a:off x="548640" y="2423160"/>
+            <a:off x="548640" y="3191256"/>
             <a:ext cx="502920" cy="502920"/>
           </a:xfrm>
           <a:prstGeom prst="ellipse">
@@ -23047,7 +22704,7 @@
         </p:blipFill>
         <p:spPr>
           <a:xfrm>
-            <a:off x="659282" y="2533802"/>
+            <a:off x="659282" y="3301898"/>
             <a:ext cx="281635" cy="281635"/>
           </a:xfrm>
           <a:prstGeom prst="rect">
@@ -23063,7 +22720,7 @@
         </p:nvSpPr>
         <p:spPr>
           <a:xfrm>
-            <a:off x="1280160" y="2395728"/>
+            <a:off x="1280160" y="3163824"/>
             <a:ext cx="10360152" cy="292608"/>
           </a:xfrm>
           <a:prstGeom prst="rect">
@@ -23102,7 +22759,7 @@
         </p:nvSpPr>
         <p:spPr>
           <a:xfrm>
-            <a:off x="1280160" y="2679192"/>
+            <a:off x="1280160" y="3447288"/>
             <a:ext cx="10360152" cy="457200"/>
           </a:xfrm>
           <a:prstGeom prst="rect">
@@ -23141,7 +22798,7 @@
         </p:nvSpPr>
         <p:spPr>
           <a:xfrm>
-            <a:off x="548640" y="3337560"/>
+            <a:off x="548640" y="4105656"/>
             <a:ext cx="502920" cy="502920"/>
           </a:xfrm>
           <a:prstGeom prst="ellipse">
@@ -23176,7 +22833,7 @@
         </p:blipFill>
         <p:spPr>
           <a:xfrm>
-            <a:off x="659282" y="3448202"/>
+            <a:off x="659282" y="4216298"/>
             <a:ext cx="281635" cy="281635"/>
           </a:xfrm>
           <a:prstGeom prst="rect">
@@ -23192,7 +22849,7 @@
         </p:nvSpPr>
         <p:spPr>
           <a:xfrm>
-            <a:off x="1280160" y="3310128"/>
+            <a:off x="1280160" y="4078224"/>
             <a:ext cx="10360152" cy="292608"/>
           </a:xfrm>
           <a:prstGeom prst="rect">
@@ -23231,7 +22888,7 @@
         </p:nvSpPr>
         <p:spPr>
           <a:xfrm>
-            <a:off x="1280160" y="3593592"/>
+            <a:off x="1280160" y="4361688"/>
             <a:ext cx="10360152" cy="457200"/>
           </a:xfrm>
           <a:prstGeom prst="rect">
@@ -23270,7 +22927,7 @@
         </p:nvSpPr>
         <p:spPr>
           <a:xfrm>
-            <a:off x="548640" y="4251960"/>
+            <a:off x="548640" y="5020056"/>
             <a:ext cx="502920" cy="502920"/>
           </a:xfrm>
           <a:prstGeom prst="ellipse">
@@ -23305,7 +22962,7 @@
         </p:blipFill>
         <p:spPr>
           <a:xfrm>
-            <a:off x="659282" y="4362602"/>
+            <a:off x="659282" y="5130698"/>
             <a:ext cx="281635" cy="281635"/>
           </a:xfrm>
           <a:prstGeom prst="rect">
@@ -23321,7 +22978,7 @@
         </p:nvSpPr>
         <p:spPr>
           <a:xfrm>
-            <a:off x="1280160" y="4224528"/>
+            <a:off x="1280160" y="4992624"/>
             <a:ext cx="10360152" cy="292608"/>
           </a:xfrm>
           <a:prstGeom prst="rect">
@@ -23360,7 +23017,7 @@
         </p:nvSpPr>
         <p:spPr>
           <a:xfrm>
-            <a:off x="1280160" y="4507992"/>
+            <a:off x="1280160" y="5276088"/>
             <a:ext cx="10360152" cy="457200"/>
           </a:xfrm>
           <a:prstGeom prst="rect">
@@ -23399,7 +23056,7 @@
         </p:nvSpPr>
         <p:spPr>
           <a:xfrm>
-            <a:off x="548640" y="5166360"/>
+            <a:off x="548640" y="1350454"/>
             <a:ext cx="502920" cy="502920"/>
           </a:xfrm>
           <a:prstGeom prst="ellipse">
@@ -23434,7 +23091,7 @@
         </p:blipFill>
         <p:spPr>
           <a:xfrm>
-            <a:off x="659282" y="5277002"/>
+            <a:off x="659282" y="1461096"/>
             <a:ext cx="281635" cy="281635"/>
           </a:xfrm>
           <a:prstGeom prst="rect">
@@ -23450,7 +23107,7 @@
         </p:nvSpPr>
         <p:spPr>
           <a:xfrm>
-            <a:off x="1280160" y="5138928"/>
+            <a:off x="1280160" y="1323022"/>
             <a:ext cx="10360152" cy="292608"/>
           </a:xfrm>
           <a:prstGeom prst="rect">
@@ -23467,6 +23124,17 @@
               <a:buNone/>
             </a:pPr>
             <a:r>
+              <a:rPr lang="en-US" sz="1450" b="1" dirty="0" err="1">
+                <a:solidFill>
+                  <a:srgbClr val="2B2320"/>
+                </a:solidFill>
+                <a:latin typeface="Calibri" pitchFamily="34" charset="0"/>
+                <a:ea typeface="Calibri" pitchFamily="34" charset="-122"/>
+                <a:cs typeface="Calibri" pitchFamily="34" charset="-120"/>
+              </a:rPr>
+              <a:t>Codificación</a:t>
+            </a:r>
+            <a:r>
               <a:rPr lang="en-US" sz="1450" b="1" dirty="0">
                 <a:solidFill>
                   <a:srgbClr val="2B2320"/>
@@ -23475,7 +23143,73 @@
                 <a:ea typeface="Calibri" pitchFamily="34" charset="-122"/>
                 <a:cs typeface="Calibri" pitchFamily="34" charset="-120"/>
               </a:rPr>
-              <a:t>Aprendizaje no supervisado complementario</a:t>
+              <a:t> de </a:t>
+            </a:r>
+            <a:r>
+              <a:rPr lang="en-US" sz="1450" b="1" i="1" dirty="0" err="1">
+                <a:solidFill>
+                  <a:srgbClr val="2B2320"/>
+                </a:solidFill>
+                <a:latin typeface="Calibri" pitchFamily="34" charset="0"/>
+                <a:ea typeface="Calibri" pitchFamily="34" charset="-122"/>
+                <a:cs typeface="Calibri" pitchFamily="34" charset="-120"/>
+              </a:rPr>
+              <a:t>localidad</a:t>
+            </a:r>
+            <a:r>
+              <a:rPr lang="en-US" sz="1450" b="1" dirty="0">
+                <a:solidFill>
+                  <a:srgbClr val="2B2320"/>
+                </a:solidFill>
+                <a:latin typeface="Calibri" pitchFamily="34" charset="0"/>
+                <a:ea typeface="Calibri" pitchFamily="34" charset="-122"/>
+                <a:cs typeface="Calibri" pitchFamily="34" charset="-120"/>
+              </a:rPr>
+              <a:t> y </a:t>
+            </a:r>
+            <a:r>
+              <a:rPr lang="en-US" sz="1450" b="1" i="1" dirty="0">
+                <a:solidFill>
+                  <a:srgbClr val="2B2320"/>
+                </a:solidFill>
+                <a:latin typeface="Calibri" pitchFamily="34" charset="0"/>
+                <a:ea typeface="Calibri" pitchFamily="34" charset="-122"/>
+                <a:cs typeface="Calibri" pitchFamily="34" charset="-120"/>
+              </a:rPr>
+              <a:t>provincial</a:t>
+            </a:r>
+            <a:r>
+              <a:rPr lang="en-US" sz="1450" b="1" dirty="0">
+                <a:solidFill>
+                  <a:srgbClr val="2B2320"/>
+                </a:solidFill>
+                <a:latin typeface="Calibri" pitchFamily="34" charset="0"/>
+                <a:ea typeface="Calibri" pitchFamily="34" charset="-122"/>
+                <a:cs typeface="Calibri" pitchFamily="34" charset="-120"/>
+              </a:rPr>
+              <a:t> </a:t>
+            </a:r>
+            <a:r>
+              <a:rPr lang="en-US" sz="1450" b="1" dirty="0" err="1">
+                <a:solidFill>
+                  <a:srgbClr val="2B2320"/>
+                </a:solidFill>
+                <a:latin typeface="Calibri" pitchFamily="34" charset="0"/>
+                <a:ea typeface="Calibri" pitchFamily="34" charset="-122"/>
+                <a:cs typeface="Calibri" pitchFamily="34" charset="-120"/>
+              </a:rPr>
+              <a:t>como</a:t>
+            </a:r>
+            <a:r>
+              <a:rPr lang="en-US" sz="1450" b="1" dirty="0">
+                <a:solidFill>
+                  <a:srgbClr val="2B2320"/>
+                </a:solidFill>
+                <a:latin typeface="Calibri" pitchFamily="34" charset="0"/>
+                <a:ea typeface="Calibri" pitchFamily="34" charset="-122"/>
+                <a:cs typeface="Calibri" pitchFamily="34" charset="-120"/>
+              </a:rPr>
+              <a:t> “one-hot-encoding”</a:t>
             </a:r>
             <a:endParaRPr lang="en-US" sz="1450" dirty="0"/>
           </a:p>
@@ -23489,7 +23223,7 @@
         </p:nvSpPr>
         <p:spPr>
           <a:xfrm>
-            <a:off x="1280160" y="5422392"/>
+            <a:off x="1280160" y="1606486"/>
             <a:ext cx="10360152" cy="457200"/>
           </a:xfrm>
           <a:prstGeom prst="rect">
@@ -23506,17 +23240,156 @@
               <a:buNone/>
             </a:pPr>
             <a:r>
+              <a:rPr lang="en-US" sz="1100" dirty="0" err="1">
+                <a:solidFill>
+                  <a:schemeClr val="tx1">
+                    <a:lumMod val="50000"/>
+                    <a:lumOff val="50000"/>
+                  </a:schemeClr>
+                </a:solidFill>
+              </a:rPr>
+              <a:t>Que</a:t>
+            </a:r>
+            <a:r>
               <a:rPr lang="en-US" sz="1100" dirty="0">
                 <a:solidFill>
-                  <a:srgbClr val="7A6F68"/>
-                </a:solidFill>
-                <a:latin typeface="Calibri" pitchFamily="34" charset="0"/>
-                <a:ea typeface="Calibri" pitchFamily="34" charset="-122"/>
-                <a:cs typeface="Calibri" pitchFamily="34" charset="-120"/>
-              </a:rPr>
-              <a:t>Isolation Forest o Local Outlier Factor para categorías con pocos datos</a:t>
-            </a:r>
-            <a:endParaRPr lang="en-US" sz="1100" dirty="0"/>
+                  <a:schemeClr val="tx1">
+                    <a:lumMod val="50000"/>
+                    <a:lumOff val="50000"/>
+                  </a:schemeClr>
+                </a:solidFill>
+              </a:rPr>
+              <a:t> el </a:t>
+            </a:r>
+            <a:r>
+              <a:rPr lang="en-US" sz="1100" dirty="0" err="1">
+                <a:solidFill>
+                  <a:schemeClr val="tx1">
+                    <a:lumMod val="50000"/>
+                    <a:lumOff val="50000"/>
+                  </a:schemeClr>
+                </a:solidFill>
+              </a:rPr>
+              <a:t>modelo</a:t>
+            </a:r>
+            <a:r>
+              <a:rPr lang="en-US" sz="1100" dirty="0">
+                <a:solidFill>
+                  <a:schemeClr val="tx1">
+                    <a:lumMod val="50000"/>
+                    <a:lumOff val="50000"/>
+                  </a:schemeClr>
+                </a:solidFill>
+              </a:rPr>
+              <a:t> no </a:t>
+            </a:r>
+            <a:r>
+              <a:rPr lang="en-US" sz="1100" dirty="0" err="1">
+                <a:solidFill>
+                  <a:schemeClr val="tx1">
+                    <a:lumMod val="50000"/>
+                    <a:lumOff val="50000"/>
+                  </a:schemeClr>
+                </a:solidFill>
+              </a:rPr>
+              <a:t>pueda</a:t>
+            </a:r>
+            <a:r>
+              <a:rPr lang="en-US" sz="1100" dirty="0">
+                <a:solidFill>
+                  <a:schemeClr val="tx1">
+                    <a:lumMod val="50000"/>
+                    <a:lumOff val="50000"/>
+                  </a:schemeClr>
+                </a:solidFill>
+              </a:rPr>
+              <a:t> </a:t>
+            </a:r>
+            <a:r>
+              <a:rPr lang="en-US" sz="1100" dirty="0" err="1">
+                <a:solidFill>
+                  <a:schemeClr val="tx1">
+                    <a:lumMod val="50000"/>
+                    <a:lumOff val="50000"/>
+                  </a:schemeClr>
+                </a:solidFill>
+              </a:rPr>
+              <a:t>aprender</a:t>
+            </a:r>
+            <a:r>
+              <a:rPr lang="en-US" sz="1100" dirty="0">
+                <a:solidFill>
+                  <a:schemeClr val="tx1">
+                    <a:lumMod val="50000"/>
+                    <a:lumOff val="50000"/>
+                  </a:schemeClr>
+                </a:solidFill>
+              </a:rPr>
+              <a:t> </a:t>
+            </a:r>
+            <a:r>
+              <a:rPr lang="en-US" sz="1100" dirty="0" err="1">
+                <a:solidFill>
+                  <a:schemeClr val="tx1">
+                    <a:lumMod val="50000"/>
+                    <a:lumOff val="50000"/>
+                  </a:schemeClr>
+                </a:solidFill>
+              </a:rPr>
+              <a:t>patrones</a:t>
+            </a:r>
+            <a:r>
+              <a:rPr lang="en-US" sz="1100" dirty="0">
+                <a:solidFill>
+                  <a:schemeClr val="tx1">
+                    <a:lumMod val="50000"/>
+                    <a:lumOff val="50000"/>
+                  </a:schemeClr>
+                </a:solidFill>
+              </a:rPr>
+              <a:t> a </a:t>
+            </a:r>
+            <a:r>
+              <a:rPr lang="en-US" sz="1100" dirty="0" err="1">
+                <a:solidFill>
+                  <a:schemeClr val="tx1">
+                    <a:lumMod val="50000"/>
+                    <a:lumOff val="50000"/>
+                  </a:schemeClr>
+                </a:solidFill>
+              </a:rPr>
+              <a:t>través</a:t>
+            </a:r>
+            <a:r>
+              <a:rPr lang="en-US" sz="1100" dirty="0">
+                <a:solidFill>
+                  <a:schemeClr val="tx1">
+                    <a:lumMod val="50000"/>
+                    <a:lumOff val="50000"/>
+                  </a:schemeClr>
+                </a:solidFill>
+              </a:rPr>
+              <a:t> del </a:t>
+            </a:r>
+            <a:r>
+              <a:rPr lang="en-US" sz="1100" dirty="0" err="1">
+                <a:solidFill>
+                  <a:schemeClr val="tx1">
+                    <a:lumMod val="50000"/>
+                    <a:lumOff val="50000"/>
+                  </a:schemeClr>
+                </a:solidFill>
+              </a:rPr>
+              <a:t>orden</a:t>
+            </a:r>
+            <a:endParaRPr lang="en-US" sz="1100" dirty="0">
+              <a:solidFill>
+                <a:schemeClr val="tx1">
+                  <a:lumMod val="50000"/>
+                  <a:lumOff val="50000"/>
+                </a:schemeClr>
+              </a:solidFill>
+            </a:endParaRPr>
           </a:p>
         </p:txBody>
       </p:sp>
@@ -27007,7 +26880,7 @@
         <p:spPr>
           <a:xfrm>
             <a:off x="6245352" y="1463040"/>
-            <a:ext cx="5394960" cy="3447288"/>
+            <a:ext cx="5394960" cy="3695814"/>
           </a:xfrm>
           <a:prstGeom prst="roundRect">
             <a:avLst>
@@ -27133,7 +27006,7 @@
         <p:spPr>
           <a:xfrm>
             <a:off x="6519672" y="2423160"/>
-            <a:ext cx="4892040" cy="3474720"/>
+            <a:ext cx="4892040" cy="2514600"/>
           </a:xfrm>
           <a:prstGeom prst="rect">
             <a:avLst/>
@@ -27652,6 +27525,17 @@
               <a:buChar char="•"/>
             </a:pPr>
             <a:r>
+              <a:rPr lang="en-US" sz="1300" dirty="0" err="1">
+                <a:solidFill>
+                  <a:srgbClr val="2B2320"/>
+                </a:solidFill>
+                <a:latin typeface="Calibri" pitchFamily="34" charset="0"/>
+                <a:ea typeface="Calibri" pitchFamily="34" charset="-122"/>
+                <a:cs typeface="Calibri" pitchFamily="34" charset="-120"/>
+              </a:rPr>
+              <a:t>Extracción</a:t>
+            </a:r>
+            <a:r>
               <a:rPr lang="en-US" sz="1300" dirty="0">
                 <a:solidFill>
                   <a:srgbClr val="2B2320"/>
@@ -27660,7 +27544,7 @@
                 <a:ea typeface="Calibri" pitchFamily="34" charset="-122"/>
                 <a:cs typeface="Calibri" pitchFamily="34" charset="-120"/>
               </a:rPr>
-              <a:t>Por </a:t>
+              <a:t> de </a:t>
             </a:r>
             <a:r>
               <a:rPr lang="en-US" sz="1300" dirty="0" err="1">
@@ -27671,7 +27555,7 @@
                 <a:ea typeface="Calibri" pitchFamily="34" charset="-122"/>
                 <a:cs typeface="Calibri" pitchFamily="34" charset="-120"/>
               </a:rPr>
-              <a:t>prudencia</a:t>
+              <a:t>datos</a:t>
             </a:r>
             <a:r>
               <a:rPr lang="en-US" sz="1300" dirty="0">
@@ -27682,7 +27566,7 @@
                 <a:ea typeface="Calibri" pitchFamily="34" charset="-122"/>
                 <a:cs typeface="Calibri" pitchFamily="34" charset="-120"/>
               </a:rPr>
-              <a:t>, la plataforma de </a:t>
+              <a:t> </a:t>
             </a:r>
             <a:r>
               <a:rPr lang="en-US" sz="1300" dirty="0" err="1">
@@ -27693,7 +27577,7 @@
                 <a:ea typeface="Calibri" pitchFamily="34" charset="-122"/>
                 <a:cs typeface="Calibri" pitchFamily="34" charset="-120"/>
               </a:rPr>
-              <a:t>origen</a:t>
+              <a:t>realizada</a:t>
             </a:r>
             <a:r>
               <a:rPr lang="en-US" sz="1300" dirty="0">
@@ -27704,7 +27588,7 @@
                 <a:ea typeface="Calibri" pitchFamily="34" charset="-122"/>
                 <a:cs typeface="Calibri" pitchFamily="34" charset="-120"/>
               </a:rPr>
-              <a:t> de </a:t>
+              <a:t> solo a </a:t>
             </a:r>
             <a:r>
               <a:rPr lang="en-US" sz="1300" dirty="0" err="1">
@@ -27715,7 +27599,7 @@
                 <a:ea typeface="Calibri" pitchFamily="34" charset="-122"/>
                 <a:cs typeface="Calibri" pitchFamily="34" charset="-120"/>
               </a:rPr>
-              <a:t>los</a:t>
+              <a:t>través</a:t>
             </a:r>
             <a:r>
               <a:rPr lang="en-US" sz="1300" dirty="0">
@@ -27726,6 +27610,109 @@
                 <a:ea typeface="Calibri" pitchFamily="34" charset="-122"/>
                 <a:cs typeface="Calibri" pitchFamily="34" charset="-120"/>
               </a:rPr>
+              <a:t> de Booking.com.</a:t>
+            </a:r>
+          </a:p>
+          <a:p>
+            <a:pPr marL="342900" indent="-342900">
+              <a:lnSpc>
+                <a:spcPct val="115000"/>
+              </a:lnSpc>
+              <a:buSzPct val="100000"/>
+              <a:buChar char="•"/>
+            </a:pPr>
+            <a:endParaRPr lang="en-US" sz="1300" dirty="0">
+              <a:solidFill>
+                <a:srgbClr val="2B2320"/>
+              </a:solidFill>
+              <a:latin typeface="Calibri" pitchFamily="34" charset="0"/>
+              <a:ea typeface="Calibri" pitchFamily="34" charset="-122"/>
+              <a:cs typeface="Calibri" pitchFamily="34" charset="-120"/>
+            </a:endParaRPr>
+          </a:p>
+          <a:p>
+            <a:pPr marL="342900" indent="-342900">
+              <a:lnSpc>
+                <a:spcPct val="115000"/>
+              </a:lnSpc>
+              <a:buSzPct val="100000"/>
+              <a:buChar char="•"/>
+            </a:pPr>
+            <a:r>
+              <a:rPr lang="en-US" sz="1300" dirty="0">
+                <a:solidFill>
+                  <a:srgbClr val="2B2320"/>
+                </a:solidFill>
+                <a:latin typeface="Calibri" pitchFamily="34" charset="0"/>
+                <a:ea typeface="Calibri" pitchFamily="34" charset="-122"/>
+                <a:cs typeface="Calibri" pitchFamily="34" charset="-120"/>
+              </a:rPr>
+              <a:t>Las variables </a:t>
+            </a:r>
+            <a:r>
+              <a:rPr lang="en-US" sz="1300" i="1" dirty="0" err="1">
+                <a:solidFill>
+                  <a:srgbClr val="2B2320"/>
+                </a:solidFill>
+                <a:latin typeface="Calibri" pitchFamily="34" charset="0"/>
+                <a:ea typeface="Calibri" pitchFamily="34" charset="-122"/>
+                <a:cs typeface="Calibri" pitchFamily="34" charset="-120"/>
+              </a:rPr>
+              <a:t>localidad</a:t>
+            </a:r>
+            <a:r>
+              <a:rPr lang="en-US" sz="1300" dirty="0">
+                <a:solidFill>
+                  <a:srgbClr val="2B2320"/>
+                </a:solidFill>
+                <a:latin typeface="Calibri" pitchFamily="34" charset="0"/>
+                <a:ea typeface="Calibri" pitchFamily="34" charset="-122"/>
+                <a:cs typeface="Calibri" pitchFamily="34" charset="-120"/>
+              </a:rPr>
+              <a:t> y </a:t>
+            </a:r>
+            <a:r>
+              <a:rPr lang="en-US" sz="1300" i="1" dirty="0" err="1">
+                <a:solidFill>
+                  <a:srgbClr val="2B2320"/>
+                </a:solidFill>
+                <a:latin typeface="Calibri" pitchFamily="34" charset="0"/>
+                <a:ea typeface="Calibri" pitchFamily="34" charset="-122"/>
+                <a:cs typeface="Calibri" pitchFamily="34" charset="-120"/>
+              </a:rPr>
+              <a:t>provincia</a:t>
+            </a:r>
+            <a:r>
+              <a:rPr lang="en-US" sz="1300" dirty="0">
+                <a:solidFill>
+                  <a:srgbClr val="2B2320"/>
+                </a:solidFill>
+                <a:latin typeface="Calibri" pitchFamily="34" charset="0"/>
+                <a:ea typeface="Calibri" pitchFamily="34" charset="-122"/>
+                <a:cs typeface="Calibri" pitchFamily="34" charset="-120"/>
+              </a:rPr>
+              <a:t> se </a:t>
+            </a:r>
+            <a:r>
+              <a:rPr lang="en-US" sz="1300" dirty="0" err="1">
+                <a:solidFill>
+                  <a:srgbClr val="2B2320"/>
+                </a:solidFill>
+                <a:latin typeface="Calibri" pitchFamily="34" charset="0"/>
+                <a:ea typeface="Calibri" pitchFamily="34" charset="-122"/>
+                <a:cs typeface="Calibri" pitchFamily="34" charset="-120"/>
+              </a:rPr>
+              <a:t>codifican</a:t>
+            </a:r>
+            <a:r>
+              <a:rPr lang="en-US" sz="1300" dirty="0">
+                <a:solidFill>
+                  <a:srgbClr val="2B2320"/>
+                </a:solidFill>
+                <a:latin typeface="Calibri" pitchFamily="34" charset="0"/>
+                <a:ea typeface="Calibri" pitchFamily="34" charset="-122"/>
+                <a:cs typeface="Calibri" pitchFamily="34" charset="-120"/>
+              </a:rPr>
               <a:t> </a:t>
             </a:r>
             <a:r>
@@ -27737,7 +27724,7 @@
                 <a:ea typeface="Calibri" pitchFamily="34" charset="-122"/>
                 <a:cs typeface="Calibri" pitchFamily="34" charset="-120"/>
               </a:rPr>
-              <a:t>datos</a:t>
+              <a:t>como</a:t>
             </a:r>
             <a:r>
               <a:rPr lang="en-US" sz="1300" dirty="0">
@@ -27748,7 +27735,7 @@
                 <a:ea typeface="Calibri" pitchFamily="34" charset="-122"/>
                 <a:cs typeface="Calibri" pitchFamily="34" charset="-120"/>
               </a:rPr>
-              <a:t> no se </a:t>
+              <a:t> </a:t>
             </a:r>
             <a:r>
               <a:rPr lang="en-US" sz="1300" dirty="0" err="1">
@@ -27759,7 +27746,7 @@
                 <a:ea typeface="Calibri" pitchFamily="34" charset="-122"/>
                 <a:cs typeface="Calibri" pitchFamily="34" charset="-120"/>
               </a:rPr>
-              <a:t>identifica</a:t>
+              <a:t>ordinales</a:t>
             </a:r>
             <a:r>
               <a:rPr lang="en-US" sz="1300" dirty="0">
@@ -27770,7 +27757,7 @@
                 <a:ea typeface="Calibri" pitchFamily="34" charset="-122"/>
                 <a:cs typeface="Calibri" pitchFamily="34" charset="-120"/>
               </a:rPr>
-              <a:t> </a:t>
+              <a:t> para </a:t>
             </a:r>
             <a:r>
               <a:rPr lang="en-US" sz="1300" dirty="0" err="1">
@@ -27781,7 +27768,7 @@
                 <a:ea typeface="Calibri" pitchFamily="34" charset="-122"/>
                 <a:cs typeface="Calibri" pitchFamily="34" charset="-120"/>
               </a:rPr>
-              <a:t>explícitamente</a:t>
+              <a:t>reducir</a:t>
             </a:r>
             <a:r>
               <a:rPr lang="en-US" sz="1300" dirty="0">
@@ -27792,7 +27779,7 @@
                 <a:ea typeface="Calibri" pitchFamily="34" charset="-122"/>
                 <a:cs typeface="Calibri" pitchFamily="34" charset="-120"/>
               </a:rPr>
-              <a:t> </a:t>
+              <a:t> la </a:t>
             </a:r>
             <a:r>
               <a:rPr lang="en-US" sz="1300" dirty="0" err="1">
@@ -27803,7 +27790,7 @@
                 <a:ea typeface="Calibri" pitchFamily="34" charset="-122"/>
                 <a:cs typeface="Calibri" pitchFamily="34" charset="-120"/>
               </a:rPr>
-              <a:t>en</a:t>
+              <a:t>dimensionalidad</a:t>
             </a:r>
             <a:r>
               <a:rPr lang="en-US" sz="1300" dirty="0">
@@ -27814,52 +27801,17 @@
                 <a:ea typeface="Calibri" pitchFamily="34" charset="-122"/>
                 <a:cs typeface="Calibri" pitchFamily="34" charset="-120"/>
               </a:rPr>
-              <a:t> la </a:t>
-            </a:r>
-            <a:r>
-              <a:rPr lang="en-US" sz="1300" dirty="0" err="1">
-                <a:solidFill>
-                  <a:srgbClr val="2B2320"/>
-                </a:solidFill>
-                <a:latin typeface="Calibri" pitchFamily="34" charset="0"/>
-                <a:ea typeface="Calibri" pitchFamily="34" charset="-122"/>
-                <a:cs typeface="Calibri" pitchFamily="34" charset="-120"/>
-              </a:rPr>
-              <a:t>memoria</a:t>
-            </a:r>
-            <a:r>
-              <a:rPr lang="en-US" sz="1300" dirty="0">
-                <a:solidFill>
-                  <a:srgbClr val="2B2320"/>
-                </a:solidFill>
-                <a:latin typeface="Calibri" pitchFamily="34" charset="0"/>
-                <a:ea typeface="Calibri" pitchFamily="34" charset="-122"/>
-                <a:cs typeface="Calibri" pitchFamily="34" charset="-120"/>
-              </a:rPr>
-              <a:t>. Se </a:t>
-            </a:r>
-            <a:r>
-              <a:rPr lang="en-US" sz="1300" dirty="0" err="1">
-                <a:solidFill>
-                  <a:srgbClr val="2B2320"/>
-                </a:solidFill>
-                <a:latin typeface="Calibri" pitchFamily="34" charset="0"/>
-                <a:ea typeface="Calibri" pitchFamily="34" charset="-122"/>
-                <a:cs typeface="Calibri" pitchFamily="34" charset="-120"/>
-              </a:rPr>
-              <a:t>trata</a:t>
-            </a:r>
-            <a:r>
-              <a:rPr lang="en-US" sz="1300" dirty="0">
-                <a:solidFill>
-                  <a:srgbClr val="2B2320"/>
-                </a:solidFill>
-                <a:latin typeface="Calibri" pitchFamily="34" charset="0"/>
-                <a:ea typeface="Calibri" pitchFamily="34" charset="-122"/>
-                <a:cs typeface="Calibri" pitchFamily="34" charset="-120"/>
-              </a:rPr>
-              <a:t> de Booking.com.</a:t>
-            </a:r>
+              <a:t>.</a:t>
+            </a:r>
+          </a:p>
+          <a:p>
+            <a:pPr marL="342900" indent="-342900">
+              <a:lnSpc>
+                <a:spcPct val="115000"/>
+              </a:lnSpc>
+              <a:buSzPct val="100000"/>
+              <a:buChar char="•"/>
+            </a:pPr>
             <a:endParaRPr lang="en-US" sz="1300" dirty="0"/>
           </a:p>
         </p:txBody>

--- a/TFG_Chollos/Presentacion_Defensa_TFG.pptx
+++ b/TFG_Chollos/Presentacion_Defensa_TFG.pptx
@@ -21151,7 +21151,29 @@
                 <a:ea typeface="Calibri" pitchFamily="34" charset="-122"/>
                 <a:cs typeface="Calibri" pitchFamily="34" charset="-120"/>
               </a:rPr>
-              <a:t>Pérdida mínima de rendimiento; el modelo podado sigue superando ampliamente al 2º mejor modelo (árbol de decisión, R² = 0,59).</a:t>
+              <a:t>Pérdida mínima de rendimiento; el modelo podado sigue superando ampliamente al 2º mejor modelo (árbol de </a:t>
+            </a:r>
+            <a:r>
+              <a:rPr lang="en-US" sz="1200" i="1" dirty="0" err="1">
+                <a:solidFill>
+                  <a:srgbClr val="7A6F68"/>
+                </a:solidFill>
+                <a:latin typeface="Calibri" pitchFamily="34" charset="0"/>
+                <a:ea typeface="Calibri" pitchFamily="34" charset="-122"/>
+                <a:cs typeface="Calibri" pitchFamily="34" charset="-120"/>
+              </a:rPr>
+              <a:t>regresión</a:t>
+            </a:r>
+            <a:r>
+              <a:rPr lang="en-US" sz="1200" i="1" dirty="0">
+                <a:solidFill>
+                  <a:srgbClr val="7A6F68"/>
+                </a:solidFill>
+                <a:latin typeface="Calibri" pitchFamily="34" charset="0"/>
+                <a:ea typeface="Calibri" pitchFamily="34" charset="-122"/>
+                <a:cs typeface="Calibri" pitchFamily="34" charset="-120"/>
+              </a:rPr>
+              <a:t>, R² = 0,59).</a:t>
             </a:r>
             <a:endParaRPr lang="en-US" sz="1200" dirty="0"/>
           </a:p>
@@ -23168,7 +23190,7 @@
               <a:t> y </a:t>
             </a:r>
             <a:r>
-              <a:rPr lang="en-US" sz="1450" b="1" i="1" dirty="0">
+              <a:rPr lang="en-US" sz="1450" b="1" i="1" dirty="0" err="1">
                 <a:solidFill>
                   <a:srgbClr val="2B2320"/>
                 </a:solidFill>
@@ -23176,7 +23198,7 @@
                 <a:ea typeface="Calibri" pitchFamily="34" charset="-122"/>
                 <a:cs typeface="Calibri" pitchFamily="34" charset="-120"/>
               </a:rPr>
-              <a:t>provincial</a:t>
+              <a:t>provincia</a:t>
             </a:r>
             <a:r>
               <a:rPr lang="en-US" sz="1450" b="1" dirty="0">

--- a/TFG_Chollos/Presentacion_Defensa_TFG.pptx
+++ b/TFG_Chollos/Presentacion_Defensa_TFG.pptx
@@ -23881,6 +23881,220 @@
           </a:p>
         </p:txBody>
       </p:sp>
+      <p:sp>
+        <p:nvSpPr>
+          <p:cNvPr id="15" name="Shape 6">
+            <a:extLst>
+              <a:ext uri="{FF2B5EF4-FFF2-40B4-BE49-F238E27FC236}">
+                <a16:creationId xmlns:a16="http://schemas.microsoft.com/office/drawing/2014/main" id="{6513E10D-C228-8FC2-6BA5-4F2DF2D84FBD}"/>
+              </a:ext>
+            </a:extLst>
+          </p:cNvPr>
+          <p:cNvSpPr/>
+          <p:nvPr/>
+        </p:nvSpPr>
+        <p:spPr>
+          <a:xfrm>
+            <a:off x="6245352" y="4709160"/>
+            <a:ext cx="5394960" cy="960120"/>
+          </a:xfrm>
+          <a:prstGeom prst="roundRect">
+            <a:avLst>
+              <a:gd name="adj" fmla="val 5161"/>
+            </a:avLst>
+          </a:prstGeom>
+          <a:solidFill>
+            <a:schemeClr val="accent1">
+              <a:lumMod val="20000"/>
+              <a:lumOff val="80000"/>
+            </a:schemeClr>
+          </a:solidFill>
+          <a:ln/>
+        </p:spPr>
+        <p:txBody>
+          <a:bodyPr/>
+          <a:lstStyle/>
+          <a:p>
+            <a:endParaRPr dirty="0"/>
+          </a:p>
+        </p:txBody>
+      </p:sp>
+      <p:sp>
+        <p:nvSpPr>
+          <p:cNvPr id="16" name="Shape 7">
+            <a:extLst>
+              <a:ext uri="{FF2B5EF4-FFF2-40B4-BE49-F238E27FC236}">
+                <a16:creationId xmlns:a16="http://schemas.microsoft.com/office/drawing/2014/main" id="{EEC70DE6-EA77-7973-0FD4-F1DC7EF04DF8}"/>
+              </a:ext>
+            </a:extLst>
+          </p:cNvPr>
+          <p:cNvSpPr/>
+          <p:nvPr/>
+        </p:nvSpPr>
+        <p:spPr>
+          <a:xfrm>
+            <a:off x="6501384" y="4965192"/>
+            <a:ext cx="548640" cy="548640"/>
+          </a:xfrm>
+          <a:prstGeom prst="ellipse">
+            <a:avLst/>
+          </a:prstGeom>
+          <a:solidFill>
+            <a:srgbClr val="D99A3D"/>
+          </a:solidFill>
+          <a:ln/>
+        </p:spPr>
+        <p:txBody>
+          <a:bodyPr/>
+          <a:lstStyle/>
+          <a:p>
+            <a:endParaRPr/>
+          </a:p>
+        </p:txBody>
+      </p:sp>
+      <p:sp>
+        <p:nvSpPr>
+          <p:cNvPr id="18" name="Text 8">
+            <a:extLst>
+              <a:ext uri="{FF2B5EF4-FFF2-40B4-BE49-F238E27FC236}">
+                <a16:creationId xmlns:a16="http://schemas.microsoft.com/office/drawing/2014/main" id="{F9EA4143-AABE-9ACA-A489-8B16185C03D5}"/>
+              </a:ext>
+            </a:extLst>
+          </p:cNvPr>
+          <p:cNvSpPr/>
+          <p:nvPr/>
+        </p:nvSpPr>
+        <p:spPr>
+          <a:xfrm>
+            <a:off x="7205472" y="4846320"/>
+            <a:ext cx="4297680" cy="320040"/>
+          </a:xfrm>
+          <a:prstGeom prst="rect">
+            <a:avLst/>
+          </a:prstGeom>
+          <a:noFill/>
+          <a:ln/>
+        </p:spPr>
+        <p:txBody>
+          <a:bodyPr wrap="square" lIns="0" tIns="0" rIns="0" bIns="0" rtlCol="0" anchor="ctr"/>
+          <a:lstStyle/>
+          <a:p>
+            <a:pPr marL="0" indent="0">
+              <a:buNone/>
+            </a:pPr>
+            <a:r>
+              <a:rPr lang="en-US" sz="1300" b="1" dirty="0" err="1">
+                <a:latin typeface="Calibri" pitchFamily="34" charset="0"/>
+                <a:ea typeface="Calibri" pitchFamily="34" charset="-122"/>
+                <a:cs typeface="Calibri" pitchFamily="34" charset="-120"/>
+              </a:rPr>
+              <a:t>Vídeo</a:t>
+            </a:r>
+            <a:r>
+              <a:rPr lang="en-US" sz="1300" b="1" dirty="0">
+                <a:latin typeface="Calibri" pitchFamily="34" charset="0"/>
+                <a:ea typeface="Calibri" pitchFamily="34" charset="-122"/>
+                <a:cs typeface="Calibri" pitchFamily="34" charset="-120"/>
+              </a:rPr>
+              <a:t> de </a:t>
+            </a:r>
+            <a:r>
+              <a:rPr lang="en-US" sz="1300" b="1" dirty="0" err="1">
+                <a:latin typeface="Calibri" pitchFamily="34" charset="0"/>
+                <a:ea typeface="Calibri" pitchFamily="34" charset="-122"/>
+                <a:cs typeface="Calibri" pitchFamily="34" charset="-120"/>
+              </a:rPr>
+              <a:t>respaldo</a:t>
+            </a:r>
+            <a:r>
+              <a:rPr lang="en-US" sz="1300" b="1" dirty="0">
+                <a:latin typeface="Calibri" pitchFamily="34" charset="0"/>
+                <a:ea typeface="Calibri" pitchFamily="34" charset="-122"/>
+                <a:cs typeface="Calibri" pitchFamily="34" charset="-120"/>
+              </a:rPr>
+              <a:t> de la App Web</a:t>
+            </a:r>
+            <a:endParaRPr lang="en-US" sz="1300" dirty="0"/>
+          </a:p>
+        </p:txBody>
+      </p:sp>
+      <p:sp>
+        <p:nvSpPr>
+          <p:cNvPr id="19" name="Text 9">
+            <a:hlinkClick r:id="rId6"/>
+            <a:extLst>
+              <a:ext uri="{FF2B5EF4-FFF2-40B4-BE49-F238E27FC236}">
+                <a16:creationId xmlns:a16="http://schemas.microsoft.com/office/drawing/2014/main" id="{1CB2A5E9-5F50-9654-C2E3-6E3557456271}"/>
+              </a:ext>
+            </a:extLst>
+          </p:cNvPr>
+          <p:cNvSpPr/>
+          <p:nvPr/>
+        </p:nvSpPr>
+        <p:spPr>
+          <a:xfrm>
+            <a:off x="7205472" y="5148072"/>
+            <a:ext cx="4297680" cy="228600"/>
+          </a:xfrm>
+          <a:prstGeom prst="rect">
+            <a:avLst/>
+          </a:prstGeom>
+          <a:noFill/>
+          <a:ln/>
+        </p:spPr>
+        <p:txBody>
+          <a:bodyPr wrap="square" lIns="0" tIns="0" rIns="0" bIns="0" rtlCol="0" anchor="t"/>
+          <a:lstStyle/>
+          <a:p>
+            <a:pPr marL="0" indent="0">
+              <a:buNone/>
+            </a:pPr>
+            <a:r>
+              <a:rPr lang="en-US" sz="1000" dirty="0">
+                <a:hlinkClick r:id="rId7"/>
+              </a:rPr>
+              <a:t>Home · </a:t>
+            </a:r>
+            <a:r>
+              <a:rPr lang="en-US" sz="1000" dirty="0" err="1">
+                <a:hlinkClick r:id="rId7"/>
+              </a:rPr>
+              <a:t>Streamlit</a:t>
+            </a:r>
+            <a:r>
+              <a:rPr lang="en-US" sz="1000" dirty="0">
+                <a:hlinkClick r:id="rId7"/>
+              </a:rPr>
+              <a:t> - Personal_ Microsoft​ Edge 2026-07-21 20-58-33.mp4 - Google Drive</a:t>
+            </a:r>
+            <a:endParaRPr lang="en-US" sz="1000" dirty="0"/>
+          </a:p>
+        </p:txBody>
+      </p:sp>
+      <p:pic>
+        <p:nvPicPr>
+          <p:cNvPr id="20" name="Picture 19" descr="video_icon.png"/>
+          <p:cNvPicPr>
+            <a:picLocks noChangeAspect="1"/>
+          </p:cNvPicPr>
+          <p:nvPr/>
+        </p:nvPicPr>
+        <p:blipFill>
+          <a:blip r:embed="rId8"/>
+          <a:stretch>
+            <a:fillRect/>
+          </a:stretch>
+        </p:blipFill>
+        <p:spPr>
+          <a:xfrm>
+            <a:off x="6638544" y="5102352"/>
+            <a:ext cx="274320" cy="274320"/>
+          </a:xfrm>
+          <a:prstGeom prst="rect">
+            <a:avLst/>
+          </a:prstGeom>
+        </p:spPr>
+      </p:pic>
     </p:spTree>
   </p:cSld>
   <p:clrMapOvr>
